--- a/content/docs/theory-analysis/kubernetes-gateway-api-gamma/images/images.pptx
+++ b/content/docs/theory-analysis/kubernetes-gateway-api-gamma/images/images.pptx
@@ -5,13 +5,16 @@
     <p:sldMasterId id="2147483648" r:id="rId1"/>
   </p:sldMasterIdLst>
   <p:notesMasterIdLst>
-    <p:notesMasterId r:id="rId6"/>
+    <p:notesMasterId r:id="rId9"/>
   </p:notesMasterIdLst>
   <p:sldIdLst>
     <p:sldId id="437" r:id="rId2"/>
     <p:sldId id="440" r:id="rId3"/>
-    <p:sldId id="442" r:id="rId4"/>
-    <p:sldId id="441" r:id="rId5"/>
+    <p:sldId id="445" r:id="rId4"/>
+    <p:sldId id="444" r:id="rId5"/>
+    <p:sldId id="443" r:id="rId6"/>
+    <p:sldId id="442" r:id="rId7"/>
+    <p:sldId id="441" r:id="rId8"/>
   </p:sldIdLst>
   <p:sldSz cx="9144000" cy="5143500" type="screen16x9"/>
   <p:notesSz cx="6858000" cy="9144000"/>
@@ -216,7 +219,7 @@
           <a:p>
             <a:fld id="{6CD5550B-26C4-49A9-A5BA-636EF7BE6CE9}" type="datetimeFigureOut">
               <a:rPr lang="ko-KR" altLang="en-US" smtClean="0"/>
-              <a:t>2026. 10. 3.</a:t>
+              <a:t>2026. 10. 4.</a:t>
             </a:fld>
             <a:endParaRPr lang="ko-KR" altLang="en-US"/>
           </a:p>
@@ -567,6 +570,330 @@
 </p:notes>
 </file>
 
+<file path=ppt/notesSlides/notesSlide2.xml><?xml version="1.0" encoding="utf-8"?>
+<p:notes xmlns:a="http://schemas.openxmlformats.org/drawingml/2006/main" xmlns:r="http://schemas.openxmlformats.org/officeDocument/2006/relationships" xmlns:p="http://schemas.openxmlformats.org/presentationml/2006/main">
+  <p:cSld>
+    <p:spTree>
+      <p:nvGrpSpPr>
+        <p:cNvPr id="1" name="">
+          <a:extLst>
+            <a:ext uri="{FF2B5EF4-FFF2-40B4-BE49-F238E27FC236}">
+              <a16:creationId xmlns:a16="http://schemas.microsoft.com/office/drawing/2014/main" id="{D14DC6EA-E860-8A3E-EEC0-77454F5E0683}"/>
+            </a:ext>
+          </a:extLst>
+        </p:cNvPr>
+        <p:cNvGrpSpPr/>
+        <p:nvPr/>
+      </p:nvGrpSpPr>
+      <p:grpSpPr>
+        <a:xfrm>
+          <a:off x="0" y="0"/>
+          <a:ext cx="0" cy="0"/>
+          <a:chOff x="0" y="0"/>
+          <a:chExt cx="0" cy="0"/>
+        </a:xfrm>
+      </p:grpSpPr>
+      <p:sp>
+        <p:nvSpPr>
+          <p:cNvPr id="2" name="슬라이드 이미지 개체 틀 1">
+            <a:extLst>
+              <a:ext uri="{FF2B5EF4-FFF2-40B4-BE49-F238E27FC236}">
+                <a16:creationId xmlns:a16="http://schemas.microsoft.com/office/drawing/2014/main" id="{8E29D875-F6F8-BBBD-97E1-B5DE6CD172A4}"/>
+              </a:ext>
+            </a:extLst>
+          </p:cNvPr>
+          <p:cNvSpPr>
+            <a:spLocks noGrp="1" noRot="1" noChangeAspect="1"/>
+          </p:cNvSpPr>
+          <p:nvPr>
+            <p:ph type="sldImg"/>
+          </p:nvPr>
+        </p:nvSpPr>
+        <p:spPr/>
+      </p:sp>
+      <p:sp>
+        <p:nvSpPr>
+          <p:cNvPr id="3" name="슬라이드 노트 개체 틀 2">
+            <a:extLst>
+              <a:ext uri="{FF2B5EF4-FFF2-40B4-BE49-F238E27FC236}">
+                <a16:creationId xmlns:a16="http://schemas.microsoft.com/office/drawing/2014/main" id="{F38C42A0-D69E-6D6F-EF29-D0BA9B823F64}"/>
+              </a:ext>
+            </a:extLst>
+          </p:cNvPr>
+          <p:cNvSpPr>
+            <a:spLocks noGrp="1"/>
+          </p:cNvSpPr>
+          <p:nvPr>
+            <p:ph type="body" idx="1"/>
+          </p:nvPr>
+        </p:nvSpPr>
+        <p:spPr/>
+        <p:txBody>
+          <a:bodyPr/>
+          <a:lstStyle/>
+          <a:p>
+            <a:endParaRPr kumimoji="1" lang="ko-KR" altLang="en-US"/>
+          </a:p>
+        </p:txBody>
+      </p:sp>
+      <p:sp>
+        <p:nvSpPr>
+          <p:cNvPr id="4" name="슬라이드 번호 개체 틀 3">
+            <a:extLst>
+              <a:ext uri="{FF2B5EF4-FFF2-40B4-BE49-F238E27FC236}">
+                <a16:creationId xmlns:a16="http://schemas.microsoft.com/office/drawing/2014/main" id="{2B77C4B4-9849-87D1-B5B7-E4C5F86A38E3}"/>
+              </a:ext>
+            </a:extLst>
+          </p:cNvPr>
+          <p:cNvSpPr>
+            <a:spLocks noGrp="1"/>
+          </p:cNvSpPr>
+          <p:nvPr>
+            <p:ph type="sldNum" sz="quarter" idx="5"/>
+          </p:nvPr>
+        </p:nvSpPr>
+        <p:spPr/>
+        <p:txBody>
+          <a:bodyPr/>
+          <a:lstStyle/>
+          <a:p>
+            <a:fld id="{BA5DFA43-8D57-47FB-BC46-057616015C3B}" type="slidenum">
+              <a:rPr lang="ko-KR" altLang="en-US" smtClean="0"/>
+              <a:t>3</a:t>
+            </a:fld>
+            <a:endParaRPr lang="ko-KR" altLang="en-US"/>
+          </a:p>
+        </p:txBody>
+      </p:sp>
+    </p:spTree>
+    <p:extLst>
+      <p:ext uri="{BB962C8B-B14F-4D97-AF65-F5344CB8AC3E}">
+        <p14:creationId xmlns:p14="http://schemas.microsoft.com/office/powerpoint/2010/main" val="2008503792"/>
+      </p:ext>
+    </p:extLst>
+  </p:cSld>
+  <p:clrMapOvr>
+    <a:masterClrMapping/>
+  </p:clrMapOvr>
+</p:notes>
+</file>
+
+<file path=ppt/notesSlides/notesSlide3.xml><?xml version="1.0" encoding="utf-8"?>
+<p:notes xmlns:a="http://schemas.openxmlformats.org/drawingml/2006/main" xmlns:r="http://schemas.openxmlformats.org/officeDocument/2006/relationships" xmlns:p="http://schemas.openxmlformats.org/presentationml/2006/main">
+  <p:cSld>
+    <p:spTree>
+      <p:nvGrpSpPr>
+        <p:cNvPr id="1" name="">
+          <a:extLst>
+            <a:ext uri="{FF2B5EF4-FFF2-40B4-BE49-F238E27FC236}">
+              <a16:creationId xmlns:a16="http://schemas.microsoft.com/office/drawing/2014/main" id="{94079343-07A3-626C-09B4-A73F8A6D50DD}"/>
+            </a:ext>
+          </a:extLst>
+        </p:cNvPr>
+        <p:cNvGrpSpPr/>
+        <p:nvPr/>
+      </p:nvGrpSpPr>
+      <p:grpSpPr>
+        <a:xfrm>
+          <a:off x="0" y="0"/>
+          <a:ext cx="0" cy="0"/>
+          <a:chOff x="0" y="0"/>
+          <a:chExt cx="0" cy="0"/>
+        </a:xfrm>
+      </p:grpSpPr>
+      <p:sp>
+        <p:nvSpPr>
+          <p:cNvPr id="2" name="슬라이드 이미지 개체 틀 1">
+            <a:extLst>
+              <a:ext uri="{FF2B5EF4-FFF2-40B4-BE49-F238E27FC236}">
+                <a16:creationId xmlns:a16="http://schemas.microsoft.com/office/drawing/2014/main" id="{D02F5B2D-D1C7-AC57-39EF-46DF31D7E19A}"/>
+              </a:ext>
+            </a:extLst>
+          </p:cNvPr>
+          <p:cNvSpPr>
+            <a:spLocks noGrp="1" noRot="1" noChangeAspect="1"/>
+          </p:cNvSpPr>
+          <p:nvPr>
+            <p:ph type="sldImg"/>
+          </p:nvPr>
+        </p:nvSpPr>
+        <p:spPr/>
+      </p:sp>
+      <p:sp>
+        <p:nvSpPr>
+          <p:cNvPr id="3" name="슬라이드 노트 개체 틀 2">
+            <a:extLst>
+              <a:ext uri="{FF2B5EF4-FFF2-40B4-BE49-F238E27FC236}">
+                <a16:creationId xmlns:a16="http://schemas.microsoft.com/office/drawing/2014/main" id="{C786AB2D-1F54-8830-148F-F153EC621133}"/>
+              </a:ext>
+            </a:extLst>
+          </p:cNvPr>
+          <p:cNvSpPr>
+            <a:spLocks noGrp="1"/>
+          </p:cNvSpPr>
+          <p:nvPr>
+            <p:ph type="body" idx="1"/>
+          </p:nvPr>
+        </p:nvSpPr>
+        <p:spPr/>
+        <p:txBody>
+          <a:bodyPr/>
+          <a:lstStyle/>
+          <a:p>
+            <a:endParaRPr kumimoji="1" lang="ko-KR" altLang="en-US"/>
+          </a:p>
+        </p:txBody>
+      </p:sp>
+      <p:sp>
+        <p:nvSpPr>
+          <p:cNvPr id="4" name="슬라이드 번호 개체 틀 3">
+            <a:extLst>
+              <a:ext uri="{FF2B5EF4-FFF2-40B4-BE49-F238E27FC236}">
+                <a16:creationId xmlns:a16="http://schemas.microsoft.com/office/drawing/2014/main" id="{10DD7343-A2BD-EBA8-33C9-38A8F3DE1288}"/>
+              </a:ext>
+            </a:extLst>
+          </p:cNvPr>
+          <p:cNvSpPr>
+            <a:spLocks noGrp="1"/>
+          </p:cNvSpPr>
+          <p:nvPr>
+            <p:ph type="sldNum" sz="quarter" idx="5"/>
+          </p:nvPr>
+        </p:nvSpPr>
+        <p:spPr/>
+        <p:txBody>
+          <a:bodyPr/>
+          <a:lstStyle/>
+          <a:p>
+            <a:fld id="{BA5DFA43-8D57-47FB-BC46-057616015C3B}" type="slidenum">
+              <a:rPr lang="ko-KR" altLang="en-US" smtClean="0"/>
+              <a:t>4</a:t>
+            </a:fld>
+            <a:endParaRPr lang="ko-KR" altLang="en-US"/>
+          </a:p>
+        </p:txBody>
+      </p:sp>
+    </p:spTree>
+    <p:extLst>
+      <p:ext uri="{BB962C8B-B14F-4D97-AF65-F5344CB8AC3E}">
+        <p14:creationId xmlns:p14="http://schemas.microsoft.com/office/powerpoint/2010/main" val="1831891916"/>
+      </p:ext>
+    </p:extLst>
+  </p:cSld>
+  <p:clrMapOvr>
+    <a:masterClrMapping/>
+  </p:clrMapOvr>
+</p:notes>
+</file>
+
+<file path=ppt/notesSlides/notesSlide4.xml><?xml version="1.0" encoding="utf-8"?>
+<p:notes xmlns:a="http://schemas.openxmlformats.org/drawingml/2006/main" xmlns:r="http://schemas.openxmlformats.org/officeDocument/2006/relationships" xmlns:p="http://schemas.openxmlformats.org/presentationml/2006/main">
+  <p:cSld>
+    <p:spTree>
+      <p:nvGrpSpPr>
+        <p:cNvPr id="1" name="">
+          <a:extLst>
+            <a:ext uri="{FF2B5EF4-FFF2-40B4-BE49-F238E27FC236}">
+              <a16:creationId xmlns:a16="http://schemas.microsoft.com/office/drawing/2014/main" id="{329CEA0A-CA0C-73D7-9B95-6962381AB28B}"/>
+            </a:ext>
+          </a:extLst>
+        </p:cNvPr>
+        <p:cNvGrpSpPr/>
+        <p:nvPr/>
+      </p:nvGrpSpPr>
+      <p:grpSpPr>
+        <a:xfrm>
+          <a:off x="0" y="0"/>
+          <a:ext cx="0" cy="0"/>
+          <a:chOff x="0" y="0"/>
+          <a:chExt cx="0" cy="0"/>
+        </a:xfrm>
+      </p:grpSpPr>
+      <p:sp>
+        <p:nvSpPr>
+          <p:cNvPr id="2" name="슬라이드 이미지 개체 틀 1">
+            <a:extLst>
+              <a:ext uri="{FF2B5EF4-FFF2-40B4-BE49-F238E27FC236}">
+                <a16:creationId xmlns:a16="http://schemas.microsoft.com/office/drawing/2014/main" id="{BF80B82A-7671-B861-C3D8-61482F4C7F19}"/>
+              </a:ext>
+            </a:extLst>
+          </p:cNvPr>
+          <p:cNvSpPr>
+            <a:spLocks noGrp="1" noRot="1" noChangeAspect="1"/>
+          </p:cNvSpPr>
+          <p:nvPr>
+            <p:ph type="sldImg"/>
+          </p:nvPr>
+        </p:nvSpPr>
+        <p:spPr/>
+      </p:sp>
+      <p:sp>
+        <p:nvSpPr>
+          <p:cNvPr id="3" name="슬라이드 노트 개체 틀 2">
+            <a:extLst>
+              <a:ext uri="{FF2B5EF4-FFF2-40B4-BE49-F238E27FC236}">
+                <a16:creationId xmlns:a16="http://schemas.microsoft.com/office/drawing/2014/main" id="{144BED26-31D5-3711-0CFE-D5A9B870EDC4}"/>
+              </a:ext>
+            </a:extLst>
+          </p:cNvPr>
+          <p:cNvSpPr>
+            <a:spLocks noGrp="1"/>
+          </p:cNvSpPr>
+          <p:nvPr>
+            <p:ph type="body" idx="1"/>
+          </p:nvPr>
+        </p:nvSpPr>
+        <p:spPr/>
+        <p:txBody>
+          <a:bodyPr/>
+          <a:lstStyle/>
+          <a:p>
+            <a:endParaRPr kumimoji="1" lang="ko-KR" altLang="en-US"/>
+          </a:p>
+        </p:txBody>
+      </p:sp>
+      <p:sp>
+        <p:nvSpPr>
+          <p:cNvPr id="4" name="슬라이드 번호 개체 틀 3">
+            <a:extLst>
+              <a:ext uri="{FF2B5EF4-FFF2-40B4-BE49-F238E27FC236}">
+                <a16:creationId xmlns:a16="http://schemas.microsoft.com/office/drawing/2014/main" id="{550AF79A-1D42-A489-9097-2016D14ED0AA}"/>
+              </a:ext>
+            </a:extLst>
+          </p:cNvPr>
+          <p:cNvSpPr>
+            <a:spLocks noGrp="1"/>
+          </p:cNvSpPr>
+          <p:nvPr>
+            <p:ph type="sldNum" sz="quarter" idx="5"/>
+          </p:nvPr>
+        </p:nvSpPr>
+        <p:spPr/>
+        <p:txBody>
+          <a:bodyPr/>
+          <a:lstStyle/>
+          <a:p>
+            <a:fld id="{BA5DFA43-8D57-47FB-BC46-057616015C3B}" type="slidenum">
+              <a:rPr lang="ko-KR" altLang="en-US" smtClean="0"/>
+              <a:t>5</a:t>
+            </a:fld>
+            <a:endParaRPr lang="ko-KR" altLang="en-US"/>
+          </a:p>
+        </p:txBody>
+      </p:sp>
+    </p:spTree>
+    <p:extLst>
+      <p:ext uri="{BB962C8B-B14F-4D97-AF65-F5344CB8AC3E}">
+        <p14:creationId xmlns:p14="http://schemas.microsoft.com/office/powerpoint/2010/main" val="739161004"/>
+      </p:ext>
+    </p:extLst>
+  </p:cSld>
+  <p:clrMapOvr>
+    <a:masterClrMapping/>
+  </p:clrMapOvr>
+</p:notes>
+</file>
+
 <file path=ppt/slideLayouts/slideLayout1.xml><?xml version="1.0" encoding="utf-8"?>
 <p:sldLayout xmlns:a="http://schemas.openxmlformats.org/drawingml/2006/main" xmlns:r="http://schemas.openxmlformats.org/officeDocument/2006/relationships" xmlns:p="http://schemas.openxmlformats.org/presentationml/2006/main" type="title" preserve="1">
   <p:cSld name="제목 슬라이드">
@@ -746,7 +1073,7 @@
           <a:p>
             <a:fld id="{FB30EDBD-1C2D-4C1E-B459-B60219FAB484}" type="datetimeFigureOut">
               <a:rPr lang="ko-KR" altLang="en-US" smtClean="0"/>
-              <a:t>2026. 10. 3.</a:t>
+              <a:t>2026. 10. 4.</a:t>
             </a:fld>
             <a:endParaRPr lang="ko-KR" altLang="en-US"/>
           </a:p>
@@ -909,7 +1236,7 @@
           <a:p>
             <a:fld id="{FB30EDBD-1C2D-4C1E-B459-B60219FAB484}" type="datetimeFigureOut">
               <a:rPr lang="ko-KR" altLang="en-US" smtClean="0"/>
-              <a:t>2026. 10. 3.</a:t>
+              <a:t>2026. 10. 4.</a:t>
             </a:fld>
             <a:endParaRPr lang="ko-KR" altLang="en-US"/>
           </a:p>
@@ -1082,7 +1409,7 @@
           <a:p>
             <a:fld id="{FB30EDBD-1C2D-4C1E-B459-B60219FAB484}" type="datetimeFigureOut">
               <a:rPr lang="ko-KR" altLang="en-US" smtClean="0"/>
-              <a:t>2026. 10. 3.</a:t>
+              <a:t>2026. 10. 4.</a:t>
             </a:fld>
             <a:endParaRPr lang="ko-KR" altLang="en-US"/>
           </a:p>
@@ -1245,7 +1572,7 @@
           <a:p>
             <a:fld id="{FB30EDBD-1C2D-4C1E-B459-B60219FAB484}" type="datetimeFigureOut">
               <a:rPr lang="ko-KR" altLang="en-US" smtClean="0"/>
-              <a:t>2026. 10. 3.</a:t>
+              <a:t>2026. 10. 4.</a:t>
             </a:fld>
             <a:endParaRPr lang="ko-KR" altLang="en-US"/>
           </a:p>
@@ -1485,7 +1812,7 @@
           <a:p>
             <a:fld id="{FB30EDBD-1C2D-4C1E-B459-B60219FAB484}" type="datetimeFigureOut">
               <a:rPr lang="ko-KR" altLang="en-US" smtClean="0"/>
-              <a:t>2026. 10. 3.</a:t>
+              <a:t>2026. 10. 4.</a:t>
             </a:fld>
             <a:endParaRPr lang="ko-KR" altLang="en-US"/>
           </a:p>
@@ -1765,7 +2092,7 @@
           <a:p>
             <a:fld id="{FB30EDBD-1C2D-4C1E-B459-B60219FAB484}" type="datetimeFigureOut">
               <a:rPr lang="ko-KR" altLang="en-US" smtClean="0"/>
-              <a:t>2026. 10. 3.</a:t>
+              <a:t>2026. 10. 4.</a:t>
             </a:fld>
             <a:endParaRPr lang="ko-KR" altLang="en-US"/>
           </a:p>
@@ -2179,7 +2506,7 @@
           <a:p>
             <a:fld id="{FB30EDBD-1C2D-4C1E-B459-B60219FAB484}" type="datetimeFigureOut">
               <a:rPr lang="ko-KR" altLang="en-US" smtClean="0"/>
-              <a:t>2026. 10. 3.</a:t>
+              <a:t>2026. 10. 4.</a:t>
             </a:fld>
             <a:endParaRPr lang="ko-KR" altLang="en-US"/>
           </a:p>
@@ -2291,7 +2618,7 @@
           <a:p>
             <a:fld id="{FB30EDBD-1C2D-4C1E-B459-B60219FAB484}" type="datetimeFigureOut">
               <a:rPr lang="ko-KR" altLang="en-US" smtClean="0"/>
-              <a:t>2026. 10. 3.</a:t>
+              <a:t>2026. 10. 4.</a:t>
             </a:fld>
             <a:endParaRPr lang="ko-KR" altLang="en-US"/>
           </a:p>
@@ -2381,7 +2708,7 @@
           <a:p>
             <a:fld id="{FB30EDBD-1C2D-4C1E-B459-B60219FAB484}" type="datetimeFigureOut">
               <a:rPr lang="ko-KR" altLang="en-US" smtClean="0"/>
-              <a:t>2026. 10. 3.</a:t>
+              <a:t>2026. 10. 4.</a:t>
             </a:fld>
             <a:endParaRPr lang="ko-KR" altLang="en-US"/>
           </a:p>
@@ -2651,7 +2978,7 @@
           <a:p>
             <a:fld id="{FB30EDBD-1C2D-4C1E-B459-B60219FAB484}" type="datetimeFigureOut">
               <a:rPr lang="ko-KR" altLang="en-US" smtClean="0"/>
-              <a:t>2026. 10. 3.</a:t>
+              <a:t>2026. 10. 4.</a:t>
             </a:fld>
             <a:endParaRPr lang="ko-KR" altLang="en-US"/>
           </a:p>
@@ -2898,7 +3225,7 @@
           <a:p>
             <a:fld id="{FB30EDBD-1C2D-4C1E-B459-B60219FAB484}" type="datetimeFigureOut">
               <a:rPr lang="ko-KR" altLang="en-US" smtClean="0"/>
-              <a:t>2026. 10. 3.</a:t>
+              <a:t>2026. 10. 4.</a:t>
             </a:fld>
             <a:endParaRPr lang="ko-KR" altLang="en-US"/>
           </a:p>
@@ -3104,7 +3431,7 @@
           <a:p>
             <a:fld id="{FB30EDBD-1C2D-4C1E-B459-B60219FAB484}" type="datetimeFigureOut">
               <a:rPr lang="ko-KR" altLang="en-US" smtClean="0"/>
-              <a:t>2026. 10. 3.</a:t>
+              <a:t>2026. 10. 4.</a:t>
             </a:fld>
             <a:endParaRPr lang="ko-KR" altLang="en-US"/>
           </a:p>
@@ -3494,7 +3821,7 @@
         </p:nvSpPr>
         <p:spPr>
           <a:xfrm>
-            <a:off x="971599" y="1000714"/>
+            <a:off x="971599" y="1180559"/>
             <a:ext cx="1800200" cy="892274"/>
           </a:xfrm>
           <a:prstGeom prst="roundRect">
@@ -3553,7 +3880,7 @@
         </p:nvSpPr>
         <p:spPr>
           <a:xfrm>
-            <a:off x="971599" y="2994106"/>
+            <a:off x="971599" y="3173951"/>
             <a:ext cx="1800200" cy="1616906"/>
           </a:xfrm>
           <a:prstGeom prst="roundRect">
@@ -3731,7 +4058,7 @@
         </p:nvSpPr>
         <p:spPr>
           <a:xfrm>
-            <a:off x="1518621" y="1341537"/>
+            <a:off x="1518621" y="1521382"/>
             <a:ext cx="1139438" cy="451511"/>
           </a:xfrm>
           <a:prstGeom prst="roundRect">
@@ -3790,7 +4117,7 @@
         </p:nvSpPr>
         <p:spPr>
           <a:xfrm>
-            <a:off x="1518621" y="4039755"/>
+            <a:off x="1518621" y="4219600"/>
             <a:ext cx="1139438" cy="451511"/>
           </a:xfrm>
           <a:prstGeom prst="roundRect">
@@ -4045,7 +4372,7 @@
         <p:spPr>
           <a:xfrm flipH="1">
             <a:off x="3870212" y="904269"/>
-            <a:ext cx="763273" cy="434149"/>
+            <a:ext cx="1641941" cy="434149"/>
           </a:xfrm>
           <a:prstGeom prst="straightConnector1">
             <a:avLst/>
@@ -4092,8 +4419,8 @@
         </p:nvCxnSpPr>
         <p:spPr>
           <a:xfrm>
-            <a:off x="4633485" y="904269"/>
-            <a:ext cx="881440" cy="440386"/>
+            <a:off x="5512153" y="904269"/>
+            <a:ext cx="2772" cy="440386"/>
           </a:xfrm>
           <a:prstGeom prst="straightConnector1">
             <a:avLst/>
@@ -4386,7 +4713,7 @@
         </p:nvSpPr>
         <p:spPr>
           <a:xfrm>
-            <a:off x="1518621" y="3342305"/>
+            <a:off x="1518621" y="3522150"/>
             <a:ext cx="1139438" cy="451511"/>
           </a:xfrm>
           <a:prstGeom prst="roundRect">
@@ -4713,7 +5040,7 @@
         <p:spPr>
           <a:xfrm flipV="1">
             <a:off x="2658059" y="1789929"/>
-            <a:ext cx="1212153" cy="1778132"/>
+            <a:ext cx="1212153" cy="1957977"/>
           </a:xfrm>
           <a:prstGeom prst="straightConnector1">
             <a:avLst/>
@@ -4761,7 +5088,7 @@
         <p:spPr>
           <a:xfrm flipV="1">
             <a:off x="2658059" y="3184829"/>
-            <a:ext cx="2856866" cy="383232"/>
+            <a:ext cx="2856866" cy="563077"/>
           </a:xfrm>
           <a:prstGeom prst="straightConnector1">
             <a:avLst/>
@@ -4808,8 +5135,8 @@
         </p:nvCxnSpPr>
         <p:spPr>
           <a:xfrm>
-            <a:off x="2658059" y="3568061"/>
-            <a:ext cx="2854094" cy="566394"/>
+            <a:off x="2658059" y="3747906"/>
+            <a:ext cx="2854094" cy="386549"/>
           </a:xfrm>
           <a:prstGeom prst="straightConnector1">
             <a:avLst/>
@@ -4857,7 +5184,7 @@
         <p:spPr>
           <a:xfrm flipV="1">
             <a:off x="2658059" y="1564174"/>
-            <a:ext cx="546942" cy="2701337"/>
+            <a:ext cx="546942" cy="2881182"/>
           </a:xfrm>
           <a:prstGeom prst="straightConnector1">
             <a:avLst/>
@@ -5001,7 +5328,7 @@
         <p:spPr>
           <a:xfrm flipV="1">
             <a:off x="2658059" y="1564174"/>
-            <a:ext cx="546942" cy="3119"/>
+            <a:ext cx="546942" cy="182964"/>
           </a:xfrm>
           <a:prstGeom prst="straightConnector1">
             <a:avLst/>
@@ -5092,7 +5419,7 @@
         </p:nvSpPr>
         <p:spPr>
           <a:xfrm>
-            <a:off x="971599" y="1997410"/>
+            <a:off x="971599" y="2177255"/>
             <a:ext cx="1800200" cy="892274"/>
           </a:xfrm>
           <a:prstGeom prst="roundRect">
@@ -5151,7 +5478,7 @@
         </p:nvSpPr>
         <p:spPr>
           <a:xfrm>
-            <a:off x="1518621" y="2338233"/>
+            <a:off x="1518621" y="2518078"/>
             <a:ext cx="1139438" cy="451511"/>
           </a:xfrm>
           <a:prstGeom prst="roundRect">
@@ -5210,7 +5537,7 @@
         </p:nvSpPr>
         <p:spPr>
           <a:xfrm>
-            <a:off x="4063766" y="452758"/>
+            <a:off x="4942434" y="452758"/>
             <a:ext cx="1139438" cy="451511"/>
           </a:xfrm>
           <a:prstGeom prst="roundRect">
@@ -5287,7 +5614,7 @@
         <p:spPr>
           <a:xfrm flipV="1">
             <a:off x="2658059" y="1564174"/>
-            <a:ext cx="546942" cy="999815"/>
+            <a:ext cx="546942" cy="1179660"/>
           </a:xfrm>
           <a:prstGeom prst="straightConnector1">
             <a:avLst/>
@@ -5476,7 +5803,7 @@
         </p:nvCxnSpPr>
         <p:spPr>
           <a:xfrm>
-            <a:off x="994672" y="476915"/>
+            <a:off x="994672" y="656760"/>
             <a:ext cx="323569" cy="0"/>
           </a:xfrm>
           <a:prstGeom prst="straightConnector1">
@@ -5520,7 +5847,7 @@
         </p:nvSpPr>
         <p:spPr>
           <a:xfrm>
-            <a:off x="1290415" y="282902"/>
+            <a:off x="1290415" y="462747"/>
             <a:ext cx="702455" cy="369332"/>
           </a:xfrm>
           <a:prstGeom prst="rect">
@@ -5536,7 +5863,7 @@
           <a:p>
             <a:r>
               <a:rPr lang="en-US" sz="900"/>
-              <a:t>Fronted</a:t>
+              <a:t>Frontend</a:t>
             </a:r>
           </a:p>
           <a:p>
@@ -5562,7 +5889,7 @@
         </p:nvSpPr>
         <p:spPr>
           <a:xfrm>
-            <a:off x="1289667" y="634961"/>
+            <a:off x="1289667" y="814806"/>
             <a:ext cx="726519" cy="369332"/>
           </a:xfrm>
           <a:prstGeom prst="rect">
@@ -5606,7 +5933,7 @@
         </p:nvCxnSpPr>
         <p:spPr>
           <a:xfrm>
-            <a:off x="1993388" y="482437"/>
+            <a:off x="1993388" y="662282"/>
             <a:ext cx="323569" cy="0"/>
           </a:xfrm>
           <a:prstGeom prst="straightConnector1">
@@ -5650,7 +5977,7 @@
         </p:nvSpPr>
         <p:spPr>
           <a:xfrm>
-            <a:off x="2289131" y="288424"/>
+            <a:off x="2289131" y="468269"/>
             <a:ext cx="702455" cy="369332"/>
           </a:xfrm>
           <a:prstGeom prst="rect">
@@ -5694,7 +6021,7 @@
         </p:nvCxnSpPr>
         <p:spPr>
           <a:xfrm>
-            <a:off x="993924" y="821050"/>
+            <a:off x="993924" y="1000895"/>
             <a:ext cx="323569" cy="0"/>
           </a:xfrm>
           <a:prstGeom prst="straightConnector1">
@@ -5738,7 +6065,7 @@
         </p:nvSpPr>
         <p:spPr>
           <a:xfrm>
-            <a:off x="2292632" y="635773"/>
+            <a:off x="2292632" y="815618"/>
             <a:ext cx="726519" cy="369332"/>
           </a:xfrm>
           <a:prstGeom prst="rect">
@@ -5782,7 +6109,7 @@
         </p:nvCxnSpPr>
         <p:spPr>
           <a:xfrm>
-            <a:off x="1996889" y="821862"/>
+            <a:off x="1996889" y="1001707"/>
             <a:ext cx="323569" cy="0"/>
           </a:xfrm>
           <a:prstGeom prst="straightConnector1">
@@ -5812,6 +6139,255 @@
           </a:fontRef>
         </p:style>
       </p:cxnSp>
+      <p:sp>
+        <p:nvSpPr>
+          <p:cNvPr id="6" name="사각형: 둥근 모서리 12">
+            <a:extLst>
+              <a:ext uri="{FF2B5EF4-FFF2-40B4-BE49-F238E27FC236}">
+                <a16:creationId xmlns:a16="http://schemas.microsoft.com/office/drawing/2014/main" id="{77D11D02-1E49-AF9E-AC6C-A6664C059122}"/>
+              </a:ext>
+            </a:extLst>
+          </p:cNvPr>
+          <p:cNvSpPr/>
+          <p:nvPr/>
+        </p:nvSpPr>
+        <p:spPr>
+          <a:xfrm>
+            <a:off x="3297795" y="452758"/>
+            <a:ext cx="1139438" cy="451511"/>
+          </a:xfrm>
+          <a:prstGeom prst="roundRect">
+            <a:avLst>
+              <a:gd name="adj" fmla="val 14105"/>
+            </a:avLst>
+          </a:prstGeom>
+          <a:solidFill>
+            <a:schemeClr val="bg1">
+              <a:lumMod val="95000"/>
+            </a:schemeClr>
+          </a:solidFill>
+          <a:ln w="12700">
+            <a:headEnd type="none" w="med" len="med"/>
+            <a:tailEnd type="triangle" w="med" len="med"/>
+          </a:ln>
+        </p:spPr>
+        <p:style>
+          <a:lnRef idx="2">
+            <a:schemeClr val="dk1"/>
+          </a:lnRef>
+          <a:fillRef idx="1">
+            <a:schemeClr val="lt1"/>
+          </a:fillRef>
+          <a:effectRef idx="0">
+            <a:schemeClr val="dk1"/>
+          </a:effectRef>
+          <a:fontRef idx="minor">
+            <a:schemeClr val="dk1"/>
+          </a:fontRef>
+        </p:style>
+        <p:txBody>
+          <a:bodyPr rtlCol="0" anchor="ctr"/>
+          <a:lstStyle/>
+          <a:p>
+            <a:pPr algn="ctr"/>
+            <a:r>
+              <a:rPr lang="en-US" altLang="ko-KR" sz="900"/>
+              <a:t>Client C</a:t>
+            </a:r>
+          </a:p>
+          <a:p>
+            <a:pPr algn="ctr"/>
+            <a:r>
+              <a:rPr lang="en-US" altLang="ko-KR" sz="900" b="1"/>
+              <a:t>ReferenceGrant</a:t>
+            </a:r>
+          </a:p>
+        </p:txBody>
+      </p:sp>
+      <p:cxnSp>
+        <p:nvCxnSpPr>
+          <p:cNvPr id="20" name="직선 화살표 연결선 96">
+            <a:extLst>
+              <a:ext uri="{FF2B5EF4-FFF2-40B4-BE49-F238E27FC236}">
+                <a16:creationId xmlns:a16="http://schemas.microsoft.com/office/drawing/2014/main" id="{E84D4C24-FE0D-AF1A-4DDA-70D1649C213D}"/>
+              </a:ext>
+            </a:extLst>
+          </p:cNvPr>
+          <p:cNvCxnSpPr>
+            <a:cxnSpLocks/>
+            <a:stCxn id="6" idx="3"/>
+            <a:endCxn id="5" idx="0"/>
+          </p:cNvCxnSpPr>
+          <p:nvPr/>
+        </p:nvCxnSpPr>
+        <p:spPr>
+          <a:xfrm>
+            <a:off x="4437233" y="678514"/>
+            <a:ext cx="199024" cy="378805"/>
+          </a:xfrm>
+          <a:prstGeom prst="straightConnector1">
+            <a:avLst/>
+          </a:prstGeom>
+          <a:ln w="12700">
+            <a:solidFill>
+              <a:schemeClr val="accent5"/>
+            </a:solidFill>
+            <a:prstDash val="solid"/>
+            <a:headEnd type="none" w="med" len="med"/>
+            <a:tailEnd type="triangle" w="med" len="med"/>
+          </a:ln>
+        </p:spPr>
+        <p:style>
+          <a:lnRef idx="1">
+            <a:schemeClr val="accent1"/>
+          </a:lnRef>
+          <a:fillRef idx="0">
+            <a:schemeClr val="accent1"/>
+          </a:fillRef>
+          <a:effectRef idx="0">
+            <a:schemeClr val="accent1"/>
+          </a:effectRef>
+          <a:fontRef idx="minor">
+            <a:schemeClr val="tx1"/>
+          </a:fontRef>
+        </p:style>
+      </p:cxnSp>
+      <p:cxnSp>
+        <p:nvCxnSpPr>
+          <p:cNvPr id="24" name="직선 화살표 연결선 96">
+            <a:extLst>
+              <a:ext uri="{FF2B5EF4-FFF2-40B4-BE49-F238E27FC236}">
+                <a16:creationId xmlns:a16="http://schemas.microsoft.com/office/drawing/2014/main" id="{B10D6ABB-BD76-0C7E-7B29-0981554A7760}"/>
+              </a:ext>
+            </a:extLst>
+          </p:cNvPr>
+          <p:cNvCxnSpPr>
+            <a:cxnSpLocks/>
+            <a:stCxn id="6" idx="1"/>
+            <a:endCxn id="3" idx="0"/>
+          </p:cNvCxnSpPr>
+          <p:nvPr/>
+        </p:nvCxnSpPr>
+        <p:spPr>
+          <a:xfrm flipH="1">
+            <a:off x="1871699" y="678514"/>
+            <a:ext cx="1426096" cy="2495437"/>
+          </a:xfrm>
+          <a:prstGeom prst="straightConnector1">
+            <a:avLst/>
+          </a:prstGeom>
+          <a:ln w="12700">
+            <a:solidFill>
+              <a:schemeClr val="accent5"/>
+            </a:solidFill>
+            <a:prstDash val="solid"/>
+            <a:headEnd type="none" w="med" len="med"/>
+            <a:tailEnd type="triangle" w="med" len="med"/>
+          </a:ln>
+        </p:spPr>
+        <p:style>
+          <a:lnRef idx="1">
+            <a:schemeClr val="accent1"/>
+          </a:lnRef>
+          <a:fillRef idx="0">
+            <a:schemeClr val="accent1"/>
+          </a:fillRef>
+          <a:effectRef idx="0">
+            <a:schemeClr val="accent1"/>
+          </a:effectRef>
+          <a:fontRef idx="minor">
+            <a:schemeClr val="tx1"/>
+          </a:fontRef>
+        </p:style>
+      </p:cxnSp>
+      <p:cxnSp>
+        <p:nvCxnSpPr>
+          <p:cNvPr id="52" name="직선 화살표 연결선 96">
+            <a:extLst>
+              <a:ext uri="{FF2B5EF4-FFF2-40B4-BE49-F238E27FC236}">
+                <a16:creationId xmlns:a16="http://schemas.microsoft.com/office/drawing/2014/main" id="{93586644-569E-1AF4-4BE0-1B546F303AFE}"/>
+              </a:ext>
+            </a:extLst>
+          </p:cNvPr>
+          <p:cNvCxnSpPr>
+            <a:cxnSpLocks/>
+          </p:cNvCxnSpPr>
+          <p:nvPr/>
+        </p:nvCxnSpPr>
+        <p:spPr>
+          <a:xfrm>
+            <a:off x="994672" y="331128"/>
+            <a:ext cx="323569" cy="0"/>
+          </a:xfrm>
+          <a:prstGeom prst="straightConnector1">
+            <a:avLst/>
+          </a:prstGeom>
+          <a:ln w="12700">
+            <a:solidFill>
+              <a:schemeClr val="accent5"/>
+            </a:solidFill>
+            <a:prstDash val="solid"/>
+            <a:headEnd type="none" w="med" len="med"/>
+            <a:tailEnd type="triangle" w="med" len="med"/>
+          </a:ln>
+        </p:spPr>
+        <p:style>
+          <a:lnRef idx="1">
+            <a:schemeClr val="accent1"/>
+          </a:lnRef>
+          <a:fillRef idx="0">
+            <a:schemeClr val="accent1"/>
+          </a:fillRef>
+          <a:effectRef idx="0">
+            <a:schemeClr val="accent1"/>
+          </a:effectRef>
+          <a:fontRef idx="minor">
+            <a:schemeClr val="tx1"/>
+          </a:fontRef>
+        </p:style>
+      </p:cxnSp>
+      <p:sp>
+        <p:nvSpPr>
+          <p:cNvPr id="53" name="TextBox 52">
+            <a:extLst>
+              <a:ext uri="{FF2B5EF4-FFF2-40B4-BE49-F238E27FC236}">
+                <a16:creationId xmlns:a16="http://schemas.microsoft.com/office/drawing/2014/main" id="{E05CD93B-7849-D65F-1F35-772024B3134F}"/>
+              </a:ext>
+            </a:extLst>
+          </p:cNvPr>
+          <p:cNvSpPr txBox="1"/>
+          <p:nvPr/>
+        </p:nvSpPr>
+        <p:spPr>
+          <a:xfrm>
+            <a:off x="1290415" y="137115"/>
+            <a:ext cx="702455" cy="369332"/>
+          </a:xfrm>
+          <a:prstGeom prst="rect">
+            <a:avLst/>
+          </a:prstGeom>
+          <a:noFill/>
+        </p:spPr>
+        <p:txBody>
+          <a:bodyPr wrap="square" rtlCol="0">
+            <a:spAutoFit/>
+          </a:bodyPr>
+          <a:lstStyle/>
+          <a:p>
+            <a:r>
+              <a:rPr lang="en-US" sz="900"/>
+              <a:t>Grant</a:t>
+            </a:r>
+          </a:p>
+          <a:p>
+            <a:r>
+              <a:rPr lang="en-US" sz="900"/>
+              <a:t>Reference</a:t>
+            </a:r>
+            <a:endParaRPr lang="en-KR" sz="900"/>
+          </a:p>
+        </p:txBody>
+      </p:sp>
     </p:spTree>
     <p:extLst>
       <p:ext uri="{BB962C8B-B14F-4D97-AF65-F5344CB8AC3E}">
@@ -5869,6 +6445,7336 @@
         <p:cNvPr id="1" name="">
           <a:extLst>
             <a:ext uri="{FF2B5EF4-FFF2-40B4-BE49-F238E27FC236}">
+              <a16:creationId xmlns:a16="http://schemas.microsoft.com/office/drawing/2014/main" id="{58FB2319-3F84-DB3E-6EC2-B9EDE684D972}"/>
+            </a:ext>
+          </a:extLst>
+        </p:cNvPr>
+        <p:cNvGrpSpPr/>
+        <p:nvPr/>
+      </p:nvGrpSpPr>
+      <p:grpSpPr>
+        <a:xfrm>
+          <a:off x="0" y="0"/>
+          <a:ext cx="0" cy="0"/>
+          <a:chOff x="0" y="0"/>
+          <a:chExt cx="0" cy="0"/>
+        </a:xfrm>
+      </p:grpSpPr>
+      <p:sp>
+        <p:nvSpPr>
+          <p:cNvPr id="2" name="사각형: 둥근 모서리 70">
+            <a:extLst>
+              <a:ext uri="{FF2B5EF4-FFF2-40B4-BE49-F238E27FC236}">
+                <a16:creationId xmlns:a16="http://schemas.microsoft.com/office/drawing/2014/main" id="{32B04CB3-7E0D-35CC-7DF6-DAC29C010C85}"/>
+              </a:ext>
+            </a:extLst>
+          </p:cNvPr>
+          <p:cNvSpPr/>
+          <p:nvPr/>
+        </p:nvSpPr>
+        <p:spPr>
+          <a:xfrm>
+            <a:off x="971599" y="1000714"/>
+            <a:ext cx="1800200" cy="892274"/>
+          </a:xfrm>
+          <a:prstGeom prst="roundRect">
+            <a:avLst>
+              <a:gd name="adj" fmla="val 8056"/>
+            </a:avLst>
+          </a:prstGeom>
+          <a:noFill/>
+          <a:ln w="12700">
+            <a:prstDash val="solid"/>
+            <a:headEnd type="none" w="med" len="med"/>
+            <a:tailEnd type="triangle" w="med" len="med"/>
+          </a:ln>
+        </p:spPr>
+        <p:style>
+          <a:lnRef idx="2">
+            <a:schemeClr val="dk1"/>
+          </a:lnRef>
+          <a:fillRef idx="1">
+            <a:schemeClr val="lt1"/>
+          </a:fillRef>
+          <a:effectRef idx="0">
+            <a:schemeClr val="dk1"/>
+          </a:effectRef>
+          <a:fontRef idx="minor">
+            <a:schemeClr val="dk1"/>
+          </a:fontRef>
+        </p:style>
+        <p:txBody>
+          <a:bodyPr rtlCol="0" anchor="t"/>
+          <a:lstStyle/>
+          <a:p>
+            <a:r>
+              <a:rPr lang="en-US" altLang="ko-KR" sz="1000" dirty="0"/>
+              <a:t>Client A </a:t>
+            </a:r>
+            <a:r>
+              <a:rPr lang="en-US" altLang="ko-KR" sz="1000" b="1" dirty="0"/>
+              <a:t>Namespace</a:t>
+            </a:r>
+            <a:endParaRPr lang="ko-KR" altLang="en-US" sz="1000" b="1" dirty="0"/>
+          </a:p>
+        </p:txBody>
+      </p:sp>
+      <p:sp>
+        <p:nvSpPr>
+          <p:cNvPr id="3" name="사각형: 둥근 모서리 70">
+            <a:extLst>
+              <a:ext uri="{FF2B5EF4-FFF2-40B4-BE49-F238E27FC236}">
+                <a16:creationId xmlns:a16="http://schemas.microsoft.com/office/drawing/2014/main" id="{92C1688A-D9C3-4787-4128-9BA77A173FC7}"/>
+              </a:ext>
+            </a:extLst>
+          </p:cNvPr>
+          <p:cNvSpPr/>
+          <p:nvPr/>
+        </p:nvSpPr>
+        <p:spPr>
+          <a:xfrm>
+            <a:off x="971599" y="2994106"/>
+            <a:ext cx="1800200" cy="1616906"/>
+          </a:xfrm>
+          <a:prstGeom prst="roundRect">
+            <a:avLst>
+              <a:gd name="adj" fmla="val 5325"/>
+            </a:avLst>
+          </a:prstGeom>
+          <a:noFill/>
+          <a:ln w="12700">
+            <a:prstDash val="solid"/>
+            <a:headEnd type="none" w="med" len="med"/>
+            <a:tailEnd type="triangle" w="med" len="med"/>
+          </a:ln>
+        </p:spPr>
+        <p:style>
+          <a:lnRef idx="2">
+            <a:schemeClr val="dk1"/>
+          </a:lnRef>
+          <a:fillRef idx="1">
+            <a:schemeClr val="lt1"/>
+          </a:fillRef>
+          <a:effectRef idx="0">
+            <a:schemeClr val="dk1"/>
+          </a:effectRef>
+          <a:fontRef idx="minor">
+            <a:schemeClr val="dk1"/>
+          </a:fontRef>
+        </p:style>
+        <p:txBody>
+          <a:bodyPr rtlCol="0" anchor="t"/>
+          <a:lstStyle/>
+          <a:p>
+            <a:r>
+              <a:rPr lang="en-US" altLang="ko-KR" sz="1000" dirty="0"/>
+              <a:t>Client C </a:t>
+            </a:r>
+            <a:r>
+              <a:rPr lang="en-US" altLang="ko-KR" sz="1000" b="1" dirty="0"/>
+              <a:t>Namespace</a:t>
+            </a:r>
+            <a:endParaRPr lang="ko-KR" altLang="en-US" sz="1000" b="1" dirty="0"/>
+          </a:p>
+        </p:txBody>
+      </p:sp>
+      <p:sp>
+        <p:nvSpPr>
+          <p:cNvPr id="4" name="사각형: 둥근 모서리 70">
+            <a:extLst>
+              <a:ext uri="{FF2B5EF4-FFF2-40B4-BE49-F238E27FC236}">
+                <a16:creationId xmlns:a16="http://schemas.microsoft.com/office/drawing/2014/main" id="{F0D8E9E4-1E7B-2B19-114D-F38540747C48}"/>
+              </a:ext>
+            </a:extLst>
+          </p:cNvPr>
+          <p:cNvSpPr/>
+          <p:nvPr/>
+        </p:nvSpPr>
+        <p:spPr>
+          <a:xfrm>
+            <a:off x="2987824" y="352643"/>
+            <a:ext cx="4637503" cy="4438214"/>
+          </a:xfrm>
+          <a:prstGeom prst="roundRect">
+            <a:avLst>
+              <a:gd name="adj" fmla="val 2531"/>
+            </a:avLst>
+          </a:prstGeom>
+          <a:noFill/>
+          <a:ln w="12700">
+            <a:prstDash val="solid"/>
+            <a:headEnd type="none" w="med" len="med"/>
+            <a:tailEnd type="triangle" w="med" len="med"/>
+          </a:ln>
+        </p:spPr>
+        <p:style>
+          <a:lnRef idx="2">
+            <a:schemeClr val="dk1"/>
+          </a:lnRef>
+          <a:fillRef idx="1">
+            <a:schemeClr val="lt1"/>
+          </a:fillRef>
+          <a:effectRef idx="0">
+            <a:schemeClr val="dk1"/>
+          </a:effectRef>
+          <a:fontRef idx="minor">
+            <a:schemeClr val="dk1"/>
+          </a:fontRef>
+        </p:style>
+        <p:txBody>
+          <a:bodyPr rtlCol="0" anchor="t"/>
+          <a:lstStyle/>
+          <a:p>
+            <a:pPr algn="r"/>
+            <a:r>
+              <a:rPr lang="en-US" altLang="ko-KR" sz="1000" dirty="0"/>
+              <a:t>Server </a:t>
+            </a:r>
+            <a:r>
+              <a:rPr lang="en-US" altLang="ko-KR" sz="1000" b="1" dirty="0"/>
+              <a:t>Namespace</a:t>
+            </a:r>
+            <a:endParaRPr lang="ko-KR" altLang="en-US" sz="1000" b="1" dirty="0"/>
+          </a:p>
+        </p:txBody>
+      </p:sp>
+      <p:sp>
+        <p:nvSpPr>
+          <p:cNvPr id="5" name="사각형: 둥근 모서리 12">
+            <a:extLst>
+              <a:ext uri="{FF2B5EF4-FFF2-40B4-BE49-F238E27FC236}">
+                <a16:creationId xmlns:a16="http://schemas.microsoft.com/office/drawing/2014/main" id="{9389CF02-1BF7-2148-7A52-5F48954C3B3A}"/>
+              </a:ext>
+            </a:extLst>
+          </p:cNvPr>
+          <p:cNvSpPr/>
+          <p:nvPr/>
+        </p:nvSpPr>
+        <p:spPr>
+          <a:xfrm>
+            <a:off x="3095263" y="1057319"/>
+            <a:ext cx="3081988" cy="836785"/>
+          </a:xfrm>
+          <a:prstGeom prst="roundRect">
+            <a:avLst>
+              <a:gd name="adj" fmla="val 8995"/>
+            </a:avLst>
+          </a:prstGeom>
+          <a:noFill/>
+          <a:ln w="12700">
+            <a:headEnd type="none" w="med" len="med"/>
+            <a:tailEnd type="triangle" w="med" len="med"/>
+          </a:ln>
+        </p:spPr>
+        <p:style>
+          <a:lnRef idx="2">
+            <a:schemeClr val="dk1"/>
+          </a:lnRef>
+          <a:fillRef idx="1">
+            <a:schemeClr val="lt1"/>
+          </a:fillRef>
+          <a:effectRef idx="0">
+            <a:schemeClr val="dk1"/>
+          </a:effectRef>
+          <a:fontRef idx="minor">
+            <a:schemeClr val="dk1"/>
+          </a:fontRef>
+        </p:style>
+        <p:txBody>
+          <a:bodyPr rtlCol="0" anchor="t"/>
+          <a:lstStyle/>
+          <a:p>
+            <a:pPr algn="ctr"/>
+            <a:r>
+              <a:rPr lang="en-US" altLang="ko-KR" sz="900"/>
+              <a:t>Server </a:t>
+            </a:r>
+            <a:r>
+              <a:rPr lang="en-US" altLang="ko-KR" sz="900" b="1" dirty="0"/>
+              <a:t>Service</a:t>
+            </a:r>
+            <a:endParaRPr lang="ko-KR" altLang="en-US" sz="900" b="1" dirty="0"/>
+          </a:p>
+        </p:txBody>
+      </p:sp>
+      <p:sp>
+        <p:nvSpPr>
+          <p:cNvPr id="11" name="사각형: 둥근 모서리 12">
+            <a:extLst>
+              <a:ext uri="{FF2B5EF4-FFF2-40B4-BE49-F238E27FC236}">
+                <a16:creationId xmlns:a16="http://schemas.microsoft.com/office/drawing/2014/main" id="{6473ECB4-207F-0798-6C41-0B2AB0221839}"/>
+              </a:ext>
+            </a:extLst>
+          </p:cNvPr>
+          <p:cNvSpPr/>
+          <p:nvPr/>
+        </p:nvSpPr>
+        <p:spPr>
+          <a:xfrm>
+            <a:off x="1518621" y="1341537"/>
+            <a:ext cx="1139438" cy="451511"/>
+          </a:xfrm>
+          <a:prstGeom prst="roundRect">
+            <a:avLst>
+              <a:gd name="adj" fmla="val 14105"/>
+            </a:avLst>
+          </a:prstGeom>
+          <a:noFill/>
+          <a:ln w="12700">
+            <a:headEnd type="none" w="med" len="med"/>
+            <a:tailEnd type="triangle" w="med" len="med"/>
+          </a:ln>
+        </p:spPr>
+        <p:style>
+          <a:lnRef idx="2">
+            <a:schemeClr val="dk1"/>
+          </a:lnRef>
+          <a:fillRef idx="1">
+            <a:schemeClr val="lt1"/>
+          </a:fillRef>
+          <a:effectRef idx="0">
+            <a:schemeClr val="dk1"/>
+          </a:effectRef>
+          <a:fontRef idx="minor">
+            <a:schemeClr val="dk1"/>
+          </a:fontRef>
+        </p:style>
+        <p:txBody>
+          <a:bodyPr rtlCol="0" anchor="ctr"/>
+          <a:lstStyle/>
+          <a:p>
+            <a:pPr algn="ctr"/>
+            <a:r>
+              <a:rPr lang="en-US" altLang="ko-KR" sz="900"/>
+              <a:t>Client A </a:t>
+            </a:r>
+            <a:r>
+              <a:rPr lang="en-US" altLang="ko-KR" sz="900" b="1" dirty="0"/>
+              <a:t>Pod</a:t>
+            </a:r>
+            <a:endParaRPr lang="ko-KR" altLang="en-US" sz="900" b="1" dirty="0"/>
+          </a:p>
+        </p:txBody>
+      </p:sp>
+      <p:sp>
+        <p:nvSpPr>
+          <p:cNvPr id="12" name="사각형: 둥근 모서리 12">
+            <a:extLst>
+              <a:ext uri="{FF2B5EF4-FFF2-40B4-BE49-F238E27FC236}">
+                <a16:creationId xmlns:a16="http://schemas.microsoft.com/office/drawing/2014/main" id="{AC17A82A-5E1E-FDB8-17B7-68202A3B8FD7}"/>
+              </a:ext>
+            </a:extLst>
+          </p:cNvPr>
+          <p:cNvSpPr/>
+          <p:nvPr/>
+        </p:nvSpPr>
+        <p:spPr>
+          <a:xfrm>
+            <a:off x="1518621" y="4039755"/>
+            <a:ext cx="1139438" cy="451511"/>
+          </a:xfrm>
+          <a:prstGeom prst="roundRect">
+            <a:avLst>
+              <a:gd name="adj" fmla="val 14105"/>
+            </a:avLst>
+          </a:prstGeom>
+          <a:noFill/>
+          <a:ln w="12700">
+            <a:headEnd type="none" w="med" len="med"/>
+            <a:tailEnd type="triangle" w="med" len="med"/>
+          </a:ln>
+        </p:spPr>
+        <p:style>
+          <a:lnRef idx="2">
+            <a:schemeClr val="dk1"/>
+          </a:lnRef>
+          <a:fillRef idx="1">
+            <a:schemeClr val="lt1"/>
+          </a:fillRef>
+          <a:effectRef idx="0">
+            <a:schemeClr val="dk1"/>
+          </a:effectRef>
+          <a:fontRef idx="minor">
+            <a:schemeClr val="dk1"/>
+          </a:fontRef>
+        </p:style>
+        <p:txBody>
+          <a:bodyPr rtlCol="0" anchor="ctr"/>
+          <a:lstStyle/>
+          <a:p>
+            <a:pPr algn="ctr"/>
+            <a:r>
+              <a:rPr lang="en-US" altLang="ko-KR" sz="900"/>
+              <a:t>Client C </a:t>
+            </a:r>
+            <a:r>
+              <a:rPr lang="en-US" altLang="ko-KR" sz="900" b="1" dirty="0"/>
+              <a:t>Pod</a:t>
+            </a:r>
+            <a:endParaRPr lang="ko-KR" altLang="en-US" sz="900" b="1" dirty="0"/>
+          </a:p>
+        </p:txBody>
+      </p:sp>
+      <p:sp>
+        <p:nvSpPr>
+          <p:cNvPr id="17" name="사각형: 둥근 모서리 12">
+            <a:extLst>
+              <a:ext uri="{FF2B5EF4-FFF2-40B4-BE49-F238E27FC236}">
+                <a16:creationId xmlns:a16="http://schemas.microsoft.com/office/drawing/2014/main" id="{295ED7A9-7E4E-FDEB-1CD9-2782109AC731}"/>
+              </a:ext>
+            </a:extLst>
+          </p:cNvPr>
+          <p:cNvSpPr/>
+          <p:nvPr/>
+        </p:nvSpPr>
+        <p:spPr>
+          <a:xfrm>
+            <a:off x="3205001" y="1338418"/>
+            <a:ext cx="1330422" cy="451511"/>
+          </a:xfrm>
+          <a:prstGeom prst="roundRect">
+            <a:avLst>
+              <a:gd name="adj" fmla="val 14105"/>
+            </a:avLst>
+          </a:prstGeom>
+          <a:solidFill>
+            <a:schemeClr val="bg1">
+              <a:lumMod val="95000"/>
+            </a:schemeClr>
+          </a:solidFill>
+          <a:ln w="12700">
+            <a:headEnd type="none" w="med" len="med"/>
+            <a:tailEnd type="triangle" w="med" len="med"/>
+          </a:ln>
+        </p:spPr>
+        <p:style>
+          <a:lnRef idx="2">
+            <a:schemeClr val="dk1"/>
+          </a:lnRef>
+          <a:fillRef idx="1">
+            <a:schemeClr val="lt1"/>
+          </a:fillRef>
+          <a:effectRef idx="0">
+            <a:schemeClr val="dk1"/>
+          </a:effectRef>
+          <a:fontRef idx="minor">
+            <a:schemeClr val="dk1"/>
+          </a:fontRef>
+        </p:style>
+        <p:txBody>
+          <a:bodyPr rtlCol="0" anchor="ctr"/>
+          <a:lstStyle/>
+          <a:p>
+            <a:pPr algn="ctr"/>
+            <a:r>
+              <a:rPr lang="en-US" altLang="ko-KR" sz="900" dirty="0"/>
+              <a:t>DNS Name, ClusterIP</a:t>
+            </a:r>
+          </a:p>
+          <a:p>
+            <a:pPr algn="ctr"/>
+            <a:r>
+              <a:rPr lang="en-US" altLang="ko-KR" sz="900" b="1" dirty="0"/>
+              <a:t>Frontend</a:t>
+            </a:r>
+            <a:endParaRPr lang="ko-KR" altLang="en-US" sz="900" b="1" dirty="0"/>
+          </a:p>
+        </p:txBody>
+      </p:sp>
+      <p:sp>
+        <p:nvSpPr>
+          <p:cNvPr id="19" name="사각형: 둥근 모서리 12">
+            <a:extLst>
+              <a:ext uri="{FF2B5EF4-FFF2-40B4-BE49-F238E27FC236}">
+                <a16:creationId xmlns:a16="http://schemas.microsoft.com/office/drawing/2014/main" id="{B2085A9D-A8F6-D604-9353-CAAA779A4092}"/>
+              </a:ext>
+            </a:extLst>
+          </p:cNvPr>
+          <p:cNvSpPr/>
+          <p:nvPr/>
+        </p:nvSpPr>
+        <p:spPr>
+          <a:xfrm>
+            <a:off x="4962660" y="1344655"/>
+            <a:ext cx="1104530" cy="445274"/>
+          </a:xfrm>
+          <a:prstGeom prst="roundRect">
+            <a:avLst>
+              <a:gd name="adj" fmla="val 14105"/>
+            </a:avLst>
+          </a:prstGeom>
+          <a:solidFill>
+            <a:schemeClr val="bg1">
+              <a:lumMod val="95000"/>
+            </a:schemeClr>
+          </a:solidFill>
+          <a:ln w="12700">
+            <a:headEnd type="none" w="med" len="med"/>
+            <a:tailEnd type="triangle" w="med" len="med"/>
+          </a:ln>
+        </p:spPr>
+        <p:style>
+          <a:lnRef idx="2">
+            <a:schemeClr val="dk1"/>
+          </a:lnRef>
+          <a:fillRef idx="1">
+            <a:schemeClr val="lt1"/>
+          </a:fillRef>
+          <a:effectRef idx="0">
+            <a:schemeClr val="dk1"/>
+          </a:effectRef>
+          <a:fontRef idx="minor">
+            <a:schemeClr val="dk1"/>
+          </a:fontRef>
+        </p:style>
+        <p:txBody>
+          <a:bodyPr rtlCol="0" anchor="ctr"/>
+          <a:lstStyle/>
+          <a:p>
+            <a:pPr algn="ctr"/>
+            <a:r>
+              <a:rPr lang="en-US" altLang="ko-KR" sz="900" dirty="0"/>
+              <a:t>Endpoint IPs</a:t>
+            </a:r>
+          </a:p>
+          <a:p>
+            <a:pPr algn="ctr"/>
+            <a:r>
+              <a:rPr lang="en-US" altLang="ko-KR" sz="900" b="1" dirty="0"/>
+              <a:t>Backend</a:t>
+            </a:r>
+            <a:endParaRPr lang="ko-KR" altLang="en-US" sz="900" b="1" dirty="0"/>
+          </a:p>
+        </p:txBody>
+      </p:sp>
+      <p:sp>
+        <p:nvSpPr>
+          <p:cNvPr id="21" name="사각형: 둥근 모서리 12">
+            <a:extLst>
+              <a:ext uri="{FF2B5EF4-FFF2-40B4-BE49-F238E27FC236}">
+                <a16:creationId xmlns:a16="http://schemas.microsoft.com/office/drawing/2014/main" id="{35D73758-572D-BB61-BA19-786018C76DF9}"/>
+              </a:ext>
+            </a:extLst>
+          </p:cNvPr>
+          <p:cNvSpPr/>
+          <p:nvPr/>
+        </p:nvSpPr>
+        <p:spPr>
+          <a:xfrm>
+            <a:off x="6390504" y="1340841"/>
+            <a:ext cx="1139438" cy="451511"/>
+          </a:xfrm>
+          <a:prstGeom prst="roundRect">
+            <a:avLst>
+              <a:gd name="adj" fmla="val 14105"/>
+            </a:avLst>
+          </a:prstGeom>
+          <a:noFill/>
+          <a:ln w="12700">
+            <a:headEnd type="none" w="med" len="med"/>
+            <a:tailEnd type="triangle" w="med" len="med"/>
+          </a:ln>
+        </p:spPr>
+        <p:style>
+          <a:lnRef idx="2">
+            <a:schemeClr val="dk1"/>
+          </a:lnRef>
+          <a:fillRef idx="1">
+            <a:schemeClr val="lt1"/>
+          </a:fillRef>
+          <a:effectRef idx="0">
+            <a:schemeClr val="dk1"/>
+          </a:effectRef>
+          <a:fontRef idx="minor">
+            <a:schemeClr val="dk1"/>
+          </a:fontRef>
+        </p:style>
+        <p:txBody>
+          <a:bodyPr rtlCol="0" anchor="ctr"/>
+          <a:lstStyle/>
+          <a:p>
+            <a:pPr algn="ctr"/>
+            <a:r>
+              <a:rPr lang="en-US" altLang="ko-KR" sz="900"/>
+              <a:t>Server </a:t>
+            </a:r>
+            <a:r>
+              <a:rPr lang="en-US" altLang="ko-KR" sz="900" b="1" dirty="0"/>
+              <a:t>Deployment</a:t>
+            </a:r>
+            <a:endParaRPr lang="ko-KR" altLang="en-US" sz="900" b="1" dirty="0"/>
+          </a:p>
+        </p:txBody>
+      </p:sp>
+      <p:cxnSp>
+        <p:nvCxnSpPr>
+          <p:cNvPr id="46" name="직선 화살표 연결선 96">
+            <a:extLst>
+              <a:ext uri="{FF2B5EF4-FFF2-40B4-BE49-F238E27FC236}">
+                <a16:creationId xmlns:a16="http://schemas.microsoft.com/office/drawing/2014/main" id="{C1A3D4FF-50EE-C48E-1243-87AAA1CB8230}"/>
+              </a:ext>
+            </a:extLst>
+          </p:cNvPr>
+          <p:cNvCxnSpPr>
+            <a:cxnSpLocks/>
+            <a:stCxn id="122" idx="2"/>
+            <a:endCxn id="17" idx="0"/>
+          </p:cNvCxnSpPr>
+          <p:nvPr/>
+        </p:nvCxnSpPr>
+        <p:spPr>
+          <a:xfrm flipH="1">
+            <a:off x="3870212" y="904269"/>
+            <a:ext cx="1641941" cy="434149"/>
+          </a:xfrm>
+          <a:prstGeom prst="straightConnector1">
+            <a:avLst/>
+          </a:prstGeom>
+          <a:ln w="12700">
+            <a:solidFill>
+              <a:schemeClr val="tx2"/>
+            </a:solidFill>
+            <a:prstDash val="solid"/>
+            <a:headEnd type="none" w="med" len="med"/>
+            <a:tailEnd type="triangle" w="med" len="med"/>
+          </a:ln>
+        </p:spPr>
+        <p:style>
+          <a:lnRef idx="1">
+            <a:schemeClr val="accent1"/>
+          </a:lnRef>
+          <a:fillRef idx="0">
+            <a:schemeClr val="accent1"/>
+          </a:fillRef>
+          <a:effectRef idx="0">
+            <a:schemeClr val="accent1"/>
+          </a:effectRef>
+          <a:fontRef idx="minor">
+            <a:schemeClr val="tx1"/>
+          </a:fontRef>
+        </p:style>
+      </p:cxnSp>
+      <p:cxnSp>
+        <p:nvCxnSpPr>
+          <p:cNvPr id="49" name="직선 화살표 연결선 96">
+            <a:extLst>
+              <a:ext uri="{FF2B5EF4-FFF2-40B4-BE49-F238E27FC236}">
+                <a16:creationId xmlns:a16="http://schemas.microsoft.com/office/drawing/2014/main" id="{1B53A41D-B077-8370-9879-7B839C377E03}"/>
+              </a:ext>
+            </a:extLst>
+          </p:cNvPr>
+          <p:cNvCxnSpPr>
+            <a:cxnSpLocks/>
+            <a:stCxn id="122" idx="2"/>
+            <a:endCxn id="19" idx="0"/>
+          </p:cNvCxnSpPr>
+          <p:nvPr/>
+        </p:nvCxnSpPr>
+        <p:spPr>
+          <a:xfrm>
+            <a:off x="5512153" y="904269"/>
+            <a:ext cx="2772" cy="440386"/>
+          </a:xfrm>
+          <a:prstGeom prst="straightConnector1">
+            <a:avLst/>
+          </a:prstGeom>
+          <a:ln w="12700">
+            <a:solidFill>
+              <a:schemeClr val="accent3"/>
+            </a:solidFill>
+            <a:prstDash val="solid"/>
+            <a:headEnd type="none" w="med" len="med"/>
+            <a:tailEnd type="triangle" w="med" len="med"/>
+          </a:ln>
+        </p:spPr>
+        <p:style>
+          <a:lnRef idx="1">
+            <a:schemeClr val="accent1"/>
+          </a:lnRef>
+          <a:fillRef idx="0">
+            <a:schemeClr val="accent1"/>
+          </a:fillRef>
+          <a:effectRef idx="0">
+            <a:schemeClr val="accent1"/>
+          </a:effectRef>
+          <a:fontRef idx="minor">
+            <a:schemeClr val="tx1"/>
+          </a:fontRef>
+        </p:style>
+      </p:cxnSp>
+      <p:sp>
+        <p:nvSpPr>
+          <p:cNvPr id="56" name="사각형: 둥근 모서리 12">
+            <a:extLst>
+              <a:ext uri="{FF2B5EF4-FFF2-40B4-BE49-F238E27FC236}">
+                <a16:creationId xmlns:a16="http://schemas.microsoft.com/office/drawing/2014/main" id="{6B790306-8A02-8616-B2F3-116D7F35EE5B}"/>
+              </a:ext>
+            </a:extLst>
+          </p:cNvPr>
+          <p:cNvSpPr/>
+          <p:nvPr/>
+        </p:nvSpPr>
+        <p:spPr>
+          <a:xfrm>
+            <a:off x="3095263" y="2452219"/>
+            <a:ext cx="3081988" cy="836785"/>
+          </a:xfrm>
+          <a:prstGeom prst="roundRect">
+            <a:avLst>
+              <a:gd name="adj" fmla="val 8995"/>
+            </a:avLst>
+          </a:prstGeom>
+          <a:noFill/>
+          <a:ln w="12700">
+            <a:headEnd type="none" w="med" len="med"/>
+            <a:tailEnd type="triangle" w="med" len="med"/>
+          </a:ln>
+        </p:spPr>
+        <p:style>
+          <a:lnRef idx="2">
+            <a:schemeClr val="dk1"/>
+          </a:lnRef>
+          <a:fillRef idx="1">
+            <a:schemeClr val="lt1"/>
+          </a:fillRef>
+          <a:effectRef idx="0">
+            <a:schemeClr val="dk1"/>
+          </a:effectRef>
+          <a:fontRef idx="minor">
+            <a:schemeClr val="dk1"/>
+          </a:fontRef>
+        </p:style>
+        <p:txBody>
+          <a:bodyPr rtlCol="0" anchor="t"/>
+          <a:lstStyle/>
+          <a:p>
+            <a:pPr algn="ctr"/>
+            <a:r>
+              <a:rPr lang="en-US" altLang="ko-KR" sz="900"/>
+              <a:t>Server Version 1 </a:t>
+            </a:r>
+            <a:r>
+              <a:rPr lang="en-US" altLang="ko-KR" sz="900" b="1" dirty="0"/>
+              <a:t>Service</a:t>
+            </a:r>
+            <a:endParaRPr lang="ko-KR" altLang="en-US" sz="900" b="1" dirty="0"/>
+          </a:p>
+        </p:txBody>
+      </p:sp>
+      <p:sp>
+        <p:nvSpPr>
+          <p:cNvPr id="57" name="사각형: 둥근 모서리 12">
+            <a:extLst>
+              <a:ext uri="{FF2B5EF4-FFF2-40B4-BE49-F238E27FC236}">
+                <a16:creationId xmlns:a16="http://schemas.microsoft.com/office/drawing/2014/main" id="{E7A13059-C2F0-1108-BA5A-D3C12518DFB7}"/>
+              </a:ext>
+            </a:extLst>
+          </p:cNvPr>
+          <p:cNvSpPr/>
+          <p:nvPr/>
+        </p:nvSpPr>
+        <p:spPr>
+          <a:xfrm>
+            <a:off x="3205001" y="2733318"/>
+            <a:ext cx="1330422" cy="451511"/>
+          </a:xfrm>
+          <a:prstGeom prst="roundRect">
+            <a:avLst>
+              <a:gd name="adj" fmla="val 14105"/>
+            </a:avLst>
+          </a:prstGeom>
+          <a:solidFill>
+            <a:schemeClr val="bg1">
+              <a:lumMod val="95000"/>
+            </a:schemeClr>
+          </a:solidFill>
+          <a:ln w="12700">
+            <a:headEnd type="none" w="med" len="med"/>
+            <a:tailEnd type="triangle" w="med" len="med"/>
+          </a:ln>
+        </p:spPr>
+        <p:style>
+          <a:lnRef idx="2">
+            <a:schemeClr val="dk1"/>
+          </a:lnRef>
+          <a:fillRef idx="1">
+            <a:schemeClr val="lt1"/>
+          </a:fillRef>
+          <a:effectRef idx="0">
+            <a:schemeClr val="dk1"/>
+          </a:effectRef>
+          <a:fontRef idx="minor">
+            <a:schemeClr val="dk1"/>
+          </a:fontRef>
+        </p:style>
+        <p:txBody>
+          <a:bodyPr rtlCol="0" anchor="ctr"/>
+          <a:lstStyle/>
+          <a:p>
+            <a:pPr algn="ctr"/>
+            <a:r>
+              <a:rPr lang="en-US" altLang="ko-KR" sz="900" dirty="0"/>
+              <a:t>DNS Name, ClusterIP</a:t>
+            </a:r>
+          </a:p>
+          <a:p>
+            <a:pPr algn="ctr"/>
+            <a:r>
+              <a:rPr lang="en-US" altLang="ko-KR" sz="900" b="1" dirty="0"/>
+              <a:t>Frontend</a:t>
+            </a:r>
+            <a:endParaRPr lang="ko-KR" altLang="en-US" sz="900" b="1" dirty="0"/>
+          </a:p>
+        </p:txBody>
+      </p:sp>
+      <p:sp>
+        <p:nvSpPr>
+          <p:cNvPr id="58" name="사각형: 둥근 모서리 12">
+            <a:extLst>
+              <a:ext uri="{FF2B5EF4-FFF2-40B4-BE49-F238E27FC236}">
+                <a16:creationId xmlns:a16="http://schemas.microsoft.com/office/drawing/2014/main" id="{3AC02CD4-E027-B5EA-77A5-0B993ED90C43}"/>
+              </a:ext>
+            </a:extLst>
+          </p:cNvPr>
+          <p:cNvSpPr/>
+          <p:nvPr/>
+        </p:nvSpPr>
+        <p:spPr>
+          <a:xfrm>
+            <a:off x="4962660" y="2739555"/>
+            <a:ext cx="1104530" cy="445274"/>
+          </a:xfrm>
+          <a:prstGeom prst="roundRect">
+            <a:avLst>
+              <a:gd name="adj" fmla="val 14105"/>
+            </a:avLst>
+          </a:prstGeom>
+          <a:solidFill>
+            <a:schemeClr val="bg1">
+              <a:lumMod val="95000"/>
+            </a:schemeClr>
+          </a:solidFill>
+          <a:ln w="12700">
+            <a:headEnd type="none" w="med" len="med"/>
+            <a:tailEnd type="triangle" w="med" len="med"/>
+          </a:ln>
+        </p:spPr>
+        <p:style>
+          <a:lnRef idx="2">
+            <a:schemeClr val="dk1"/>
+          </a:lnRef>
+          <a:fillRef idx="1">
+            <a:schemeClr val="lt1"/>
+          </a:fillRef>
+          <a:effectRef idx="0">
+            <a:schemeClr val="dk1"/>
+          </a:effectRef>
+          <a:fontRef idx="minor">
+            <a:schemeClr val="dk1"/>
+          </a:fontRef>
+        </p:style>
+        <p:txBody>
+          <a:bodyPr rtlCol="0" anchor="ctr"/>
+          <a:lstStyle/>
+          <a:p>
+            <a:pPr algn="ctr"/>
+            <a:r>
+              <a:rPr lang="en-US" altLang="ko-KR" sz="900" dirty="0"/>
+              <a:t>Endpoint IPs</a:t>
+            </a:r>
+          </a:p>
+          <a:p>
+            <a:pPr algn="ctr"/>
+            <a:r>
+              <a:rPr lang="en-US" altLang="ko-KR" sz="900" b="1" dirty="0"/>
+              <a:t>Backend</a:t>
+            </a:r>
+            <a:endParaRPr lang="ko-KR" altLang="en-US" sz="900" b="1" dirty="0"/>
+          </a:p>
+        </p:txBody>
+      </p:sp>
+      <p:sp>
+        <p:nvSpPr>
+          <p:cNvPr id="59" name="사각형: 둥근 모서리 12">
+            <a:extLst>
+              <a:ext uri="{FF2B5EF4-FFF2-40B4-BE49-F238E27FC236}">
+                <a16:creationId xmlns:a16="http://schemas.microsoft.com/office/drawing/2014/main" id="{B3ECB462-DCC2-85D4-32B8-6442BE404D18}"/>
+              </a:ext>
+            </a:extLst>
+          </p:cNvPr>
+          <p:cNvSpPr/>
+          <p:nvPr/>
+        </p:nvSpPr>
+        <p:spPr>
+          <a:xfrm>
+            <a:off x="6390504" y="2736436"/>
+            <a:ext cx="1139438" cy="451511"/>
+          </a:xfrm>
+          <a:prstGeom prst="roundRect">
+            <a:avLst>
+              <a:gd name="adj" fmla="val 14105"/>
+            </a:avLst>
+          </a:prstGeom>
+          <a:noFill/>
+          <a:ln w="12700">
+            <a:headEnd type="none" w="med" len="med"/>
+            <a:tailEnd type="triangle" w="med" len="med"/>
+          </a:ln>
+        </p:spPr>
+        <p:style>
+          <a:lnRef idx="2">
+            <a:schemeClr val="dk1"/>
+          </a:lnRef>
+          <a:fillRef idx="1">
+            <a:schemeClr val="lt1"/>
+          </a:fillRef>
+          <a:effectRef idx="0">
+            <a:schemeClr val="dk1"/>
+          </a:effectRef>
+          <a:fontRef idx="minor">
+            <a:schemeClr val="dk1"/>
+          </a:fontRef>
+        </p:style>
+        <p:txBody>
+          <a:bodyPr rtlCol="0" anchor="ctr"/>
+          <a:lstStyle/>
+          <a:p>
+            <a:pPr algn="ctr"/>
+            <a:r>
+              <a:rPr lang="en-US" altLang="ko-KR" sz="900"/>
+              <a:t>Server Version 1 </a:t>
+            </a:r>
+            <a:r>
+              <a:rPr lang="en-US" altLang="ko-KR" sz="900" b="1" dirty="0"/>
+              <a:t>Deployment</a:t>
+            </a:r>
+            <a:endParaRPr lang="ko-KR" altLang="en-US" sz="900" b="1" dirty="0"/>
+          </a:p>
+        </p:txBody>
+      </p:sp>
+      <p:sp>
+        <p:nvSpPr>
+          <p:cNvPr id="61" name="사각형: 둥근 모서리 12">
+            <a:extLst>
+              <a:ext uri="{FF2B5EF4-FFF2-40B4-BE49-F238E27FC236}">
+                <a16:creationId xmlns:a16="http://schemas.microsoft.com/office/drawing/2014/main" id="{5E7AB619-573A-66B7-8F64-0C319A5F09F8}"/>
+              </a:ext>
+            </a:extLst>
+          </p:cNvPr>
+          <p:cNvSpPr/>
+          <p:nvPr/>
+        </p:nvSpPr>
+        <p:spPr>
+          <a:xfrm>
+            <a:off x="1518621" y="3342305"/>
+            <a:ext cx="1139438" cy="451511"/>
+          </a:xfrm>
+          <a:prstGeom prst="roundRect">
+            <a:avLst>
+              <a:gd name="adj" fmla="val 14105"/>
+            </a:avLst>
+          </a:prstGeom>
+          <a:solidFill>
+            <a:schemeClr val="bg1">
+              <a:lumMod val="95000"/>
+            </a:schemeClr>
+          </a:solidFill>
+          <a:ln w="12700">
+            <a:headEnd type="none" w="med" len="med"/>
+            <a:tailEnd type="triangle" w="med" len="med"/>
+          </a:ln>
+        </p:spPr>
+        <p:style>
+          <a:lnRef idx="2">
+            <a:schemeClr val="dk1"/>
+          </a:lnRef>
+          <a:fillRef idx="1">
+            <a:schemeClr val="lt1"/>
+          </a:fillRef>
+          <a:effectRef idx="0">
+            <a:schemeClr val="dk1"/>
+          </a:effectRef>
+          <a:fontRef idx="minor">
+            <a:schemeClr val="dk1"/>
+          </a:fontRef>
+        </p:style>
+        <p:txBody>
+          <a:bodyPr rtlCol="0" anchor="ctr"/>
+          <a:lstStyle/>
+          <a:p>
+            <a:pPr algn="ctr"/>
+            <a:r>
+              <a:rPr lang="en-US" altLang="ko-KR" sz="900"/>
+              <a:t>Server</a:t>
+            </a:r>
+          </a:p>
+          <a:p>
+            <a:pPr algn="ctr"/>
+            <a:r>
+              <a:rPr lang="en-US" altLang="ko-KR" sz="900" b="1"/>
+              <a:t>HTTPRoute</a:t>
+            </a:r>
+          </a:p>
+          <a:p>
+            <a:pPr algn="ctr"/>
+            <a:r>
+              <a:rPr lang="en-US" altLang="ko-KR" sz="900" b="1"/>
+              <a:t>(Consumer)</a:t>
+            </a:r>
+          </a:p>
+        </p:txBody>
+      </p:sp>
+      <p:sp>
+        <p:nvSpPr>
+          <p:cNvPr id="62" name="사각형: 둥근 모서리 12">
+            <a:extLst>
+              <a:ext uri="{FF2B5EF4-FFF2-40B4-BE49-F238E27FC236}">
+                <a16:creationId xmlns:a16="http://schemas.microsoft.com/office/drawing/2014/main" id="{0AB5375B-A412-095F-CFCE-E05C9C8717F2}"/>
+              </a:ext>
+            </a:extLst>
+          </p:cNvPr>
+          <p:cNvSpPr/>
+          <p:nvPr/>
+        </p:nvSpPr>
+        <p:spPr>
+          <a:xfrm>
+            <a:off x="3092491" y="3847119"/>
+            <a:ext cx="3081988" cy="836785"/>
+          </a:xfrm>
+          <a:prstGeom prst="roundRect">
+            <a:avLst>
+              <a:gd name="adj" fmla="val 8995"/>
+            </a:avLst>
+          </a:prstGeom>
+          <a:noFill/>
+          <a:ln w="12700">
+            <a:headEnd type="none" w="med" len="med"/>
+            <a:tailEnd type="triangle" w="med" len="med"/>
+          </a:ln>
+        </p:spPr>
+        <p:style>
+          <a:lnRef idx="2">
+            <a:schemeClr val="dk1"/>
+          </a:lnRef>
+          <a:fillRef idx="1">
+            <a:schemeClr val="lt1"/>
+          </a:fillRef>
+          <a:effectRef idx="0">
+            <a:schemeClr val="dk1"/>
+          </a:effectRef>
+          <a:fontRef idx="minor">
+            <a:schemeClr val="dk1"/>
+          </a:fontRef>
+        </p:style>
+        <p:txBody>
+          <a:bodyPr rtlCol="0" anchor="t"/>
+          <a:lstStyle/>
+          <a:p>
+            <a:pPr algn="ctr"/>
+            <a:r>
+              <a:rPr lang="en-US" altLang="ko-KR" sz="900"/>
+              <a:t>Server Version 2 </a:t>
+            </a:r>
+            <a:r>
+              <a:rPr lang="en-US" altLang="ko-KR" sz="900" b="1" dirty="0"/>
+              <a:t>Service</a:t>
+            </a:r>
+            <a:endParaRPr lang="ko-KR" altLang="en-US" sz="900" b="1" dirty="0"/>
+          </a:p>
+        </p:txBody>
+      </p:sp>
+      <p:sp>
+        <p:nvSpPr>
+          <p:cNvPr id="63" name="사각형: 둥근 모서리 12">
+            <a:extLst>
+              <a:ext uri="{FF2B5EF4-FFF2-40B4-BE49-F238E27FC236}">
+                <a16:creationId xmlns:a16="http://schemas.microsoft.com/office/drawing/2014/main" id="{2D5785F9-CF98-3898-FABE-750F5DB628B1}"/>
+              </a:ext>
+            </a:extLst>
+          </p:cNvPr>
+          <p:cNvSpPr/>
+          <p:nvPr/>
+        </p:nvSpPr>
+        <p:spPr>
+          <a:xfrm>
+            <a:off x="3202229" y="4128218"/>
+            <a:ext cx="1330422" cy="451511"/>
+          </a:xfrm>
+          <a:prstGeom prst="roundRect">
+            <a:avLst>
+              <a:gd name="adj" fmla="val 14105"/>
+            </a:avLst>
+          </a:prstGeom>
+          <a:solidFill>
+            <a:schemeClr val="bg1">
+              <a:lumMod val="95000"/>
+            </a:schemeClr>
+          </a:solidFill>
+          <a:ln w="12700">
+            <a:headEnd type="none" w="med" len="med"/>
+            <a:tailEnd type="triangle" w="med" len="med"/>
+          </a:ln>
+        </p:spPr>
+        <p:style>
+          <a:lnRef idx="2">
+            <a:schemeClr val="dk1"/>
+          </a:lnRef>
+          <a:fillRef idx="1">
+            <a:schemeClr val="lt1"/>
+          </a:fillRef>
+          <a:effectRef idx="0">
+            <a:schemeClr val="dk1"/>
+          </a:effectRef>
+          <a:fontRef idx="minor">
+            <a:schemeClr val="dk1"/>
+          </a:fontRef>
+        </p:style>
+        <p:txBody>
+          <a:bodyPr rtlCol="0" anchor="ctr"/>
+          <a:lstStyle/>
+          <a:p>
+            <a:pPr algn="ctr"/>
+            <a:r>
+              <a:rPr lang="en-US" altLang="ko-KR" sz="900" dirty="0"/>
+              <a:t>DNS Name, ClusterIP</a:t>
+            </a:r>
+          </a:p>
+          <a:p>
+            <a:pPr algn="ctr"/>
+            <a:r>
+              <a:rPr lang="en-US" altLang="ko-KR" sz="900" b="1" dirty="0"/>
+              <a:t>Frontend</a:t>
+            </a:r>
+            <a:endParaRPr lang="ko-KR" altLang="en-US" sz="900" b="1" dirty="0"/>
+          </a:p>
+        </p:txBody>
+      </p:sp>
+      <p:sp>
+        <p:nvSpPr>
+          <p:cNvPr id="64" name="사각형: 둥근 모서리 12">
+            <a:extLst>
+              <a:ext uri="{FF2B5EF4-FFF2-40B4-BE49-F238E27FC236}">
+                <a16:creationId xmlns:a16="http://schemas.microsoft.com/office/drawing/2014/main" id="{99B9D7DC-B9F4-8633-BFFA-F4DBE7238203}"/>
+              </a:ext>
+            </a:extLst>
+          </p:cNvPr>
+          <p:cNvSpPr/>
+          <p:nvPr/>
+        </p:nvSpPr>
+        <p:spPr>
+          <a:xfrm>
+            <a:off x="4959888" y="4134455"/>
+            <a:ext cx="1104530" cy="445274"/>
+          </a:xfrm>
+          <a:prstGeom prst="roundRect">
+            <a:avLst>
+              <a:gd name="adj" fmla="val 14105"/>
+            </a:avLst>
+          </a:prstGeom>
+          <a:solidFill>
+            <a:schemeClr val="bg1">
+              <a:lumMod val="95000"/>
+            </a:schemeClr>
+          </a:solidFill>
+          <a:ln w="12700">
+            <a:headEnd type="none" w="med" len="med"/>
+            <a:tailEnd type="triangle" w="med" len="med"/>
+          </a:ln>
+        </p:spPr>
+        <p:style>
+          <a:lnRef idx="2">
+            <a:schemeClr val="dk1"/>
+          </a:lnRef>
+          <a:fillRef idx="1">
+            <a:schemeClr val="lt1"/>
+          </a:fillRef>
+          <a:effectRef idx="0">
+            <a:schemeClr val="dk1"/>
+          </a:effectRef>
+          <a:fontRef idx="minor">
+            <a:schemeClr val="dk1"/>
+          </a:fontRef>
+        </p:style>
+        <p:txBody>
+          <a:bodyPr rtlCol="0" anchor="ctr"/>
+          <a:lstStyle/>
+          <a:p>
+            <a:pPr algn="ctr"/>
+            <a:r>
+              <a:rPr lang="en-US" altLang="ko-KR" sz="900" dirty="0"/>
+              <a:t>Endpoint IPs</a:t>
+            </a:r>
+          </a:p>
+          <a:p>
+            <a:pPr algn="ctr"/>
+            <a:r>
+              <a:rPr lang="en-US" altLang="ko-KR" sz="900" b="1" dirty="0"/>
+              <a:t>Backend</a:t>
+            </a:r>
+            <a:endParaRPr lang="ko-KR" altLang="en-US" sz="900" b="1" dirty="0"/>
+          </a:p>
+        </p:txBody>
+      </p:sp>
+      <p:sp>
+        <p:nvSpPr>
+          <p:cNvPr id="65" name="사각형: 둥근 모서리 12">
+            <a:extLst>
+              <a:ext uri="{FF2B5EF4-FFF2-40B4-BE49-F238E27FC236}">
+                <a16:creationId xmlns:a16="http://schemas.microsoft.com/office/drawing/2014/main" id="{CE01AF45-0126-366C-1A8B-A3541D74DB85}"/>
+              </a:ext>
+            </a:extLst>
+          </p:cNvPr>
+          <p:cNvSpPr/>
+          <p:nvPr/>
+        </p:nvSpPr>
+        <p:spPr>
+          <a:xfrm>
+            <a:off x="6387732" y="4131336"/>
+            <a:ext cx="1139438" cy="451511"/>
+          </a:xfrm>
+          <a:prstGeom prst="roundRect">
+            <a:avLst>
+              <a:gd name="adj" fmla="val 14105"/>
+            </a:avLst>
+          </a:prstGeom>
+          <a:noFill/>
+          <a:ln w="12700">
+            <a:headEnd type="none" w="med" len="med"/>
+            <a:tailEnd type="triangle" w="med" len="med"/>
+          </a:ln>
+        </p:spPr>
+        <p:style>
+          <a:lnRef idx="2">
+            <a:schemeClr val="dk1"/>
+          </a:lnRef>
+          <a:fillRef idx="1">
+            <a:schemeClr val="lt1"/>
+          </a:fillRef>
+          <a:effectRef idx="0">
+            <a:schemeClr val="dk1"/>
+          </a:effectRef>
+          <a:fontRef idx="minor">
+            <a:schemeClr val="dk1"/>
+          </a:fontRef>
+        </p:style>
+        <p:txBody>
+          <a:bodyPr rtlCol="0" anchor="ctr"/>
+          <a:lstStyle/>
+          <a:p>
+            <a:pPr algn="ctr"/>
+            <a:r>
+              <a:rPr lang="en-US" altLang="ko-KR" sz="900"/>
+              <a:t>Server Version 2 </a:t>
+            </a:r>
+            <a:r>
+              <a:rPr lang="en-US" altLang="ko-KR" sz="900" b="1" dirty="0"/>
+              <a:t>Deployment</a:t>
+            </a:r>
+            <a:endParaRPr lang="ko-KR" altLang="en-US" sz="900" b="1" dirty="0"/>
+          </a:p>
+        </p:txBody>
+      </p:sp>
+      <p:cxnSp>
+        <p:nvCxnSpPr>
+          <p:cNvPr id="70" name="직선 화살표 연결선 96">
+            <a:extLst>
+              <a:ext uri="{FF2B5EF4-FFF2-40B4-BE49-F238E27FC236}">
+                <a16:creationId xmlns:a16="http://schemas.microsoft.com/office/drawing/2014/main" id="{451F49D5-7C54-5FBE-9F92-9D9C673F2730}"/>
+              </a:ext>
+            </a:extLst>
+          </p:cNvPr>
+          <p:cNvCxnSpPr>
+            <a:cxnSpLocks/>
+            <a:stCxn id="61" idx="3"/>
+            <a:endCxn id="17" idx="2"/>
+          </p:cNvCxnSpPr>
+          <p:nvPr/>
+        </p:nvCxnSpPr>
+        <p:spPr>
+          <a:xfrm flipV="1">
+            <a:off x="2658059" y="1789929"/>
+            <a:ext cx="1212153" cy="1778132"/>
+          </a:xfrm>
+          <a:prstGeom prst="straightConnector1">
+            <a:avLst/>
+          </a:prstGeom>
+          <a:ln w="12700">
+            <a:solidFill>
+              <a:schemeClr val="tx2"/>
+            </a:solidFill>
+            <a:prstDash val="solid"/>
+            <a:headEnd type="none" w="med" len="med"/>
+            <a:tailEnd type="triangle" w="med" len="med"/>
+          </a:ln>
+        </p:spPr>
+        <p:style>
+          <a:lnRef idx="1">
+            <a:schemeClr val="accent1"/>
+          </a:lnRef>
+          <a:fillRef idx="0">
+            <a:schemeClr val="accent1"/>
+          </a:fillRef>
+          <a:effectRef idx="0">
+            <a:schemeClr val="accent1"/>
+          </a:effectRef>
+          <a:fontRef idx="minor">
+            <a:schemeClr val="tx1"/>
+          </a:fontRef>
+        </p:style>
+      </p:cxnSp>
+      <p:cxnSp>
+        <p:nvCxnSpPr>
+          <p:cNvPr id="73" name="직선 화살표 연결선 96">
+            <a:extLst>
+              <a:ext uri="{FF2B5EF4-FFF2-40B4-BE49-F238E27FC236}">
+                <a16:creationId xmlns:a16="http://schemas.microsoft.com/office/drawing/2014/main" id="{E6290888-63CF-3DD1-8436-C71204A84D58}"/>
+              </a:ext>
+            </a:extLst>
+          </p:cNvPr>
+          <p:cNvCxnSpPr>
+            <a:cxnSpLocks/>
+            <a:stCxn id="61" idx="3"/>
+            <a:endCxn id="58" idx="2"/>
+          </p:cNvCxnSpPr>
+          <p:nvPr/>
+        </p:nvCxnSpPr>
+        <p:spPr>
+          <a:xfrm flipV="1">
+            <a:off x="2658059" y="3184829"/>
+            <a:ext cx="2856866" cy="383232"/>
+          </a:xfrm>
+          <a:prstGeom prst="straightConnector1">
+            <a:avLst/>
+          </a:prstGeom>
+          <a:ln w="12700">
+            <a:solidFill>
+              <a:schemeClr val="accent3"/>
+            </a:solidFill>
+            <a:prstDash val="solid"/>
+            <a:headEnd type="none" w="med" len="med"/>
+            <a:tailEnd type="triangle" w="med" len="med"/>
+          </a:ln>
+        </p:spPr>
+        <p:style>
+          <a:lnRef idx="1">
+            <a:schemeClr val="accent1"/>
+          </a:lnRef>
+          <a:fillRef idx="0">
+            <a:schemeClr val="accent1"/>
+          </a:fillRef>
+          <a:effectRef idx="0">
+            <a:schemeClr val="accent1"/>
+          </a:effectRef>
+          <a:fontRef idx="minor">
+            <a:schemeClr val="tx1"/>
+          </a:fontRef>
+        </p:style>
+      </p:cxnSp>
+      <p:cxnSp>
+        <p:nvCxnSpPr>
+          <p:cNvPr id="76" name="직선 화살표 연결선 96">
+            <a:extLst>
+              <a:ext uri="{FF2B5EF4-FFF2-40B4-BE49-F238E27FC236}">
+                <a16:creationId xmlns:a16="http://schemas.microsoft.com/office/drawing/2014/main" id="{FE39577F-5949-2512-97E2-D87950A5D957}"/>
+              </a:ext>
+            </a:extLst>
+          </p:cNvPr>
+          <p:cNvCxnSpPr>
+            <a:cxnSpLocks/>
+            <a:stCxn id="61" idx="3"/>
+            <a:endCxn id="64" idx="0"/>
+          </p:cNvCxnSpPr>
+          <p:nvPr/>
+        </p:nvCxnSpPr>
+        <p:spPr>
+          <a:xfrm>
+            <a:off x="2658059" y="3568061"/>
+            <a:ext cx="2854094" cy="566394"/>
+          </a:xfrm>
+          <a:prstGeom prst="straightConnector1">
+            <a:avLst/>
+          </a:prstGeom>
+          <a:ln w="12700">
+            <a:solidFill>
+              <a:schemeClr val="accent3"/>
+            </a:solidFill>
+            <a:prstDash val="solid"/>
+            <a:headEnd type="none" w="med" len="med"/>
+            <a:tailEnd type="triangle" w="med" len="med"/>
+          </a:ln>
+        </p:spPr>
+        <p:style>
+          <a:lnRef idx="1">
+            <a:schemeClr val="accent1"/>
+          </a:lnRef>
+          <a:fillRef idx="0">
+            <a:schemeClr val="accent1"/>
+          </a:fillRef>
+          <a:effectRef idx="0">
+            <a:schemeClr val="accent1"/>
+          </a:effectRef>
+          <a:fontRef idx="minor">
+            <a:schemeClr val="tx1"/>
+          </a:fontRef>
+        </p:style>
+      </p:cxnSp>
+      <p:cxnSp>
+        <p:nvCxnSpPr>
+          <p:cNvPr id="79" name="직선 화살표 연결선 96">
+            <a:extLst>
+              <a:ext uri="{FF2B5EF4-FFF2-40B4-BE49-F238E27FC236}">
+                <a16:creationId xmlns:a16="http://schemas.microsoft.com/office/drawing/2014/main" id="{A6A03733-B2E4-F46A-CB5D-7ED3078DA83C}"/>
+              </a:ext>
+            </a:extLst>
+          </p:cNvPr>
+          <p:cNvCxnSpPr>
+            <a:cxnSpLocks/>
+            <a:stCxn id="12" idx="3"/>
+            <a:endCxn id="17" idx="1"/>
+          </p:cNvCxnSpPr>
+          <p:nvPr/>
+        </p:nvCxnSpPr>
+        <p:spPr>
+          <a:xfrm flipV="1">
+            <a:off x="2658059" y="1564174"/>
+            <a:ext cx="546942" cy="2701337"/>
+          </a:xfrm>
+          <a:prstGeom prst="straightConnector1">
+            <a:avLst/>
+          </a:prstGeom>
+          <a:ln w="12700">
+            <a:solidFill>
+              <a:schemeClr val="accent6"/>
+            </a:solidFill>
+            <a:prstDash val="solid"/>
+            <a:headEnd type="none" w="med" len="med"/>
+            <a:tailEnd type="triangle" w="med" len="med"/>
+          </a:ln>
+        </p:spPr>
+        <p:style>
+          <a:lnRef idx="1">
+            <a:schemeClr val="accent1"/>
+          </a:lnRef>
+          <a:fillRef idx="0">
+            <a:schemeClr val="accent1"/>
+          </a:fillRef>
+          <a:effectRef idx="0">
+            <a:schemeClr val="accent1"/>
+          </a:effectRef>
+          <a:fontRef idx="minor">
+            <a:schemeClr val="tx1"/>
+          </a:fontRef>
+        </p:style>
+      </p:cxnSp>
+      <p:cxnSp>
+        <p:nvCxnSpPr>
+          <p:cNvPr id="85" name="직선 화살표 연결선 96">
+            <a:extLst>
+              <a:ext uri="{FF2B5EF4-FFF2-40B4-BE49-F238E27FC236}">
+                <a16:creationId xmlns:a16="http://schemas.microsoft.com/office/drawing/2014/main" id="{7C4111C1-2A42-4F8B-63CE-523119195209}"/>
+              </a:ext>
+            </a:extLst>
+          </p:cNvPr>
+          <p:cNvCxnSpPr>
+            <a:cxnSpLocks/>
+            <a:stCxn id="64" idx="3"/>
+            <a:endCxn id="65" idx="1"/>
+          </p:cNvCxnSpPr>
+          <p:nvPr/>
+        </p:nvCxnSpPr>
+        <p:spPr>
+          <a:xfrm>
+            <a:off x="6064418" y="4357092"/>
+            <a:ext cx="323314" cy="0"/>
+          </a:xfrm>
+          <a:prstGeom prst="straightConnector1">
+            <a:avLst/>
+          </a:prstGeom>
+          <a:ln w="12700">
+            <a:solidFill>
+              <a:schemeClr val="accent6"/>
+            </a:solidFill>
+            <a:prstDash val="solid"/>
+            <a:headEnd type="none" w="med" len="med"/>
+            <a:tailEnd type="triangle" w="med" len="med"/>
+          </a:ln>
+        </p:spPr>
+        <p:style>
+          <a:lnRef idx="1">
+            <a:schemeClr val="accent1"/>
+          </a:lnRef>
+          <a:fillRef idx="0">
+            <a:schemeClr val="accent1"/>
+          </a:fillRef>
+          <a:effectRef idx="0">
+            <a:schemeClr val="accent1"/>
+          </a:effectRef>
+          <a:fontRef idx="minor">
+            <a:schemeClr val="tx1"/>
+          </a:fontRef>
+        </p:style>
+      </p:cxnSp>
+      <p:cxnSp>
+        <p:nvCxnSpPr>
+          <p:cNvPr id="88" name="직선 화살표 연결선 96">
+            <a:extLst>
+              <a:ext uri="{FF2B5EF4-FFF2-40B4-BE49-F238E27FC236}">
+                <a16:creationId xmlns:a16="http://schemas.microsoft.com/office/drawing/2014/main" id="{0761A076-F654-3479-6611-C862F1181C8E}"/>
+              </a:ext>
+            </a:extLst>
+          </p:cNvPr>
+          <p:cNvCxnSpPr>
+            <a:cxnSpLocks/>
+            <a:stCxn id="58" idx="3"/>
+            <a:endCxn id="59" idx="1"/>
+          </p:cNvCxnSpPr>
+          <p:nvPr/>
+        </p:nvCxnSpPr>
+        <p:spPr>
+          <a:xfrm>
+            <a:off x="6067190" y="2962192"/>
+            <a:ext cx="323314" cy="0"/>
+          </a:xfrm>
+          <a:prstGeom prst="straightConnector1">
+            <a:avLst/>
+          </a:prstGeom>
+          <a:ln w="12700">
+            <a:solidFill>
+              <a:schemeClr val="accent6"/>
+            </a:solidFill>
+            <a:prstDash val="solid"/>
+            <a:headEnd type="none" w="med" len="med"/>
+            <a:tailEnd type="triangle" w="med" len="med"/>
+          </a:ln>
+        </p:spPr>
+        <p:style>
+          <a:lnRef idx="1">
+            <a:schemeClr val="accent1"/>
+          </a:lnRef>
+          <a:fillRef idx="0">
+            <a:schemeClr val="accent1"/>
+          </a:fillRef>
+          <a:effectRef idx="0">
+            <a:schemeClr val="accent1"/>
+          </a:effectRef>
+          <a:fontRef idx="minor">
+            <a:schemeClr val="tx1"/>
+          </a:fontRef>
+        </p:style>
+      </p:cxnSp>
+      <p:cxnSp>
+        <p:nvCxnSpPr>
+          <p:cNvPr id="91" name="직선 화살표 연결선 96">
+            <a:extLst>
+              <a:ext uri="{FF2B5EF4-FFF2-40B4-BE49-F238E27FC236}">
+                <a16:creationId xmlns:a16="http://schemas.microsoft.com/office/drawing/2014/main" id="{E2512FCB-8D2E-69A8-14B8-377187A6C061}"/>
+              </a:ext>
+            </a:extLst>
+          </p:cNvPr>
+          <p:cNvCxnSpPr>
+            <a:cxnSpLocks/>
+            <a:stCxn id="11" idx="3"/>
+            <a:endCxn id="17" idx="1"/>
+          </p:cNvCxnSpPr>
+          <p:nvPr/>
+        </p:nvCxnSpPr>
+        <p:spPr>
+          <a:xfrm flipV="1">
+            <a:off x="2658059" y="1564174"/>
+            <a:ext cx="546942" cy="3119"/>
+          </a:xfrm>
+          <a:prstGeom prst="straightConnector1">
+            <a:avLst/>
+          </a:prstGeom>
+          <a:ln w="12700">
+            <a:solidFill>
+              <a:srgbClr val="C00000"/>
+            </a:solidFill>
+            <a:prstDash val="solid"/>
+            <a:headEnd type="none" w="med" len="med"/>
+            <a:tailEnd type="triangle" w="med" len="med"/>
+          </a:ln>
+        </p:spPr>
+        <p:style>
+          <a:lnRef idx="1">
+            <a:schemeClr val="accent1"/>
+          </a:lnRef>
+          <a:fillRef idx="0">
+            <a:schemeClr val="accent1"/>
+          </a:fillRef>
+          <a:effectRef idx="0">
+            <a:schemeClr val="accent1"/>
+          </a:effectRef>
+          <a:fontRef idx="minor">
+            <a:schemeClr val="tx1"/>
+          </a:fontRef>
+        </p:style>
+      </p:cxnSp>
+      <p:cxnSp>
+        <p:nvCxnSpPr>
+          <p:cNvPr id="95" name="직선 화살표 연결선 96">
+            <a:extLst>
+              <a:ext uri="{FF2B5EF4-FFF2-40B4-BE49-F238E27FC236}">
+                <a16:creationId xmlns:a16="http://schemas.microsoft.com/office/drawing/2014/main" id="{39AF3F79-092B-EDBE-DC8F-542E829DEC82}"/>
+              </a:ext>
+            </a:extLst>
+          </p:cNvPr>
+          <p:cNvCxnSpPr>
+            <a:cxnSpLocks/>
+            <a:stCxn id="19" idx="3"/>
+            <a:endCxn id="21" idx="1"/>
+          </p:cNvCxnSpPr>
+          <p:nvPr/>
+        </p:nvCxnSpPr>
+        <p:spPr>
+          <a:xfrm flipV="1">
+            <a:off x="6067190" y="1566597"/>
+            <a:ext cx="323314" cy="695"/>
+          </a:xfrm>
+          <a:prstGeom prst="straightConnector1">
+            <a:avLst/>
+          </a:prstGeom>
+          <a:ln w="12700">
+            <a:solidFill>
+              <a:srgbClr val="C00000"/>
+            </a:solidFill>
+            <a:prstDash val="solid"/>
+            <a:headEnd type="none" w="med" len="med"/>
+            <a:tailEnd type="triangle" w="med" len="med"/>
+          </a:ln>
+        </p:spPr>
+        <p:style>
+          <a:lnRef idx="1">
+            <a:schemeClr val="accent1"/>
+          </a:lnRef>
+          <a:fillRef idx="0">
+            <a:schemeClr val="accent1"/>
+          </a:fillRef>
+          <a:effectRef idx="0">
+            <a:schemeClr val="accent1"/>
+          </a:effectRef>
+          <a:fontRef idx="minor">
+            <a:schemeClr val="tx1"/>
+          </a:fontRef>
+        </p:style>
+      </p:cxnSp>
+      <p:sp>
+        <p:nvSpPr>
+          <p:cNvPr id="111" name="사각형: 둥근 모서리 70">
+            <a:extLst>
+              <a:ext uri="{FF2B5EF4-FFF2-40B4-BE49-F238E27FC236}">
+                <a16:creationId xmlns:a16="http://schemas.microsoft.com/office/drawing/2014/main" id="{F30071A7-DF71-51B4-0739-27D6D3447D7D}"/>
+              </a:ext>
+            </a:extLst>
+          </p:cNvPr>
+          <p:cNvSpPr/>
+          <p:nvPr/>
+        </p:nvSpPr>
+        <p:spPr>
+          <a:xfrm>
+            <a:off x="971599" y="1997410"/>
+            <a:ext cx="1800200" cy="892274"/>
+          </a:xfrm>
+          <a:prstGeom prst="roundRect">
+            <a:avLst>
+              <a:gd name="adj" fmla="val 8056"/>
+            </a:avLst>
+          </a:prstGeom>
+          <a:noFill/>
+          <a:ln w="12700">
+            <a:prstDash val="solid"/>
+            <a:headEnd type="none" w="med" len="med"/>
+            <a:tailEnd type="triangle" w="med" len="med"/>
+          </a:ln>
+        </p:spPr>
+        <p:style>
+          <a:lnRef idx="2">
+            <a:schemeClr val="dk1"/>
+          </a:lnRef>
+          <a:fillRef idx="1">
+            <a:schemeClr val="lt1"/>
+          </a:fillRef>
+          <a:effectRef idx="0">
+            <a:schemeClr val="dk1"/>
+          </a:effectRef>
+          <a:fontRef idx="minor">
+            <a:schemeClr val="dk1"/>
+          </a:fontRef>
+        </p:style>
+        <p:txBody>
+          <a:bodyPr rtlCol="0" anchor="t"/>
+          <a:lstStyle/>
+          <a:p>
+            <a:r>
+              <a:rPr lang="en-US" altLang="ko-KR" sz="1000" dirty="0"/>
+              <a:t>Client B </a:t>
+            </a:r>
+            <a:r>
+              <a:rPr lang="en-US" altLang="ko-KR" sz="1000" b="1" dirty="0"/>
+              <a:t>Namespace</a:t>
+            </a:r>
+            <a:endParaRPr lang="ko-KR" altLang="en-US" sz="1000" b="1" dirty="0"/>
+          </a:p>
+        </p:txBody>
+      </p:sp>
+      <p:sp>
+        <p:nvSpPr>
+          <p:cNvPr id="112" name="사각형: 둥근 모서리 12">
+            <a:extLst>
+              <a:ext uri="{FF2B5EF4-FFF2-40B4-BE49-F238E27FC236}">
+                <a16:creationId xmlns:a16="http://schemas.microsoft.com/office/drawing/2014/main" id="{082602F7-84FB-7C91-A3CB-CDAB8133B5B6}"/>
+              </a:ext>
+            </a:extLst>
+          </p:cNvPr>
+          <p:cNvSpPr/>
+          <p:nvPr/>
+        </p:nvSpPr>
+        <p:spPr>
+          <a:xfrm>
+            <a:off x="1518621" y="2338233"/>
+            <a:ext cx="1139438" cy="451511"/>
+          </a:xfrm>
+          <a:prstGeom prst="roundRect">
+            <a:avLst>
+              <a:gd name="adj" fmla="val 14105"/>
+            </a:avLst>
+          </a:prstGeom>
+          <a:noFill/>
+          <a:ln w="12700">
+            <a:headEnd type="none" w="med" len="med"/>
+            <a:tailEnd type="triangle" w="med" len="med"/>
+          </a:ln>
+        </p:spPr>
+        <p:style>
+          <a:lnRef idx="2">
+            <a:schemeClr val="dk1"/>
+          </a:lnRef>
+          <a:fillRef idx="1">
+            <a:schemeClr val="lt1"/>
+          </a:fillRef>
+          <a:effectRef idx="0">
+            <a:schemeClr val="dk1"/>
+          </a:effectRef>
+          <a:fontRef idx="minor">
+            <a:schemeClr val="dk1"/>
+          </a:fontRef>
+        </p:style>
+        <p:txBody>
+          <a:bodyPr rtlCol="0" anchor="ctr"/>
+          <a:lstStyle/>
+          <a:p>
+            <a:pPr algn="ctr"/>
+            <a:r>
+              <a:rPr lang="en-US" altLang="ko-KR" sz="900"/>
+              <a:t>Client B </a:t>
+            </a:r>
+            <a:r>
+              <a:rPr lang="en-US" altLang="ko-KR" sz="900" b="1" dirty="0"/>
+              <a:t>Pod</a:t>
+            </a:r>
+            <a:endParaRPr lang="ko-KR" altLang="en-US" sz="900" b="1" dirty="0"/>
+          </a:p>
+        </p:txBody>
+      </p:sp>
+      <p:sp>
+        <p:nvSpPr>
+          <p:cNvPr id="122" name="사각형: 둥근 모서리 12">
+            <a:extLst>
+              <a:ext uri="{FF2B5EF4-FFF2-40B4-BE49-F238E27FC236}">
+                <a16:creationId xmlns:a16="http://schemas.microsoft.com/office/drawing/2014/main" id="{4893CDF2-B165-6914-6395-27FBE2C1E049}"/>
+              </a:ext>
+            </a:extLst>
+          </p:cNvPr>
+          <p:cNvSpPr/>
+          <p:nvPr/>
+        </p:nvSpPr>
+        <p:spPr>
+          <a:xfrm>
+            <a:off x="4942434" y="452758"/>
+            <a:ext cx="1139438" cy="451511"/>
+          </a:xfrm>
+          <a:prstGeom prst="roundRect">
+            <a:avLst>
+              <a:gd name="adj" fmla="val 14105"/>
+            </a:avLst>
+          </a:prstGeom>
+          <a:solidFill>
+            <a:schemeClr val="bg1">
+              <a:lumMod val="95000"/>
+            </a:schemeClr>
+          </a:solidFill>
+          <a:ln w="12700">
+            <a:headEnd type="none" w="med" len="med"/>
+            <a:tailEnd type="triangle" w="med" len="med"/>
+          </a:ln>
+        </p:spPr>
+        <p:style>
+          <a:lnRef idx="2">
+            <a:schemeClr val="dk1"/>
+          </a:lnRef>
+          <a:fillRef idx="1">
+            <a:schemeClr val="lt1"/>
+          </a:fillRef>
+          <a:effectRef idx="0">
+            <a:schemeClr val="dk1"/>
+          </a:effectRef>
+          <a:fontRef idx="minor">
+            <a:schemeClr val="dk1"/>
+          </a:fontRef>
+        </p:style>
+        <p:txBody>
+          <a:bodyPr rtlCol="0" anchor="ctr"/>
+          <a:lstStyle/>
+          <a:p>
+            <a:pPr algn="ctr"/>
+            <a:r>
+              <a:rPr lang="en-US" altLang="ko-KR" sz="900"/>
+              <a:t>Server</a:t>
+            </a:r>
+          </a:p>
+          <a:p>
+            <a:pPr algn="ctr"/>
+            <a:r>
+              <a:rPr lang="en-US" altLang="ko-KR" sz="900" b="1"/>
+              <a:t>HTTPRoute</a:t>
+            </a:r>
+          </a:p>
+          <a:p>
+            <a:pPr algn="ctr"/>
+            <a:r>
+              <a:rPr lang="en-US" altLang="ko-KR" sz="900" b="1"/>
+              <a:t>(Producer)</a:t>
+            </a:r>
+          </a:p>
+        </p:txBody>
+      </p:sp>
+      <p:cxnSp>
+        <p:nvCxnSpPr>
+          <p:cNvPr id="125" name="직선 화살표 연결선 96">
+            <a:extLst>
+              <a:ext uri="{FF2B5EF4-FFF2-40B4-BE49-F238E27FC236}">
+                <a16:creationId xmlns:a16="http://schemas.microsoft.com/office/drawing/2014/main" id="{EB7FE052-D7E8-B802-6CE4-2B80BE9D0156}"/>
+              </a:ext>
+            </a:extLst>
+          </p:cNvPr>
+          <p:cNvCxnSpPr>
+            <a:cxnSpLocks/>
+            <a:stCxn id="112" idx="3"/>
+            <a:endCxn id="17" idx="1"/>
+          </p:cNvCxnSpPr>
+          <p:nvPr/>
+        </p:nvCxnSpPr>
+        <p:spPr>
+          <a:xfrm flipV="1">
+            <a:off x="2658059" y="1564174"/>
+            <a:ext cx="546942" cy="999815"/>
+          </a:xfrm>
+          <a:prstGeom prst="straightConnector1">
+            <a:avLst/>
+          </a:prstGeom>
+          <a:ln w="12700">
+            <a:solidFill>
+              <a:srgbClr val="C00000"/>
+            </a:solidFill>
+            <a:prstDash val="solid"/>
+            <a:headEnd type="none" w="med" len="med"/>
+            <a:tailEnd type="triangle" w="med" len="med"/>
+          </a:ln>
+        </p:spPr>
+        <p:style>
+          <a:lnRef idx="1">
+            <a:schemeClr val="accent1"/>
+          </a:lnRef>
+          <a:fillRef idx="0">
+            <a:schemeClr val="accent1"/>
+          </a:fillRef>
+          <a:effectRef idx="0">
+            <a:schemeClr val="accent1"/>
+          </a:effectRef>
+          <a:fontRef idx="minor">
+            <a:schemeClr val="tx1"/>
+          </a:fontRef>
+        </p:style>
+      </p:cxnSp>
+      <p:cxnSp>
+        <p:nvCxnSpPr>
+          <p:cNvPr id="128" name="직선 화살표 연결선 96">
+            <a:extLst>
+              <a:ext uri="{FF2B5EF4-FFF2-40B4-BE49-F238E27FC236}">
+                <a16:creationId xmlns:a16="http://schemas.microsoft.com/office/drawing/2014/main" id="{6B0FA537-54FD-324E-D6EC-957B5F83FEE5}"/>
+              </a:ext>
+            </a:extLst>
+          </p:cNvPr>
+          <p:cNvCxnSpPr>
+            <a:cxnSpLocks/>
+            <a:stCxn id="17" idx="3"/>
+            <a:endCxn id="19" idx="1"/>
+          </p:cNvCxnSpPr>
+          <p:nvPr/>
+        </p:nvCxnSpPr>
+        <p:spPr>
+          <a:xfrm>
+            <a:off x="4535423" y="1564174"/>
+            <a:ext cx="427237" cy="3118"/>
+          </a:xfrm>
+          <a:prstGeom prst="straightConnector1">
+            <a:avLst/>
+          </a:prstGeom>
+          <a:ln w="12700">
+            <a:solidFill>
+              <a:srgbClr val="C00000"/>
+            </a:solidFill>
+            <a:prstDash val="solid"/>
+            <a:headEnd type="none" w="med" len="med"/>
+            <a:tailEnd type="triangle" w="med" len="med"/>
+          </a:ln>
+        </p:spPr>
+        <p:style>
+          <a:lnRef idx="1">
+            <a:schemeClr val="accent1"/>
+          </a:lnRef>
+          <a:fillRef idx="0">
+            <a:schemeClr val="accent1"/>
+          </a:fillRef>
+          <a:effectRef idx="0">
+            <a:schemeClr val="accent1"/>
+          </a:effectRef>
+          <a:fontRef idx="minor">
+            <a:schemeClr val="tx1"/>
+          </a:fontRef>
+        </p:style>
+      </p:cxnSp>
+      <p:cxnSp>
+        <p:nvCxnSpPr>
+          <p:cNvPr id="144" name="직선 화살표 연결선 96">
+            <a:extLst>
+              <a:ext uri="{FF2B5EF4-FFF2-40B4-BE49-F238E27FC236}">
+                <a16:creationId xmlns:a16="http://schemas.microsoft.com/office/drawing/2014/main" id="{75BC2CBB-6E81-9CCC-E449-23AADD42E24C}"/>
+              </a:ext>
+            </a:extLst>
+          </p:cNvPr>
+          <p:cNvCxnSpPr>
+            <a:cxnSpLocks/>
+            <a:stCxn id="17" idx="3"/>
+            <a:endCxn id="58" idx="1"/>
+          </p:cNvCxnSpPr>
+          <p:nvPr/>
+        </p:nvCxnSpPr>
+        <p:spPr>
+          <a:xfrm>
+            <a:off x="4535423" y="1564174"/>
+            <a:ext cx="427237" cy="1398018"/>
+          </a:xfrm>
+          <a:prstGeom prst="straightConnector1">
+            <a:avLst/>
+          </a:prstGeom>
+          <a:ln w="12700">
+            <a:solidFill>
+              <a:schemeClr val="accent6"/>
+            </a:solidFill>
+            <a:prstDash val="solid"/>
+            <a:headEnd type="none" w="med" len="med"/>
+            <a:tailEnd type="triangle" w="med" len="med"/>
+          </a:ln>
+        </p:spPr>
+        <p:style>
+          <a:lnRef idx="1">
+            <a:schemeClr val="accent1"/>
+          </a:lnRef>
+          <a:fillRef idx="0">
+            <a:schemeClr val="accent1"/>
+          </a:fillRef>
+          <a:effectRef idx="0">
+            <a:schemeClr val="accent1"/>
+          </a:effectRef>
+          <a:fontRef idx="minor">
+            <a:schemeClr val="tx1"/>
+          </a:fontRef>
+        </p:style>
+      </p:cxnSp>
+      <p:cxnSp>
+        <p:nvCxnSpPr>
+          <p:cNvPr id="147" name="직선 화살표 연결선 96">
+            <a:extLst>
+              <a:ext uri="{FF2B5EF4-FFF2-40B4-BE49-F238E27FC236}">
+                <a16:creationId xmlns:a16="http://schemas.microsoft.com/office/drawing/2014/main" id="{BE05A9A7-E086-AF58-1C2B-7A63BA0099E1}"/>
+              </a:ext>
+            </a:extLst>
+          </p:cNvPr>
+          <p:cNvCxnSpPr>
+            <a:cxnSpLocks/>
+            <a:stCxn id="17" idx="3"/>
+            <a:endCxn id="64" idx="1"/>
+          </p:cNvCxnSpPr>
+          <p:nvPr/>
+        </p:nvCxnSpPr>
+        <p:spPr>
+          <a:xfrm>
+            <a:off x="4535423" y="1564174"/>
+            <a:ext cx="424465" cy="2792918"/>
+          </a:xfrm>
+          <a:prstGeom prst="straightConnector1">
+            <a:avLst/>
+          </a:prstGeom>
+          <a:ln w="12700">
+            <a:solidFill>
+              <a:schemeClr val="accent6"/>
+            </a:solidFill>
+            <a:prstDash val="solid"/>
+            <a:headEnd type="none" w="med" len="med"/>
+            <a:tailEnd type="triangle" w="med" len="med"/>
+          </a:ln>
+        </p:spPr>
+        <p:style>
+          <a:lnRef idx="1">
+            <a:schemeClr val="accent1"/>
+          </a:lnRef>
+          <a:fillRef idx="0">
+            <a:schemeClr val="accent1"/>
+          </a:fillRef>
+          <a:effectRef idx="0">
+            <a:schemeClr val="accent1"/>
+          </a:effectRef>
+          <a:fontRef idx="minor">
+            <a:schemeClr val="tx1"/>
+          </a:fontRef>
+        </p:style>
+      </p:cxnSp>
+      <p:cxnSp>
+        <p:nvCxnSpPr>
+          <p:cNvPr id="193" name="직선 화살표 연결선 96">
+            <a:extLst>
+              <a:ext uri="{FF2B5EF4-FFF2-40B4-BE49-F238E27FC236}">
+                <a16:creationId xmlns:a16="http://schemas.microsoft.com/office/drawing/2014/main" id="{6A85B2C8-928A-1561-0FB9-09FFFE50FCC3}"/>
+              </a:ext>
+            </a:extLst>
+          </p:cNvPr>
+          <p:cNvCxnSpPr>
+            <a:cxnSpLocks/>
+          </p:cNvCxnSpPr>
+          <p:nvPr/>
+        </p:nvCxnSpPr>
+        <p:spPr>
+          <a:xfrm>
+            <a:off x="994672" y="476915"/>
+            <a:ext cx="323569" cy="0"/>
+          </a:xfrm>
+          <a:prstGeom prst="straightConnector1">
+            <a:avLst/>
+          </a:prstGeom>
+          <a:ln w="12700">
+            <a:solidFill>
+              <a:schemeClr val="tx2"/>
+            </a:solidFill>
+            <a:prstDash val="solid"/>
+            <a:headEnd type="none" w="med" len="med"/>
+            <a:tailEnd type="triangle" w="med" len="med"/>
+          </a:ln>
+        </p:spPr>
+        <p:style>
+          <a:lnRef idx="1">
+            <a:schemeClr val="accent1"/>
+          </a:lnRef>
+          <a:fillRef idx="0">
+            <a:schemeClr val="accent1"/>
+          </a:fillRef>
+          <a:effectRef idx="0">
+            <a:schemeClr val="accent1"/>
+          </a:effectRef>
+          <a:fontRef idx="minor">
+            <a:schemeClr val="tx1"/>
+          </a:fontRef>
+        </p:style>
+      </p:cxnSp>
+      <p:sp>
+        <p:nvSpPr>
+          <p:cNvPr id="194" name="TextBox 193">
+            <a:extLst>
+              <a:ext uri="{FF2B5EF4-FFF2-40B4-BE49-F238E27FC236}">
+                <a16:creationId xmlns:a16="http://schemas.microsoft.com/office/drawing/2014/main" id="{09E809E7-22F5-6209-BD0B-09380781D267}"/>
+              </a:ext>
+            </a:extLst>
+          </p:cNvPr>
+          <p:cNvSpPr txBox="1"/>
+          <p:nvPr/>
+        </p:nvSpPr>
+        <p:spPr>
+          <a:xfrm>
+            <a:off x="1290415" y="282902"/>
+            <a:ext cx="702455" cy="369332"/>
+          </a:xfrm>
+          <a:prstGeom prst="rect">
+            <a:avLst/>
+          </a:prstGeom>
+          <a:noFill/>
+        </p:spPr>
+        <p:txBody>
+          <a:bodyPr wrap="square" rtlCol="0">
+            <a:spAutoFit/>
+          </a:bodyPr>
+          <a:lstStyle/>
+          <a:p>
+            <a:r>
+              <a:rPr lang="en-US" sz="900"/>
+              <a:t>Frontend</a:t>
+            </a:r>
+          </a:p>
+          <a:p>
+            <a:r>
+              <a:rPr lang="en-US" sz="900"/>
+              <a:t>Reference</a:t>
+            </a:r>
+            <a:endParaRPr lang="en-KR" sz="900"/>
+          </a:p>
+        </p:txBody>
+      </p:sp>
+      <p:sp>
+        <p:nvSpPr>
+          <p:cNvPr id="198" name="TextBox 197">
+            <a:extLst>
+              <a:ext uri="{FF2B5EF4-FFF2-40B4-BE49-F238E27FC236}">
+                <a16:creationId xmlns:a16="http://schemas.microsoft.com/office/drawing/2014/main" id="{1EF93140-1021-0AC5-F6B5-6766ED9FEF03}"/>
+              </a:ext>
+            </a:extLst>
+          </p:cNvPr>
+          <p:cNvSpPr txBox="1"/>
+          <p:nvPr/>
+        </p:nvSpPr>
+        <p:spPr>
+          <a:xfrm>
+            <a:off x="1289667" y="634961"/>
+            <a:ext cx="726519" cy="369332"/>
+          </a:xfrm>
+          <a:prstGeom prst="rect">
+            <a:avLst/>
+          </a:prstGeom>
+          <a:noFill/>
+        </p:spPr>
+        <p:txBody>
+          <a:bodyPr wrap="square" rtlCol="0">
+            <a:spAutoFit/>
+          </a:bodyPr>
+          <a:lstStyle/>
+          <a:p>
+            <a:r>
+              <a:rPr lang="en-US" sz="900"/>
+              <a:t>Client A/B</a:t>
+            </a:r>
+          </a:p>
+          <a:p>
+            <a:r>
+              <a:rPr lang="en-US" sz="900"/>
+              <a:t>Traffic</a:t>
+            </a:r>
+            <a:endParaRPr lang="en-KR" sz="900"/>
+          </a:p>
+        </p:txBody>
+      </p:sp>
+      <p:cxnSp>
+        <p:nvCxnSpPr>
+          <p:cNvPr id="199" name="직선 화살표 연결선 96">
+            <a:extLst>
+              <a:ext uri="{FF2B5EF4-FFF2-40B4-BE49-F238E27FC236}">
+                <a16:creationId xmlns:a16="http://schemas.microsoft.com/office/drawing/2014/main" id="{41D6FC51-BD08-DACE-3D64-118077A3F75C}"/>
+              </a:ext>
+            </a:extLst>
+          </p:cNvPr>
+          <p:cNvCxnSpPr>
+            <a:cxnSpLocks/>
+          </p:cNvCxnSpPr>
+          <p:nvPr/>
+        </p:nvCxnSpPr>
+        <p:spPr>
+          <a:xfrm>
+            <a:off x="1993388" y="482437"/>
+            <a:ext cx="323569" cy="0"/>
+          </a:xfrm>
+          <a:prstGeom prst="straightConnector1">
+            <a:avLst/>
+          </a:prstGeom>
+          <a:ln w="12700">
+            <a:solidFill>
+              <a:schemeClr val="accent3"/>
+            </a:solidFill>
+            <a:prstDash val="solid"/>
+            <a:headEnd type="none" w="med" len="med"/>
+            <a:tailEnd type="triangle" w="med" len="med"/>
+          </a:ln>
+        </p:spPr>
+        <p:style>
+          <a:lnRef idx="1">
+            <a:schemeClr val="accent1"/>
+          </a:lnRef>
+          <a:fillRef idx="0">
+            <a:schemeClr val="accent1"/>
+          </a:fillRef>
+          <a:effectRef idx="0">
+            <a:schemeClr val="accent1"/>
+          </a:effectRef>
+          <a:fontRef idx="minor">
+            <a:schemeClr val="tx1"/>
+          </a:fontRef>
+        </p:style>
+      </p:cxnSp>
+      <p:sp>
+        <p:nvSpPr>
+          <p:cNvPr id="200" name="TextBox 199">
+            <a:extLst>
+              <a:ext uri="{FF2B5EF4-FFF2-40B4-BE49-F238E27FC236}">
+                <a16:creationId xmlns:a16="http://schemas.microsoft.com/office/drawing/2014/main" id="{178708D9-C1A6-F304-A205-D40A1D078AE6}"/>
+              </a:ext>
+            </a:extLst>
+          </p:cNvPr>
+          <p:cNvSpPr txBox="1"/>
+          <p:nvPr/>
+        </p:nvSpPr>
+        <p:spPr>
+          <a:xfrm>
+            <a:off x="2289131" y="288424"/>
+            <a:ext cx="702455" cy="369332"/>
+          </a:xfrm>
+          <a:prstGeom prst="rect">
+            <a:avLst/>
+          </a:prstGeom>
+          <a:noFill/>
+        </p:spPr>
+        <p:txBody>
+          <a:bodyPr wrap="square" rtlCol="0">
+            <a:spAutoFit/>
+          </a:bodyPr>
+          <a:lstStyle/>
+          <a:p>
+            <a:r>
+              <a:rPr lang="en-US" sz="900"/>
+              <a:t>Backend</a:t>
+            </a:r>
+          </a:p>
+          <a:p>
+            <a:r>
+              <a:rPr lang="en-US" sz="900"/>
+              <a:t>Reference</a:t>
+            </a:r>
+            <a:endParaRPr lang="en-KR" sz="900"/>
+          </a:p>
+        </p:txBody>
+      </p:sp>
+      <p:cxnSp>
+        <p:nvCxnSpPr>
+          <p:cNvPr id="201" name="직선 화살표 연결선 96">
+            <a:extLst>
+              <a:ext uri="{FF2B5EF4-FFF2-40B4-BE49-F238E27FC236}">
+                <a16:creationId xmlns:a16="http://schemas.microsoft.com/office/drawing/2014/main" id="{700E2BA5-A650-1904-D84A-76CB9CC78B6B}"/>
+              </a:ext>
+            </a:extLst>
+          </p:cNvPr>
+          <p:cNvCxnSpPr>
+            <a:cxnSpLocks/>
+          </p:cNvCxnSpPr>
+          <p:nvPr/>
+        </p:nvCxnSpPr>
+        <p:spPr>
+          <a:xfrm>
+            <a:off x="993924" y="821050"/>
+            <a:ext cx="323569" cy="0"/>
+          </a:xfrm>
+          <a:prstGeom prst="straightConnector1">
+            <a:avLst/>
+          </a:prstGeom>
+          <a:ln w="12700">
+            <a:solidFill>
+              <a:srgbClr val="C00000"/>
+            </a:solidFill>
+            <a:prstDash val="solid"/>
+            <a:headEnd type="none" w="med" len="med"/>
+            <a:tailEnd type="triangle" w="med" len="med"/>
+          </a:ln>
+        </p:spPr>
+        <p:style>
+          <a:lnRef idx="1">
+            <a:schemeClr val="accent1"/>
+          </a:lnRef>
+          <a:fillRef idx="0">
+            <a:schemeClr val="accent1"/>
+          </a:fillRef>
+          <a:effectRef idx="0">
+            <a:schemeClr val="accent1"/>
+          </a:effectRef>
+          <a:fontRef idx="minor">
+            <a:schemeClr val="tx1"/>
+          </a:fontRef>
+        </p:style>
+      </p:cxnSp>
+      <p:sp>
+        <p:nvSpPr>
+          <p:cNvPr id="202" name="TextBox 201">
+            <a:extLst>
+              <a:ext uri="{FF2B5EF4-FFF2-40B4-BE49-F238E27FC236}">
+                <a16:creationId xmlns:a16="http://schemas.microsoft.com/office/drawing/2014/main" id="{58DC09EA-3734-B487-A34F-585083244229}"/>
+              </a:ext>
+            </a:extLst>
+          </p:cNvPr>
+          <p:cNvSpPr txBox="1"/>
+          <p:nvPr/>
+        </p:nvSpPr>
+        <p:spPr>
+          <a:xfrm>
+            <a:off x="2292632" y="635773"/>
+            <a:ext cx="726519" cy="369332"/>
+          </a:xfrm>
+          <a:prstGeom prst="rect">
+            <a:avLst/>
+          </a:prstGeom>
+          <a:noFill/>
+        </p:spPr>
+        <p:txBody>
+          <a:bodyPr wrap="square" rtlCol="0">
+            <a:spAutoFit/>
+          </a:bodyPr>
+          <a:lstStyle/>
+          <a:p>
+            <a:r>
+              <a:rPr lang="en-US" sz="900"/>
+              <a:t>Client C</a:t>
+            </a:r>
+          </a:p>
+          <a:p>
+            <a:r>
+              <a:rPr lang="en-US" sz="900"/>
+              <a:t>Traffic</a:t>
+            </a:r>
+            <a:endParaRPr lang="en-KR" sz="900"/>
+          </a:p>
+        </p:txBody>
+      </p:sp>
+      <p:cxnSp>
+        <p:nvCxnSpPr>
+          <p:cNvPr id="203" name="직선 화살표 연결선 96">
+            <a:extLst>
+              <a:ext uri="{FF2B5EF4-FFF2-40B4-BE49-F238E27FC236}">
+                <a16:creationId xmlns:a16="http://schemas.microsoft.com/office/drawing/2014/main" id="{9E000A68-B9E1-AA23-90E0-32DDFB8ADE3D}"/>
+              </a:ext>
+            </a:extLst>
+          </p:cNvPr>
+          <p:cNvCxnSpPr>
+            <a:cxnSpLocks/>
+          </p:cNvCxnSpPr>
+          <p:nvPr/>
+        </p:nvCxnSpPr>
+        <p:spPr>
+          <a:xfrm>
+            <a:off x="1996889" y="821862"/>
+            <a:ext cx="323569" cy="0"/>
+          </a:xfrm>
+          <a:prstGeom prst="straightConnector1">
+            <a:avLst/>
+          </a:prstGeom>
+          <a:ln w="12700">
+            <a:solidFill>
+              <a:schemeClr val="accent6"/>
+            </a:solidFill>
+            <a:prstDash val="solid"/>
+            <a:headEnd type="none" w="med" len="med"/>
+            <a:tailEnd type="triangle" w="med" len="med"/>
+          </a:ln>
+        </p:spPr>
+        <p:style>
+          <a:lnRef idx="1">
+            <a:schemeClr val="accent1"/>
+          </a:lnRef>
+          <a:fillRef idx="0">
+            <a:schemeClr val="accent1"/>
+          </a:fillRef>
+          <a:effectRef idx="0">
+            <a:schemeClr val="accent1"/>
+          </a:effectRef>
+          <a:fontRef idx="minor">
+            <a:schemeClr val="tx1"/>
+          </a:fontRef>
+        </p:style>
+      </p:cxnSp>
+      <p:sp>
+        <p:nvSpPr>
+          <p:cNvPr id="6" name="사각형: 둥근 모서리 12">
+            <a:extLst>
+              <a:ext uri="{FF2B5EF4-FFF2-40B4-BE49-F238E27FC236}">
+                <a16:creationId xmlns:a16="http://schemas.microsoft.com/office/drawing/2014/main" id="{12C546E3-A4B7-0117-863A-9991F8277054}"/>
+              </a:ext>
+            </a:extLst>
+          </p:cNvPr>
+          <p:cNvSpPr/>
+          <p:nvPr/>
+        </p:nvSpPr>
+        <p:spPr>
+          <a:xfrm>
+            <a:off x="3297795" y="452758"/>
+            <a:ext cx="1139438" cy="451511"/>
+          </a:xfrm>
+          <a:prstGeom prst="roundRect">
+            <a:avLst>
+              <a:gd name="adj" fmla="val 14105"/>
+            </a:avLst>
+          </a:prstGeom>
+          <a:solidFill>
+            <a:schemeClr val="bg1">
+              <a:lumMod val="95000"/>
+            </a:schemeClr>
+          </a:solidFill>
+          <a:ln w="12700">
+            <a:headEnd type="none" w="med" len="med"/>
+            <a:tailEnd type="triangle" w="med" len="med"/>
+          </a:ln>
+        </p:spPr>
+        <p:style>
+          <a:lnRef idx="2">
+            <a:schemeClr val="dk1"/>
+          </a:lnRef>
+          <a:fillRef idx="1">
+            <a:schemeClr val="lt1"/>
+          </a:fillRef>
+          <a:effectRef idx="0">
+            <a:schemeClr val="dk1"/>
+          </a:effectRef>
+          <a:fontRef idx="minor">
+            <a:schemeClr val="dk1"/>
+          </a:fontRef>
+        </p:style>
+        <p:txBody>
+          <a:bodyPr rtlCol="0" anchor="ctr"/>
+          <a:lstStyle/>
+          <a:p>
+            <a:pPr algn="ctr"/>
+            <a:r>
+              <a:rPr lang="en-US" altLang="ko-KR" sz="900"/>
+              <a:t>Client C</a:t>
+            </a:r>
+          </a:p>
+          <a:p>
+            <a:pPr algn="ctr"/>
+            <a:r>
+              <a:rPr lang="en-US" altLang="ko-KR" sz="900" b="1"/>
+              <a:t>ReferenceGrant</a:t>
+            </a:r>
+          </a:p>
+        </p:txBody>
+      </p:sp>
+      <p:cxnSp>
+        <p:nvCxnSpPr>
+          <p:cNvPr id="20" name="직선 화살표 연결선 96">
+            <a:extLst>
+              <a:ext uri="{FF2B5EF4-FFF2-40B4-BE49-F238E27FC236}">
+                <a16:creationId xmlns:a16="http://schemas.microsoft.com/office/drawing/2014/main" id="{83B052CD-A2A3-EF70-D6DC-FAA269D94646}"/>
+              </a:ext>
+            </a:extLst>
+          </p:cNvPr>
+          <p:cNvCxnSpPr>
+            <a:cxnSpLocks/>
+            <a:stCxn id="6" idx="3"/>
+            <a:endCxn id="5" idx="0"/>
+          </p:cNvCxnSpPr>
+          <p:nvPr/>
+        </p:nvCxnSpPr>
+        <p:spPr>
+          <a:xfrm>
+            <a:off x="4437233" y="678514"/>
+            <a:ext cx="199024" cy="378805"/>
+          </a:xfrm>
+          <a:prstGeom prst="straightConnector1">
+            <a:avLst/>
+          </a:prstGeom>
+          <a:ln w="12700">
+            <a:solidFill>
+              <a:schemeClr val="accent5"/>
+            </a:solidFill>
+            <a:prstDash val="solid"/>
+            <a:headEnd type="none" w="med" len="med"/>
+            <a:tailEnd type="triangle" w="med" len="med"/>
+          </a:ln>
+        </p:spPr>
+        <p:style>
+          <a:lnRef idx="1">
+            <a:schemeClr val="accent1"/>
+          </a:lnRef>
+          <a:fillRef idx="0">
+            <a:schemeClr val="accent1"/>
+          </a:fillRef>
+          <a:effectRef idx="0">
+            <a:schemeClr val="accent1"/>
+          </a:effectRef>
+          <a:fontRef idx="minor">
+            <a:schemeClr val="tx1"/>
+          </a:fontRef>
+        </p:style>
+      </p:cxnSp>
+      <p:cxnSp>
+        <p:nvCxnSpPr>
+          <p:cNvPr id="24" name="직선 화살표 연결선 96">
+            <a:extLst>
+              <a:ext uri="{FF2B5EF4-FFF2-40B4-BE49-F238E27FC236}">
+                <a16:creationId xmlns:a16="http://schemas.microsoft.com/office/drawing/2014/main" id="{11A267FB-27E0-B85D-D305-C2F55822F50D}"/>
+              </a:ext>
+            </a:extLst>
+          </p:cNvPr>
+          <p:cNvCxnSpPr>
+            <a:cxnSpLocks/>
+            <a:stCxn id="6" idx="1"/>
+            <a:endCxn id="3" idx="0"/>
+          </p:cNvCxnSpPr>
+          <p:nvPr/>
+        </p:nvCxnSpPr>
+        <p:spPr>
+          <a:xfrm flipH="1">
+            <a:off x="1871699" y="678514"/>
+            <a:ext cx="1426096" cy="2315592"/>
+          </a:xfrm>
+          <a:prstGeom prst="straightConnector1">
+            <a:avLst/>
+          </a:prstGeom>
+          <a:ln w="12700">
+            <a:solidFill>
+              <a:schemeClr val="accent5"/>
+            </a:solidFill>
+            <a:prstDash val="solid"/>
+            <a:headEnd type="none" w="med" len="med"/>
+            <a:tailEnd type="triangle" w="med" len="med"/>
+          </a:ln>
+        </p:spPr>
+        <p:style>
+          <a:lnRef idx="1">
+            <a:schemeClr val="accent1"/>
+          </a:lnRef>
+          <a:fillRef idx="0">
+            <a:schemeClr val="accent1"/>
+          </a:fillRef>
+          <a:effectRef idx="0">
+            <a:schemeClr val="accent1"/>
+          </a:effectRef>
+          <a:fontRef idx="minor">
+            <a:schemeClr val="tx1"/>
+          </a:fontRef>
+        </p:style>
+      </p:cxnSp>
+    </p:spTree>
+    <p:extLst>
+      <p:ext uri="{BB962C8B-B14F-4D97-AF65-F5344CB8AC3E}">
+        <p14:creationId xmlns:p14="http://schemas.microsoft.com/office/powerpoint/2010/main" val="4012065249"/>
+      </p:ext>
+    </p:extLst>
+  </p:cSld>
+  <p:clrMapOvr>
+    <a:masterClrMapping/>
+  </p:clrMapOvr>
+</p:sld>
+</file>
+
+<file path=ppt/slides/slide4.xml><?xml version="1.0" encoding="utf-8"?>
+<p:sld xmlns:a="http://schemas.openxmlformats.org/drawingml/2006/main" xmlns:r="http://schemas.openxmlformats.org/officeDocument/2006/relationships" xmlns:p="http://schemas.openxmlformats.org/presentationml/2006/main">
+  <p:cSld>
+    <p:spTree>
+      <p:nvGrpSpPr>
+        <p:cNvPr id="1" name="">
+          <a:extLst>
+            <a:ext uri="{FF2B5EF4-FFF2-40B4-BE49-F238E27FC236}">
+              <a16:creationId xmlns:a16="http://schemas.microsoft.com/office/drawing/2014/main" id="{364339D6-F158-15C7-2034-29A2333728EC}"/>
+            </a:ext>
+          </a:extLst>
+        </p:cNvPr>
+        <p:cNvGrpSpPr/>
+        <p:nvPr/>
+      </p:nvGrpSpPr>
+      <p:grpSpPr>
+        <a:xfrm>
+          <a:off x="0" y="0"/>
+          <a:ext cx="0" cy="0"/>
+          <a:chOff x="0" y="0"/>
+          <a:chExt cx="0" cy="0"/>
+        </a:xfrm>
+      </p:grpSpPr>
+      <p:sp>
+        <p:nvSpPr>
+          <p:cNvPr id="2" name="사각형: 둥근 모서리 70">
+            <a:extLst>
+              <a:ext uri="{FF2B5EF4-FFF2-40B4-BE49-F238E27FC236}">
+                <a16:creationId xmlns:a16="http://schemas.microsoft.com/office/drawing/2014/main" id="{A6E89500-A94D-308A-E36D-7ED17A38AC80}"/>
+              </a:ext>
+            </a:extLst>
+          </p:cNvPr>
+          <p:cNvSpPr/>
+          <p:nvPr/>
+        </p:nvSpPr>
+        <p:spPr>
+          <a:xfrm>
+            <a:off x="971599" y="1000714"/>
+            <a:ext cx="1800200" cy="892274"/>
+          </a:xfrm>
+          <a:prstGeom prst="roundRect">
+            <a:avLst>
+              <a:gd name="adj" fmla="val 8056"/>
+            </a:avLst>
+          </a:prstGeom>
+          <a:noFill/>
+          <a:ln w="12700">
+            <a:prstDash val="solid"/>
+            <a:headEnd type="none" w="med" len="med"/>
+            <a:tailEnd type="triangle" w="med" len="med"/>
+          </a:ln>
+        </p:spPr>
+        <p:style>
+          <a:lnRef idx="2">
+            <a:schemeClr val="dk1"/>
+          </a:lnRef>
+          <a:fillRef idx="1">
+            <a:schemeClr val="lt1"/>
+          </a:fillRef>
+          <a:effectRef idx="0">
+            <a:schemeClr val="dk1"/>
+          </a:effectRef>
+          <a:fontRef idx="minor">
+            <a:schemeClr val="dk1"/>
+          </a:fontRef>
+        </p:style>
+        <p:txBody>
+          <a:bodyPr rtlCol="0" anchor="t"/>
+          <a:lstStyle/>
+          <a:p>
+            <a:r>
+              <a:rPr lang="en-US" altLang="ko-KR" sz="1000" dirty="0"/>
+              <a:t>Client A </a:t>
+            </a:r>
+            <a:r>
+              <a:rPr lang="en-US" altLang="ko-KR" sz="1000" b="1" dirty="0"/>
+              <a:t>Namespace</a:t>
+            </a:r>
+            <a:endParaRPr lang="ko-KR" altLang="en-US" sz="1000" b="1" dirty="0"/>
+          </a:p>
+        </p:txBody>
+      </p:sp>
+      <p:sp>
+        <p:nvSpPr>
+          <p:cNvPr id="3" name="사각형: 둥근 모서리 70">
+            <a:extLst>
+              <a:ext uri="{FF2B5EF4-FFF2-40B4-BE49-F238E27FC236}">
+                <a16:creationId xmlns:a16="http://schemas.microsoft.com/office/drawing/2014/main" id="{06FD0222-6A63-CEA6-3C29-81453AD7E7F3}"/>
+              </a:ext>
+            </a:extLst>
+          </p:cNvPr>
+          <p:cNvSpPr/>
+          <p:nvPr/>
+        </p:nvSpPr>
+        <p:spPr>
+          <a:xfrm>
+            <a:off x="971599" y="2994106"/>
+            <a:ext cx="1800200" cy="1616906"/>
+          </a:xfrm>
+          <a:prstGeom prst="roundRect">
+            <a:avLst>
+              <a:gd name="adj" fmla="val 5325"/>
+            </a:avLst>
+          </a:prstGeom>
+          <a:noFill/>
+          <a:ln w="12700">
+            <a:prstDash val="solid"/>
+            <a:headEnd type="none" w="med" len="med"/>
+            <a:tailEnd type="triangle" w="med" len="med"/>
+          </a:ln>
+        </p:spPr>
+        <p:style>
+          <a:lnRef idx="2">
+            <a:schemeClr val="dk1"/>
+          </a:lnRef>
+          <a:fillRef idx="1">
+            <a:schemeClr val="lt1"/>
+          </a:fillRef>
+          <a:effectRef idx="0">
+            <a:schemeClr val="dk1"/>
+          </a:effectRef>
+          <a:fontRef idx="minor">
+            <a:schemeClr val="dk1"/>
+          </a:fontRef>
+        </p:style>
+        <p:txBody>
+          <a:bodyPr rtlCol="0" anchor="t"/>
+          <a:lstStyle/>
+          <a:p>
+            <a:r>
+              <a:rPr lang="en-US" altLang="ko-KR" sz="1000" dirty="0"/>
+              <a:t>Client C </a:t>
+            </a:r>
+            <a:r>
+              <a:rPr lang="en-US" altLang="ko-KR" sz="1000" b="1" dirty="0"/>
+              <a:t>Namespace</a:t>
+            </a:r>
+            <a:endParaRPr lang="ko-KR" altLang="en-US" sz="1000" b="1" dirty="0"/>
+          </a:p>
+        </p:txBody>
+      </p:sp>
+      <p:sp>
+        <p:nvSpPr>
+          <p:cNvPr id="4" name="사각형: 둥근 모서리 70">
+            <a:extLst>
+              <a:ext uri="{FF2B5EF4-FFF2-40B4-BE49-F238E27FC236}">
+                <a16:creationId xmlns:a16="http://schemas.microsoft.com/office/drawing/2014/main" id="{F2CB8FC9-9AD7-066D-28F1-8B0879725361}"/>
+              </a:ext>
+            </a:extLst>
+          </p:cNvPr>
+          <p:cNvSpPr/>
+          <p:nvPr/>
+        </p:nvSpPr>
+        <p:spPr>
+          <a:xfrm>
+            <a:off x="2987824" y="352643"/>
+            <a:ext cx="4637503" cy="4438214"/>
+          </a:xfrm>
+          <a:prstGeom prst="roundRect">
+            <a:avLst>
+              <a:gd name="adj" fmla="val 2531"/>
+            </a:avLst>
+          </a:prstGeom>
+          <a:noFill/>
+          <a:ln w="12700">
+            <a:prstDash val="solid"/>
+            <a:headEnd type="none" w="med" len="med"/>
+            <a:tailEnd type="triangle" w="med" len="med"/>
+          </a:ln>
+        </p:spPr>
+        <p:style>
+          <a:lnRef idx="2">
+            <a:schemeClr val="dk1"/>
+          </a:lnRef>
+          <a:fillRef idx="1">
+            <a:schemeClr val="lt1"/>
+          </a:fillRef>
+          <a:effectRef idx="0">
+            <a:schemeClr val="dk1"/>
+          </a:effectRef>
+          <a:fontRef idx="minor">
+            <a:schemeClr val="dk1"/>
+          </a:fontRef>
+        </p:style>
+        <p:txBody>
+          <a:bodyPr rtlCol="0" anchor="t"/>
+          <a:lstStyle/>
+          <a:p>
+            <a:pPr algn="r"/>
+            <a:r>
+              <a:rPr lang="en-US" altLang="ko-KR" sz="1000" dirty="0"/>
+              <a:t>Server </a:t>
+            </a:r>
+            <a:r>
+              <a:rPr lang="en-US" altLang="ko-KR" sz="1000" b="1" dirty="0"/>
+              <a:t>Namespace</a:t>
+            </a:r>
+            <a:endParaRPr lang="ko-KR" altLang="en-US" sz="1000" b="1" dirty="0"/>
+          </a:p>
+        </p:txBody>
+      </p:sp>
+      <p:sp>
+        <p:nvSpPr>
+          <p:cNvPr id="5" name="사각형: 둥근 모서리 12">
+            <a:extLst>
+              <a:ext uri="{FF2B5EF4-FFF2-40B4-BE49-F238E27FC236}">
+                <a16:creationId xmlns:a16="http://schemas.microsoft.com/office/drawing/2014/main" id="{07869D2E-5B5C-2198-3648-DE4968A10B08}"/>
+              </a:ext>
+            </a:extLst>
+          </p:cNvPr>
+          <p:cNvSpPr/>
+          <p:nvPr/>
+        </p:nvSpPr>
+        <p:spPr>
+          <a:xfrm>
+            <a:off x="3095263" y="1057319"/>
+            <a:ext cx="3081988" cy="836785"/>
+          </a:xfrm>
+          <a:prstGeom prst="roundRect">
+            <a:avLst>
+              <a:gd name="adj" fmla="val 8995"/>
+            </a:avLst>
+          </a:prstGeom>
+          <a:noFill/>
+          <a:ln w="12700">
+            <a:headEnd type="none" w="med" len="med"/>
+            <a:tailEnd type="triangle" w="med" len="med"/>
+          </a:ln>
+        </p:spPr>
+        <p:style>
+          <a:lnRef idx="2">
+            <a:schemeClr val="dk1"/>
+          </a:lnRef>
+          <a:fillRef idx="1">
+            <a:schemeClr val="lt1"/>
+          </a:fillRef>
+          <a:effectRef idx="0">
+            <a:schemeClr val="dk1"/>
+          </a:effectRef>
+          <a:fontRef idx="minor">
+            <a:schemeClr val="dk1"/>
+          </a:fontRef>
+        </p:style>
+        <p:txBody>
+          <a:bodyPr rtlCol="0" anchor="t"/>
+          <a:lstStyle/>
+          <a:p>
+            <a:pPr algn="ctr"/>
+            <a:r>
+              <a:rPr lang="en-US" altLang="ko-KR" sz="900"/>
+              <a:t>Server </a:t>
+            </a:r>
+            <a:r>
+              <a:rPr lang="en-US" altLang="ko-KR" sz="900" b="1" dirty="0"/>
+              <a:t>Service</a:t>
+            </a:r>
+            <a:endParaRPr lang="ko-KR" altLang="en-US" sz="900" b="1" dirty="0"/>
+          </a:p>
+        </p:txBody>
+      </p:sp>
+      <p:sp>
+        <p:nvSpPr>
+          <p:cNvPr id="11" name="사각형: 둥근 모서리 12">
+            <a:extLst>
+              <a:ext uri="{FF2B5EF4-FFF2-40B4-BE49-F238E27FC236}">
+                <a16:creationId xmlns:a16="http://schemas.microsoft.com/office/drawing/2014/main" id="{E4BA0B58-B355-4CFA-B21F-3857E25116B4}"/>
+              </a:ext>
+            </a:extLst>
+          </p:cNvPr>
+          <p:cNvSpPr/>
+          <p:nvPr/>
+        </p:nvSpPr>
+        <p:spPr>
+          <a:xfrm>
+            <a:off x="1518621" y="1341537"/>
+            <a:ext cx="1139438" cy="451511"/>
+          </a:xfrm>
+          <a:prstGeom prst="roundRect">
+            <a:avLst>
+              <a:gd name="adj" fmla="val 14105"/>
+            </a:avLst>
+          </a:prstGeom>
+          <a:noFill/>
+          <a:ln w="12700">
+            <a:headEnd type="none" w="med" len="med"/>
+            <a:tailEnd type="triangle" w="med" len="med"/>
+          </a:ln>
+        </p:spPr>
+        <p:style>
+          <a:lnRef idx="2">
+            <a:schemeClr val="dk1"/>
+          </a:lnRef>
+          <a:fillRef idx="1">
+            <a:schemeClr val="lt1"/>
+          </a:fillRef>
+          <a:effectRef idx="0">
+            <a:schemeClr val="dk1"/>
+          </a:effectRef>
+          <a:fontRef idx="minor">
+            <a:schemeClr val="dk1"/>
+          </a:fontRef>
+        </p:style>
+        <p:txBody>
+          <a:bodyPr rtlCol="0" anchor="ctr"/>
+          <a:lstStyle/>
+          <a:p>
+            <a:pPr algn="ctr"/>
+            <a:r>
+              <a:rPr lang="en-US" altLang="ko-KR" sz="900"/>
+              <a:t>Client A </a:t>
+            </a:r>
+            <a:r>
+              <a:rPr lang="en-US" altLang="ko-KR" sz="900" b="1" dirty="0"/>
+              <a:t>Pod</a:t>
+            </a:r>
+            <a:endParaRPr lang="ko-KR" altLang="en-US" sz="900" b="1" dirty="0"/>
+          </a:p>
+        </p:txBody>
+      </p:sp>
+      <p:sp>
+        <p:nvSpPr>
+          <p:cNvPr id="12" name="사각형: 둥근 모서리 12">
+            <a:extLst>
+              <a:ext uri="{FF2B5EF4-FFF2-40B4-BE49-F238E27FC236}">
+                <a16:creationId xmlns:a16="http://schemas.microsoft.com/office/drawing/2014/main" id="{9B6E2ADA-94D8-AD61-7299-D191CFB18901}"/>
+              </a:ext>
+            </a:extLst>
+          </p:cNvPr>
+          <p:cNvSpPr/>
+          <p:nvPr/>
+        </p:nvSpPr>
+        <p:spPr>
+          <a:xfrm>
+            <a:off x="1518621" y="4039755"/>
+            <a:ext cx="1139438" cy="451511"/>
+          </a:xfrm>
+          <a:prstGeom prst="roundRect">
+            <a:avLst>
+              <a:gd name="adj" fmla="val 14105"/>
+            </a:avLst>
+          </a:prstGeom>
+          <a:noFill/>
+          <a:ln w="12700">
+            <a:headEnd type="none" w="med" len="med"/>
+            <a:tailEnd type="triangle" w="med" len="med"/>
+          </a:ln>
+        </p:spPr>
+        <p:style>
+          <a:lnRef idx="2">
+            <a:schemeClr val="dk1"/>
+          </a:lnRef>
+          <a:fillRef idx="1">
+            <a:schemeClr val="lt1"/>
+          </a:fillRef>
+          <a:effectRef idx="0">
+            <a:schemeClr val="dk1"/>
+          </a:effectRef>
+          <a:fontRef idx="minor">
+            <a:schemeClr val="dk1"/>
+          </a:fontRef>
+        </p:style>
+        <p:txBody>
+          <a:bodyPr rtlCol="0" anchor="ctr"/>
+          <a:lstStyle/>
+          <a:p>
+            <a:pPr algn="ctr"/>
+            <a:r>
+              <a:rPr lang="en-US" altLang="ko-KR" sz="900"/>
+              <a:t>Client C </a:t>
+            </a:r>
+            <a:r>
+              <a:rPr lang="en-US" altLang="ko-KR" sz="900" b="1" dirty="0"/>
+              <a:t>Pod</a:t>
+            </a:r>
+            <a:endParaRPr lang="ko-KR" altLang="en-US" sz="900" b="1" dirty="0"/>
+          </a:p>
+        </p:txBody>
+      </p:sp>
+      <p:sp>
+        <p:nvSpPr>
+          <p:cNvPr id="17" name="사각형: 둥근 모서리 12">
+            <a:extLst>
+              <a:ext uri="{FF2B5EF4-FFF2-40B4-BE49-F238E27FC236}">
+                <a16:creationId xmlns:a16="http://schemas.microsoft.com/office/drawing/2014/main" id="{C0DBB69D-20C3-AB4E-A443-B6D6736D667E}"/>
+              </a:ext>
+            </a:extLst>
+          </p:cNvPr>
+          <p:cNvSpPr/>
+          <p:nvPr/>
+        </p:nvSpPr>
+        <p:spPr>
+          <a:xfrm>
+            <a:off x="3205001" y="1338418"/>
+            <a:ext cx="1330422" cy="451511"/>
+          </a:xfrm>
+          <a:prstGeom prst="roundRect">
+            <a:avLst>
+              <a:gd name="adj" fmla="val 14105"/>
+            </a:avLst>
+          </a:prstGeom>
+          <a:solidFill>
+            <a:schemeClr val="bg1">
+              <a:lumMod val="95000"/>
+            </a:schemeClr>
+          </a:solidFill>
+          <a:ln w="12700">
+            <a:headEnd type="none" w="med" len="med"/>
+            <a:tailEnd type="triangle" w="med" len="med"/>
+          </a:ln>
+        </p:spPr>
+        <p:style>
+          <a:lnRef idx="2">
+            <a:schemeClr val="dk1"/>
+          </a:lnRef>
+          <a:fillRef idx="1">
+            <a:schemeClr val="lt1"/>
+          </a:fillRef>
+          <a:effectRef idx="0">
+            <a:schemeClr val="dk1"/>
+          </a:effectRef>
+          <a:fontRef idx="minor">
+            <a:schemeClr val="dk1"/>
+          </a:fontRef>
+        </p:style>
+        <p:txBody>
+          <a:bodyPr rtlCol="0" anchor="ctr"/>
+          <a:lstStyle/>
+          <a:p>
+            <a:pPr algn="ctr"/>
+            <a:r>
+              <a:rPr lang="en-US" altLang="ko-KR" sz="900" dirty="0"/>
+              <a:t>DNS Name, ClusterIP</a:t>
+            </a:r>
+          </a:p>
+          <a:p>
+            <a:pPr algn="ctr"/>
+            <a:r>
+              <a:rPr lang="en-US" altLang="ko-KR" sz="900" b="1" dirty="0"/>
+              <a:t>Frontend</a:t>
+            </a:r>
+            <a:endParaRPr lang="ko-KR" altLang="en-US" sz="900" b="1" dirty="0"/>
+          </a:p>
+        </p:txBody>
+      </p:sp>
+      <p:sp>
+        <p:nvSpPr>
+          <p:cNvPr id="19" name="사각형: 둥근 모서리 12">
+            <a:extLst>
+              <a:ext uri="{FF2B5EF4-FFF2-40B4-BE49-F238E27FC236}">
+                <a16:creationId xmlns:a16="http://schemas.microsoft.com/office/drawing/2014/main" id="{481F8D19-6103-F4ED-1D0B-BA658CF30D0C}"/>
+              </a:ext>
+            </a:extLst>
+          </p:cNvPr>
+          <p:cNvSpPr/>
+          <p:nvPr/>
+        </p:nvSpPr>
+        <p:spPr>
+          <a:xfrm>
+            <a:off x="4962660" y="1344655"/>
+            <a:ext cx="1104530" cy="445274"/>
+          </a:xfrm>
+          <a:prstGeom prst="roundRect">
+            <a:avLst>
+              <a:gd name="adj" fmla="val 14105"/>
+            </a:avLst>
+          </a:prstGeom>
+          <a:solidFill>
+            <a:schemeClr val="bg1">
+              <a:lumMod val="95000"/>
+            </a:schemeClr>
+          </a:solidFill>
+          <a:ln w="12700">
+            <a:headEnd type="none" w="med" len="med"/>
+            <a:tailEnd type="triangle" w="med" len="med"/>
+          </a:ln>
+        </p:spPr>
+        <p:style>
+          <a:lnRef idx="2">
+            <a:schemeClr val="dk1"/>
+          </a:lnRef>
+          <a:fillRef idx="1">
+            <a:schemeClr val="lt1"/>
+          </a:fillRef>
+          <a:effectRef idx="0">
+            <a:schemeClr val="dk1"/>
+          </a:effectRef>
+          <a:fontRef idx="minor">
+            <a:schemeClr val="dk1"/>
+          </a:fontRef>
+        </p:style>
+        <p:txBody>
+          <a:bodyPr rtlCol="0" anchor="ctr"/>
+          <a:lstStyle/>
+          <a:p>
+            <a:pPr algn="ctr"/>
+            <a:r>
+              <a:rPr lang="en-US" altLang="ko-KR" sz="900" dirty="0"/>
+              <a:t>Endpoint IPs</a:t>
+            </a:r>
+          </a:p>
+          <a:p>
+            <a:pPr algn="ctr"/>
+            <a:r>
+              <a:rPr lang="en-US" altLang="ko-KR" sz="900" b="1" dirty="0"/>
+              <a:t>Backend</a:t>
+            </a:r>
+            <a:endParaRPr lang="ko-KR" altLang="en-US" sz="900" b="1" dirty="0"/>
+          </a:p>
+        </p:txBody>
+      </p:sp>
+      <p:sp>
+        <p:nvSpPr>
+          <p:cNvPr id="21" name="사각형: 둥근 모서리 12">
+            <a:extLst>
+              <a:ext uri="{FF2B5EF4-FFF2-40B4-BE49-F238E27FC236}">
+                <a16:creationId xmlns:a16="http://schemas.microsoft.com/office/drawing/2014/main" id="{E86D213C-2C7F-30E8-DCDA-CC263988231A}"/>
+              </a:ext>
+            </a:extLst>
+          </p:cNvPr>
+          <p:cNvSpPr/>
+          <p:nvPr/>
+        </p:nvSpPr>
+        <p:spPr>
+          <a:xfrm>
+            <a:off x="6390504" y="1340841"/>
+            <a:ext cx="1139438" cy="451511"/>
+          </a:xfrm>
+          <a:prstGeom prst="roundRect">
+            <a:avLst>
+              <a:gd name="adj" fmla="val 14105"/>
+            </a:avLst>
+          </a:prstGeom>
+          <a:noFill/>
+          <a:ln w="12700">
+            <a:headEnd type="none" w="med" len="med"/>
+            <a:tailEnd type="triangle" w="med" len="med"/>
+          </a:ln>
+        </p:spPr>
+        <p:style>
+          <a:lnRef idx="2">
+            <a:schemeClr val="dk1"/>
+          </a:lnRef>
+          <a:fillRef idx="1">
+            <a:schemeClr val="lt1"/>
+          </a:fillRef>
+          <a:effectRef idx="0">
+            <a:schemeClr val="dk1"/>
+          </a:effectRef>
+          <a:fontRef idx="minor">
+            <a:schemeClr val="dk1"/>
+          </a:fontRef>
+        </p:style>
+        <p:txBody>
+          <a:bodyPr rtlCol="0" anchor="ctr"/>
+          <a:lstStyle/>
+          <a:p>
+            <a:pPr algn="ctr"/>
+            <a:r>
+              <a:rPr lang="en-US" altLang="ko-KR" sz="900"/>
+              <a:t>Server </a:t>
+            </a:r>
+            <a:r>
+              <a:rPr lang="en-US" altLang="ko-KR" sz="900" b="1" dirty="0"/>
+              <a:t>Deployment</a:t>
+            </a:r>
+            <a:endParaRPr lang="ko-KR" altLang="en-US" sz="900" b="1" dirty="0"/>
+          </a:p>
+        </p:txBody>
+      </p:sp>
+      <p:cxnSp>
+        <p:nvCxnSpPr>
+          <p:cNvPr id="46" name="직선 화살표 연결선 96">
+            <a:extLst>
+              <a:ext uri="{FF2B5EF4-FFF2-40B4-BE49-F238E27FC236}">
+                <a16:creationId xmlns:a16="http://schemas.microsoft.com/office/drawing/2014/main" id="{571AF5C3-8173-E167-FE0B-89EE3376513C}"/>
+              </a:ext>
+            </a:extLst>
+          </p:cNvPr>
+          <p:cNvCxnSpPr>
+            <a:cxnSpLocks/>
+            <a:stCxn id="122" idx="2"/>
+            <a:endCxn id="17" idx="0"/>
+          </p:cNvCxnSpPr>
+          <p:nvPr/>
+        </p:nvCxnSpPr>
+        <p:spPr>
+          <a:xfrm flipH="1">
+            <a:off x="3870212" y="904269"/>
+            <a:ext cx="1454" cy="434149"/>
+          </a:xfrm>
+          <a:prstGeom prst="straightConnector1">
+            <a:avLst/>
+          </a:prstGeom>
+          <a:ln w="12700">
+            <a:solidFill>
+              <a:schemeClr val="tx2"/>
+            </a:solidFill>
+            <a:prstDash val="solid"/>
+            <a:headEnd type="none" w="med" len="med"/>
+            <a:tailEnd type="triangle" w="med" len="med"/>
+          </a:ln>
+        </p:spPr>
+        <p:style>
+          <a:lnRef idx="1">
+            <a:schemeClr val="accent1"/>
+          </a:lnRef>
+          <a:fillRef idx="0">
+            <a:schemeClr val="accent1"/>
+          </a:fillRef>
+          <a:effectRef idx="0">
+            <a:schemeClr val="accent1"/>
+          </a:effectRef>
+          <a:fontRef idx="minor">
+            <a:schemeClr val="tx1"/>
+          </a:fontRef>
+        </p:style>
+      </p:cxnSp>
+      <p:cxnSp>
+        <p:nvCxnSpPr>
+          <p:cNvPr id="49" name="직선 화살표 연결선 96">
+            <a:extLst>
+              <a:ext uri="{FF2B5EF4-FFF2-40B4-BE49-F238E27FC236}">
+                <a16:creationId xmlns:a16="http://schemas.microsoft.com/office/drawing/2014/main" id="{29108E09-6A8F-D03D-7C36-BDD161BC5206}"/>
+              </a:ext>
+            </a:extLst>
+          </p:cNvPr>
+          <p:cNvCxnSpPr>
+            <a:cxnSpLocks/>
+            <a:stCxn id="122" idx="2"/>
+            <a:endCxn id="19" idx="0"/>
+          </p:cNvCxnSpPr>
+          <p:nvPr/>
+        </p:nvCxnSpPr>
+        <p:spPr>
+          <a:xfrm>
+            <a:off x="3871666" y="904269"/>
+            <a:ext cx="1643259" cy="440386"/>
+          </a:xfrm>
+          <a:prstGeom prst="straightConnector1">
+            <a:avLst/>
+          </a:prstGeom>
+          <a:ln w="12700">
+            <a:solidFill>
+              <a:schemeClr val="accent3"/>
+            </a:solidFill>
+            <a:prstDash val="solid"/>
+            <a:headEnd type="none" w="med" len="med"/>
+            <a:tailEnd type="triangle" w="med" len="med"/>
+          </a:ln>
+        </p:spPr>
+        <p:style>
+          <a:lnRef idx="1">
+            <a:schemeClr val="accent1"/>
+          </a:lnRef>
+          <a:fillRef idx="0">
+            <a:schemeClr val="accent1"/>
+          </a:fillRef>
+          <a:effectRef idx="0">
+            <a:schemeClr val="accent1"/>
+          </a:effectRef>
+          <a:fontRef idx="minor">
+            <a:schemeClr val="tx1"/>
+          </a:fontRef>
+        </p:style>
+      </p:cxnSp>
+      <p:sp>
+        <p:nvSpPr>
+          <p:cNvPr id="56" name="사각형: 둥근 모서리 12">
+            <a:extLst>
+              <a:ext uri="{FF2B5EF4-FFF2-40B4-BE49-F238E27FC236}">
+                <a16:creationId xmlns:a16="http://schemas.microsoft.com/office/drawing/2014/main" id="{7B5DFC63-04BE-2445-906B-9299198530AC}"/>
+              </a:ext>
+            </a:extLst>
+          </p:cNvPr>
+          <p:cNvSpPr/>
+          <p:nvPr/>
+        </p:nvSpPr>
+        <p:spPr>
+          <a:xfrm>
+            <a:off x="3095263" y="2452219"/>
+            <a:ext cx="3081988" cy="836785"/>
+          </a:xfrm>
+          <a:prstGeom prst="roundRect">
+            <a:avLst>
+              <a:gd name="adj" fmla="val 8995"/>
+            </a:avLst>
+          </a:prstGeom>
+          <a:noFill/>
+          <a:ln w="12700">
+            <a:headEnd type="none" w="med" len="med"/>
+            <a:tailEnd type="triangle" w="med" len="med"/>
+          </a:ln>
+        </p:spPr>
+        <p:style>
+          <a:lnRef idx="2">
+            <a:schemeClr val="dk1"/>
+          </a:lnRef>
+          <a:fillRef idx="1">
+            <a:schemeClr val="lt1"/>
+          </a:fillRef>
+          <a:effectRef idx="0">
+            <a:schemeClr val="dk1"/>
+          </a:effectRef>
+          <a:fontRef idx="minor">
+            <a:schemeClr val="dk1"/>
+          </a:fontRef>
+        </p:style>
+        <p:txBody>
+          <a:bodyPr rtlCol="0" anchor="t"/>
+          <a:lstStyle/>
+          <a:p>
+            <a:pPr algn="ctr"/>
+            <a:r>
+              <a:rPr lang="en-US" altLang="ko-KR" sz="900"/>
+              <a:t>Server Version 1 </a:t>
+            </a:r>
+            <a:r>
+              <a:rPr lang="en-US" altLang="ko-KR" sz="900" b="1" dirty="0"/>
+              <a:t>Service</a:t>
+            </a:r>
+            <a:endParaRPr lang="ko-KR" altLang="en-US" sz="900" b="1" dirty="0"/>
+          </a:p>
+        </p:txBody>
+      </p:sp>
+      <p:sp>
+        <p:nvSpPr>
+          <p:cNvPr id="57" name="사각형: 둥근 모서리 12">
+            <a:extLst>
+              <a:ext uri="{FF2B5EF4-FFF2-40B4-BE49-F238E27FC236}">
+                <a16:creationId xmlns:a16="http://schemas.microsoft.com/office/drawing/2014/main" id="{4C5FE407-C624-D969-0371-0F9F458045AC}"/>
+              </a:ext>
+            </a:extLst>
+          </p:cNvPr>
+          <p:cNvSpPr/>
+          <p:nvPr/>
+        </p:nvSpPr>
+        <p:spPr>
+          <a:xfrm>
+            <a:off x="3205001" y="2733318"/>
+            <a:ext cx="1330422" cy="451511"/>
+          </a:xfrm>
+          <a:prstGeom prst="roundRect">
+            <a:avLst>
+              <a:gd name="adj" fmla="val 14105"/>
+            </a:avLst>
+          </a:prstGeom>
+          <a:solidFill>
+            <a:schemeClr val="bg1">
+              <a:lumMod val="95000"/>
+            </a:schemeClr>
+          </a:solidFill>
+          <a:ln w="12700">
+            <a:headEnd type="none" w="med" len="med"/>
+            <a:tailEnd type="triangle" w="med" len="med"/>
+          </a:ln>
+        </p:spPr>
+        <p:style>
+          <a:lnRef idx="2">
+            <a:schemeClr val="dk1"/>
+          </a:lnRef>
+          <a:fillRef idx="1">
+            <a:schemeClr val="lt1"/>
+          </a:fillRef>
+          <a:effectRef idx="0">
+            <a:schemeClr val="dk1"/>
+          </a:effectRef>
+          <a:fontRef idx="minor">
+            <a:schemeClr val="dk1"/>
+          </a:fontRef>
+        </p:style>
+        <p:txBody>
+          <a:bodyPr rtlCol="0" anchor="ctr"/>
+          <a:lstStyle/>
+          <a:p>
+            <a:pPr algn="ctr"/>
+            <a:r>
+              <a:rPr lang="en-US" altLang="ko-KR" sz="900" dirty="0"/>
+              <a:t>DNS Name, ClusterIP</a:t>
+            </a:r>
+          </a:p>
+          <a:p>
+            <a:pPr algn="ctr"/>
+            <a:r>
+              <a:rPr lang="en-US" altLang="ko-KR" sz="900" b="1" dirty="0"/>
+              <a:t>Frontend</a:t>
+            </a:r>
+            <a:endParaRPr lang="ko-KR" altLang="en-US" sz="900" b="1" dirty="0"/>
+          </a:p>
+        </p:txBody>
+      </p:sp>
+      <p:sp>
+        <p:nvSpPr>
+          <p:cNvPr id="58" name="사각형: 둥근 모서리 12">
+            <a:extLst>
+              <a:ext uri="{FF2B5EF4-FFF2-40B4-BE49-F238E27FC236}">
+                <a16:creationId xmlns:a16="http://schemas.microsoft.com/office/drawing/2014/main" id="{790E7527-B144-CE6C-59CB-DCE40AE3572E}"/>
+              </a:ext>
+            </a:extLst>
+          </p:cNvPr>
+          <p:cNvSpPr/>
+          <p:nvPr/>
+        </p:nvSpPr>
+        <p:spPr>
+          <a:xfrm>
+            <a:off x="4962660" y="2739555"/>
+            <a:ext cx="1104530" cy="445274"/>
+          </a:xfrm>
+          <a:prstGeom prst="roundRect">
+            <a:avLst>
+              <a:gd name="adj" fmla="val 14105"/>
+            </a:avLst>
+          </a:prstGeom>
+          <a:solidFill>
+            <a:schemeClr val="bg1">
+              <a:lumMod val="95000"/>
+            </a:schemeClr>
+          </a:solidFill>
+          <a:ln w="12700">
+            <a:headEnd type="none" w="med" len="med"/>
+            <a:tailEnd type="triangle" w="med" len="med"/>
+          </a:ln>
+        </p:spPr>
+        <p:style>
+          <a:lnRef idx="2">
+            <a:schemeClr val="dk1"/>
+          </a:lnRef>
+          <a:fillRef idx="1">
+            <a:schemeClr val="lt1"/>
+          </a:fillRef>
+          <a:effectRef idx="0">
+            <a:schemeClr val="dk1"/>
+          </a:effectRef>
+          <a:fontRef idx="minor">
+            <a:schemeClr val="dk1"/>
+          </a:fontRef>
+        </p:style>
+        <p:txBody>
+          <a:bodyPr rtlCol="0" anchor="ctr"/>
+          <a:lstStyle/>
+          <a:p>
+            <a:pPr algn="ctr"/>
+            <a:r>
+              <a:rPr lang="en-US" altLang="ko-KR" sz="900" dirty="0"/>
+              <a:t>Endpoint IPs</a:t>
+            </a:r>
+          </a:p>
+          <a:p>
+            <a:pPr algn="ctr"/>
+            <a:r>
+              <a:rPr lang="en-US" altLang="ko-KR" sz="900" b="1" dirty="0"/>
+              <a:t>Backend</a:t>
+            </a:r>
+            <a:endParaRPr lang="ko-KR" altLang="en-US" sz="900" b="1" dirty="0"/>
+          </a:p>
+        </p:txBody>
+      </p:sp>
+      <p:sp>
+        <p:nvSpPr>
+          <p:cNvPr id="59" name="사각형: 둥근 모서리 12">
+            <a:extLst>
+              <a:ext uri="{FF2B5EF4-FFF2-40B4-BE49-F238E27FC236}">
+                <a16:creationId xmlns:a16="http://schemas.microsoft.com/office/drawing/2014/main" id="{1F231614-1951-95A8-7DE7-B02645E55B92}"/>
+              </a:ext>
+            </a:extLst>
+          </p:cNvPr>
+          <p:cNvSpPr/>
+          <p:nvPr/>
+        </p:nvSpPr>
+        <p:spPr>
+          <a:xfrm>
+            <a:off x="6390504" y="2736436"/>
+            <a:ext cx="1139438" cy="451511"/>
+          </a:xfrm>
+          <a:prstGeom prst="roundRect">
+            <a:avLst>
+              <a:gd name="adj" fmla="val 14105"/>
+            </a:avLst>
+          </a:prstGeom>
+          <a:noFill/>
+          <a:ln w="12700">
+            <a:headEnd type="none" w="med" len="med"/>
+            <a:tailEnd type="triangle" w="med" len="med"/>
+          </a:ln>
+        </p:spPr>
+        <p:style>
+          <a:lnRef idx="2">
+            <a:schemeClr val="dk1"/>
+          </a:lnRef>
+          <a:fillRef idx="1">
+            <a:schemeClr val="lt1"/>
+          </a:fillRef>
+          <a:effectRef idx="0">
+            <a:schemeClr val="dk1"/>
+          </a:effectRef>
+          <a:fontRef idx="minor">
+            <a:schemeClr val="dk1"/>
+          </a:fontRef>
+        </p:style>
+        <p:txBody>
+          <a:bodyPr rtlCol="0" anchor="ctr"/>
+          <a:lstStyle/>
+          <a:p>
+            <a:pPr algn="ctr"/>
+            <a:r>
+              <a:rPr lang="en-US" altLang="ko-KR" sz="900"/>
+              <a:t>Server Version 1 </a:t>
+            </a:r>
+            <a:r>
+              <a:rPr lang="en-US" altLang="ko-KR" sz="900" b="1" dirty="0"/>
+              <a:t>Deployment</a:t>
+            </a:r>
+            <a:endParaRPr lang="ko-KR" altLang="en-US" sz="900" b="1" dirty="0"/>
+          </a:p>
+        </p:txBody>
+      </p:sp>
+      <p:sp>
+        <p:nvSpPr>
+          <p:cNvPr id="61" name="사각형: 둥근 모서리 12">
+            <a:extLst>
+              <a:ext uri="{FF2B5EF4-FFF2-40B4-BE49-F238E27FC236}">
+                <a16:creationId xmlns:a16="http://schemas.microsoft.com/office/drawing/2014/main" id="{83EACC93-24A3-B571-FA40-1396C0896729}"/>
+              </a:ext>
+            </a:extLst>
+          </p:cNvPr>
+          <p:cNvSpPr/>
+          <p:nvPr/>
+        </p:nvSpPr>
+        <p:spPr>
+          <a:xfrm>
+            <a:off x="1518621" y="3342305"/>
+            <a:ext cx="1139438" cy="451511"/>
+          </a:xfrm>
+          <a:prstGeom prst="roundRect">
+            <a:avLst>
+              <a:gd name="adj" fmla="val 14105"/>
+            </a:avLst>
+          </a:prstGeom>
+          <a:solidFill>
+            <a:schemeClr val="bg1">
+              <a:lumMod val="95000"/>
+            </a:schemeClr>
+          </a:solidFill>
+          <a:ln w="12700">
+            <a:headEnd type="none" w="med" len="med"/>
+            <a:tailEnd type="triangle" w="med" len="med"/>
+          </a:ln>
+        </p:spPr>
+        <p:style>
+          <a:lnRef idx="2">
+            <a:schemeClr val="dk1"/>
+          </a:lnRef>
+          <a:fillRef idx="1">
+            <a:schemeClr val="lt1"/>
+          </a:fillRef>
+          <a:effectRef idx="0">
+            <a:schemeClr val="dk1"/>
+          </a:effectRef>
+          <a:fontRef idx="minor">
+            <a:schemeClr val="dk1"/>
+          </a:fontRef>
+        </p:style>
+        <p:txBody>
+          <a:bodyPr rtlCol="0" anchor="ctr"/>
+          <a:lstStyle/>
+          <a:p>
+            <a:pPr algn="ctr"/>
+            <a:r>
+              <a:rPr lang="en-US" altLang="ko-KR" sz="900"/>
+              <a:t>Server</a:t>
+            </a:r>
+          </a:p>
+          <a:p>
+            <a:pPr algn="ctr"/>
+            <a:r>
+              <a:rPr lang="en-US" altLang="ko-KR" sz="900" b="1"/>
+              <a:t>HTTPRoute</a:t>
+            </a:r>
+          </a:p>
+          <a:p>
+            <a:pPr algn="ctr"/>
+            <a:r>
+              <a:rPr lang="en-US" altLang="ko-KR" sz="900" b="1"/>
+              <a:t>(Consumer)</a:t>
+            </a:r>
+          </a:p>
+        </p:txBody>
+      </p:sp>
+      <p:sp>
+        <p:nvSpPr>
+          <p:cNvPr id="62" name="사각형: 둥근 모서리 12">
+            <a:extLst>
+              <a:ext uri="{FF2B5EF4-FFF2-40B4-BE49-F238E27FC236}">
+                <a16:creationId xmlns:a16="http://schemas.microsoft.com/office/drawing/2014/main" id="{68E38031-2E82-1939-BF78-00546BEE479B}"/>
+              </a:ext>
+            </a:extLst>
+          </p:cNvPr>
+          <p:cNvSpPr/>
+          <p:nvPr/>
+        </p:nvSpPr>
+        <p:spPr>
+          <a:xfrm>
+            <a:off x="3092491" y="3847119"/>
+            <a:ext cx="3081988" cy="836785"/>
+          </a:xfrm>
+          <a:prstGeom prst="roundRect">
+            <a:avLst>
+              <a:gd name="adj" fmla="val 8995"/>
+            </a:avLst>
+          </a:prstGeom>
+          <a:noFill/>
+          <a:ln w="12700">
+            <a:headEnd type="none" w="med" len="med"/>
+            <a:tailEnd type="triangle" w="med" len="med"/>
+          </a:ln>
+        </p:spPr>
+        <p:style>
+          <a:lnRef idx="2">
+            <a:schemeClr val="dk1"/>
+          </a:lnRef>
+          <a:fillRef idx="1">
+            <a:schemeClr val="lt1"/>
+          </a:fillRef>
+          <a:effectRef idx="0">
+            <a:schemeClr val="dk1"/>
+          </a:effectRef>
+          <a:fontRef idx="minor">
+            <a:schemeClr val="dk1"/>
+          </a:fontRef>
+        </p:style>
+        <p:txBody>
+          <a:bodyPr rtlCol="0" anchor="t"/>
+          <a:lstStyle/>
+          <a:p>
+            <a:pPr algn="ctr"/>
+            <a:r>
+              <a:rPr lang="en-US" altLang="ko-KR" sz="900"/>
+              <a:t>Server Version 2 </a:t>
+            </a:r>
+            <a:r>
+              <a:rPr lang="en-US" altLang="ko-KR" sz="900" b="1" dirty="0"/>
+              <a:t>Service</a:t>
+            </a:r>
+            <a:endParaRPr lang="ko-KR" altLang="en-US" sz="900" b="1" dirty="0"/>
+          </a:p>
+        </p:txBody>
+      </p:sp>
+      <p:sp>
+        <p:nvSpPr>
+          <p:cNvPr id="63" name="사각형: 둥근 모서리 12">
+            <a:extLst>
+              <a:ext uri="{FF2B5EF4-FFF2-40B4-BE49-F238E27FC236}">
+                <a16:creationId xmlns:a16="http://schemas.microsoft.com/office/drawing/2014/main" id="{B0190EE1-58EF-E0CA-03FD-4BB02DC35826}"/>
+              </a:ext>
+            </a:extLst>
+          </p:cNvPr>
+          <p:cNvSpPr/>
+          <p:nvPr/>
+        </p:nvSpPr>
+        <p:spPr>
+          <a:xfrm>
+            <a:off x="3202229" y="4128218"/>
+            <a:ext cx="1330422" cy="451511"/>
+          </a:xfrm>
+          <a:prstGeom prst="roundRect">
+            <a:avLst>
+              <a:gd name="adj" fmla="val 14105"/>
+            </a:avLst>
+          </a:prstGeom>
+          <a:solidFill>
+            <a:schemeClr val="bg1">
+              <a:lumMod val="95000"/>
+            </a:schemeClr>
+          </a:solidFill>
+          <a:ln w="12700">
+            <a:headEnd type="none" w="med" len="med"/>
+            <a:tailEnd type="triangle" w="med" len="med"/>
+          </a:ln>
+        </p:spPr>
+        <p:style>
+          <a:lnRef idx="2">
+            <a:schemeClr val="dk1"/>
+          </a:lnRef>
+          <a:fillRef idx="1">
+            <a:schemeClr val="lt1"/>
+          </a:fillRef>
+          <a:effectRef idx="0">
+            <a:schemeClr val="dk1"/>
+          </a:effectRef>
+          <a:fontRef idx="minor">
+            <a:schemeClr val="dk1"/>
+          </a:fontRef>
+        </p:style>
+        <p:txBody>
+          <a:bodyPr rtlCol="0" anchor="ctr"/>
+          <a:lstStyle/>
+          <a:p>
+            <a:pPr algn="ctr"/>
+            <a:r>
+              <a:rPr lang="en-US" altLang="ko-KR" sz="900" dirty="0"/>
+              <a:t>DNS Name, ClusterIP</a:t>
+            </a:r>
+          </a:p>
+          <a:p>
+            <a:pPr algn="ctr"/>
+            <a:r>
+              <a:rPr lang="en-US" altLang="ko-KR" sz="900" b="1" dirty="0"/>
+              <a:t>Frontend</a:t>
+            </a:r>
+            <a:endParaRPr lang="ko-KR" altLang="en-US" sz="900" b="1" dirty="0"/>
+          </a:p>
+        </p:txBody>
+      </p:sp>
+      <p:sp>
+        <p:nvSpPr>
+          <p:cNvPr id="64" name="사각형: 둥근 모서리 12">
+            <a:extLst>
+              <a:ext uri="{FF2B5EF4-FFF2-40B4-BE49-F238E27FC236}">
+                <a16:creationId xmlns:a16="http://schemas.microsoft.com/office/drawing/2014/main" id="{EEF73322-89FC-2618-06A1-F637B6CBC6C7}"/>
+              </a:ext>
+            </a:extLst>
+          </p:cNvPr>
+          <p:cNvSpPr/>
+          <p:nvPr/>
+        </p:nvSpPr>
+        <p:spPr>
+          <a:xfrm>
+            <a:off x="4959888" y="4134455"/>
+            <a:ext cx="1104530" cy="445274"/>
+          </a:xfrm>
+          <a:prstGeom prst="roundRect">
+            <a:avLst>
+              <a:gd name="adj" fmla="val 14105"/>
+            </a:avLst>
+          </a:prstGeom>
+          <a:solidFill>
+            <a:schemeClr val="bg1">
+              <a:lumMod val="95000"/>
+            </a:schemeClr>
+          </a:solidFill>
+          <a:ln w="12700">
+            <a:headEnd type="none" w="med" len="med"/>
+            <a:tailEnd type="triangle" w="med" len="med"/>
+          </a:ln>
+        </p:spPr>
+        <p:style>
+          <a:lnRef idx="2">
+            <a:schemeClr val="dk1"/>
+          </a:lnRef>
+          <a:fillRef idx="1">
+            <a:schemeClr val="lt1"/>
+          </a:fillRef>
+          <a:effectRef idx="0">
+            <a:schemeClr val="dk1"/>
+          </a:effectRef>
+          <a:fontRef idx="minor">
+            <a:schemeClr val="dk1"/>
+          </a:fontRef>
+        </p:style>
+        <p:txBody>
+          <a:bodyPr rtlCol="0" anchor="ctr"/>
+          <a:lstStyle/>
+          <a:p>
+            <a:pPr algn="ctr"/>
+            <a:r>
+              <a:rPr lang="en-US" altLang="ko-KR" sz="900" dirty="0"/>
+              <a:t>Endpoint IPs</a:t>
+            </a:r>
+          </a:p>
+          <a:p>
+            <a:pPr algn="ctr"/>
+            <a:r>
+              <a:rPr lang="en-US" altLang="ko-KR" sz="900" b="1" dirty="0"/>
+              <a:t>Backend</a:t>
+            </a:r>
+            <a:endParaRPr lang="ko-KR" altLang="en-US" sz="900" b="1" dirty="0"/>
+          </a:p>
+        </p:txBody>
+      </p:sp>
+      <p:sp>
+        <p:nvSpPr>
+          <p:cNvPr id="65" name="사각형: 둥근 모서리 12">
+            <a:extLst>
+              <a:ext uri="{FF2B5EF4-FFF2-40B4-BE49-F238E27FC236}">
+                <a16:creationId xmlns:a16="http://schemas.microsoft.com/office/drawing/2014/main" id="{52D05665-28B0-FC5D-7375-46898A4D5C22}"/>
+              </a:ext>
+            </a:extLst>
+          </p:cNvPr>
+          <p:cNvSpPr/>
+          <p:nvPr/>
+        </p:nvSpPr>
+        <p:spPr>
+          <a:xfrm>
+            <a:off x="6387732" y="4131336"/>
+            <a:ext cx="1139438" cy="451511"/>
+          </a:xfrm>
+          <a:prstGeom prst="roundRect">
+            <a:avLst>
+              <a:gd name="adj" fmla="val 14105"/>
+            </a:avLst>
+          </a:prstGeom>
+          <a:noFill/>
+          <a:ln w="12700">
+            <a:headEnd type="none" w="med" len="med"/>
+            <a:tailEnd type="triangle" w="med" len="med"/>
+          </a:ln>
+        </p:spPr>
+        <p:style>
+          <a:lnRef idx="2">
+            <a:schemeClr val="dk1"/>
+          </a:lnRef>
+          <a:fillRef idx="1">
+            <a:schemeClr val="lt1"/>
+          </a:fillRef>
+          <a:effectRef idx="0">
+            <a:schemeClr val="dk1"/>
+          </a:effectRef>
+          <a:fontRef idx="minor">
+            <a:schemeClr val="dk1"/>
+          </a:fontRef>
+        </p:style>
+        <p:txBody>
+          <a:bodyPr rtlCol="0" anchor="ctr"/>
+          <a:lstStyle/>
+          <a:p>
+            <a:pPr algn="ctr"/>
+            <a:r>
+              <a:rPr lang="en-US" altLang="ko-KR" sz="900"/>
+              <a:t>Server Version 2 </a:t>
+            </a:r>
+            <a:r>
+              <a:rPr lang="en-US" altLang="ko-KR" sz="900" b="1" dirty="0"/>
+              <a:t>Deployment</a:t>
+            </a:r>
+            <a:endParaRPr lang="ko-KR" altLang="en-US" sz="900" b="1" dirty="0"/>
+          </a:p>
+        </p:txBody>
+      </p:sp>
+      <p:cxnSp>
+        <p:nvCxnSpPr>
+          <p:cNvPr id="70" name="직선 화살표 연결선 96">
+            <a:extLst>
+              <a:ext uri="{FF2B5EF4-FFF2-40B4-BE49-F238E27FC236}">
+                <a16:creationId xmlns:a16="http://schemas.microsoft.com/office/drawing/2014/main" id="{1FCB6ABC-C4CC-E373-9B82-625C9BDB1678}"/>
+              </a:ext>
+            </a:extLst>
+          </p:cNvPr>
+          <p:cNvCxnSpPr>
+            <a:cxnSpLocks/>
+            <a:stCxn id="61" idx="3"/>
+            <a:endCxn id="17" idx="2"/>
+          </p:cNvCxnSpPr>
+          <p:nvPr/>
+        </p:nvCxnSpPr>
+        <p:spPr>
+          <a:xfrm flipV="1">
+            <a:off x="2658059" y="1789929"/>
+            <a:ext cx="1212153" cy="1778132"/>
+          </a:xfrm>
+          <a:prstGeom prst="straightConnector1">
+            <a:avLst/>
+          </a:prstGeom>
+          <a:ln w="12700">
+            <a:solidFill>
+              <a:schemeClr val="tx2"/>
+            </a:solidFill>
+            <a:prstDash val="solid"/>
+            <a:headEnd type="none" w="med" len="med"/>
+            <a:tailEnd type="triangle" w="med" len="med"/>
+          </a:ln>
+        </p:spPr>
+        <p:style>
+          <a:lnRef idx="1">
+            <a:schemeClr val="accent1"/>
+          </a:lnRef>
+          <a:fillRef idx="0">
+            <a:schemeClr val="accent1"/>
+          </a:fillRef>
+          <a:effectRef idx="0">
+            <a:schemeClr val="accent1"/>
+          </a:effectRef>
+          <a:fontRef idx="minor">
+            <a:schemeClr val="tx1"/>
+          </a:fontRef>
+        </p:style>
+      </p:cxnSp>
+      <p:cxnSp>
+        <p:nvCxnSpPr>
+          <p:cNvPr id="73" name="직선 화살표 연결선 96">
+            <a:extLst>
+              <a:ext uri="{FF2B5EF4-FFF2-40B4-BE49-F238E27FC236}">
+                <a16:creationId xmlns:a16="http://schemas.microsoft.com/office/drawing/2014/main" id="{A3B1D35D-F5C3-A03D-9129-C970727F64E4}"/>
+              </a:ext>
+            </a:extLst>
+          </p:cNvPr>
+          <p:cNvCxnSpPr>
+            <a:cxnSpLocks/>
+            <a:stCxn id="61" idx="3"/>
+            <a:endCxn id="58" idx="2"/>
+          </p:cNvCxnSpPr>
+          <p:nvPr/>
+        </p:nvCxnSpPr>
+        <p:spPr>
+          <a:xfrm flipV="1">
+            <a:off x="2658059" y="3184829"/>
+            <a:ext cx="2856866" cy="383232"/>
+          </a:xfrm>
+          <a:prstGeom prst="straightConnector1">
+            <a:avLst/>
+          </a:prstGeom>
+          <a:ln w="12700">
+            <a:solidFill>
+              <a:schemeClr val="accent3"/>
+            </a:solidFill>
+            <a:prstDash val="solid"/>
+            <a:headEnd type="none" w="med" len="med"/>
+            <a:tailEnd type="triangle" w="med" len="med"/>
+          </a:ln>
+        </p:spPr>
+        <p:style>
+          <a:lnRef idx="1">
+            <a:schemeClr val="accent1"/>
+          </a:lnRef>
+          <a:fillRef idx="0">
+            <a:schemeClr val="accent1"/>
+          </a:fillRef>
+          <a:effectRef idx="0">
+            <a:schemeClr val="accent1"/>
+          </a:effectRef>
+          <a:fontRef idx="minor">
+            <a:schemeClr val="tx1"/>
+          </a:fontRef>
+        </p:style>
+      </p:cxnSp>
+      <p:cxnSp>
+        <p:nvCxnSpPr>
+          <p:cNvPr id="76" name="직선 화살표 연결선 96">
+            <a:extLst>
+              <a:ext uri="{FF2B5EF4-FFF2-40B4-BE49-F238E27FC236}">
+                <a16:creationId xmlns:a16="http://schemas.microsoft.com/office/drawing/2014/main" id="{0DB6DEC3-567B-81F8-771D-0A3B7201AF76}"/>
+              </a:ext>
+            </a:extLst>
+          </p:cNvPr>
+          <p:cNvCxnSpPr>
+            <a:cxnSpLocks/>
+            <a:stCxn id="61" idx="3"/>
+            <a:endCxn id="64" idx="0"/>
+          </p:cNvCxnSpPr>
+          <p:nvPr/>
+        </p:nvCxnSpPr>
+        <p:spPr>
+          <a:xfrm>
+            <a:off x="2658059" y="3568061"/>
+            <a:ext cx="2854094" cy="566394"/>
+          </a:xfrm>
+          <a:prstGeom prst="straightConnector1">
+            <a:avLst/>
+          </a:prstGeom>
+          <a:ln w="12700">
+            <a:solidFill>
+              <a:schemeClr val="accent3"/>
+            </a:solidFill>
+            <a:prstDash val="solid"/>
+            <a:headEnd type="none" w="med" len="med"/>
+            <a:tailEnd type="triangle" w="med" len="med"/>
+          </a:ln>
+        </p:spPr>
+        <p:style>
+          <a:lnRef idx="1">
+            <a:schemeClr val="accent1"/>
+          </a:lnRef>
+          <a:fillRef idx="0">
+            <a:schemeClr val="accent1"/>
+          </a:fillRef>
+          <a:effectRef idx="0">
+            <a:schemeClr val="accent1"/>
+          </a:effectRef>
+          <a:fontRef idx="minor">
+            <a:schemeClr val="tx1"/>
+          </a:fontRef>
+        </p:style>
+      </p:cxnSp>
+      <p:cxnSp>
+        <p:nvCxnSpPr>
+          <p:cNvPr id="79" name="직선 화살표 연결선 96">
+            <a:extLst>
+              <a:ext uri="{FF2B5EF4-FFF2-40B4-BE49-F238E27FC236}">
+                <a16:creationId xmlns:a16="http://schemas.microsoft.com/office/drawing/2014/main" id="{DC209014-A2CA-4159-F546-7C9D653B1229}"/>
+              </a:ext>
+            </a:extLst>
+          </p:cNvPr>
+          <p:cNvCxnSpPr>
+            <a:cxnSpLocks/>
+            <a:stCxn id="12" idx="3"/>
+            <a:endCxn id="17" idx="1"/>
+          </p:cNvCxnSpPr>
+          <p:nvPr/>
+        </p:nvCxnSpPr>
+        <p:spPr>
+          <a:xfrm flipV="1">
+            <a:off x="2658059" y="1564174"/>
+            <a:ext cx="546942" cy="2701337"/>
+          </a:xfrm>
+          <a:prstGeom prst="straightConnector1">
+            <a:avLst/>
+          </a:prstGeom>
+          <a:ln w="12700">
+            <a:solidFill>
+              <a:schemeClr val="accent6"/>
+            </a:solidFill>
+            <a:prstDash val="solid"/>
+            <a:headEnd type="none" w="med" len="med"/>
+            <a:tailEnd type="triangle" w="med" len="med"/>
+          </a:ln>
+        </p:spPr>
+        <p:style>
+          <a:lnRef idx="1">
+            <a:schemeClr val="accent1"/>
+          </a:lnRef>
+          <a:fillRef idx="0">
+            <a:schemeClr val="accent1"/>
+          </a:fillRef>
+          <a:effectRef idx="0">
+            <a:schemeClr val="accent1"/>
+          </a:effectRef>
+          <a:fontRef idx="minor">
+            <a:schemeClr val="tx1"/>
+          </a:fontRef>
+        </p:style>
+      </p:cxnSp>
+      <p:cxnSp>
+        <p:nvCxnSpPr>
+          <p:cNvPr id="85" name="직선 화살표 연결선 96">
+            <a:extLst>
+              <a:ext uri="{FF2B5EF4-FFF2-40B4-BE49-F238E27FC236}">
+                <a16:creationId xmlns:a16="http://schemas.microsoft.com/office/drawing/2014/main" id="{FEE4C96C-9130-C52E-FF0C-3653B25E1197}"/>
+              </a:ext>
+            </a:extLst>
+          </p:cNvPr>
+          <p:cNvCxnSpPr>
+            <a:cxnSpLocks/>
+            <a:stCxn id="64" idx="3"/>
+            <a:endCxn id="65" idx="1"/>
+          </p:cNvCxnSpPr>
+          <p:nvPr/>
+        </p:nvCxnSpPr>
+        <p:spPr>
+          <a:xfrm>
+            <a:off x="6064418" y="4357092"/>
+            <a:ext cx="323314" cy="0"/>
+          </a:xfrm>
+          <a:prstGeom prst="straightConnector1">
+            <a:avLst/>
+          </a:prstGeom>
+          <a:ln w="12700">
+            <a:solidFill>
+              <a:schemeClr val="accent6"/>
+            </a:solidFill>
+            <a:prstDash val="solid"/>
+            <a:headEnd type="none" w="med" len="med"/>
+            <a:tailEnd type="triangle" w="med" len="med"/>
+          </a:ln>
+        </p:spPr>
+        <p:style>
+          <a:lnRef idx="1">
+            <a:schemeClr val="accent1"/>
+          </a:lnRef>
+          <a:fillRef idx="0">
+            <a:schemeClr val="accent1"/>
+          </a:fillRef>
+          <a:effectRef idx="0">
+            <a:schemeClr val="accent1"/>
+          </a:effectRef>
+          <a:fontRef idx="minor">
+            <a:schemeClr val="tx1"/>
+          </a:fontRef>
+        </p:style>
+      </p:cxnSp>
+      <p:cxnSp>
+        <p:nvCxnSpPr>
+          <p:cNvPr id="88" name="직선 화살표 연결선 96">
+            <a:extLst>
+              <a:ext uri="{FF2B5EF4-FFF2-40B4-BE49-F238E27FC236}">
+                <a16:creationId xmlns:a16="http://schemas.microsoft.com/office/drawing/2014/main" id="{3CCF7CC9-96A0-3685-ABA5-8AFD3FAA9418}"/>
+              </a:ext>
+            </a:extLst>
+          </p:cNvPr>
+          <p:cNvCxnSpPr>
+            <a:cxnSpLocks/>
+            <a:stCxn id="58" idx="3"/>
+            <a:endCxn id="59" idx="1"/>
+          </p:cNvCxnSpPr>
+          <p:nvPr/>
+        </p:nvCxnSpPr>
+        <p:spPr>
+          <a:xfrm>
+            <a:off x="6067190" y="2962192"/>
+            <a:ext cx="323314" cy="0"/>
+          </a:xfrm>
+          <a:prstGeom prst="straightConnector1">
+            <a:avLst/>
+          </a:prstGeom>
+          <a:ln w="12700">
+            <a:solidFill>
+              <a:schemeClr val="accent6"/>
+            </a:solidFill>
+            <a:prstDash val="solid"/>
+            <a:headEnd type="none" w="med" len="med"/>
+            <a:tailEnd type="triangle" w="med" len="med"/>
+          </a:ln>
+        </p:spPr>
+        <p:style>
+          <a:lnRef idx="1">
+            <a:schemeClr val="accent1"/>
+          </a:lnRef>
+          <a:fillRef idx="0">
+            <a:schemeClr val="accent1"/>
+          </a:fillRef>
+          <a:effectRef idx="0">
+            <a:schemeClr val="accent1"/>
+          </a:effectRef>
+          <a:fontRef idx="minor">
+            <a:schemeClr val="tx1"/>
+          </a:fontRef>
+        </p:style>
+      </p:cxnSp>
+      <p:cxnSp>
+        <p:nvCxnSpPr>
+          <p:cNvPr id="91" name="직선 화살표 연결선 96">
+            <a:extLst>
+              <a:ext uri="{FF2B5EF4-FFF2-40B4-BE49-F238E27FC236}">
+                <a16:creationId xmlns:a16="http://schemas.microsoft.com/office/drawing/2014/main" id="{635252A3-105B-A42D-D962-6C61AF94161C}"/>
+              </a:ext>
+            </a:extLst>
+          </p:cNvPr>
+          <p:cNvCxnSpPr>
+            <a:cxnSpLocks/>
+            <a:stCxn id="11" idx="3"/>
+            <a:endCxn id="17" idx="1"/>
+          </p:cNvCxnSpPr>
+          <p:nvPr/>
+        </p:nvCxnSpPr>
+        <p:spPr>
+          <a:xfrm flipV="1">
+            <a:off x="2658059" y="1564174"/>
+            <a:ext cx="546942" cy="3119"/>
+          </a:xfrm>
+          <a:prstGeom prst="straightConnector1">
+            <a:avLst/>
+          </a:prstGeom>
+          <a:ln w="12700">
+            <a:solidFill>
+              <a:srgbClr val="C00000"/>
+            </a:solidFill>
+            <a:prstDash val="solid"/>
+            <a:headEnd type="none" w="med" len="med"/>
+            <a:tailEnd type="triangle" w="med" len="med"/>
+          </a:ln>
+        </p:spPr>
+        <p:style>
+          <a:lnRef idx="1">
+            <a:schemeClr val="accent1"/>
+          </a:lnRef>
+          <a:fillRef idx="0">
+            <a:schemeClr val="accent1"/>
+          </a:fillRef>
+          <a:effectRef idx="0">
+            <a:schemeClr val="accent1"/>
+          </a:effectRef>
+          <a:fontRef idx="minor">
+            <a:schemeClr val="tx1"/>
+          </a:fontRef>
+        </p:style>
+      </p:cxnSp>
+      <p:cxnSp>
+        <p:nvCxnSpPr>
+          <p:cNvPr id="95" name="직선 화살표 연결선 96">
+            <a:extLst>
+              <a:ext uri="{FF2B5EF4-FFF2-40B4-BE49-F238E27FC236}">
+                <a16:creationId xmlns:a16="http://schemas.microsoft.com/office/drawing/2014/main" id="{C4EA040D-7EF5-CF49-2DEA-656917A37CBB}"/>
+              </a:ext>
+            </a:extLst>
+          </p:cNvPr>
+          <p:cNvCxnSpPr>
+            <a:cxnSpLocks/>
+            <a:stCxn id="19" idx="3"/>
+            <a:endCxn id="21" idx="1"/>
+          </p:cNvCxnSpPr>
+          <p:nvPr/>
+        </p:nvCxnSpPr>
+        <p:spPr>
+          <a:xfrm flipV="1">
+            <a:off x="6067190" y="1566597"/>
+            <a:ext cx="323314" cy="695"/>
+          </a:xfrm>
+          <a:prstGeom prst="straightConnector1">
+            <a:avLst/>
+          </a:prstGeom>
+          <a:ln w="12700">
+            <a:solidFill>
+              <a:srgbClr val="C00000"/>
+            </a:solidFill>
+            <a:prstDash val="solid"/>
+            <a:headEnd type="none" w="med" len="med"/>
+            <a:tailEnd type="triangle" w="med" len="med"/>
+          </a:ln>
+        </p:spPr>
+        <p:style>
+          <a:lnRef idx="1">
+            <a:schemeClr val="accent1"/>
+          </a:lnRef>
+          <a:fillRef idx="0">
+            <a:schemeClr val="accent1"/>
+          </a:fillRef>
+          <a:effectRef idx="0">
+            <a:schemeClr val="accent1"/>
+          </a:effectRef>
+          <a:fontRef idx="minor">
+            <a:schemeClr val="tx1"/>
+          </a:fontRef>
+        </p:style>
+      </p:cxnSp>
+      <p:sp>
+        <p:nvSpPr>
+          <p:cNvPr id="111" name="사각형: 둥근 모서리 70">
+            <a:extLst>
+              <a:ext uri="{FF2B5EF4-FFF2-40B4-BE49-F238E27FC236}">
+                <a16:creationId xmlns:a16="http://schemas.microsoft.com/office/drawing/2014/main" id="{81D26DC4-C324-7CED-5659-96CBFDD874DF}"/>
+              </a:ext>
+            </a:extLst>
+          </p:cNvPr>
+          <p:cNvSpPr/>
+          <p:nvPr/>
+        </p:nvSpPr>
+        <p:spPr>
+          <a:xfrm>
+            <a:off x="971599" y="1997410"/>
+            <a:ext cx="1800200" cy="892274"/>
+          </a:xfrm>
+          <a:prstGeom prst="roundRect">
+            <a:avLst>
+              <a:gd name="adj" fmla="val 8056"/>
+            </a:avLst>
+          </a:prstGeom>
+          <a:noFill/>
+          <a:ln w="12700">
+            <a:prstDash val="solid"/>
+            <a:headEnd type="none" w="med" len="med"/>
+            <a:tailEnd type="triangle" w="med" len="med"/>
+          </a:ln>
+        </p:spPr>
+        <p:style>
+          <a:lnRef idx="2">
+            <a:schemeClr val="dk1"/>
+          </a:lnRef>
+          <a:fillRef idx="1">
+            <a:schemeClr val="lt1"/>
+          </a:fillRef>
+          <a:effectRef idx="0">
+            <a:schemeClr val="dk1"/>
+          </a:effectRef>
+          <a:fontRef idx="minor">
+            <a:schemeClr val="dk1"/>
+          </a:fontRef>
+        </p:style>
+        <p:txBody>
+          <a:bodyPr rtlCol="0" anchor="t"/>
+          <a:lstStyle/>
+          <a:p>
+            <a:r>
+              <a:rPr lang="en-US" altLang="ko-KR" sz="1000" dirty="0"/>
+              <a:t>Client B </a:t>
+            </a:r>
+            <a:r>
+              <a:rPr lang="en-US" altLang="ko-KR" sz="1000" b="1" dirty="0"/>
+              <a:t>Namespace</a:t>
+            </a:r>
+            <a:endParaRPr lang="ko-KR" altLang="en-US" sz="1000" b="1" dirty="0"/>
+          </a:p>
+        </p:txBody>
+      </p:sp>
+      <p:sp>
+        <p:nvSpPr>
+          <p:cNvPr id="112" name="사각형: 둥근 모서리 12">
+            <a:extLst>
+              <a:ext uri="{FF2B5EF4-FFF2-40B4-BE49-F238E27FC236}">
+                <a16:creationId xmlns:a16="http://schemas.microsoft.com/office/drawing/2014/main" id="{596F3B37-C4C7-EC86-A21C-BBE24B70A20E}"/>
+              </a:ext>
+            </a:extLst>
+          </p:cNvPr>
+          <p:cNvSpPr/>
+          <p:nvPr/>
+        </p:nvSpPr>
+        <p:spPr>
+          <a:xfrm>
+            <a:off x="1518621" y="2338233"/>
+            <a:ext cx="1139438" cy="451511"/>
+          </a:xfrm>
+          <a:prstGeom prst="roundRect">
+            <a:avLst>
+              <a:gd name="adj" fmla="val 14105"/>
+            </a:avLst>
+          </a:prstGeom>
+          <a:noFill/>
+          <a:ln w="12700">
+            <a:headEnd type="none" w="med" len="med"/>
+            <a:tailEnd type="triangle" w="med" len="med"/>
+          </a:ln>
+        </p:spPr>
+        <p:style>
+          <a:lnRef idx="2">
+            <a:schemeClr val="dk1"/>
+          </a:lnRef>
+          <a:fillRef idx="1">
+            <a:schemeClr val="lt1"/>
+          </a:fillRef>
+          <a:effectRef idx="0">
+            <a:schemeClr val="dk1"/>
+          </a:effectRef>
+          <a:fontRef idx="minor">
+            <a:schemeClr val="dk1"/>
+          </a:fontRef>
+        </p:style>
+        <p:txBody>
+          <a:bodyPr rtlCol="0" anchor="ctr"/>
+          <a:lstStyle/>
+          <a:p>
+            <a:pPr algn="ctr"/>
+            <a:r>
+              <a:rPr lang="en-US" altLang="ko-KR" sz="900"/>
+              <a:t>Client B </a:t>
+            </a:r>
+            <a:r>
+              <a:rPr lang="en-US" altLang="ko-KR" sz="900" b="1" dirty="0"/>
+              <a:t>Pod</a:t>
+            </a:r>
+            <a:endParaRPr lang="ko-KR" altLang="en-US" sz="900" b="1" dirty="0"/>
+          </a:p>
+        </p:txBody>
+      </p:sp>
+      <p:sp>
+        <p:nvSpPr>
+          <p:cNvPr id="122" name="사각형: 둥근 모서리 12">
+            <a:extLst>
+              <a:ext uri="{FF2B5EF4-FFF2-40B4-BE49-F238E27FC236}">
+                <a16:creationId xmlns:a16="http://schemas.microsoft.com/office/drawing/2014/main" id="{170EDED4-A80D-1FA4-7A0F-F26E64026BB5}"/>
+              </a:ext>
+            </a:extLst>
+          </p:cNvPr>
+          <p:cNvSpPr/>
+          <p:nvPr/>
+        </p:nvSpPr>
+        <p:spPr>
+          <a:xfrm>
+            <a:off x="3301947" y="452758"/>
+            <a:ext cx="1139438" cy="451511"/>
+          </a:xfrm>
+          <a:prstGeom prst="roundRect">
+            <a:avLst>
+              <a:gd name="adj" fmla="val 14105"/>
+            </a:avLst>
+          </a:prstGeom>
+          <a:solidFill>
+            <a:schemeClr val="bg1">
+              <a:lumMod val="95000"/>
+            </a:schemeClr>
+          </a:solidFill>
+          <a:ln w="12700">
+            <a:headEnd type="none" w="med" len="med"/>
+            <a:tailEnd type="triangle" w="med" len="med"/>
+          </a:ln>
+        </p:spPr>
+        <p:style>
+          <a:lnRef idx="2">
+            <a:schemeClr val="dk1"/>
+          </a:lnRef>
+          <a:fillRef idx="1">
+            <a:schemeClr val="lt1"/>
+          </a:fillRef>
+          <a:effectRef idx="0">
+            <a:schemeClr val="dk1"/>
+          </a:effectRef>
+          <a:fontRef idx="minor">
+            <a:schemeClr val="dk1"/>
+          </a:fontRef>
+        </p:style>
+        <p:txBody>
+          <a:bodyPr rtlCol="0" anchor="ctr"/>
+          <a:lstStyle/>
+          <a:p>
+            <a:pPr algn="ctr"/>
+            <a:r>
+              <a:rPr lang="en-US" altLang="ko-KR" sz="900"/>
+              <a:t>Server</a:t>
+            </a:r>
+          </a:p>
+          <a:p>
+            <a:pPr algn="ctr"/>
+            <a:r>
+              <a:rPr lang="en-US" altLang="ko-KR" sz="900" b="1"/>
+              <a:t>HTTPRoute</a:t>
+            </a:r>
+          </a:p>
+          <a:p>
+            <a:pPr algn="ctr"/>
+            <a:r>
+              <a:rPr lang="en-US" altLang="ko-KR" sz="900" b="1"/>
+              <a:t>(Producer)</a:t>
+            </a:r>
+          </a:p>
+        </p:txBody>
+      </p:sp>
+      <p:cxnSp>
+        <p:nvCxnSpPr>
+          <p:cNvPr id="125" name="직선 화살표 연결선 96">
+            <a:extLst>
+              <a:ext uri="{FF2B5EF4-FFF2-40B4-BE49-F238E27FC236}">
+                <a16:creationId xmlns:a16="http://schemas.microsoft.com/office/drawing/2014/main" id="{51E5E940-800F-9A5A-B55F-F09A1339764A}"/>
+              </a:ext>
+            </a:extLst>
+          </p:cNvPr>
+          <p:cNvCxnSpPr>
+            <a:cxnSpLocks/>
+            <a:stCxn id="112" idx="3"/>
+            <a:endCxn id="17" idx="1"/>
+          </p:cNvCxnSpPr>
+          <p:nvPr/>
+        </p:nvCxnSpPr>
+        <p:spPr>
+          <a:xfrm flipV="1">
+            <a:off x="2658059" y="1564174"/>
+            <a:ext cx="546942" cy="999815"/>
+          </a:xfrm>
+          <a:prstGeom prst="straightConnector1">
+            <a:avLst/>
+          </a:prstGeom>
+          <a:ln w="12700">
+            <a:solidFill>
+              <a:srgbClr val="C00000"/>
+            </a:solidFill>
+            <a:prstDash val="solid"/>
+            <a:headEnd type="none" w="med" len="med"/>
+            <a:tailEnd type="triangle" w="med" len="med"/>
+          </a:ln>
+        </p:spPr>
+        <p:style>
+          <a:lnRef idx="1">
+            <a:schemeClr val="accent1"/>
+          </a:lnRef>
+          <a:fillRef idx="0">
+            <a:schemeClr val="accent1"/>
+          </a:fillRef>
+          <a:effectRef idx="0">
+            <a:schemeClr val="accent1"/>
+          </a:effectRef>
+          <a:fontRef idx="minor">
+            <a:schemeClr val="tx1"/>
+          </a:fontRef>
+        </p:style>
+      </p:cxnSp>
+      <p:cxnSp>
+        <p:nvCxnSpPr>
+          <p:cNvPr id="128" name="직선 화살표 연결선 96">
+            <a:extLst>
+              <a:ext uri="{FF2B5EF4-FFF2-40B4-BE49-F238E27FC236}">
+                <a16:creationId xmlns:a16="http://schemas.microsoft.com/office/drawing/2014/main" id="{6C4BB4DB-C1AB-228B-7983-75C0C3FBE8D7}"/>
+              </a:ext>
+            </a:extLst>
+          </p:cNvPr>
+          <p:cNvCxnSpPr>
+            <a:cxnSpLocks/>
+            <a:stCxn id="17" idx="3"/>
+            <a:endCxn id="19" idx="1"/>
+          </p:cNvCxnSpPr>
+          <p:nvPr/>
+        </p:nvCxnSpPr>
+        <p:spPr>
+          <a:xfrm>
+            <a:off x="4535423" y="1564174"/>
+            <a:ext cx="427237" cy="3118"/>
+          </a:xfrm>
+          <a:prstGeom prst="straightConnector1">
+            <a:avLst/>
+          </a:prstGeom>
+          <a:ln w="12700">
+            <a:solidFill>
+              <a:srgbClr val="C00000"/>
+            </a:solidFill>
+            <a:prstDash val="solid"/>
+            <a:headEnd type="none" w="med" len="med"/>
+            <a:tailEnd type="triangle" w="med" len="med"/>
+          </a:ln>
+        </p:spPr>
+        <p:style>
+          <a:lnRef idx="1">
+            <a:schemeClr val="accent1"/>
+          </a:lnRef>
+          <a:fillRef idx="0">
+            <a:schemeClr val="accent1"/>
+          </a:fillRef>
+          <a:effectRef idx="0">
+            <a:schemeClr val="accent1"/>
+          </a:effectRef>
+          <a:fontRef idx="minor">
+            <a:schemeClr val="tx1"/>
+          </a:fontRef>
+        </p:style>
+      </p:cxnSp>
+      <p:cxnSp>
+        <p:nvCxnSpPr>
+          <p:cNvPr id="144" name="직선 화살표 연결선 96">
+            <a:extLst>
+              <a:ext uri="{FF2B5EF4-FFF2-40B4-BE49-F238E27FC236}">
+                <a16:creationId xmlns:a16="http://schemas.microsoft.com/office/drawing/2014/main" id="{2A82D63B-5AC2-58A9-133D-44E9C416FD0E}"/>
+              </a:ext>
+            </a:extLst>
+          </p:cNvPr>
+          <p:cNvCxnSpPr>
+            <a:cxnSpLocks/>
+            <a:stCxn id="17" idx="3"/>
+            <a:endCxn id="58" idx="1"/>
+          </p:cNvCxnSpPr>
+          <p:nvPr/>
+        </p:nvCxnSpPr>
+        <p:spPr>
+          <a:xfrm>
+            <a:off x="4535423" y="1564174"/>
+            <a:ext cx="427237" cy="1398018"/>
+          </a:xfrm>
+          <a:prstGeom prst="straightConnector1">
+            <a:avLst/>
+          </a:prstGeom>
+          <a:ln w="12700">
+            <a:solidFill>
+              <a:schemeClr val="accent6"/>
+            </a:solidFill>
+            <a:prstDash val="solid"/>
+            <a:headEnd type="none" w="med" len="med"/>
+            <a:tailEnd type="triangle" w="med" len="med"/>
+          </a:ln>
+        </p:spPr>
+        <p:style>
+          <a:lnRef idx="1">
+            <a:schemeClr val="accent1"/>
+          </a:lnRef>
+          <a:fillRef idx="0">
+            <a:schemeClr val="accent1"/>
+          </a:fillRef>
+          <a:effectRef idx="0">
+            <a:schemeClr val="accent1"/>
+          </a:effectRef>
+          <a:fontRef idx="minor">
+            <a:schemeClr val="tx1"/>
+          </a:fontRef>
+        </p:style>
+      </p:cxnSp>
+      <p:cxnSp>
+        <p:nvCxnSpPr>
+          <p:cNvPr id="147" name="직선 화살표 연결선 96">
+            <a:extLst>
+              <a:ext uri="{FF2B5EF4-FFF2-40B4-BE49-F238E27FC236}">
+                <a16:creationId xmlns:a16="http://schemas.microsoft.com/office/drawing/2014/main" id="{2C86A4AB-B690-C58A-E921-4BBFC6B118D4}"/>
+              </a:ext>
+            </a:extLst>
+          </p:cNvPr>
+          <p:cNvCxnSpPr>
+            <a:cxnSpLocks/>
+            <a:stCxn id="17" idx="3"/>
+            <a:endCxn id="64" idx="1"/>
+          </p:cNvCxnSpPr>
+          <p:nvPr/>
+        </p:nvCxnSpPr>
+        <p:spPr>
+          <a:xfrm>
+            <a:off x="4535423" y="1564174"/>
+            <a:ext cx="424465" cy="2792918"/>
+          </a:xfrm>
+          <a:prstGeom prst="straightConnector1">
+            <a:avLst/>
+          </a:prstGeom>
+          <a:ln w="12700">
+            <a:solidFill>
+              <a:schemeClr val="accent6"/>
+            </a:solidFill>
+            <a:prstDash val="solid"/>
+            <a:headEnd type="none" w="med" len="med"/>
+            <a:tailEnd type="triangle" w="med" len="med"/>
+          </a:ln>
+        </p:spPr>
+        <p:style>
+          <a:lnRef idx="1">
+            <a:schemeClr val="accent1"/>
+          </a:lnRef>
+          <a:fillRef idx="0">
+            <a:schemeClr val="accent1"/>
+          </a:fillRef>
+          <a:effectRef idx="0">
+            <a:schemeClr val="accent1"/>
+          </a:effectRef>
+          <a:fontRef idx="minor">
+            <a:schemeClr val="tx1"/>
+          </a:fontRef>
+        </p:style>
+      </p:cxnSp>
+      <p:cxnSp>
+        <p:nvCxnSpPr>
+          <p:cNvPr id="193" name="직선 화살표 연결선 96">
+            <a:extLst>
+              <a:ext uri="{FF2B5EF4-FFF2-40B4-BE49-F238E27FC236}">
+                <a16:creationId xmlns:a16="http://schemas.microsoft.com/office/drawing/2014/main" id="{0249CEBB-F4A1-721D-0877-E93473958E55}"/>
+              </a:ext>
+            </a:extLst>
+          </p:cNvPr>
+          <p:cNvCxnSpPr>
+            <a:cxnSpLocks/>
+          </p:cNvCxnSpPr>
+          <p:nvPr/>
+        </p:nvCxnSpPr>
+        <p:spPr>
+          <a:xfrm>
+            <a:off x="994672" y="476915"/>
+            <a:ext cx="323569" cy="0"/>
+          </a:xfrm>
+          <a:prstGeom prst="straightConnector1">
+            <a:avLst/>
+          </a:prstGeom>
+          <a:ln w="12700">
+            <a:solidFill>
+              <a:schemeClr val="tx2"/>
+            </a:solidFill>
+            <a:prstDash val="solid"/>
+            <a:headEnd type="none" w="med" len="med"/>
+            <a:tailEnd type="triangle" w="med" len="med"/>
+          </a:ln>
+        </p:spPr>
+        <p:style>
+          <a:lnRef idx="1">
+            <a:schemeClr val="accent1"/>
+          </a:lnRef>
+          <a:fillRef idx="0">
+            <a:schemeClr val="accent1"/>
+          </a:fillRef>
+          <a:effectRef idx="0">
+            <a:schemeClr val="accent1"/>
+          </a:effectRef>
+          <a:fontRef idx="minor">
+            <a:schemeClr val="tx1"/>
+          </a:fontRef>
+        </p:style>
+      </p:cxnSp>
+      <p:sp>
+        <p:nvSpPr>
+          <p:cNvPr id="194" name="TextBox 193">
+            <a:extLst>
+              <a:ext uri="{FF2B5EF4-FFF2-40B4-BE49-F238E27FC236}">
+                <a16:creationId xmlns:a16="http://schemas.microsoft.com/office/drawing/2014/main" id="{CB0CF314-DFF5-C3B9-86C6-841FE18A465B}"/>
+              </a:ext>
+            </a:extLst>
+          </p:cNvPr>
+          <p:cNvSpPr txBox="1"/>
+          <p:nvPr/>
+        </p:nvSpPr>
+        <p:spPr>
+          <a:xfrm>
+            <a:off x="1290415" y="282902"/>
+            <a:ext cx="702455" cy="369332"/>
+          </a:xfrm>
+          <a:prstGeom prst="rect">
+            <a:avLst/>
+          </a:prstGeom>
+          <a:noFill/>
+        </p:spPr>
+        <p:txBody>
+          <a:bodyPr wrap="square" rtlCol="0">
+            <a:spAutoFit/>
+          </a:bodyPr>
+          <a:lstStyle/>
+          <a:p>
+            <a:r>
+              <a:rPr lang="en-US" sz="900"/>
+              <a:t>Fronted</a:t>
+            </a:r>
+          </a:p>
+          <a:p>
+            <a:r>
+              <a:rPr lang="en-US" sz="900"/>
+              <a:t>Reference</a:t>
+            </a:r>
+            <a:endParaRPr lang="en-KR" sz="900"/>
+          </a:p>
+        </p:txBody>
+      </p:sp>
+      <p:sp>
+        <p:nvSpPr>
+          <p:cNvPr id="198" name="TextBox 197">
+            <a:extLst>
+              <a:ext uri="{FF2B5EF4-FFF2-40B4-BE49-F238E27FC236}">
+                <a16:creationId xmlns:a16="http://schemas.microsoft.com/office/drawing/2014/main" id="{33E7B282-3957-1ADC-C63A-92C657074E8F}"/>
+              </a:ext>
+            </a:extLst>
+          </p:cNvPr>
+          <p:cNvSpPr txBox="1"/>
+          <p:nvPr/>
+        </p:nvSpPr>
+        <p:spPr>
+          <a:xfrm>
+            <a:off x="1289667" y="634961"/>
+            <a:ext cx="726519" cy="369332"/>
+          </a:xfrm>
+          <a:prstGeom prst="rect">
+            <a:avLst/>
+          </a:prstGeom>
+          <a:noFill/>
+        </p:spPr>
+        <p:txBody>
+          <a:bodyPr wrap="square" rtlCol="0">
+            <a:spAutoFit/>
+          </a:bodyPr>
+          <a:lstStyle/>
+          <a:p>
+            <a:r>
+              <a:rPr lang="en-US" sz="900"/>
+              <a:t>Client A/B</a:t>
+            </a:r>
+          </a:p>
+          <a:p>
+            <a:r>
+              <a:rPr lang="en-US" sz="900"/>
+              <a:t>Traffic</a:t>
+            </a:r>
+            <a:endParaRPr lang="en-KR" sz="900"/>
+          </a:p>
+        </p:txBody>
+      </p:sp>
+      <p:cxnSp>
+        <p:nvCxnSpPr>
+          <p:cNvPr id="199" name="직선 화살표 연결선 96">
+            <a:extLst>
+              <a:ext uri="{FF2B5EF4-FFF2-40B4-BE49-F238E27FC236}">
+                <a16:creationId xmlns:a16="http://schemas.microsoft.com/office/drawing/2014/main" id="{10D2D61D-7ABB-2B05-DD05-5F2C9CE03AF0}"/>
+              </a:ext>
+            </a:extLst>
+          </p:cNvPr>
+          <p:cNvCxnSpPr>
+            <a:cxnSpLocks/>
+          </p:cNvCxnSpPr>
+          <p:nvPr/>
+        </p:nvCxnSpPr>
+        <p:spPr>
+          <a:xfrm>
+            <a:off x="1993388" y="482437"/>
+            <a:ext cx="323569" cy="0"/>
+          </a:xfrm>
+          <a:prstGeom prst="straightConnector1">
+            <a:avLst/>
+          </a:prstGeom>
+          <a:ln w="12700">
+            <a:solidFill>
+              <a:schemeClr val="accent3"/>
+            </a:solidFill>
+            <a:prstDash val="solid"/>
+            <a:headEnd type="none" w="med" len="med"/>
+            <a:tailEnd type="triangle" w="med" len="med"/>
+          </a:ln>
+        </p:spPr>
+        <p:style>
+          <a:lnRef idx="1">
+            <a:schemeClr val="accent1"/>
+          </a:lnRef>
+          <a:fillRef idx="0">
+            <a:schemeClr val="accent1"/>
+          </a:fillRef>
+          <a:effectRef idx="0">
+            <a:schemeClr val="accent1"/>
+          </a:effectRef>
+          <a:fontRef idx="minor">
+            <a:schemeClr val="tx1"/>
+          </a:fontRef>
+        </p:style>
+      </p:cxnSp>
+      <p:sp>
+        <p:nvSpPr>
+          <p:cNvPr id="200" name="TextBox 199">
+            <a:extLst>
+              <a:ext uri="{FF2B5EF4-FFF2-40B4-BE49-F238E27FC236}">
+                <a16:creationId xmlns:a16="http://schemas.microsoft.com/office/drawing/2014/main" id="{FB199EDD-7E04-07E8-646F-EED80C937183}"/>
+              </a:ext>
+            </a:extLst>
+          </p:cNvPr>
+          <p:cNvSpPr txBox="1"/>
+          <p:nvPr/>
+        </p:nvSpPr>
+        <p:spPr>
+          <a:xfrm>
+            <a:off x="2289131" y="288424"/>
+            <a:ext cx="702455" cy="369332"/>
+          </a:xfrm>
+          <a:prstGeom prst="rect">
+            <a:avLst/>
+          </a:prstGeom>
+          <a:noFill/>
+        </p:spPr>
+        <p:txBody>
+          <a:bodyPr wrap="square" rtlCol="0">
+            <a:spAutoFit/>
+          </a:bodyPr>
+          <a:lstStyle/>
+          <a:p>
+            <a:r>
+              <a:rPr lang="en-US" sz="900"/>
+              <a:t>Backend</a:t>
+            </a:r>
+          </a:p>
+          <a:p>
+            <a:r>
+              <a:rPr lang="en-US" sz="900"/>
+              <a:t>Reference</a:t>
+            </a:r>
+            <a:endParaRPr lang="en-KR" sz="900"/>
+          </a:p>
+        </p:txBody>
+      </p:sp>
+      <p:cxnSp>
+        <p:nvCxnSpPr>
+          <p:cNvPr id="201" name="직선 화살표 연결선 96">
+            <a:extLst>
+              <a:ext uri="{FF2B5EF4-FFF2-40B4-BE49-F238E27FC236}">
+                <a16:creationId xmlns:a16="http://schemas.microsoft.com/office/drawing/2014/main" id="{DABEDF4F-1909-009B-F830-CE5882B16AA6}"/>
+              </a:ext>
+            </a:extLst>
+          </p:cNvPr>
+          <p:cNvCxnSpPr>
+            <a:cxnSpLocks/>
+          </p:cNvCxnSpPr>
+          <p:nvPr/>
+        </p:nvCxnSpPr>
+        <p:spPr>
+          <a:xfrm>
+            <a:off x="993924" y="821050"/>
+            <a:ext cx="323569" cy="0"/>
+          </a:xfrm>
+          <a:prstGeom prst="straightConnector1">
+            <a:avLst/>
+          </a:prstGeom>
+          <a:ln w="12700">
+            <a:solidFill>
+              <a:srgbClr val="C00000"/>
+            </a:solidFill>
+            <a:prstDash val="solid"/>
+            <a:headEnd type="none" w="med" len="med"/>
+            <a:tailEnd type="triangle" w="med" len="med"/>
+          </a:ln>
+        </p:spPr>
+        <p:style>
+          <a:lnRef idx="1">
+            <a:schemeClr val="accent1"/>
+          </a:lnRef>
+          <a:fillRef idx="0">
+            <a:schemeClr val="accent1"/>
+          </a:fillRef>
+          <a:effectRef idx="0">
+            <a:schemeClr val="accent1"/>
+          </a:effectRef>
+          <a:fontRef idx="minor">
+            <a:schemeClr val="tx1"/>
+          </a:fontRef>
+        </p:style>
+      </p:cxnSp>
+      <p:sp>
+        <p:nvSpPr>
+          <p:cNvPr id="202" name="TextBox 201">
+            <a:extLst>
+              <a:ext uri="{FF2B5EF4-FFF2-40B4-BE49-F238E27FC236}">
+                <a16:creationId xmlns:a16="http://schemas.microsoft.com/office/drawing/2014/main" id="{4C94C074-31AC-C5C8-FE14-E596742EA35C}"/>
+              </a:ext>
+            </a:extLst>
+          </p:cNvPr>
+          <p:cNvSpPr txBox="1"/>
+          <p:nvPr/>
+        </p:nvSpPr>
+        <p:spPr>
+          <a:xfrm>
+            <a:off x="2292632" y="635773"/>
+            <a:ext cx="726519" cy="369332"/>
+          </a:xfrm>
+          <a:prstGeom prst="rect">
+            <a:avLst/>
+          </a:prstGeom>
+          <a:noFill/>
+        </p:spPr>
+        <p:txBody>
+          <a:bodyPr wrap="square" rtlCol="0">
+            <a:spAutoFit/>
+          </a:bodyPr>
+          <a:lstStyle/>
+          <a:p>
+            <a:r>
+              <a:rPr lang="en-US" sz="900"/>
+              <a:t>Client C</a:t>
+            </a:r>
+          </a:p>
+          <a:p>
+            <a:r>
+              <a:rPr lang="en-US" sz="900"/>
+              <a:t>Traffic</a:t>
+            </a:r>
+            <a:endParaRPr lang="en-KR" sz="900"/>
+          </a:p>
+        </p:txBody>
+      </p:sp>
+      <p:cxnSp>
+        <p:nvCxnSpPr>
+          <p:cNvPr id="203" name="직선 화살표 연결선 96">
+            <a:extLst>
+              <a:ext uri="{FF2B5EF4-FFF2-40B4-BE49-F238E27FC236}">
+                <a16:creationId xmlns:a16="http://schemas.microsoft.com/office/drawing/2014/main" id="{4831313F-AF64-D729-77A7-08A1F50E28E0}"/>
+              </a:ext>
+            </a:extLst>
+          </p:cNvPr>
+          <p:cNvCxnSpPr>
+            <a:cxnSpLocks/>
+          </p:cNvCxnSpPr>
+          <p:nvPr/>
+        </p:nvCxnSpPr>
+        <p:spPr>
+          <a:xfrm>
+            <a:off x="1996889" y="821862"/>
+            <a:ext cx="323569" cy="0"/>
+          </a:xfrm>
+          <a:prstGeom prst="straightConnector1">
+            <a:avLst/>
+          </a:prstGeom>
+          <a:ln w="12700">
+            <a:solidFill>
+              <a:schemeClr val="accent6"/>
+            </a:solidFill>
+            <a:prstDash val="solid"/>
+            <a:headEnd type="none" w="med" len="med"/>
+            <a:tailEnd type="triangle" w="med" len="med"/>
+          </a:ln>
+        </p:spPr>
+        <p:style>
+          <a:lnRef idx="1">
+            <a:schemeClr val="accent1"/>
+          </a:lnRef>
+          <a:fillRef idx="0">
+            <a:schemeClr val="accent1"/>
+          </a:fillRef>
+          <a:effectRef idx="0">
+            <a:schemeClr val="accent1"/>
+          </a:effectRef>
+          <a:fontRef idx="minor">
+            <a:schemeClr val="tx1"/>
+          </a:fontRef>
+        </p:style>
+      </p:cxnSp>
+      <p:sp>
+        <p:nvSpPr>
+          <p:cNvPr id="6" name="사각형: 둥근 모서리 12">
+            <a:extLst>
+              <a:ext uri="{FF2B5EF4-FFF2-40B4-BE49-F238E27FC236}">
+                <a16:creationId xmlns:a16="http://schemas.microsoft.com/office/drawing/2014/main" id="{8AE1F9BF-5328-33FE-7002-430EAFAA725E}"/>
+              </a:ext>
+            </a:extLst>
+          </p:cNvPr>
+          <p:cNvSpPr/>
+          <p:nvPr/>
+        </p:nvSpPr>
+        <p:spPr>
+          <a:xfrm>
+            <a:off x="4942434" y="452758"/>
+            <a:ext cx="1139438" cy="451511"/>
+          </a:xfrm>
+          <a:prstGeom prst="roundRect">
+            <a:avLst>
+              <a:gd name="adj" fmla="val 14105"/>
+            </a:avLst>
+          </a:prstGeom>
+          <a:solidFill>
+            <a:schemeClr val="bg1">
+              <a:lumMod val="95000"/>
+            </a:schemeClr>
+          </a:solidFill>
+          <a:ln w="12700">
+            <a:headEnd type="none" w="med" len="med"/>
+            <a:tailEnd type="triangle" w="med" len="med"/>
+          </a:ln>
+        </p:spPr>
+        <p:style>
+          <a:lnRef idx="2">
+            <a:schemeClr val="dk1"/>
+          </a:lnRef>
+          <a:fillRef idx="1">
+            <a:schemeClr val="lt1"/>
+          </a:fillRef>
+          <a:effectRef idx="0">
+            <a:schemeClr val="dk1"/>
+          </a:effectRef>
+          <a:fontRef idx="minor">
+            <a:schemeClr val="dk1"/>
+          </a:fontRef>
+        </p:style>
+        <p:txBody>
+          <a:bodyPr rtlCol="0" anchor="ctr"/>
+          <a:lstStyle/>
+          <a:p>
+            <a:pPr algn="ctr"/>
+            <a:r>
+              <a:rPr lang="en-US" altLang="ko-KR" sz="900"/>
+              <a:t>Client C</a:t>
+            </a:r>
+          </a:p>
+          <a:p>
+            <a:pPr algn="ctr"/>
+            <a:r>
+              <a:rPr lang="en-US" altLang="ko-KR" sz="900" b="1"/>
+              <a:t>ReferenceGrant</a:t>
+            </a:r>
+          </a:p>
+        </p:txBody>
+      </p:sp>
+    </p:spTree>
+    <p:extLst>
+      <p:ext uri="{BB962C8B-B14F-4D97-AF65-F5344CB8AC3E}">
+        <p14:creationId xmlns:p14="http://schemas.microsoft.com/office/powerpoint/2010/main" val="213300633"/>
+      </p:ext>
+    </p:extLst>
+  </p:cSld>
+  <p:clrMapOvr>
+    <a:masterClrMapping/>
+  </p:clrMapOvr>
+</p:sld>
+</file>
+
+<file path=ppt/slides/slide5.xml><?xml version="1.0" encoding="utf-8"?>
+<p:sld xmlns:a="http://schemas.openxmlformats.org/drawingml/2006/main" xmlns:r="http://schemas.openxmlformats.org/officeDocument/2006/relationships" xmlns:p="http://schemas.openxmlformats.org/presentationml/2006/main">
+  <p:cSld>
+    <p:spTree>
+      <p:nvGrpSpPr>
+        <p:cNvPr id="1" name="">
+          <a:extLst>
+            <a:ext uri="{FF2B5EF4-FFF2-40B4-BE49-F238E27FC236}">
+              <a16:creationId xmlns:a16="http://schemas.microsoft.com/office/drawing/2014/main" id="{18488A9F-98AC-3C85-6941-865E3D251FC0}"/>
+            </a:ext>
+          </a:extLst>
+        </p:cNvPr>
+        <p:cNvGrpSpPr/>
+        <p:nvPr/>
+      </p:nvGrpSpPr>
+      <p:grpSpPr>
+        <a:xfrm>
+          <a:off x="0" y="0"/>
+          <a:ext cx="0" cy="0"/>
+          <a:chOff x="0" y="0"/>
+          <a:chExt cx="0" cy="0"/>
+        </a:xfrm>
+      </p:grpSpPr>
+      <p:sp>
+        <p:nvSpPr>
+          <p:cNvPr id="2" name="사각형: 둥근 모서리 70">
+            <a:extLst>
+              <a:ext uri="{FF2B5EF4-FFF2-40B4-BE49-F238E27FC236}">
+                <a16:creationId xmlns:a16="http://schemas.microsoft.com/office/drawing/2014/main" id="{9483E504-F26E-2AD4-7564-08C07D885B2A}"/>
+              </a:ext>
+            </a:extLst>
+          </p:cNvPr>
+          <p:cNvSpPr/>
+          <p:nvPr/>
+        </p:nvSpPr>
+        <p:spPr>
+          <a:xfrm>
+            <a:off x="971599" y="1000714"/>
+            <a:ext cx="1800200" cy="892274"/>
+          </a:xfrm>
+          <a:prstGeom prst="roundRect">
+            <a:avLst>
+              <a:gd name="adj" fmla="val 8056"/>
+            </a:avLst>
+          </a:prstGeom>
+          <a:noFill/>
+          <a:ln w="12700">
+            <a:prstDash val="solid"/>
+            <a:headEnd type="none" w="med" len="med"/>
+            <a:tailEnd type="triangle" w="med" len="med"/>
+          </a:ln>
+        </p:spPr>
+        <p:style>
+          <a:lnRef idx="2">
+            <a:schemeClr val="dk1"/>
+          </a:lnRef>
+          <a:fillRef idx="1">
+            <a:schemeClr val="lt1"/>
+          </a:fillRef>
+          <a:effectRef idx="0">
+            <a:schemeClr val="dk1"/>
+          </a:effectRef>
+          <a:fontRef idx="minor">
+            <a:schemeClr val="dk1"/>
+          </a:fontRef>
+        </p:style>
+        <p:txBody>
+          <a:bodyPr rtlCol="0" anchor="t"/>
+          <a:lstStyle/>
+          <a:p>
+            <a:r>
+              <a:rPr lang="en-US" altLang="ko-KR" sz="1000" dirty="0"/>
+              <a:t>Client A </a:t>
+            </a:r>
+            <a:r>
+              <a:rPr lang="en-US" altLang="ko-KR" sz="1000" b="1" dirty="0"/>
+              <a:t>Namespace</a:t>
+            </a:r>
+            <a:endParaRPr lang="ko-KR" altLang="en-US" sz="1000" b="1" dirty="0"/>
+          </a:p>
+        </p:txBody>
+      </p:sp>
+      <p:sp>
+        <p:nvSpPr>
+          <p:cNvPr id="3" name="사각형: 둥근 모서리 70">
+            <a:extLst>
+              <a:ext uri="{FF2B5EF4-FFF2-40B4-BE49-F238E27FC236}">
+                <a16:creationId xmlns:a16="http://schemas.microsoft.com/office/drawing/2014/main" id="{A7FE3898-FA1C-980D-FD90-9BA0D1D36E4A}"/>
+              </a:ext>
+            </a:extLst>
+          </p:cNvPr>
+          <p:cNvSpPr/>
+          <p:nvPr/>
+        </p:nvSpPr>
+        <p:spPr>
+          <a:xfrm>
+            <a:off x="971599" y="2994106"/>
+            <a:ext cx="1800200" cy="1616906"/>
+          </a:xfrm>
+          <a:prstGeom prst="roundRect">
+            <a:avLst>
+              <a:gd name="adj" fmla="val 5325"/>
+            </a:avLst>
+          </a:prstGeom>
+          <a:noFill/>
+          <a:ln w="12700">
+            <a:prstDash val="solid"/>
+            <a:headEnd type="none" w="med" len="med"/>
+            <a:tailEnd type="triangle" w="med" len="med"/>
+          </a:ln>
+        </p:spPr>
+        <p:style>
+          <a:lnRef idx="2">
+            <a:schemeClr val="dk1"/>
+          </a:lnRef>
+          <a:fillRef idx="1">
+            <a:schemeClr val="lt1"/>
+          </a:fillRef>
+          <a:effectRef idx="0">
+            <a:schemeClr val="dk1"/>
+          </a:effectRef>
+          <a:fontRef idx="minor">
+            <a:schemeClr val="dk1"/>
+          </a:fontRef>
+        </p:style>
+        <p:txBody>
+          <a:bodyPr rtlCol="0" anchor="t"/>
+          <a:lstStyle/>
+          <a:p>
+            <a:r>
+              <a:rPr lang="en-US" altLang="ko-KR" sz="1000" dirty="0"/>
+              <a:t>Client C </a:t>
+            </a:r>
+            <a:r>
+              <a:rPr lang="en-US" altLang="ko-KR" sz="1000" b="1" dirty="0"/>
+              <a:t>Namespace</a:t>
+            </a:r>
+            <a:endParaRPr lang="ko-KR" altLang="en-US" sz="1000" b="1" dirty="0"/>
+          </a:p>
+        </p:txBody>
+      </p:sp>
+      <p:sp>
+        <p:nvSpPr>
+          <p:cNvPr id="4" name="사각형: 둥근 모서리 70">
+            <a:extLst>
+              <a:ext uri="{FF2B5EF4-FFF2-40B4-BE49-F238E27FC236}">
+                <a16:creationId xmlns:a16="http://schemas.microsoft.com/office/drawing/2014/main" id="{C7238DC4-2FDE-8B91-9AA7-4FD957707962}"/>
+              </a:ext>
+            </a:extLst>
+          </p:cNvPr>
+          <p:cNvSpPr/>
+          <p:nvPr/>
+        </p:nvSpPr>
+        <p:spPr>
+          <a:xfrm>
+            <a:off x="2987824" y="352643"/>
+            <a:ext cx="4637503" cy="4438214"/>
+          </a:xfrm>
+          <a:prstGeom prst="roundRect">
+            <a:avLst>
+              <a:gd name="adj" fmla="val 2531"/>
+            </a:avLst>
+          </a:prstGeom>
+          <a:noFill/>
+          <a:ln w="12700">
+            <a:prstDash val="solid"/>
+            <a:headEnd type="none" w="med" len="med"/>
+            <a:tailEnd type="triangle" w="med" len="med"/>
+          </a:ln>
+        </p:spPr>
+        <p:style>
+          <a:lnRef idx="2">
+            <a:schemeClr val="dk1"/>
+          </a:lnRef>
+          <a:fillRef idx="1">
+            <a:schemeClr val="lt1"/>
+          </a:fillRef>
+          <a:effectRef idx="0">
+            <a:schemeClr val="dk1"/>
+          </a:effectRef>
+          <a:fontRef idx="minor">
+            <a:schemeClr val="dk1"/>
+          </a:fontRef>
+        </p:style>
+        <p:txBody>
+          <a:bodyPr rtlCol="0" anchor="t"/>
+          <a:lstStyle/>
+          <a:p>
+            <a:pPr algn="r"/>
+            <a:r>
+              <a:rPr lang="en-US" altLang="ko-KR" sz="1000" dirty="0"/>
+              <a:t>Server </a:t>
+            </a:r>
+            <a:r>
+              <a:rPr lang="en-US" altLang="ko-KR" sz="1000" b="1" dirty="0"/>
+              <a:t>Namespace</a:t>
+            </a:r>
+            <a:endParaRPr lang="ko-KR" altLang="en-US" sz="1000" b="1" dirty="0"/>
+          </a:p>
+        </p:txBody>
+      </p:sp>
+      <p:sp>
+        <p:nvSpPr>
+          <p:cNvPr id="5" name="사각형: 둥근 모서리 12">
+            <a:extLst>
+              <a:ext uri="{FF2B5EF4-FFF2-40B4-BE49-F238E27FC236}">
+                <a16:creationId xmlns:a16="http://schemas.microsoft.com/office/drawing/2014/main" id="{E8951FE7-6EAF-4A93-6D81-4A2269E354AA}"/>
+              </a:ext>
+            </a:extLst>
+          </p:cNvPr>
+          <p:cNvSpPr/>
+          <p:nvPr/>
+        </p:nvSpPr>
+        <p:spPr>
+          <a:xfrm>
+            <a:off x="3095263" y="1057319"/>
+            <a:ext cx="3081988" cy="836785"/>
+          </a:xfrm>
+          <a:prstGeom prst="roundRect">
+            <a:avLst>
+              <a:gd name="adj" fmla="val 8995"/>
+            </a:avLst>
+          </a:prstGeom>
+          <a:noFill/>
+          <a:ln w="12700">
+            <a:headEnd type="none" w="med" len="med"/>
+            <a:tailEnd type="triangle" w="med" len="med"/>
+          </a:ln>
+        </p:spPr>
+        <p:style>
+          <a:lnRef idx="2">
+            <a:schemeClr val="dk1"/>
+          </a:lnRef>
+          <a:fillRef idx="1">
+            <a:schemeClr val="lt1"/>
+          </a:fillRef>
+          <a:effectRef idx="0">
+            <a:schemeClr val="dk1"/>
+          </a:effectRef>
+          <a:fontRef idx="minor">
+            <a:schemeClr val="dk1"/>
+          </a:fontRef>
+        </p:style>
+        <p:txBody>
+          <a:bodyPr rtlCol="0" anchor="t"/>
+          <a:lstStyle/>
+          <a:p>
+            <a:pPr algn="ctr"/>
+            <a:r>
+              <a:rPr lang="en-US" altLang="ko-KR" sz="900"/>
+              <a:t>Server </a:t>
+            </a:r>
+            <a:r>
+              <a:rPr lang="en-US" altLang="ko-KR" sz="900" b="1" dirty="0"/>
+              <a:t>Service</a:t>
+            </a:r>
+            <a:endParaRPr lang="ko-KR" altLang="en-US" sz="900" b="1" dirty="0"/>
+          </a:p>
+        </p:txBody>
+      </p:sp>
+      <p:sp>
+        <p:nvSpPr>
+          <p:cNvPr id="11" name="사각형: 둥근 모서리 12">
+            <a:extLst>
+              <a:ext uri="{FF2B5EF4-FFF2-40B4-BE49-F238E27FC236}">
+                <a16:creationId xmlns:a16="http://schemas.microsoft.com/office/drawing/2014/main" id="{738528AA-4261-1045-B2A9-90FE1C5C9D04}"/>
+              </a:ext>
+            </a:extLst>
+          </p:cNvPr>
+          <p:cNvSpPr/>
+          <p:nvPr/>
+        </p:nvSpPr>
+        <p:spPr>
+          <a:xfrm>
+            <a:off x="1518621" y="1341537"/>
+            <a:ext cx="1139438" cy="451511"/>
+          </a:xfrm>
+          <a:prstGeom prst="roundRect">
+            <a:avLst>
+              <a:gd name="adj" fmla="val 14105"/>
+            </a:avLst>
+          </a:prstGeom>
+          <a:noFill/>
+          <a:ln w="12700">
+            <a:headEnd type="none" w="med" len="med"/>
+            <a:tailEnd type="triangle" w="med" len="med"/>
+          </a:ln>
+        </p:spPr>
+        <p:style>
+          <a:lnRef idx="2">
+            <a:schemeClr val="dk1"/>
+          </a:lnRef>
+          <a:fillRef idx="1">
+            <a:schemeClr val="lt1"/>
+          </a:fillRef>
+          <a:effectRef idx="0">
+            <a:schemeClr val="dk1"/>
+          </a:effectRef>
+          <a:fontRef idx="minor">
+            <a:schemeClr val="dk1"/>
+          </a:fontRef>
+        </p:style>
+        <p:txBody>
+          <a:bodyPr rtlCol="0" anchor="ctr"/>
+          <a:lstStyle/>
+          <a:p>
+            <a:pPr algn="ctr"/>
+            <a:r>
+              <a:rPr lang="en-US" altLang="ko-KR" sz="900"/>
+              <a:t>Client A </a:t>
+            </a:r>
+            <a:r>
+              <a:rPr lang="en-US" altLang="ko-KR" sz="900" b="1" dirty="0"/>
+              <a:t>Pod</a:t>
+            </a:r>
+            <a:endParaRPr lang="ko-KR" altLang="en-US" sz="900" b="1" dirty="0"/>
+          </a:p>
+        </p:txBody>
+      </p:sp>
+      <p:sp>
+        <p:nvSpPr>
+          <p:cNvPr id="12" name="사각형: 둥근 모서리 12">
+            <a:extLst>
+              <a:ext uri="{FF2B5EF4-FFF2-40B4-BE49-F238E27FC236}">
+                <a16:creationId xmlns:a16="http://schemas.microsoft.com/office/drawing/2014/main" id="{CFA4CAE6-067F-5560-AC76-F60354BD9C1B}"/>
+              </a:ext>
+            </a:extLst>
+          </p:cNvPr>
+          <p:cNvSpPr/>
+          <p:nvPr/>
+        </p:nvSpPr>
+        <p:spPr>
+          <a:xfrm>
+            <a:off x="1518621" y="4039755"/>
+            <a:ext cx="1139438" cy="451511"/>
+          </a:xfrm>
+          <a:prstGeom prst="roundRect">
+            <a:avLst>
+              <a:gd name="adj" fmla="val 14105"/>
+            </a:avLst>
+          </a:prstGeom>
+          <a:noFill/>
+          <a:ln w="12700">
+            <a:headEnd type="none" w="med" len="med"/>
+            <a:tailEnd type="triangle" w="med" len="med"/>
+          </a:ln>
+        </p:spPr>
+        <p:style>
+          <a:lnRef idx="2">
+            <a:schemeClr val="dk1"/>
+          </a:lnRef>
+          <a:fillRef idx="1">
+            <a:schemeClr val="lt1"/>
+          </a:fillRef>
+          <a:effectRef idx="0">
+            <a:schemeClr val="dk1"/>
+          </a:effectRef>
+          <a:fontRef idx="minor">
+            <a:schemeClr val="dk1"/>
+          </a:fontRef>
+        </p:style>
+        <p:txBody>
+          <a:bodyPr rtlCol="0" anchor="ctr"/>
+          <a:lstStyle/>
+          <a:p>
+            <a:pPr algn="ctr"/>
+            <a:r>
+              <a:rPr lang="en-US" altLang="ko-KR" sz="900"/>
+              <a:t>Client C </a:t>
+            </a:r>
+            <a:r>
+              <a:rPr lang="en-US" altLang="ko-KR" sz="900" b="1" dirty="0"/>
+              <a:t>Pod</a:t>
+            </a:r>
+            <a:endParaRPr lang="ko-KR" altLang="en-US" sz="900" b="1" dirty="0"/>
+          </a:p>
+        </p:txBody>
+      </p:sp>
+      <p:sp>
+        <p:nvSpPr>
+          <p:cNvPr id="17" name="사각형: 둥근 모서리 12">
+            <a:extLst>
+              <a:ext uri="{FF2B5EF4-FFF2-40B4-BE49-F238E27FC236}">
+                <a16:creationId xmlns:a16="http://schemas.microsoft.com/office/drawing/2014/main" id="{20DCD150-BF78-15B3-08E6-8088A0B45CA0}"/>
+              </a:ext>
+            </a:extLst>
+          </p:cNvPr>
+          <p:cNvSpPr/>
+          <p:nvPr/>
+        </p:nvSpPr>
+        <p:spPr>
+          <a:xfrm>
+            <a:off x="3205001" y="1338418"/>
+            <a:ext cx="1330422" cy="451511"/>
+          </a:xfrm>
+          <a:prstGeom prst="roundRect">
+            <a:avLst>
+              <a:gd name="adj" fmla="val 14105"/>
+            </a:avLst>
+          </a:prstGeom>
+          <a:solidFill>
+            <a:schemeClr val="bg1">
+              <a:lumMod val="95000"/>
+            </a:schemeClr>
+          </a:solidFill>
+          <a:ln w="12700">
+            <a:headEnd type="none" w="med" len="med"/>
+            <a:tailEnd type="triangle" w="med" len="med"/>
+          </a:ln>
+        </p:spPr>
+        <p:style>
+          <a:lnRef idx="2">
+            <a:schemeClr val="dk1"/>
+          </a:lnRef>
+          <a:fillRef idx="1">
+            <a:schemeClr val="lt1"/>
+          </a:fillRef>
+          <a:effectRef idx="0">
+            <a:schemeClr val="dk1"/>
+          </a:effectRef>
+          <a:fontRef idx="minor">
+            <a:schemeClr val="dk1"/>
+          </a:fontRef>
+        </p:style>
+        <p:txBody>
+          <a:bodyPr rtlCol="0" anchor="ctr"/>
+          <a:lstStyle/>
+          <a:p>
+            <a:pPr algn="ctr"/>
+            <a:r>
+              <a:rPr lang="en-US" altLang="ko-KR" sz="900" dirty="0"/>
+              <a:t>DNS Name, ClusterIP</a:t>
+            </a:r>
+          </a:p>
+          <a:p>
+            <a:pPr algn="ctr"/>
+            <a:r>
+              <a:rPr lang="en-US" altLang="ko-KR" sz="900" b="1" dirty="0"/>
+              <a:t>Frontend</a:t>
+            </a:r>
+            <a:endParaRPr lang="ko-KR" altLang="en-US" sz="900" b="1" dirty="0"/>
+          </a:p>
+        </p:txBody>
+      </p:sp>
+      <p:sp>
+        <p:nvSpPr>
+          <p:cNvPr id="19" name="사각형: 둥근 모서리 12">
+            <a:extLst>
+              <a:ext uri="{FF2B5EF4-FFF2-40B4-BE49-F238E27FC236}">
+                <a16:creationId xmlns:a16="http://schemas.microsoft.com/office/drawing/2014/main" id="{20B5ED54-B7FA-D732-BD19-A9480015F606}"/>
+              </a:ext>
+            </a:extLst>
+          </p:cNvPr>
+          <p:cNvSpPr/>
+          <p:nvPr/>
+        </p:nvSpPr>
+        <p:spPr>
+          <a:xfrm>
+            <a:off x="4962660" y="1344655"/>
+            <a:ext cx="1104530" cy="445274"/>
+          </a:xfrm>
+          <a:prstGeom prst="roundRect">
+            <a:avLst>
+              <a:gd name="adj" fmla="val 14105"/>
+            </a:avLst>
+          </a:prstGeom>
+          <a:solidFill>
+            <a:schemeClr val="bg1">
+              <a:lumMod val="95000"/>
+            </a:schemeClr>
+          </a:solidFill>
+          <a:ln w="12700">
+            <a:headEnd type="none" w="med" len="med"/>
+            <a:tailEnd type="triangle" w="med" len="med"/>
+          </a:ln>
+        </p:spPr>
+        <p:style>
+          <a:lnRef idx="2">
+            <a:schemeClr val="dk1"/>
+          </a:lnRef>
+          <a:fillRef idx="1">
+            <a:schemeClr val="lt1"/>
+          </a:fillRef>
+          <a:effectRef idx="0">
+            <a:schemeClr val="dk1"/>
+          </a:effectRef>
+          <a:fontRef idx="minor">
+            <a:schemeClr val="dk1"/>
+          </a:fontRef>
+        </p:style>
+        <p:txBody>
+          <a:bodyPr rtlCol="0" anchor="ctr"/>
+          <a:lstStyle/>
+          <a:p>
+            <a:pPr algn="ctr"/>
+            <a:r>
+              <a:rPr lang="en-US" altLang="ko-KR" sz="900" dirty="0"/>
+              <a:t>Endpoint IPs</a:t>
+            </a:r>
+          </a:p>
+          <a:p>
+            <a:pPr algn="ctr"/>
+            <a:r>
+              <a:rPr lang="en-US" altLang="ko-KR" sz="900" b="1" dirty="0"/>
+              <a:t>Backend</a:t>
+            </a:r>
+            <a:endParaRPr lang="ko-KR" altLang="en-US" sz="900" b="1" dirty="0"/>
+          </a:p>
+        </p:txBody>
+      </p:sp>
+      <p:sp>
+        <p:nvSpPr>
+          <p:cNvPr id="21" name="사각형: 둥근 모서리 12">
+            <a:extLst>
+              <a:ext uri="{FF2B5EF4-FFF2-40B4-BE49-F238E27FC236}">
+                <a16:creationId xmlns:a16="http://schemas.microsoft.com/office/drawing/2014/main" id="{651520B1-135F-3E04-B7C8-21FBFE9B6CEA}"/>
+              </a:ext>
+            </a:extLst>
+          </p:cNvPr>
+          <p:cNvSpPr/>
+          <p:nvPr/>
+        </p:nvSpPr>
+        <p:spPr>
+          <a:xfrm>
+            <a:off x="6390504" y="1340841"/>
+            <a:ext cx="1139438" cy="451511"/>
+          </a:xfrm>
+          <a:prstGeom prst="roundRect">
+            <a:avLst>
+              <a:gd name="adj" fmla="val 14105"/>
+            </a:avLst>
+          </a:prstGeom>
+          <a:noFill/>
+          <a:ln w="12700">
+            <a:headEnd type="none" w="med" len="med"/>
+            <a:tailEnd type="triangle" w="med" len="med"/>
+          </a:ln>
+        </p:spPr>
+        <p:style>
+          <a:lnRef idx="2">
+            <a:schemeClr val="dk1"/>
+          </a:lnRef>
+          <a:fillRef idx="1">
+            <a:schemeClr val="lt1"/>
+          </a:fillRef>
+          <a:effectRef idx="0">
+            <a:schemeClr val="dk1"/>
+          </a:effectRef>
+          <a:fontRef idx="minor">
+            <a:schemeClr val="dk1"/>
+          </a:fontRef>
+        </p:style>
+        <p:txBody>
+          <a:bodyPr rtlCol="0" anchor="ctr"/>
+          <a:lstStyle/>
+          <a:p>
+            <a:pPr algn="ctr"/>
+            <a:r>
+              <a:rPr lang="en-US" altLang="ko-KR" sz="900"/>
+              <a:t>Server </a:t>
+            </a:r>
+            <a:r>
+              <a:rPr lang="en-US" altLang="ko-KR" sz="900" b="1" dirty="0"/>
+              <a:t>Deployment</a:t>
+            </a:r>
+            <a:endParaRPr lang="ko-KR" altLang="en-US" sz="900" b="1" dirty="0"/>
+          </a:p>
+        </p:txBody>
+      </p:sp>
+      <p:cxnSp>
+        <p:nvCxnSpPr>
+          <p:cNvPr id="46" name="직선 화살표 연결선 96">
+            <a:extLst>
+              <a:ext uri="{FF2B5EF4-FFF2-40B4-BE49-F238E27FC236}">
+                <a16:creationId xmlns:a16="http://schemas.microsoft.com/office/drawing/2014/main" id="{C75F98C6-225A-E730-1D94-6FE1193E8930}"/>
+              </a:ext>
+            </a:extLst>
+          </p:cNvPr>
+          <p:cNvCxnSpPr>
+            <a:cxnSpLocks/>
+            <a:stCxn id="122" idx="2"/>
+            <a:endCxn id="17" idx="0"/>
+          </p:cNvCxnSpPr>
+          <p:nvPr/>
+        </p:nvCxnSpPr>
+        <p:spPr>
+          <a:xfrm flipH="1">
+            <a:off x="3870212" y="904269"/>
+            <a:ext cx="763273" cy="434149"/>
+          </a:xfrm>
+          <a:prstGeom prst="straightConnector1">
+            <a:avLst/>
+          </a:prstGeom>
+          <a:ln w="12700">
+            <a:solidFill>
+              <a:schemeClr val="tx2"/>
+            </a:solidFill>
+            <a:prstDash val="solid"/>
+            <a:headEnd type="none" w="med" len="med"/>
+            <a:tailEnd type="triangle" w="med" len="med"/>
+          </a:ln>
+        </p:spPr>
+        <p:style>
+          <a:lnRef idx="1">
+            <a:schemeClr val="accent1"/>
+          </a:lnRef>
+          <a:fillRef idx="0">
+            <a:schemeClr val="accent1"/>
+          </a:fillRef>
+          <a:effectRef idx="0">
+            <a:schemeClr val="accent1"/>
+          </a:effectRef>
+          <a:fontRef idx="minor">
+            <a:schemeClr val="tx1"/>
+          </a:fontRef>
+        </p:style>
+      </p:cxnSp>
+      <p:cxnSp>
+        <p:nvCxnSpPr>
+          <p:cNvPr id="49" name="직선 화살표 연결선 96">
+            <a:extLst>
+              <a:ext uri="{FF2B5EF4-FFF2-40B4-BE49-F238E27FC236}">
+                <a16:creationId xmlns:a16="http://schemas.microsoft.com/office/drawing/2014/main" id="{39AC78CD-711A-F6EE-3BF0-AA458FBF14EC}"/>
+              </a:ext>
+            </a:extLst>
+          </p:cNvPr>
+          <p:cNvCxnSpPr>
+            <a:cxnSpLocks/>
+            <a:stCxn id="122" idx="2"/>
+            <a:endCxn id="19" idx="0"/>
+          </p:cNvCxnSpPr>
+          <p:nvPr/>
+        </p:nvCxnSpPr>
+        <p:spPr>
+          <a:xfrm>
+            <a:off x="4633485" y="904269"/>
+            <a:ext cx="881440" cy="440386"/>
+          </a:xfrm>
+          <a:prstGeom prst="straightConnector1">
+            <a:avLst/>
+          </a:prstGeom>
+          <a:ln w="12700">
+            <a:solidFill>
+              <a:schemeClr val="accent3"/>
+            </a:solidFill>
+            <a:prstDash val="solid"/>
+            <a:headEnd type="none" w="med" len="med"/>
+            <a:tailEnd type="triangle" w="med" len="med"/>
+          </a:ln>
+        </p:spPr>
+        <p:style>
+          <a:lnRef idx="1">
+            <a:schemeClr val="accent1"/>
+          </a:lnRef>
+          <a:fillRef idx="0">
+            <a:schemeClr val="accent1"/>
+          </a:fillRef>
+          <a:effectRef idx="0">
+            <a:schemeClr val="accent1"/>
+          </a:effectRef>
+          <a:fontRef idx="minor">
+            <a:schemeClr val="tx1"/>
+          </a:fontRef>
+        </p:style>
+      </p:cxnSp>
+      <p:sp>
+        <p:nvSpPr>
+          <p:cNvPr id="56" name="사각형: 둥근 모서리 12">
+            <a:extLst>
+              <a:ext uri="{FF2B5EF4-FFF2-40B4-BE49-F238E27FC236}">
+                <a16:creationId xmlns:a16="http://schemas.microsoft.com/office/drawing/2014/main" id="{C3E5B67B-BBB8-E615-ED78-9A6B457E5A1D}"/>
+              </a:ext>
+            </a:extLst>
+          </p:cNvPr>
+          <p:cNvSpPr/>
+          <p:nvPr/>
+        </p:nvSpPr>
+        <p:spPr>
+          <a:xfrm>
+            <a:off x="3095263" y="2452219"/>
+            <a:ext cx="3081988" cy="836785"/>
+          </a:xfrm>
+          <a:prstGeom prst="roundRect">
+            <a:avLst>
+              <a:gd name="adj" fmla="val 8995"/>
+            </a:avLst>
+          </a:prstGeom>
+          <a:noFill/>
+          <a:ln w="12700">
+            <a:headEnd type="none" w="med" len="med"/>
+            <a:tailEnd type="triangle" w="med" len="med"/>
+          </a:ln>
+        </p:spPr>
+        <p:style>
+          <a:lnRef idx="2">
+            <a:schemeClr val="dk1"/>
+          </a:lnRef>
+          <a:fillRef idx="1">
+            <a:schemeClr val="lt1"/>
+          </a:fillRef>
+          <a:effectRef idx="0">
+            <a:schemeClr val="dk1"/>
+          </a:effectRef>
+          <a:fontRef idx="minor">
+            <a:schemeClr val="dk1"/>
+          </a:fontRef>
+        </p:style>
+        <p:txBody>
+          <a:bodyPr rtlCol="0" anchor="t"/>
+          <a:lstStyle/>
+          <a:p>
+            <a:pPr algn="ctr"/>
+            <a:r>
+              <a:rPr lang="en-US" altLang="ko-KR" sz="900"/>
+              <a:t>Server Version 1 </a:t>
+            </a:r>
+            <a:r>
+              <a:rPr lang="en-US" altLang="ko-KR" sz="900" b="1" dirty="0"/>
+              <a:t>Service</a:t>
+            </a:r>
+            <a:endParaRPr lang="ko-KR" altLang="en-US" sz="900" b="1" dirty="0"/>
+          </a:p>
+        </p:txBody>
+      </p:sp>
+      <p:sp>
+        <p:nvSpPr>
+          <p:cNvPr id="57" name="사각형: 둥근 모서리 12">
+            <a:extLst>
+              <a:ext uri="{FF2B5EF4-FFF2-40B4-BE49-F238E27FC236}">
+                <a16:creationId xmlns:a16="http://schemas.microsoft.com/office/drawing/2014/main" id="{3495DEC7-C6D4-DFEB-120F-6C15EBE40304}"/>
+              </a:ext>
+            </a:extLst>
+          </p:cNvPr>
+          <p:cNvSpPr/>
+          <p:nvPr/>
+        </p:nvSpPr>
+        <p:spPr>
+          <a:xfrm>
+            <a:off x="3205001" y="2733318"/>
+            <a:ext cx="1330422" cy="451511"/>
+          </a:xfrm>
+          <a:prstGeom prst="roundRect">
+            <a:avLst>
+              <a:gd name="adj" fmla="val 14105"/>
+            </a:avLst>
+          </a:prstGeom>
+          <a:solidFill>
+            <a:schemeClr val="bg1">
+              <a:lumMod val="95000"/>
+            </a:schemeClr>
+          </a:solidFill>
+          <a:ln w="12700">
+            <a:headEnd type="none" w="med" len="med"/>
+            <a:tailEnd type="triangle" w="med" len="med"/>
+          </a:ln>
+        </p:spPr>
+        <p:style>
+          <a:lnRef idx="2">
+            <a:schemeClr val="dk1"/>
+          </a:lnRef>
+          <a:fillRef idx="1">
+            <a:schemeClr val="lt1"/>
+          </a:fillRef>
+          <a:effectRef idx="0">
+            <a:schemeClr val="dk1"/>
+          </a:effectRef>
+          <a:fontRef idx="minor">
+            <a:schemeClr val="dk1"/>
+          </a:fontRef>
+        </p:style>
+        <p:txBody>
+          <a:bodyPr rtlCol="0" anchor="ctr"/>
+          <a:lstStyle/>
+          <a:p>
+            <a:pPr algn="ctr"/>
+            <a:r>
+              <a:rPr lang="en-US" altLang="ko-KR" sz="900" dirty="0"/>
+              <a:t>DNS Name, ClusterIP</a:t>
+            </a:r>
+          </a:p>
+          <a:p>
+            <a:pPr algn="ctr"/>
+            <a:r>
+              <a:rPr lang="en-US" altLang="ko-KR" sz="900" b="1" dirty="0"/>
+              <a:t>Frontend</a:t>
+            </a:r>
+            <a:endParaRPr lang="ko-KR" altLang="en-US" sz="900" b="1" dirty="0"/>
+          </a:p>
+        </p:txBody>
+      </p:sp>
+      <p:sp>
+        <p:nvSpPr>
+          <p:cNvPr id="58" name="사각형: 둥근 모서리 12">
+            <a:extLst>
+              <a:ext uri="{FF2B5EF4-FFF2-40B4-BE49-F238E27FC236}">
+                <a16:creationId xmlns:a16="http://schemas.microsoft.com/office/drawing/2014/main" id="{92E47C6D-3087-DAED-C433-1D2C8E5FD2D5}"/>
+              </a:ext>
+            </a:extLst>
+          </p:cNvPr>
+          <p:cNvSpPr/>
+          <p:nvPr/>
+        </p:nvSpPr>
+        <p:spPr>
+          <a:xfrm>
+            <a:off x="4962660" y="2739555"/>
+            <a:ext cx="1104530" cy="445274"/>
+          </a:xfrm>
+          <a:prstGeom prst="roundRect">
+            <a:avLst>
+              <a:gd name="adj" fmla="val 14105"/>
+            </a:avLst>
+          </a:prstGeom>
+          <a:solidFill>
+            <a:schemeClr val="bg1">
+              <a:lumMod val="95000"/>
+            </a:schemeClr>
+          </a:solidFill>
+          <a:ln w="12700">
+            <a:headEnd type="none" w="med" len="med"/>
+            <a:tailEnd type="triangle" w="med" len="med"/>
+          </a:ln>
+        </p:spPr>
+        <p:style>
+          <a:lnRef idx="2">
+            <a:schemeClr val="dk1"/>
+          </a:lnRef>
+          <a:fillRef idx="1">
+            <a:schemeClr val="lt1"/>
+          </a:fillRef>
+          <a:effectRef idx="0">
+            <a:schemeClr val="dk1"/>
+          </a:effectRef>
+          <a:fontRef idx="minor">
+            <a:schemeClr val="dk1"/>
+          </a:fontRef>
+        </p:style>
+        <p:txBody>
+          <a:bodyPr rtlCol="0" anchor="ctr"/>
+          <a:lstStyle/>
+          <a:p>
+            <a:pPr algn="ctr"/>
+            <a:r>
+              <a:rPr lang="en-US" altLang="ko-KR" sz="900" dirty="0"/>
+              <a:t>Endpoint IPs</a:t>
+            </a:r>
+          </a:p>
+          <a:p>
+            <a:pPr algn="ctr"/>
+            <a:r>
+              <a:rPr lang="en-US" altLang="ko-KR" sz="900" b="1" dirty="0"/>
+              <a:t>Backend</a:t>
+            </a:r>
+            <a:endParaRPr lang="ko-KR" altLang="en-US" sz="900" b="1" dirty="0"/>
+          </a:p>
+        </p:txBody>
+      </p:sp>
+      <p:sp>
+        <p:nvSpPr>
+          <p:cNvPr id="59" name="사각형: 둥근 모서리 12">
+            <a:extLst>
+              <a:ext uri="{FF2B5EF4-FFF2-40B4-BE49-F238E27FC236}">
+                <a16:creationId xmlns:a16="http://schemas.microsoft.com/office/drawing/2014/main" id="{4EEC17BE-0D0A-1A71-07EA-C0B6CD071343}"/>
+              </a:ext>
+            </a:extLst>
+          </p:cNvPr>
+          <p:cNvSpPr/>
+          <p:nvPr/>
+        </p:nvSpPr>
+        <p:spPr>
+          <a:xfrm>
+            <a:off x="6390504" y="2736436"/>
+            <a:ext cx="1139438" cy="451511"/>
+          </a:xfrm>
+          <a:prstGeom prst="roundRect">
+            <a:avLst>
+              <a:gd name="adj" fmla="val 14105"/>
+            </a:avLst>
+          </a:prstGeom>
+          <a:noFill/>
+          <a:ln w="12700">
+            <a:headEnd type="none" w="med" len="med"/>
+            <a:tailEnd type="triangle" w="med" len="med"/>
+          </a:ln>
+        </p:spPr>
+        <p:style>
+          <a:lnRef idx="2">
+            <a:schemeClr val="dk1"/>
+          </a:lnRef>
+          <a:fillRef idx="1">
+            <a:schemeClr val="lt1"/>
+          </a:fillRef>
+          <a:effectRef idx="0">
+            <a:schemeClr val="dk1"/>
+          </a:effectRef>
+          <a:fontRef idx="minor">
+            <a:schemeClr val="dk1"/>
+          </a:fontRef>
+        </p:style>
+        <p:txBody>
+          <a:bodyPr rtlCol="0" anchor="ctr"/>
+          <a:lstStyle/>
+          <a:p>
+            <a:pPr algn="ctr"/>
+            <a:r>
+              <a:rPr lang="en-US" altLang="ko-KR" sz="900"/>
+              <a:t>Server Version 1 </a:t>
+            </a:r>
+            <a:r>
+              <a:rPr lang="en-US" altLang="ko-KR" sz="900" b="1" dirty="0"/>
+              <a:t>Deployment</a:t>
+            </a:r>
+            <a:endParaRPr lang="ko-KR" altLang="en-US" sz="900" b="1" dirty="0"/>
+          </a:p>
+        </p:txBody>
+      </p:sp>
+      <p:sp>
+        <p:nvSpPr>
+          <p:cNvPr id="61" name="사각형: 둥근 모서리 12">
+            <a:extLst>
+              <a:ext uri="{FF2B5EF4-FFF2-40B4-BE49-F238E27FC236}">
+                <a16:creationId xmlns:a16="http://schemas.microsoft.com/office/drawing/2014/main" id="{D886FD8A-8723-7C90-A761-EC31BCE19389}"/>
+              </a:ext>
+            </a:extLst>
+          </p:cNvPr>
+          <p:cNvSpPr/>
+          <p:nvPr/>
+        </p:nvSpPr>
+        <p:spPr>
+          <a:xfrm>
+            <a:off x="1518621" y="3342305"/>
+            <a:ext cx="1139438" cy="451511"/>
+          </a:xfrm>
+          <a:prstGeom prst="roundRect">
+            <a:avLst>
+              <a:gd name="adj" fmla="val 14105"/>
+            </a:avLst>
+          </a:prstGeom>
+          <a:solidFill>
+            <a:schemeClr val="bg1">
+              <a:lumMod val="95000"/>
+            </a:schemeClr>
+          </a:solidFill>
+          <a:ln w="12700">
+            <a:headEnd type="none" w="med" len="med"/>
+            <a:tailEnd type="triangle" w="med" len="med"/>
+          </a:ln>
+        </p:spPr>
+        <p:style>
+          <a:lnRef idx="2">
+            <a:schemeClr val="dk1"/>
+          </a:lnRef>
+          <a:fillRef idx="1">
+            <a:schemeClr val="lt1"/>
+          </a:fillRef>
+          <a:effectRef idx="0">
+            <a:schemeClr val="dk1"/>
+          </a:effectRef>
+          <a:fontRef idx="minor">
+            <a:schemeClr val="dk1"/>
+          </a:fontRef>
+        </p:style>
+        <p:txBody>
+          <a:bodyPr rtlCol="0" anchor="ctr"/>
+          <a:lstStyle/>
+          <a:p>
+            <a:pPr algn="ctr"/>
+            <a:r>
+              <a:rPr lang="en-US" altLang="ko-KR" sz="900"/>
+              <a:t>Server</a:t>
+            </a:r>
+          </a:p>
+          <a:p>
+            <a:pPr algn="ctr"/>
+            <a:r>
+              <a:rPr lang="en-US" altLang="ko-KR" sz="900" b="1"/>
+              <a:t>HTTPRoute</a:t>
+            </a:r>
+          </a:p>
+          <a:p>
+            <a:pPr algn="ctr"/>
+            <a:r>
+              <a:rPr lang="en-US" altLang="ko-KR" sz="900" b="1"/>
+              <a:t>(Consumer)</a:t>
+            </a:r>
+          </a:p>
+        </p:txBody>
+      </p:sp>
+      <p:sp>
+        <p:nvSpPr>
+          <p:cNvPr id="62" name="사각형: 둥근 모서리 12">
+            <a:extLst>
+              <a:ext uri="{FF2B5EF4-FFF2-40B4-BE49-F238E27FC236}">
+                <a16:creationId xmlns:a16="http://schemas.microsoft.com/office/drawing/2014/main" id="{6C60D62C-DADF-C393-F023-11E816F187B2}"/>
+              </a:ext>
+            </a:extLst>
+          </p:cNvPr>
+          <p:cNvSpPr/>
+          <p:nvPr/>
+        </p:nvSpPr>
+        <p:spPr>
+          <a:xfrm>
+            <a:off x="3092491" y="3847119"/>
+            <a:ext cx="3081988" cy="836785"/>
+          </a:xfrm>
+          <a:prstGeom prst="roundRect">
+            <a:avLst>
+              <a:gd name="adj" fmla="val 8995"/>
+            </a:avLst>
+          </a:prstGeom>
+          <a:noFill/>
+          <a:ln w="12700">
+            <a:headEnd type="none" w="med" len="med"/>
+            <a:tailEnd type="triangle" w="med" len="med"/>
+          </a:ln>
+        </p:spPr>
+        <p:style>
+          <a:lnRef idx="2">
+            <a:schemeClr val="dk1"/>
+          </a:lnRef>
+          <a:fillRef idx="1">
+            <a:schemeClr val="lt1"/>
+          </a:fillRef>
+          <a:effectRef idx="0">
+            <a:schemeClr val="dk1"/>
+          </a:effectRef>
+          <a:fontRef idx="minor">
+            <a:schemeClr val="dk1"/>
+          </a:fontRef>
+        </p:style>
+        <p:txBody>
+          <a:bodyPr rtlCol="0" anchor="t"/>
+          <a:lstStyle/>
+          <a:p>
+            <a:pPr algn="ctr"/>
+            <a:r>
+              <a:rPr lang="en-US" altLang="ko-KR" sz="900"/>
+              <a:t>Server Version 2 </a:t>
+            </a:r>
+            <a:r>
+              <a:rPr lang="en-US" altLang="ko-KR" sz="900" b="1" dirty="0"/>
+              <a:t>Service</a:t>
+            </a:r>
+            <a:endParaRPr lang="ko-KR" altLang="en-US" sz="900" b="1" dirty="0"/>
+          </a:p>
+        </p:txBody>
+      </p:sp>
+      <p:sp>
+        <p:nvSpPr>
+          <p:cNvPr id="63" name="사각형: 둥근 모서리 12">
+            <a:extLst>
+              <a:ext uri="{FF2B5EF4-FFF2-40B4-BE49-F238E27FC236}">
+                <a16:creationId xmlns:a16="http://schemas.microsoft.com/office/drawing/2014/main" id="{513321FE-B039-1518-C056-5239AFC3DDD6}"/>
+              </a:ext>
+            </a:extLst>
+          </p:cNvPr>
+          <p:cNvSpPr/>
+          <p:nvPr/>
+        </p:nvSpPr>
+        <p:spPr>
+          <a:xfrm>
+            <a:off x="3202229" y="4128218"/>
+            <a:ext cx="1330422" cy="451511"/>
+          </a:xfrm>
+          <a:prstGeom prst="roundRect">
+            <a:avLst>
+              <a:gd name="adj" fmla="val 14105"/>
+            </a:avLst>
+          </a:prstGeom>
+          <a:solidFill>
+            <a:schemeClr val="bg1">
+              <a:lumMod val="95000"/>
+            </a:schemeClr>
+          </a:solidFill>
+          <a:ln w="12700">
+            <a:headEnd type="none" w="med" len="med"/>
+            <a:tailEnd type="triangle" w="med" len="med"/>
+          </a:ln>
+        </p:spPr>
+        <p:style>
+          <a:lnRef idx="2">
+            <a:schemeClr val="dk1"/>
+          </a:lnRef>
+          <a:fillRef idx="1">
+            <a:schemeClr val="lt1"/>
+          </a:fillRef>
+          <a:effectRef idx="0">
+            <a:schemeClr val="dk1"/>
+          </a:effectRef>
+          <a:fontRef idx="minor">
+            <a:schemeClr val="dk1"/>
+          </a:fontRef>
+        </p:style>
+        <p:txBody>
+          <a:bodyPr rtlCol="0" anchor="ctr"/>
+          <a:lstStyle/>
+          <a:p>
+            <a:pPr algn="ctr"/>
+            <a:r>
+              <a:rPr lang="en-US" altLang="ko-KR" sz="900" dirty="0"/>
+              <a:t>DNS Name, ClusterIP</a:t>
+            </a:r>
+          </a:p>
+          <a:p>
+            <a:pPr algn="ctr"/>
+            <a:r>
+              <a:rPr lang="en-US" altLang="ko-KR" sz="900" b="1" dirty="0"/>
+              <a:t>Frontend</a:t>
+            </a:r>
+            <a:endParaRPr lang="ko-KR" altLang="en-US" sz="900" b="1" dirty="0"/>
+          </a:p>
+        </p:txBody>
+      </p:sp>
+      <p:sp>
+        <p:nvSpPr>
+          <p:cNvPr id="64" name="사각형: 둥근 모서리 12">
+            <a:extLst>
+              <a:ext uri="{FF2B5EF4-FFF2-40B4-BE49-F238E27FC236}">
+                <a16:creationId xmlns:a16="http://schemas.microsoft.com/office/drawing/2014/main" id="{9587D5E1-1526-F6E0-1735-E62C13DB0F6B}"/>
+              </a:ext>
+            </a:extLst>
+          </p:cNvPr>
+          <p:cNvSpPr/>
+          <p:nvPr/>
+        </p:nvSpPr>
+        <p:spPr>
+          <a:xfrm>
+            <a:off x="4959888" y="4134455"/>
+            <a:ext cx="1104530" cy="445274"/>
+          </a:xfrm>
+          <a:prstGeom prst="roundRect">
+            <a:avLst>
+              <a:gd name="adj" fmla="val 14105"/>
+            </a:avLst>
+          </a:prstGeom>
+          <a:solidFill>
+            <a:schemeClr val="bg1">
+              <a:lumMod val="95000"/>
+            </a:schemeClr>
+          </a:solidFill>
+          <a:ln w="12700">
+            <a:headEnd type="none" w="med" len="med"/>
+            <a:tailEnd type="triangle" w="med" len="med"/>
+          </a:ln>
+        </p:spPr>
+        <p:style>
+          <a:lnRef idx="2">
+            <a:schemeClr val="dk1"/>
+          </a:lnRef>
+          <a:fillRef idx="1">
+            <a:schemeClr val="lt1"/>
+          </a:fillRef>
+          <a:effectRef idx="0">
+            <a:schemeClr val="dk1"/>
+          </a:effectRef>
+          <a:fontRef idx="minor">
+            <a:schemeClr val="dk1"/>
+          </a:fontRef>
+        </p:style>
+        <p:txBody>
+          <a:bodyPr rtlCol="0" anchor="ctr"/>
+          <a:lstStyle/>
+          <a:p>
+            <a:pPr algn="ctr"/>
+            <a:r>
+              <a:rPr lang="en-US" altLang="ko-KR" sz="900" dirty="0"/>
+              <a:t>Endpoint IPs</a:t>
+            </a:r>
+          </a:p>
+          <a:p>
+            <a:pPr algn="ctr"/>
+            <a:r>
+              <a:rPr lang="en-US" altLang="ko-KR" sz="900" b="1" dirty="0"/>
+              <a:t>Backend</a:t>
+            </a:r>
+            <a:endParaRPr lang="ko-KR" altLang="en-US" sz="900" b="1" dirty="0"/>
+          </a:p>
+        </p:txBody>
+      </p:sp>
+      <p:sp>
+        <p:nvSpPr>
+          <p:cNvPr id="65" name="사각형: 둥근 모서리 12">
+            <a:extLst>
+              <a:ext uri="{FF2B5EF4-FFF2-40B4-BE49-F238E27FC236}">
+                <a16:creationId xmlns:a16="http://schemas.microsoft.com/office/drawing/2014/main" id="{6B410F47-12F8-28C4-53AB-35E64AE702E6}"/>
+              </a:ext>
+            </a:extLst>
+          </p:cNvPr>
+          <p:cNvSpPr/>
+          <p:nvPr/>
+        </p:nvSpPr>
+        <p:spPr>
+          <a:xfrm>
+            <a:off x="6387732" y="4131336"/>
+            <a:ext cx="1139438" cy="451511"/>
+          </a:xfrm>
+          <a:prstGeom prst="roundRect">
+            <a:avLst>
+              <a:gd name="adj" fmla="val 14105"/>
+            </a:avLst>
+          </a:prstGeom>
+          <a:noFill/>
+          <a:ln w="12700">
+            <a:headEnd type="none" w="med" len="med"/>
+            <a:tailEnd type="triangle" w="med" len="med"/>
+          </a:ln>
+        </p:spPr>
+        <p:style>
+          <a:lnRef idx="2">
+            <a:schemeClr val="dk1"/>
+          </a:lnRef>
+          <a:fillRef idx="1">
+            <a:schemeClr val="lt1"/>
+          </a:fillRef>
+          <a:effectRef idx="0">
+            <a:schemeClr val="dk1"/>
+          </a:effectRef>
+          <a:fontRef idx="minor">
+            <a:schemeClr val="dk1"/>
+          </a:fontRef>
+        </p:style>
+        <p:txBody>
+          <a:bodyPr rtlCol="0" anchor="ctr"/>
+          <a:lstStyle/>
+          <a:p>
+            <a:pPr algn="ctr"/>
+            <a:r>
+              <a:rPr lang="en-US" altLang="ko-KR" sz="900"/>
+              <a:t>Server Version 2 </a:t>
+            </a:r>
+            <a:r>
+              <a:rPr lang="en-US" altLang="ko-KR" sz="900" b="1" dirty="0"/>
+              <a:t>Deployment</a:t>
+            </a:r>
+            <a:endParaRPr lang="ko-KR" altLang="en-US" sz="900" b="1" dirty="0"/>
+          </a:p>
+        </p:txBody>
+      </p:sp>
+      <p:cxnSp>
+        <p:nvCxnSpPr>
+          <p:cNvPr id="70" name="직선 화살표 연결선 96">
+            <a:extLst>
+              <a:ext uri="{FF2B5EF4-FFF2-40B4-BE49-F238E27FC236}">
+                <a16:creationId xmlns:a16="http://schemas.microsoft.com/office/drawing/2014/main" id="{91160A6C-AF30-D283-83BB-97AD983D0479}"/>
+              </a:ext>
+            </a:extLst>
+          </p:cNvPr>
+          <p:cNvCxnSpPr>
+            <a:cxnSpLocks/>
+            <a:stCxn id="61" idx="3"/>
+            <a:endCxn id="17" idx="2"/>
+          </p:cNvCxnSpPr>
+          <p:nvPr/>
+        </p:nvCxnSpPr>
+        <p:spPr>
+          <a:xfrm flipV="1">
+            <a:off x="2658059" y="1789929"/>
+            <a:ext cx="1212153" cy="1778132"/>
+          </a:xfrm>
+          <a:prstGeom prst="straightConnector1">
+            <a:avLst/>
+          </a:prstGeom>
+          <a:ln w="12700">
+            <a:solidFill>
+              <a:schemeClr val="tx2"/>
+            </a:solidFill>
+            <a:prstDash val="solid"/>
+            <a:headEnd type="none" w="med" len="med"/>
+            <a:tailEnd type="triangle" w="med" len="med"/>
+          </a:ln>
+        </p:spPr>
+        <p:style>
+          <a:lnRef idx="1">
+            <a:schemeClr val="accent1"/>
+          </a:lnRef>
+          <a:fillRef idx="0">
+            <a:schemeClr val="accent1"/>
+          </a:fillRef>
+          <a:effectRef idx="0">
+            <a:schemeClr val="accent1"/>
+          </a:effectRef>
+          <a:fontRef idx="minor">
+            <a:schemeClr val="tx1"/>
+          </a:fontRef>
+        </p:style>
+      </p:cxnSp>
+      <p:cxnSp>
+        <p:nvCxnSpPr>
+          <p:cNvPr id="73" name="직선 화살표 연결선 96">
+            <a:extLst>
+              <a:ext uri="{FF2B5EF4-FFF2-40B4-BE49-F238E27FC236}">
+                <a16:creationId xmlns:a16="http://schemas.microsoft.com/office/drawing/2014/main" id="{E4BB9FD3-229C-8737-55D2-FF6DE00C0965}"/>
+              </a:ext>
+            </a:extLst>
+          </p:cNvPr>
+          <p:cNvCxnSpPr>
+            <a:cxnSpLocks/>
+            <a:stCxn id="61" idx="3"/>
+            <a:endCxn id="58" idx="2"/>
+          </p:cNvCxnSpPr>
+          <p:nvPr/>
+        </p:nvCxnSpPr>
+        <p:spPr>
+          <a:xfrm flipV="1">
+            <a:off x="2658059" y="3184829"/>
+            <a:ext cx="2856866" cy="383232"/>
+          </a:xfrm>
+          <a:prstGeom prst="straightConnector1">
+            <a:avLst/>
+          </a:prstGeom>
+          <a:ln w="12700">
+            <a:solidFill>
+              <a:schemeClr val="accent3"/>
+            </a:solidFill>
+            <a:prstDash val="solid"/>
+            <a:headEnd type="none" w="med" len="med"/>
+            <a:tailEnd type="triangle" w="med" len="med"/>
+          </a:ln>
+        </p:spPr>
+        <p:style>
+          <a:lnRef idx="1">
+            <a:schemeClr val="accent1"/>
+          </a:lnRef>
+          <a:fillRef idx="0">
+            <a:schemeClr val="accent1"/>
+          </a:fillRef>
+          <a:effectRef idx="0">
+            <a:schemeClr val="accent1"/>
+          </a:effectRef>
+          <a:fontRef idx="minor">
+            <a:schemeClr val="tx1"/>
+          </a:fontRef>
+        </p:style>
+      </p:cxnSp>
+      <p:cxnSp>
+        <p:nvCxnSpPr>
+          <p:cNvPr id="76" name="직선 화살표 연결선 96">
+            <a:extLst>
+              <a:ext uri="{FF2B5EF4-FFF2-40B4-BE49-F238E27FC236}">
+                <a16:creationId xmlns:a16="http://schemas.microsoft.com/office/drawing/2014/main" id="{F133F9BF-A301-C969-5913-6985303A7D68}"/>
+              </a:ext>
+            </a:extLst>
+          </p:cNvPr>
+          <p:cNvCxnSpPr>
+            <a:cxnSpLocks/>
+            <a:stCxn id="61" idx="3"/>
+            <a:endCxn id="64" idx="0"/>
+          </p:cNvCxnSpPr>
+          <p:nvPr/>
+        </p:nvCxnSpPr>
+        <p:spPr>
+          <a:xfrm>
+            <a:off x="2658059" y="3568061"/>
+            <a:ext cx="2854094" cy="566394"/>
+          </a:xfrm>
+          <a:prstGeom prst="straightConnector1">
+            <a:avLst/>
+          </a:prstGeom>
+          <a:ln w="12700">
+            <a:solidFill>
+              <a:schemeClr val="accent3"/>
+            </a:solidFill>
+            <a:prstDash val="solid"/>
+            <a:headEnd type="none" w="med" len="med"/>
+            <a:tailEnd type="triangle" w="med" len="med"/>
+          </a:ln>
+        </p:spPr>
+        <p:style>
+          <a:lnRef idx="1">
+            <a:schemeClr val="accent1"/>
+          </a:lnRef>
+          <a:fillRef idx="0">
+            <a:schemeClr val="accent1"/>
+          </a:fillRef>
+          <a:effectRef idx="0">
+            <a:schemeClr val="accent1"/>
+          </a:effectRef>
+          <a:fontRef idx="minor">
+            <a:schemeClr val="tx1"/>
+          </a:fontRef>
+        </p:style>
+      </p:cxnSp>
+      <p:cxnSp>
+        <p:nvCxnSpPr>
+          <p:cNvPr id="79" name="직선 화살표 연결선 96">
+            <a:extLst>
+              <a:ext uri="{FF2B5EF4-FFF2-40B4-BE49-F238E27FC236}">
+                <a16:creationId xmlns:a16="http://schemas.microsoft.com/office/drawing/2014/main" id="{CA2FA15C-8D02-937A-A4A7-6A46C9F23BF1}"/>
+              </a:ext>
+            </a:extLst>
+          </p:cNvPr>
+          <p:cNvCxnSpPr>
+            <a:cxnSpLocks/>
+            <a:stCxn id="12" idx="3"/>
+            <a:endCxn id="17" idx="1"/>
+          </p:cNvCxnSpPr>
+          <p:nvPr/>
+        </p:nvCxnSpPr>
+        <p:spPr>
+          <a:xfrm flipV="1">
+            <a:off x="2658059" y="1564174"/>
+            <a:ext cx="546942" cy="2701337"/>
+          </a:xfrm>
+          <a:prstGeom prst="straightConnector1">
+            <a:avLst/>
+          </a:prstGeom>
+          <a:ln w="12700">
+            <a:solidFill>
+              <a:schemeClr val="accent6"/>
+            </a:solidFill>
+            <a:prstDash val="solid"/>
+            <a:headEnd type="none" w="med" len="med"/>
+            <a:tailEnd type="triangle" w="med" len="med"/>
+          </a:ln>
+        </p:spPr>
+        <p:style>
+          <a:lnRef idx="1">
+            <a:schemeClr val="accent1"/>
+          </a:lnRef>
+          <a:fillRef idx="0">
+            <a:schemeClr val="accent1"/>
+          </a:fillRef>
+          <a:effectRef idx="0">
+            <a:schemeClr val="accent1"/>
+          </a:effectRef>
+          <a:fontRef idx="minor">
+            <a:schemeClr val="tx1"/>
+          </a:fontRef>
+        </p:style>
+      </p:cxnSp>
+      <p:cxnSp>
+        <p:nvCxnSpPr>
+          <p:cNvPr id="85" name="직선 화살표 연결선 96">
+            <a:extLst>
+              <a:ext uri="{FF2B5EF4-FFF2-40B4-BE49-F238E27FC236}">
+                <a16:creationId xmlns:a16="http://schemas.microsoft.com/office/drawing/2014/main" id="{ECCF3186-7675-BA58-28F2-3E02F6AC7E34}"/>
+              </a:ext>
+            </a:extLst>
+          </p:cNvPr>
+          <p:cNvCxnSpPr>
+            <a:cxnSpLocks/>
+            <a:stCxn id="64" idx="3"/>
+            <a:endCxn id="65" idx="1"/>
+          </p:cNvCxnSpPr>
+          <p:nvPr/>
+        </p:nvCxnSpPr>
+        <p:spPr>
+          <a:xfrm>
+            <a:off x="6064418" y="4357092"/>
+            <a:ext cx="323314" cy="0"/>
+          </a:xfrm>
+          <a:prstGeom prst="straightConnector1">
+            <a:avLst/>
+          </a:prstGeom>
+          <a:ln w="12700">
+            <a:solidFill>
+              <a:schemeClr val="accent6"/>
+            </a:solidFill>
+            <a:prstDash val="solid"/>
+            <a:headEnd type="none" w="med" len="med"/>
+            <a:tailEnd type="triangle" w="med" len="med"/>
+          </a:ln>
+        </p:spPr>
+        <p:style>
+          <a:lnRef idx="1">
+            <a:schemeClr val="accent1"/>
+          </a:lnRef>
+          <a:fillRef idx="0">
+            <a:schemeClr val="accent1"/>
+          </a:fillRef>
+          <a:effectRef idx="0">
+            <a:schemeClr val="accent1"/>
+          </a:effectRef>
+          <a:fontRef idx="minor">
+            <a:schemeClr val="tx1"/>
+          </a:fontRef>
+        </p:style>
+      </p:cxnSp>
+      <p:cxnSp>
+        <p:nvCxnSpPr>
+          <p:cNvPr id="88" name="직선 화살표 연결선 96">
+            <a:extLst>
+              <a:ext uri="{FF2B5EF4-FFF2-40B4-BE49-F238E27FC236}">
+                <a16:creationId xmlns:a16="http://schemas.microsoft.com/office/drawing/2014/main" id="{050EF3CB-747E-44A9-BA5F-63A1F9D96541}"/>
+              </a:ext>
+            </a:extLst>
+          </p:cNvPr>
+          <p:cNvCxnSpPr>
+            <a:cxnSpLocks/>
+            <a:stCxn id="58" idx="3"/>
+            <a:endCxn id="59" idx="1"/>
+          </p:cNvCxnSpPr>
+          <p:nvPr/>
+        </p:nvCxnSpPr>
+        <p:spPr>
+          <a:xfrm>
+            <a:off x="6067190" y="2962192"/>
+            <a:ext cx="323314" cy="0"/>
+          </a:xfrm>
+          <a:prstGeom prst="straightConnector1">
+            <a:avLst/>
+          </a:prstGeom>
+          <a:ln w="12700">
+            <a:solidFill>
+              <a:schemeClr val="accent6"/>
+            </a:solidFill>
+            <a:prstDash val="solid"/>
+            <a:headEnd type="none" w="med" len="med"/>
+            <a:tailEnd type="triangle" w="med" len="med"/>
+          </a:ln>
+        </p:spPr>
+        <p:style>
+          <a:lnRef idx="1">
+            <a:schemeClr val="accent1"/>
+          </a:lnRef>
+          <a:fillRef idx="0">
+            <a:schemeClr val="accent1"/>
+          </a:fillRef>
+          <a:effectRef idx="0">
+            <a:schemeClr val="accent1"/>
+          </a:effectRef>
+          <a:fontRef idx="minor">
+            <a:schemeClr val="tx1"/>
+          </a:fontRef>
+        </p:style>
+      </p:cxnSp>
+      <p:cxnSp>
+        <p:nvCxnSpPr>
+          <p:cNvPr id="91" name="직선 화살표 연결선 96">
+            <a:extLst>
+              <a:ext uri="{FF2B5EF4-FFF2-40B4-BE49-F238E27FC236}">
+                <a16:creationId xmlns:a16="http://schemas.microsoft.com/office/drawing/2014/main" id="{9CCEC718-A0F5-AE2E-4331-B2D2A336D7D4}"/>
+              </a:ext>
+            </a:extLst>
+          </p:cNvPr>
+          <p:cNvCxnSpPr>
+            <a:cxnSpLocks/>
+            <a:stCxn id="11" idx="3"/>
+            <a:endCxn id="17" idx="1"/>
+          </p:cNvCxnSpPr>
+          <p:nvPr/>
+        </p:nvCxnSpPr>
+        <p:spPr>
+          <a:xfrm flipV="1">
+            <a:off x="2658059" y="1564174"/>
+            <a:ext cx="546942" cy="3119"/>
+          </a:xfrm>
+          <a:prstGeom prst="straightConnector1">
+            <a:avLst/>
+          </a:prstGeom>
+          <a:ln w="12700">
+            <a:solidFill>
+              <a:srgbClr val="C00000"/>
+            </a:solidFill>
+            <a:prstDash val="solid"/>
+            <a:headEnd type="none" w="med" len="med"/>
+            <a:tailEnd type="triangle" w="med" len="med"/>
+          </a:ln>
+        </p:spPr>
+        <p:style>
+          <a:lnRef idx="1">
+            <a:schemeClr val="accent1"/>
+          </a:lnRef>
+          <a:fillRef idx="0">
+            <a:schemeClr val="accent1"/>
+          </a:fillRef>
+          <a:effectRef idx="0">
+            <a:schemeClr val="accent1"/>
+          </a:effectRef>
+          <a:fontRef idx="minor">
+            <a:schemeClr val="tx1"/>
+          </a:fontRef>
+        </p:style>
+      </p:cxnSp>
+      <p:cxnSp>
+        <p:nvCxnSpPr>
+          <p:cNvPr id="95" name="직선 화살표 연결선 96">
+            <a:extLst>
+              <a:ext uri="{FF2B5EF4-FFF2-40B4-BE49-F238E27FC236}">
+                <a16:creationId xmlns:a16="http://schemas.microsoft.com/office/drawing/2014/main" id="{0C5C6F66-3A99-79A9-4085-73B0634380A8}"/>
+              </a:ext>
+            </a:extLst>
+          </p:cNvPr>
+          <p:cNvCxnSpPr>
+            <a:cxnSpLocks/>
+            <a:stCxn id="19" idx="3"/>
+            <a:endCxn id="21" idx="1"/>
+          </p:cNvCxnSpPr>
+          <p:nvPr/>
+        </p:nvCxnSpPr>
+        <p:spPr>
+          <a:xfrm flipV="1">
+            <a:off x="6067190" y="1566597"/>
+            <a:ext cx="323314" cy="695"/>
+          </a:xfrm>
+          <a:prstGeom prst="straightConnector1">
+            <a:avLst/>
+          </a:prstGeom>
+          <a:ln w="12700">
+            <a:solidFill>
+              <a:srgbClr val="C00000"/>
+            </a:solidFill>
+            <a:prstDash val="solid"/>
+            <a:headEnd type="none" w="med" len="med"/>
+            <a:tailEnd type="triangle" w="med" len="med"/>
+          </a:ln>
+        </p:spPr>
+        <p:style>
+          <a:lnRef idx="1">
+            <a:schemeClr val="accent1"/>
+          </a:lnRef>
+          <a:fillRef idx="0">
+            <a:schemeClr val="accent1"/>
+          </a:fillRef>
+          <a:effectRef idx="0">
+            <a:schemeClr val="accent1"/>
+          </a:effectRef>
+          <a:fontRef idx="minor">
+            <a:schemeClr val="tx1"/>
+          </a:fontRef>
+        </p:style>
+      </p:cxnSp>
+      <p:sp>
+        <p:nvSpPr>
+          <p:cNvPr id="111" name="사각형: 둥근 모서리 70">
+            <a:extLst>
+              <a:ext uri="{FF2B5EF4-FFF2-40B4-BE49-F238E27FC236}">
+                <a16:creationId xmlns:a16="http://schemas.microsoft.com/office/drawing/2014/main" id="{B0A3BE14-C78A-B50E-EB0A-B6CA190C292D}"/>
+              </a:ext>
+            </a:extLst>
+          </p:cNvPr>
+          <p:cNvSpPr/>
+          <p:nvPr/>
+        </p:nvSpPr>
+        <p:spPr>
+          <a:xfrm>
+            <a:off x="971599" y="1997410"/>
+            <a:ext cx="1800200" cy="892274"/>
+          </a:xfrm>
+          <a:prstGeom prst="roundRect">
+            <a:avLst>
+              <a:gd name="adj" fmla="val 8056"/>
+            </a:avLst>
+          </a:prstGeom>
+          <a:noFill/>
+          <a:ln w="12700">
+            <a:prstDash val="solid"/>
+            <a:headEnd type="none" w="med" len="med"/>
+            <a:tailEnd type="triangle" w="med" len="med"/>
+          </a:ln>
+        </p:spPr>
+        <p:style>
+          <a:lnRef idx="2">
+            <a:schemeClr val="dk1"/>
+          </a:lnRef>
+          <a:fillRef idx="1">
+            <a:schemeClr val="lt1"/>
+          </a:fillRef>
+          <a:effectRef idx="0">
+            <a:schemeClr val="dk1"/>
+          </a:effectRef>
+          <a:fontRef idx="minor">
+            <a:schemeClr val="dk1"/>
+          </a:fontRef>
+        </p:style>
+        <p:txBody>
+          <a:bodyPr rtlCol="0" anchor="t"/>
+          <a:lstStyle/>
+          <a:p>
+            <a:r>
+              <a:rPr lang="en-US" altLang="ko-KR" sz="1000" dirty="0"/>
+              <a:t>Client B </a:t>
+            </a:r>
+            <a:r>
+              <a:rPr lang="en-US" altLang="ko-KR" sz="1000" b="1" dirty="0"/>
+              <a:t>Namespace</a:t>
+            </a:r>
+            <a:endParaRPr lang="ko-KR" altLang="en-US" sz="1000" b="1" dirty="0"/>
+          </a:p>
+        </p:txBody>
+      </p:sp>
+      <p:sp>
+        <p:nvSpPr>
+          <p:cNvPr id="112" name="사각형: 둥근 모서리 12">
+            <a:extLst>
+              <a:ext uri="{FF2B5EF4-FFF2-40B4-BE49-F238E27FC236}">
+                <a16:creationId xmlns:a16="http://schemas.microsoft.com/office/drawing/2014/main" id="{B183F9FC-2E4B-F484-8106-81992FAFF593}"/>
+              </a:ext>
+            </a:extLst>
+          </p:cNvPr>
+          <p:cNvSpPr/>
+          <p:nvPr/>
+        </p:nvSpPr>
+        <p:spPr>
+          <a:xfrm>
+            <a:off x="1518621" y="2338233"/>
+            <a:ext cx="1139438" cy="451511"/>
+          </a:xfrm>
+          <a:prstGeom prst="roundRect">
+            <a:avLst>
+              <a:gd name="adj" fmla="val 14105"/>
+            </a:avLst>
+          </a:prstGeom>
+          <a:noFill/>
+          <a:ln w="12700">
+            <a:headEnd type="none" w="med" len="med"/>
+            <a:tailEnd type="triangle" w="med" len="med"/>
+          </a:ln>
+        </p:spPr>
+        <p:style>
+          <a:lnRef idx="2">
+            <a:schemeClr val="dk1"/>
+          </a:lnRef>
+          <a:fillRef idx="1">
+            <a:schemeClr val="lt1"/>
+          </a:fillRef>
+          <a:effectRef idx="0">
+            <a:schemeClr val="dk1"/>
+          </a:effectRef>
+          <a:fontRef idx="minor">
+            <a:schemeClr val="dk1"/>
+          </a:fontRef>
+        </p:style>
+        <p:txBody>
+          <a:bodyPr rtlCol="0" anchor="ctr"/>
+          <a:lstStyle/>
+          <a:p>
+            <a:pPr algn="ctr"/>
+            <a:r>
+              <a:rPr lang="en-US" altLang="ko-KR" sz="900"/>
+              <a:t>Client B </a:t>
+            </a:r>
+            <a:r>
+              <a:rPr lang="en-US" altLang="ko-KR" sz="900" b="1" dirty="0"/>
+              <a:t>Pod</a:t>
+            </a:r>
+            <a:endParaRPr lang="ko-KR" altLang="en-US" sz="900" b="1" dirty="0"/>
+          </a:p>
+        </p:txBody>
+      </p:sp>
+      <p:sp>
+        <p:nvSpPr>
+          <p:cNvPr id="122" name="사각형: 둥근 모서리 12">
+            <a:extLst>
+              <a:ext uri="{FF2B5EF4-FFF2-40B4-BE49-F238E27FC236}">
+                <a16:creationId xmlns:a16="http://schemas.microsoft.com/office/drawing/2014/main" id="{6A3CB1F8-B368-731E-31B0-6103C39DB7F2}"/>
+              </a:ext>
+            </a:extLst>
+          </p:cNvPr>
+          <p:cNvSpPr/>
+          <p:nvPr/>
+        </p:nvSpPr>
+        <p:spPr>
+          <a:xfrm>
+            <a:off x="4063766" y="452758"/>
+            <a:ext cx="1139438" cy="451511"/>
+          </a:xfrm>
+          <a:prstGeom prst="roundRect">
+            <a:avLst>
+              <a:gd name="adj" fmla="val 14105"/>
+            </a:avLst>
+          </a:prstGeom>
+          <a:solidFill>
+            <a:schemeClr val="bg1">
+              <a:lumMod val="95000"/>
+            </a:schemeClr>
+          </a:solidFill>
+          <a:ln w="12700">
+            <a:headEnd type="none" w="med" len="med"/>
+            <a:tailEnd type="triangle" w="med" len="med"/>
+          </a:ln>
+        </p:spPr>
+        <p:style>
+          <a:lnRef idx="2">
+            <a:schemeClr val="dk1"/>
+          </a:lnRef>
+          <a:fillRef idx="1">
+            <a:schemeClr val="lt1"/>
+          </a:fillRef>
+          <a:effectRef idx="0">
+            <a:schemeClr val="dk1"/>
+          </a:effectRef>
+          <a:fontRef idx="minor">
+            <a:schemeClr val="dk1"/>
+          </a:fontRef>
+        </p:style>
+        <p:txBody>
+          <a:bodyPr rtlCol="0" anchor="ctr"/>
+          <a:lstStyle/>
+          <a:p>
+            <a:pPr algn="ctr"/>
+            <a:r>
+              <a:rPr lang="en-US" altLang="ko-KR" sz="900"/>
+              <a:t>Server</a:t>
+            </a:r>
+          </a:p>
+          <a:p>
+            <a:pPr algn="ctr"/>
+            <a:r>
+              <a:rPr lang="en-US" altLang="ko-KR" sz="900" b="1"/>
+              <a:t>HTTPRoute</a:t>
+            </a:r>
+          </a:p>
+          <a:p>
+            <a:pPr algn="ctr"/>
+            <a:r>
+              <a:rPr lang="en-US" altLang="ko-KR" sz="900" b="1"/>
+              <a:t>(Producer)</a:t>
+            </a:r>
+          </a:p>
+        </p:txBody>
+      </p:sp>
+      <p:cxnSp>
+        <p:nvCxnSpPr>
+          <p:cNvPr id="125" name="직선 화살표 연결선 96">
+            <a:extLst>
+              <a:ext uri="{FF2B5EF4-FFF2-40B4-BE49-F238E27FC236}">
+                <a16:creationId xmlns:a16="http://schemas.microsoft.com/office/drawing/2014/main" id="{9EFB79B0-4B62-699E-85DB-C98219436804}"/>
+              </a:ext>
+            </a:extLst>
+          </p:cNvPr>
+          <p:cNvCxnSpPr>
+            <a:cxnSpLocks/>
+            <a:stCxn id="112" idx="3"/>
+            <a:endCxn id="17" idx="1"/>
+          </p:cNvCxnSpPr>
+          <p:nvPr/>
+        </p:nvCxnSpPr>
+        <p:spPr>
+          <a:xfrm flipV="1">
+            <a:off x="2658059" y="1564174"/>
+            <a:ext cx="546942" cy="999815"/>
+          </a:xfrm>
+          <a:prstGeom prst="straightConnector1">
+            <a:avLst/>
+          </a:prstGeom>
+          <a:ln w="12700">
+            <a:solidFill>
+              <a:srgbClr val="C00000"/>
+            </a:solidFill>
+            <a:prstDash val="solid"/>
+            <a:headEnd type="none" w="med" len="med"/>
+            <a:tailEnd type="triangle" w="med" len="med"/>
+          </a:ln>
+        </p:spPr>
+        <p:style>
+          <a:lnRef idx="1">
+            <a:schemeClr val="accent1"/>
+          </a:lnRef>
+          <a:fillRef idx="0">
+            <a:schemeClr val="accent1"/>
+          </a:fillRef>
+          <a:effectRef idx="0">
+            <a:schemeClr val="accent1"/>
+          </a:effectRef>
+          <a:fontRef idx="minor">
+            <a:schemeClr val="tx1"/>
+          </a:fontRef>
+        </p:style>
+      </p:cxnSp>
+      <p:cxnSp>
+        <p:nvCxnSpPr>
+          <p:cNvPr id="128" name="직선 화살표 연결선 96">
+            <a:extLst>
+              <a:ext uri="{FF2B5EF4-FFF2-40B4-BE49-F238E27FC236}">
+                <a16:creationId xmlns:a16="http://schemas.microsoft.com/office/drawing/2014/main" id="{E740C718-DE92-BED2-FA01-9B8BEC0B92F7}"/>
+              </a:ext>
+            </a:extLst>
+          </p:cNvPr>
+          <p:cNvCxnSpPr>
+            <a:cxnSpLocks/>
+            <a:stCxn id="17" idx="3"/>
+            <a:endCxn id="19" idx="1"/>
+          </p:cNvCxnSpPr>
+          <p:nvPr/>
+        </p:nvCxnSpPr>
+        <p:spPr>
+          <a:xfrm>
+            <a:off x="4535423" y="1564174"/>
+            <a:ext cx="427237" cy="3118"/>
+          </a:xfrm>
+          <a:prstGeom prst="straightConnector1">
+            <a:avLst/>
+          </a:prstGeom>
+          <a:ln w="12700">
+            <a:solidFill>
+              <a:srgbClr val="C00000"/>
+            </a:solidFill>
+            <a:prstDash val="solid"/>
+            <a:headEnd type="none" w="med" len="med"/>
+            <a:tailEnd type="triangle" w="med" len="med"/>
+          </a:ln>
+        </p:spPr>
+        <p:style>
+          <a:lnRef idx="1">
+            <a:schemeClr val="accent1"/>
+          </a:lnRef>
+          <a:fillRef idx="0">
+            <a:schemeClr val="accent1"/>
+          </a:fillRef>
+          <a:effectRef idx="0">
+            <a:schemeClr val="accent1"/>
+          </a:effectRef>
+          <a:fontRef idx="minor">
+            <a:schemeClr val="tx1"/>
+          </a:fontRef>
+        </p:style>
+      </p:cxnSp>
+      <p:cxnSp>
+        <p:nvCxnSpPr>
+          <p:cNvPr id="144" name="직선 화살표 연결선 96">
+            <a:extLst>
+              <a:ext uri="{FF2B5EF4-FFF2-40B4-BE49-F238E27FC236}">
+                <a16:creationId xmlns:a16="http://schemas.microsoft.com/office/drawing/2014/main" id="{2EB8415D-3B00-9CF8-A356-B6E9159DF1A9}"/>
+              </a:ext>
+            </a:extLst>
+          </p:cNvPr>
+          <p:cNvCxnSpPr>
+            <a:cxnSpLocks/>
+            <a:stCxn id="17" idx="3"/>
+            <a:endCxn id="58" idx="1"/>
+          </p:cNvCxnSpPr>
+          <p:nvPr/>
+        </p:nvCxnSpPr>
+        <p:spPr>
+          <a:xfrm>
+            <a:off x="4535423" y="1564174"/>
+            <a:ext cx="427237" cy="1398018"/>
+          </a:xfrm>
+          <a:prstGeom prst="straightConnector1">
+            <a:avLst/>
+          </a:prstGeom>
+          <a:ln w="12700">
+            <a:solidFill>
+              <a:schemeClr val="accent6"/>
+            </a:solidFill>
+            <a:prstDash val="solid"/>
+            <a:headEnd type="none" w="med" len="med"/>
+            <a:tailEnd type="triangle" w="med" len="med"/>
+          </a:ln>
+        </p:spPr>
+        <p:style>
+          <a:lnRef idx="1">
+            <a:schemeClr val="accent1"/>
+          </a:lnRef>
+          <a:fillRef idx="0">
+            <a:schemeClr val="accent1"/>
+          </a:fillRef>
+          <a:effectRef idx="0">
+            <a:schemeClr val="accent1"/>
+          </a:effectRef>
+          <a:fontRef idx="minor">
+            <a:schemeClr val="tx1"/>
+          </a:fontRef>
+        </p:style>
+      </p:cxnSp>
+      <p:cxnSp>
+        <p:nvCxnSpPr>
+          <p:cNvPr id="147" name="직선 화살표 연결선 96">
+            <a:extLst>
+              <a:ext uri="{FF2B5EF4-FFF2-40B4-BE49-F238E27FC236}">
+                <a16:creationId xmlns:a16="http://schemas.microsoft.com/office/drawing/2014/main" id="{F05EEF92-D324-CDF1-2C27-1FF8F563D1DE}"/>
+              </a:ext>
+            </a:extLst>
+          </p:cNvPr>
+          <p:cNvCxnSpPr>
+            <a:cxnSpLocks/>
+            <a:stCxn id="17" idx="3"/>
+            <a:endCxn id="64" idx="1"/>
+          </p:cNvCxnSpPr>
+          <p:nvPr/>
+        </p:nvCxnSpPr>
+        <p:spPr>
+          <a:xfrm>
+            <a:off x="4535423" y="1564174"/>
+            <a:ext cx="424465" cy="2792918"/>
+          </a:xfrm>
+          <a:prstGeom prst="straightConnector1">
+            <a:avLst/>
+          </a:prstGeom>
+          <a:ln w="12700">
+            <a:solidFill>
+              <a:schemeClr val="accent6"/>
+            </a:solidFill>
+            <a:prstDash val="solid"/>
+            <a:headEnd type="none" w="med" len="med"/>
+            <a:tailEnd type="triangle" w="med" len="med"/>
+          </a:ln>
+        </p:spPr>
+        <p:style>
+          <a:lnRef idx="1">
+            <a:schemeClr val="accent1"/>
+          </a:lnRef>
+          <a:fillRef idx="0">
+            <a:schemeClr val="accent1"/>
+          </a:fillRef>
+          <a:effectRef idx="0">
+            <a:schemeClr val="accent1"/>
+          </a:effectRef>
+          <a:fontRef idx="minor">
+            <a:schemeClr val="tx1"/>
+          </a:fontRef>
+        </p:style>
+      </p:cxnSp>
+      <p:cxnSp>
+        <p:nvCxnSpPr>
+          <p:cNvPr id="193" name="직선 화살표 연결선 96">
+            <a:extLst>
+              <a:ext uri="{FF2B5EF4-FFF2-40B4-BE49-F238E27FC236}">
+                <a16:creationId xmlns:a16="http://schemas.microsoft.com/office/drawing/2014/main" id="{1BF1E73A-9AD2-9E43-CACE-5EABB0A885CD}"/>
+              </a:ext>
+            </a:extLst>
+          </p:cNvPr>
+          <p:cNvCxnSpPr>
+            <a:cxnSpLocks/>
+          </p:cNvCxnSpPr>
+          <p:nvPr/>
+        </p:nvCxnSpPr>
+        <p:spPr>
+          <a:xfrm>
+            <a:off x="994672" y="476915"/>
+            <a:ext cx="323569" cy="0"/>
+          </a:xfrm>
+          <a:prstGeom prst="straightConnector1">
+            <a:avLst/>
+          </a:prstGeom>
+          <a:ln w="12700">
+            <a:solidFill>
+              <a:schemeClr val="tx2"/>
+            </a:solidFill>
+            <a:prstDash val="solid"/>
+            <a:headEnd type="none" w="med" len="med"/>
+            <a:tailEnd type="triangle" w="med" len="med"/>
+          </a:ln>
+        </p:spPr>
+        <p:style>
+          <a:lnRef idx="1">
+            <a:schemeClr val="accent1"/>
+          </a:lnRef>
+          <a:fillRef idx="0">
+            <a:schemeClr val="accent1"/>
+          </a:fillRef>
+          <a:effectRef idx="0">
+            <a:schemeClr val="accent1"/>
+          </a:effectRef>
+          <a:fontRef idx="minor">
+            <a:schemeClr val="tx1"/>
+          </a:fontRef>
+        </p:style>
+      </p:cxnSp>
+      <p:sp>
+        <p:nvSpPr>
+          <p:cNvPr id="194" name="TextBox 193">
+            <a:extLst>
+              <a:ext uri="{FF2B5EF4-FFF2-40B4-BE49-F238E27FC236}">
+                <a16:creationId xmlns:a16="http://schemas.microsoft.com/office/drawing/2014/main" id="{6294F60B-F1AE-CF33-C269-BAFD4312C687}"/>
+              </a:ext>
+            </a:extLst>
+          </p:cNvPr>
+          <p:cNvSpPr txBox="1"/>
+          <p:nvPr/>
+        </p:nvSpPr>
+        <p:spPr>
+          <a:xfrm>
+            <a:off x="1290415" y="282902"/>
+            <a:ext cx="702455" cy="369332"/>
+          </a:xfrm>
+          <a:prstGeom prst="rect">
+            <a:avLst/>
+          </a:prstGeom>
+          <a:noFill/>
+        </p:spPr>
+        <p:txBody>
+          <a:bodyPr wrap="square" rtlCol="0">
+            <a:spAutoFit/>
+          </a:bodyPr>
+          <a:lstStyle/>
+          <a:p>
+            <a:r>
+              <a:rPr lang="en-US" sz="900"/>
+              <a:t>Fronted</a:t>
+            </a:r>
+          </a:p>
+          <a:p>
+            <a:r>
+              <a:rPr lang="en-US" sz="900"/>
+              <a:t>Reference</a:t>
+            </a:r>
+            <a:endParaRPr lang="en-KR" sz="900"/>
+          </a:p>
+        </p:txBody>
+      </p:sp>
+      <p:sp>
+        <p:nvSpPr>
+          <p:cNvPr id="198" name="TextBox 197">
+            <a:extLst>
+              <a:ext uri="{FF2B5EF4-FFF2-40B4-BE49-F238E27FC236}">
+                <a16:creationId xmlns:a16="http://schemas.microsoft.com/office/drawing/2014/main" id="{8F718BB6-97C2-BFE0-A4F8-7CEB6713B4BF}"/>
+              </a:ext>
+            </a:extLst>
+          </p:cNvPr>
+          <p:cNvSpPr txBox="1"/>
+          <p:nvPr/>
+        </p:nvSpPr>
+        <p:spPr>
+          <a:xfrm>
+            <a:off x="1289667" y="634961"/>
+            <a:ext cx="726519" cy="369332"/>
+          </a:xfrm>
+          <a:prstGeom prst="rect">
+            <a:avLst/>
+          </a:prstGeom>
+          <a:noFill/>
+        </p:spPr>
+        <p:txBody>
+          <a:bodyPr wrap="square" rtlCol="0">
+            <a:spAutoFit/>
+          </a:bodyPr>
+          <a:lstStyle/>
+          <a:p>
+            <a:r>
+              <a:rPr lang="en-US" sz="900"/>
+              <a:t>Client A/B</a:t>
+            </a:r>
+          </a:p>
+          <a:p>
+            <a:r>
+              <a:rPr lang="en-US" sz="900"/>
+              <a:t>Traffic</a:t>
+            </a:r>
+            <a:endParaRPr lang="en-KR" sz="900"/>
+          </a:p>
+        </p:txBody>
+      </p:sp>
+      <p:cxnSp>
+        <p:nvCxnSpPr>
+          <p:cNvPr id="199" name="직선 화살표 연결선 96">
+            <a:extLst>
+              <a:ext uri="{FF2B5EF4-FFF2-40B4-BE49-F238E27FC236}">
+                <a16:creationId xmlns:a16="http://schemas.microsoft.com/office/drawing/2014/main" id="{72A256FD-E857-E21B-C099-E75E36BFBB97}"/>
+              </a:ext>
+            </a:extLst>
+          </p:cNvPr>
+          <p:cNvCxnSpPr>
+            <a:cxnSpLocks/>
+          </p:cNvCxnSpPr>
+          <p:nvPr/>
+        </p:nvCxnSpPr>
+        <p:spPr>
+          <a:xfrm>
+            <a:off x="1993388" y="482437"/>
+            <a:ext cx="323569" cy="0"/>
+          </a:xfrm>
+          <a:prstGeom prst="straightConnector1">
+            <a:avLst/>
+          </a:prstGeom>
+          <a:ln w="12700">
+            <a:solidFill>
+              <a:schemeClr val="accent3"/>
+            </a:solidFill>
+            <a:prstDash val="solid"/>
+            <a:headEnd type="none" w="med" len="med"/>
+            <a:tailEnd type="triangle" w="med" len="med"/>
+          </a:ln>
+        </p:spPr>
+        <p:style>
+          <a:lnRef idx="1">
+            <a:schemeClr val="accent1"/>
+          </a:lnRef>
+          <a:fillRef idx="0">
+            <a:schemeClr val="accent1"/>
+          </a:fillRef>
+          <a:effectRef idx="0">
+            <a:schemeClr val="accent1"/>
+          </a:effectRef>
+          <a:fontRef idx="minor">
+            <a:schemeClr val="tx1"/>
+          </a:fontRef>
+        </p:style>
+      </p:cxnSp>
+      <p:sp>
+        <p:nvSpPr>
+          <p:cNvPr id="200" name="TextBox 199">
+            <a:extLst>
+              <a:ext uri="{FF2B5EF4-FFF2-40B4-BE49-F238E27FC236}">
+                <a16:creationId xmlns:a16="http://schemas.microsoft.com/office/drawing/2014/main" id="{68F471A7-DF10-DA85-DCE3-2F9936915703}"/>
+              </a:ext>
+            </a:extLst>
+          </p:cNvPr>
+          <p:cNvSpPr txBox="1"/>
+          <p:nvPr/>
+        </p:nvSpPr>
+        <p:spPr>
+          <a:xfrm>
+            <a:off x="2289131" y="288424"/>
+            <a:ext cx="702455" cy="369332"/>
+          </a:xfrm>
+          <a:prstGeom prst="rect">
+            <a:avLst/>
+          </a:prstGeom>
+          <a:noFill/>
+        </p:spPr>
+        <p:txBody>
+          <a:bodyPr wrap="square" rtlCol="0">
+            <a:spAutoFit/>
+          </a:bodyPr>
+          <a:lstStyle/>
+          <a:p>
+            <a:r>
+              <a:rPr lang="en-US" sz="900"/>
+              <a:t>Backend</a:t>
+            </a:r>
+          </a:p>
+          <a:p>
+            <a:r>
+              <a:rPr lang="en-US" sz="900"/>
+              <a:t>Reference</a:t>
+            </a:r>
+            <a:endParaRPr lang="en-KR" sz="900"/>
+          </a:p>
+        </p:txBody>
+      </p:sp>
+      <p:cxnSp>
+        <p:nvCxnSpPr>
+          <p:cNvPr id="201" name="직선 화살표 연결선 96">
+            <a:extLst>
+              <a:ext uri="{FF2B5EF4-FFF2-40B4-BE49-F238E27FC236}">
+                <a16:creationId xmlns:a16="http://schemas.microsoft.com/office/drawing/2014/main" id="{6916C1F4-FFBB-29C8-DB37-AF61F72B9575}"/>
+              </a:ext>
+            </a:extLst>
+          </p:cNvPr>
+          <p:cNvCxnSpPr>
+            <a:cxnSpLocks/>
+          </p:cNvCxnSpPr>
+          <p:nvPr/>
+        </p:nvCxnSpPr>
+        <p:spPr>
+          <a:xfrm>
+            <a:off x="993924" y="821050"/>
+            <a:ext cx="323569" cy="0"/>
+          </a:xfrm>
+          <a:prstGeom prst="straightConnector1">
+            <a:avLst/>
+          </a:prstGeom>
+          <a:ln w="12700">
+            <a:solidFill>
+              <a:srgbClr val="C00000"/>
+            </a:solidFill>
+            <a:prstDash val="solid"/>
+            <a:headEnd type="none" w="med" len="med"/>
+            <a:tailEnd type="triangle" w="med" len="med"/>
+          </a:ln>
+        </p:spPr>
+        <p:style>
+          <a:lnRef idx="1">
+            <a:schemeClr val="accent1"/>
+          </a:lnRef>
+          <a:fillRef idx="0">
+            <a:schemeClr val="accent1"/>
+          </a:fillRef>
+          <a:effectRef idx="0">
+            <a:schemeClr val="accent1"/>
+          </a:effectRef>
+          <a:fontRef idx="minor">
+            <a:schemeClr val="tx1"/>
+          </a:fontRef>
+        </p:style>
+      </p:cxnSp>
+      <p:sp>
+        <p:nvSpPr>
+          <p:cNvPr id="202" name="TextBox 201">
+            <a:extLst>
+              <a:ext uri="{FF2B5EF4-FFF2-40B4-BE49-F238E27FC236}">
+                <a16:creationId xmlns:a16="http://schemas.microsoft.com/office/drawing/2014/main" id="{4800D812-F072-802A-4996-1F49BD08739D}"/>
+              </a:ext>
+            </a:extLst>
+          </p:cNvPr>
+          <p:cNvSpPr txBox="1"/>
+          <p:nvPr/>
+        </p:nvSpPr>
+        <p:spPr>
+          <a:xfrm>
+            <a:off x="2292632" y="635773"/>
+            <a:ext cx="726519" cy="369332"/>
+          </a:xfrm>
+          <a:prstGeom prst="rect">
+            <a:avLst/>
+          </a:prstGeom>
+          <a:noFill/>
+        </p:spPr>
+        <p:txBody>
+          <a:bodyPr wrap="square" rtlCol="0">
+            <a:spAutoFit/>
+          </a:bodyPr>
+          <a:lstStyle/>
+          <a:p>
+            <a:r>
+              <a:rPr lang="en-US" sz="900"/>
+              <a:t>Client C</a:t>
+            </a:r>
+          </a:p>
+          <a:p>
+            <a:r>
+              <a:rPr lang="en-US" sz="900"/>
+              <a:t>Traffic</a:t>
+            </a:r>
+            <a:endParaRPr lang="en-KR" sz="900"/>
+          </a:p>
+        </p:txBody>
+      </p:sp>
+      <p:cxnSp>
+        <p:nvCxnSpPr>
+          <p:cNvPr id="203" name="직선 화살표 연결선 96">
+            <a:extLst>
+              <a:ext uri="{FF2B5EF4-FFF2-40B4-BE49-F238E27FC236}">
+                <a16:creationId xmlns:a16="http://schemas.microsoft.com/office/drawing/2014/main" id="{58F13455-C6C2-7157-68C8-3F3E78B5795D}"/>
+              </a:ext>
+            </a:extLst>
+          </p:cNvPr>
+          <p:cNvCxnSpPr>
+            <a:cxnSpLocks/>
+          </p:cNvCxnSpPr>
+          <p:nvPr/>
+        </p:nvCxnSpPr>
+        <p:spPr>
+          <a:xfrm>
+            <a:off x="1996889" y="821862"/>
+            <a:ext cx="323569" cy="0"/>
+          </a:xfrm>
+          <a:prstGeom prst="straightConnector1">
+            <a:avLst/>
+          </a:prstGeom>
+          <a:ln w="12700">
+            <a:solidFill>
+              <a:schemeClr val="accent6"/>
+            </a:solidFill>
+            <a:prstDash val="solid"/>
+            <a:headEnd type="none" w="med" len="med"/>
+            <a:tailEnd type="triangle" w="med" len="med"/>
+          </a:ln>
+        </p:spPr>
+        <p:style>
+          <a:lnRef idx="1">
+            <a:schemeClr val="accent1"/>
+          </a:lnRef>
+          <a:fillRef idx="0">
+            <a:schemeClr val="accent1"/>
+          </a:fillRef>
+          <a:effectRef idx="0">
+            <a:schemeClr val="accent1"/>
+          </a:effectRef>
+          <a:fontRef idx="minor">
+            <a:schemeClr val="tx1"/>
+          </a:fontRef>
+        </p:style>
+      </p:cxnSp>
+    </p:spTree>
+    <p:extLst>
+      <p:ext uri="{BB962C8B-B14F-4D97-AF65-F5344CB8AC3E}">
+        <p14:creationId xmlns:p14="http://schemas.microsoft.com/office/powerpoint/2010/main" val="3618307342"/>
+      </p:ext>
+    </p:extLst>
+  </p:cSld>
+  <p:clrMapOvr>
+    <a:masterClrMapping/>
+  </p:clrMapOvr>
+</p:sld>
+</file>
+
+<file path=ppt/slides/slide6.xml><?xml version="1.0" encoding="utf-8"?>
+<p:sld xmlns:a="http://schemas.openxmlformats.org/drawingml/2006/main" xmlns:r="http://schemas.openxmlformats.org/officeDocument/2006/relationships" xmlns:p="http://schemas.openxmlformats.org/presentationml/2006/main">
+  <p:cSld>
+    <p:spTree>
+      <p:nvGrpSpPr>
+        <p:cNvPr id="1" name="">
+          <a:extLst>
+            <a:ext uri="{FF2B5EF4-FFF2-40B4-BE49-F238E27FC236}">
               <a16:creationId xmlns:a16="http://schemas.microsoft.com/office/drawing/2014/main" id="{DD637DD3-F30D-5CB7-19AE-AE9D5B749D1C}"/>
             </a:ext>
           </a:extLst>
@@ -7780,7 +15686,7 @@
 </p:sld>
 </file>
 
-<file path=ppt/slides/slide4.xml><?xml version="1.0" encoding="utf-8"?>
+<file path=ppt/slides/slide7.xml><?xml version="1.0" encoding="utf-8"?>
 <p:sld xmlns:a="http://schemas.openxmlformats.org/drawingml/2006/main" xmlns:r="http://schemas.openxmlformats.org/officeDocument/2006/relationships" xmlns:p="http://schemas.openxmlformats.org/presentationml/2006/main">
   <p:cSld>
     <p:spTree>

--- a/content/docs/theory-analysis/kubernetes-gateway-api-gamma/images/images.pptx
+++ b/content/docs/theory-analysis/kubernetes-gateway-api-gamma/images/images.pptx
@@ -6216,14 +6216,14 @@
           <p:cNvCxnSpPr>
             <a:cxnSpLocks/>
             <a:stCxn id="6" idx="3"/>
-            <a:endCxn id="5" idx="0"/>
+            <a:endCxn id="56" idx="0"/>
           </p:cNvCxnSpPr>
           <p:nvPr/>
         </p:nvCxnSpPr>
         <p:spPr>
           <a:xfrm>
             <a:off x="4437233" y="678514"/>
-            <a:ext cx="199024" cy="378805"/>
+            <a:ext cx="199024" cy="1773705"/>
           </a:xfrm>
           <a:prstGeom prst="straightConnector1">
             <a:avLst/>
@@ -6388,6 +6388,54 @@
           </a:p>
         </p:txBody>
       </p:sp>
+      <p:cxnSp>
+        <p:nvCxnSpPr>
+          <p:cNvPr id="10" name="직선 화살표 연결선 96">
+            <a:extLst>
+              <a:ext uri="{FF2B5EF4-FFF2-40B4-BE49-F238E27FC236}">
+                <a16:creationId xmlns:a16="http://schemas.microsoft.com/office/drawing/2014/main" id="{B8CD6875-703B-6FF9-A31D-5C51192C3EE0}"/>
+              </a:ext>
+            </a:extLst>
+          </p:cNvPr>
+          <p:cNvCxnSpPr>
+            <a:cxnSpLocks/>
+            <a:stCxn id="6" idx="3"/>
+            <a:endCxn id="62" idx="0"/>
+          </p:cNvCxnSpPr>
+          <p:nvPr/>
+        </p:nvCxnSpPr>
+        <p:spPr>
+          <a:xfrm>
+            <a:off x="4437233" y="678514"/>
+            <a:ext cx="196252" cy="3168605"/>
+          </a:xfrm>
+          <a:prstGeom prst="straightConnector1">
+            <a:avLst/>
+          </a:prstGeom>
+          <a:ln w="12700">
+            <a:solidFill>
+              <a:schemeClr val="accent5"/>
+            </a:solidFill>
+            <a:prstDash val="solid"/>
+            <a:headEnd type="none" w="med" len="med"/>
+            <a:tailEnd type="triangle" w="med" len="med"/>
+          </a:ln>
+        </p:spPr>
+        <p:style>
+          <a:lnRef idx="1">
+            <a:schemeClr val="accent1"/>
+          </a:lnRef>
+          <a:fillRef idx="0">
+            <a:schemeClr val="accent1"/>
+          </a:fillRef>
+          <a:effectRef idx="0">
+            <a:schemeClr val="accent1"/>
+          </a:effectRef>
+          <a:fontRef idx="minor">
+            <a:schemeClr val="tx1"/>
+          </a:fontRef>
+        </p:style>
+      </p:cxnSp>
     </p:spTree>
     <p:extLst>
       <p:ext uri="{BB962C8B-B14F-4D97-AF65-F5344CB8AC3E}">

--- a/content/docs/theory-analysis/kubernetes-gateway-api-gamma/images/images.pptx
+++ b/content/docs/theory-analysis/kubernetes-gateway-api-gamma/images/images.pptx
@@ -5,16 +5,18 @@
     <p:sldMasterId id="2147483648" r:id="rId1"/>
   </p:sldMasterIdLst>
   <p:notesMasterIdLst>
-    <p:notesMasterId r:id="rId9"/>
+    <p:notesMasterId r:id="rId11"/>
   </p:notesMasterIdLst>
   <p:sldIdLst>
     <p:sldId id="437" r:id="rId2"/>
-    <p:sldId id="440" r:id="rId3"/>
-    <p:sldId id="445" r:id="rId4"/>
-    <p:sldId id="444" r:id="rId5"/>
-    <p:sldId id="443" r:id="rId6"/>
-    <p:sldId id="442" r:id="rId7"/>
-    <p:sldId id="441" r:id="rId8"/>
+    <p:sldId id="447" r:id="rId3"/>
+    <p:sldId id="440" r:id="rId4"/>
+    <p:sldId id="446" r:id="rId5"/>
+    <p:sldId id="445" r:id="rId6"/>
+    <p:sldId id="444" r:id="rId7"/>
+    <p:sldId id="443" r:id="rId8"/>
+    <p:sldId id="442" r:id="rId9"/>
+    <p:sldId id="441" r:id="rId10"/>
   </p:sldIdLst>
   <p:sldSz cx="9144000" cy="5143500" type="screen16x9"/>
   <p:notesSz cx="6858000" cy="9144000"/>
@@ -219,7 +221,7 @@
           <a:p>
             <a:fld id="{6CD5550B-26C4-49A9-A5BA-636EF7BE6CE9}" type="datetimeFigureOut">
               <a:rPr lang="ko-KR" altLang="en-US" smtClean="0"/>
-              <a:t>2026. 10. 4.</a:t>
+              <a:t>2026. 10. 6.</a:t>
             </a:fld>
             <a:endParaRPr lang="ko-KR" altLang="en-US"/>
           </a:p>
@@ -578,6 +580,222 @@
         <p:cNvPr id="1" name="">
           <a:extLst>
             <a:ext uri="{FF2B5EF4-FFF2-40B4-BE49-F238E27FC236}">
+              <a16:creationId xmlns:a16="http://schemas.microsoft.com/office/drawing/2014/main" id="{3C869E8E-ED06-C666-5B1D-5263E3464EE5}"/>
+            </a:ext>
+          </a:extLst>
+        </p:cNvPr>
+        <p:cNvGrpSpPr/>
+        <p:nvPr/>
+      </p:nvGrpSpPr>
+      <p:grpSpPr>
+        <a:xfrm>
+          <a:off x="0" y="0"/>
+          <a:ext cx="0" cy="0"/>
+          <a:chOff x="0" y="0"/>
+          <a:chExt cx="0" cy="0"/>
+        </a:xfrm>
+      </p:grpSpPr>
+      <p:sp>
+        <p:nvSpPr>
+          <p:cNvPr id="2" name="슬라이드 이미지 개체 틀 1">
+            <a:extLst>
+              <a:ext uri="{FF2B5EF4-FFF2-40B4-BE49-F238E27FC236}">
+                <a16:creationId xmlns:a16="http://schemas.microsoft.com/office/drawing/2014/main" id="{86B9D7A4-E57A-3083-87F8-D9E24050F225}"/>
+              </a:ext>
+            </a:extLst>
+          </p:cNvPr>
+          <p:cNvSpPr>
+            <a:spLocks noGrp="1" noRot="1" noChangeAspect="1"/>
+          </p:cNvSpPr>
+          <p:nvPr>
+            <p:ph type="sldImg"/>
+          </p:nvPr>
+        </p:nvSpPr>
+        <p:spPr/>
+      </p:sp>
+      <p:sp>
+        <p:nvSpPr>
+          <p:cNvPr id="3" name="슬라이드 노트 개체 틀 2">
+            <a:extLst>
+              <a:ext uri="{FF2B5EF4-FFF2-40B4-BE49-F238E27FC236}">
+                <a16:creationId xmlns:a16="http://schemas.microsoft.com/office/drawing/2014/main" id="{78D3A388-F934-52A9-6A29-B99BF1A0197C}"/>
+              </a:ext>
+            </a:extLst>
+          </p:cNvPr>
+          <p:cNvSpPr>
+            <a:spLocks noGrp="1"/>
+          </p:cNvSpPr>
+          <p:nvPr>
+            <p:ph type="body" idx="1"/>
+          </p:nvPr>
+        </p:nvSpPr>
+        <p:spPr/>
+        <p:txBody>
+          <a:bodyPr/>
+          <a:lstStyle/>
+          <a:p>
+            <a:endParaRPr kumimoji="1" lang="ko-KR" altLang="en-US"/>
+          </a:p>
+        </p:txBody>
+      </p:sp>
+      <p:sp>
+        <p:nvSpPr>
+          <p:cNvPr id="4" name="슬라이드 번호 개체 틀 3">
+            <a:extLst>
+              <a:ext uri="{FF2B5EF4-FFF2-40B4-BE49-F238E27FC236}">
+                <a16:creationId xmlns:a16="http://schemas.microsoft.com/office/drawing/2014/main" id="{47084B3C-68F2-0848-CB78-E077976C3807}"/>
+              </a:ext>
+            </a:extLst>
+          </p:cNvPr>
+          <p:cNvSpPr>
+            <a:spLocks noGrp="1"/>
+          </p:cNvSpPr>
+          <p:nvPr>
+            <p:ph type="sldNum" sz="quarter" idx="5"/>
+          </p:nvPr>
+        </p:nvSpPr>
+        <p:spPr/>
+        <p:txBody>
+          <a:bodyPr/>
+          <a:lstStyle/>
+          <a:p>
+            <a:fld id="{BA5DFA43-8D57-47FB-BC46-057616015C3B}" type="slidenum">
+              <a:rPr lang="ko-KR" altLang="en-US" smtClean="0"/>
+              <a:t>2</a:t>
+            </a:fld>
+            <a:endParaRPr lang="ko-KR" altLang="en-US"/>
+          </a:p>
+        </p:txBody>
+      </p:sp>
+    </p:spTree>
+    <p:extLst>
+      <p:ext uri="{BB962C8B-B14F-4D97-AF65-F5344CB8AC3E}">
+        <p14:creationId xmlns:p14="http://schemas.microsoft.com/office/powerpoint/2010/main" val="1392128086"/>
+      </p:ext>
+    </p:extLst>
+  </p:cSld>
+  <p:clrMapOvr>
+    <a:masterClrMapping/>
+  </p:clrMapOvr>
+</p:notes>
+</file>
+
+<file path=ppt/notesSlides/notesSlide3.xml><?xml version="1.0" encoding="utf-8"?>
+<p:notes xmlns:a="http://schemas.openxmlformats.org/drawingml/2006/main" xmlns:r="http://schemas.openxmlformats.org/officeDocument/2006/relationships" xmlns:p="http://schemas.openxmlformats.org/presentationml/2006/main">
+  <p:cSld>
+    <p:spTree>
+      <p:nvGrpSpPr>
+        <p:cNvPr id="1" name="">
+          <a:extLst>
+            <a:ext uri="{FF2B5EF4-FFF2-40B4-BE49-F238E27FC236}">
+              <a16:creationId xmlns:a16="http://schemas.microsoft.com/office/drawing/2014/main" id="{AAF47A2E-3E61-C7ED-2435-842AE6B979C0}"/>
+            </a:ext>
+          </a:extLst>
+        </p:cNvPr>
+        <p:cNvGrpSpPr/>
+        <p:nvPr/>
+      </p:nvGrpSpPr>
+      <p:grpSpPr>
+        <a:xfrm>
+          <a:off x="0" y="0"/>
+          <a:ext cx="0" cy="0"/>
+          <a:chOff x="0" y="0"/>
+          <a:chExt cx="0" cy="0"/>
+        </a:xfrm>
+      </p:grpSpPr>
+      <p:sp>
+        <p:nvSpPr>
+          <p:cNvPr id="2" name="슬라이드 이미지 개체 틀 1">
+            <a:extLst>
+              <a:ext uri="{FF2B5EF4-FFF2-40B4-BE49-F238E27FC236}">
+                <a16:creationId xmlns:a16="http://schemas.microsoft.com/office/drawing/2014/main" id="{EDFC4DCC-44CF-303C-A7C5-FB27026C52EC}"/>
+              </a:ext>
+            </a:extLst>
+          </p:cNvPr>
+          <p:cNvSpPr>
+            <a:spLocks noGrp="1" noRot="1" noChangeAspect="1"/>
+          </p:cNvSpPr>
+          <p:nvPr>
+            <p:ph type="sldImg"/>
+          </p:nvPr>
+        </p:nvSpPr>
+        <p:spPr/>
+      </p:sp>
+      <p:sp>
+        <p:nvSpPr>
+          <p:cNvPr id="3" name="슬라이드 노트 개체 틀 2">
+            <a:extLst>
+              <a:ext uri="{FF2B5EF4-FFF2-40B4-BE49-F238E27FC236}">
+                <a16:creationId xmlns:a16="http://schemas.microsoft.com/office/drawing/2014/main" id="{E8AB0C47-6740-E3D0-93B5-FBC110BCC5AD}"/>
+              </a:ext>
+            </a:extLst>
+          </p:cNvPr>
+          <p:cNvSpPr>
+            <a:spLocks noGrp="1"/>
+          </p:cNvSpPr>
+          <p:nvPr>
+            <p:ph type="body" idx="1"/>
+          </p:nvPr>
+        </p:nvSpPr>
+        <p:spPr/>
+        <p:txBody>
+          <a:bodyPr/>
+          <a:lstStyle/>
+          <a:p>
+            <a:endParaRPr kumimoji="1" lang="ko-KR" altLang="en-US"/>
+          </a:p>
+        </p:txBody>
+      </p:sp>
+      <p:sp>
+        <p:nvSpPr>
+          <p:cNvPr id="4" name="슬라이드 번호 개체 틀 3">
+            <a:extLst>
+              <a:ext uri="{FF2B5EF4-FFF2-40B4-BE49-F238E27FC236}">
+                <a16:creationId xmlns:a16="http://schemas.microsoft.com/office/drawing/2014/main" id="{64378FC4-7B6B-F65B-7ED2-F854EC433FB1}"/>
+              </a:ext>
+            </a:extLst>
+          </p:cNvPr>
+          <p:cNvSpPr>
+            <a:spLocks noGrp="1"/>
+          </p:cNvSpPr>
+          <p:nvPr>
+            <p:ph type="sldNum" sz="quarter" idx="5"/>
+          </p:nvPr>
+        </p:nvSpPr>
+        <p:spPr/>
+        <p:txBody>
+          <a:bodyPr/>
+          <a:lstStyle/>
+          <a:p>
+            <a:fld id="{BA5DFA43-8D57-47FB-BC46-057616015C3B}" type="slidenum">
+              <a:rPr lang="ko-KR" altLang="en-US" smtClean="0"/>
+              <a:t>4</a:t>
+            </a:fld>
+            <a:endParaRPr lang="ko-KR" altLang="en-US"/>
+          </a:p>
+        </p:txBody>
+      </p:sp>
+    </p:spTree>
+    <p:extLst>
+      <p:ext uri="{BB962C8B-B14F-4D97-AF65-F5344CB8AC3E}">
+        <p14:creationId xmlns:p14="http://schemas.microsoft.com/office/powerpoint/2010/main" val="3002575145"/>
+      </p:ext>
+    </p:extLst>
+  </p:cSld>
+  <p:clrMapOvr>
+    <a:masterClrMapping/>
+  </p:clrMapOvr>
+</p:notes>
+</file>
+
+<file path=ppt/notesSlides/notesSlide4.xml><?xml version="1.0" encoding="utf-8"?>
+<p:notes xmlns:a="http://schemas.openxmlformats.org/drawingml/2006/main" xmlns:r="http://schemas.openxmlformats.org/officeDocument/2006/relationships" xmlns:p="http://schemas.openxmlformats.org/presentationml/2006/main">
+  <p:cSld>
+    <p:spTree>
+      <p:nvGrpSpPr>
+        <p:cNvPr id="1" name="">
+          <a:extLst>
+            <a:ext uri="{FF2B5EF4-FFF2-40B4-BE49-F238E27FC236}">
               <a16:creationId xmlns:a16="http://schemas.microsoft.com/office/drawing/2014/main" id="{D14DC6EA-E860-8A3E-EEC0-77454F5E0683}"/>
             </a:ext>
           </a:extLst>
@@ -659,7 +877,7 @@
           <a:p>
             <a:fld id="{BA5DFA43-8D57-47FB-BC46-057616015C3B}" type="slidenum">
               <a:rPr lang="ko-KR" altLang="en-US" smtClean="0"/>
-              <a:t>3</a:t>
+              <a:t>5</a:t>
             </a:fld>
             <a:endParaRPr lang="ko-KR" altLang="en-US"/>
           </a:p>
@@ -678,7 +896,7 @@
 </p:notes>
 </file>
 
-<file path=ppt/notesSlides/notesSlide3.xml><?xml version="1.0" encoding="utf-8"?>
+<file path=ppt/notesSlides/notesSlide5.xml><?xml version="1.0" encoding="utf-8"?>
 <p:notes xmlns:a="http://schemas.openxmlformats.org/drawingml/2006/main" xmlns:r="http://schemas.openxmlformats.org/officeDocument/2006/relationships" xmlns:p="http://schemas.openxmlformats.org/presentationml/2006/main">
   <p:cSld>
     <p:spTree>
@@ -767,7 +985,7 @@
           <a:p>
             <a:fld id="{BA5DFA43-8D57-47FB-BC46-057616015C3B}" type="slidenum">
               <a:rPr lang="ko-KR" altLang="en-US" smtClean="0"/>
-              <a:t>4</a:t>
+              <a:t>6</a:t>
             </a:fld>
             <a:endParaRPr lang="ko-KR" altLang="en-US"/>
           </a:p>
@@ -786,7 +1004,7 @@
 </p:notes>
 </file>
 
-<file path=ppt/notesSlides/notesSlide4.xml><?xml version="1.0" encoding="utf-8"?>
+<file path=ppt/notesSlides/notesSlide6.xml><?xml version="1.0" encoding="utf-8"?>
 <p:notes xmlns:a="http://schemas.openxmlformats.org/drawingml/2006/main" xmlns:r="http://schemas.openxmlformats.org/officeDocument/2006/relationships" xmlns:p="http://schemas.openxmlformats.org/presentationml/2006/main">
   <p:cSld>
     <p:spTree>
@@ -875,7 +1093,7 @@
           <a:p>
             <a:fld id="{BA5DFA43-8D57-47FB-BC46-057616015C3B}" type="slidenum">
               <a:rPr lang="ko-KR" altLang="en-US" smtClean="0"/>
-              <a:t>5</a:t>
+              <a:t>7</a:t>
             </a:fld>
             <a:endParaRPr lang="ko-KR" altLang="en-US"/>
           </a:p>
@@ -1073,7 +1291,7 @@
           <a:p>
             <a:fld id="{FB30EDBD-1C2D-4C1E-B459-B60219FAB484}" type="datetimeFigureOut">
               <a:rPr lang="ko-KR" altLang="en-US" smtClean="0"/>
-              <a:t>2026. 10. 4.</a:t>
+              <a:t>2026. 10. 6.</a:t>
             </a:fld>
             <a:endParaRPr lang="ko-KR" altLang="en-US"/>
           </a:p>
@@ -1236,7 +1454,7 @@
           <a:p>
             <a:fld id="{FB30EDBD-1C2D-4C1E-B459-B60219FAB484}" type="datetimeFigureOut">
               <a:rPr lang="ko-KR" altLang="en-US" smtClean="0"/>
-              <a:t>2026. 10. 4.</a:t>
+              <a:t>2026. 10. 6.</a:t>
             </a:fld>
             <a:endParaRPr lang="ko-KR" altLang="en-US"/>
           </a:p>
@@ -1409,7 +1627,7 @@
           <a:p>
             <a:fld id="{FB30EDBD-1C2D-4C1E-B459-B60219FAB484}" type="datetimeFigureOut">
               <a:rPr lang="ko-KR" altLang="en-US" smtClean="0"/>
-              <a:t>2026. 10. 4.</a:t>
+              <a:t>2026. 10. 6.</a:t>
             </a:fld>
             <a:endParaRPr lang="ko-KR" altLang="en-US"/>
           </a:p>
@@ -1572,7 +1790,7 @@
           <a:p>
             <a:fld id="{FB30EDBD-1C2D-4C1E-B459-B60219FAB484}" type="datetimeFigureOut">
               <a:rPr lang="ko-KR" altLang="en-US" smtClean="0"/>
-              <a:t>2026. 10. 4.</a:t>
+              <a:t>2026. 10. 6.</a:t>
             </a:fld>
             <a:endParaRPr lang="ko-KR" altLang="en-US"/>
           </a:p>
@@ -1812,7 +2030,7 @@
           <a:p>
             <a:fld id="{FB30EDBD-1C2D-4C1E-B459-B60219FAB484}" type="datetimeFigureOut">
               <a:rPr lang="ko-KR" altLang="en-US" smtClean="0"/>
-              <a:t>2026. 10. 4.</a:t>
+              <a:t>2026. 10. 6.</a:t>
             </a:fld>
             <a:endParaRPr lang="ko-KR" altLang="en-US"/>
           </a:p>
@@ -2092,7 +2310,7 @@
           <a:p>
             <a:fld id="{FB30EDBD-1C2D-4C1E-B459-B60219FAB484}" type="datetimeFigureOut">
               <a:rPr lang="ko-KR" altLang="en-US" smtClean="0"/>
-              <a:t>2026. 10. 4.</a:t>
+              <a:t>2026. 10. 6.</a:t>
             </a:fld>
             <a:endParaRPr lang="ko-KR" altLang="en-US"/>
           </a:p>
@@ -2506,7 +2724,7 @@
           <a:p>
             <a:fld id="{FB30EDBD-1C2D-4C1E-B459-B60219FAB484}" type="datetimeFigureOut">
               <a:rPr lang="ko-KR" altLang="en-US" smtClean="0"/>
-              <a:t>2026. 10. 4.</a:t>
+              <a:t>2026. 10. 6.</a:t>
             </a:fld>
             <a:endParaRPr lang="ko-KR" altLang="en-US"/>
           </a:p>
@@ -2618,7 +2836,7 @@
           <a:p>
             <a:fld id="{FB30EDBD-1C2D-4C1E-B459-B60219FAB484}" type="datetimeFigureOut">
               <a:rPr lang="ko-KR" altLang="en-US" smtClean="0"/>
-              <a:t>2026. 10. 4.</a:t>
+              <a:t>2026. 10. 6.</a:t>
             </a:fld>
             <a:endParaRPr lang="ko-KR" altLang="en-US"/>
           </a:p>
@@ -2708,7 +2926,7 @@
           <a:p>
             <a:fld id="{FB30EDBD-1C2D-4C1E-B459-B60219FAB484}" type="datetimeFigureOut">
               <a:rPr lang="ko-KR" altLang="en-US" smtClean="0"/>
-              <a:t>2026. 10. 4.</a:t>
+              <a:t>2026. 10. 6.</a:t>
             </a:fld>
             <a:endParaRPr lang="ko-KR" altLang="en-US"/>
           </a:p>
@@ -2978,7 +3196,7 @@
           <a:p>
             <a:fld id="{FB30EDBD-1C2D-4C1E-B459-B60219FAB484}" type="datetimeFigureOut">
               <a:rPr lang="ko-KR" altLang="en-US" smtClean="0"/>
-              <a:t>2026. 10. 4.</a:t>
+              <a:t>2026. 10. 6.</a:t>
             </a:fld>
             <a:endParaRPr lang="ko-KR" altLang="en-US"/>
           </a:p>
@@ -3225,7 +3443,7 @@
           <a:p>
             <a:fld id="{FB30EDBD-1C2D-4C1E-B459-B60219FAB484}" type="datetimeFigureOut">
               <a:rPr lang="ko-KR" altLang="en-US" smtClean="0"/>
-              <a:t>2026. 10. 4.</a:t>
+              <a:t>2026. 10. 6.</a:t>
             </a:fld>
             <a:endParaRPr lang="ko-KR" altLang="en-US"/>
           </a:p>
@@ -3431,7 +3649,7 @@
           <a:p>
             <a:fld id="{FB30EDBD-1C2D-4C1E-B459-B60219FAB484}" type="datetimeFigureOut">
               <a:rPr lang="ko-KR" altLang="en-US" smtClean="0"/>
-              <a:t>2026. 10. 4.</a:t>
+              <a:t>2026. 10. 6.</a:t>
             </a:fld>
             <a:endParaRPr lang="ko-KR" altLang="en-US"/>
           </a:p>
@@ -3821,7 +4039,7 @@
         </p:nvSpPr>
         <p:spPr>
           <a:xfrm>
-            <a:off x="971599" y="1180559"/>
+            <a:off x="235987" y="1180559"/>
             <a:ext cx="1800200" cy="892274"/>
           </a:xfrm>
           <a:prstGeom prst="roundRect">
@@ -3880,7 +4098,7 @@
         </p:nvSpPr>
         <p:spPr>
           <a:xfrm>
-            <a:off x="971599" y="3173951"/>
+            <a:off x="235987" y="3173951"/>
             <a:ext cx="1800200" cy="1616906"/>
           </a:xfrm>
           <a:prstGeom prst="roundRect">
@@ -3939,8 +4157,8 @@
         </p:nvSpPr>
         <p:spPr>
           <a:xfrm>
-            <a:off x="2987824" y="352643"/>
-            <a:ext cx="4637503" cy="4438214"/>
+            <a:off x="2252212" y="915565"/>
+            <a:ext cx="4637503" cy="3875291"/>
           </a:xfrm>
           <a:prstGeom prst="roundRect">
             <a:avLst>
@@ -3999,7 +4217,7 @@
         </p:nvSpPr>
         <p:spPr>
           <a:xfrm>
-            <a:off x="3095263" y="1057319"/>
+            <a:off x="2359651" y="1057319"/>
             <a:ext cx="3081988" cy="836785"/>
           </a:xfrm>
           <a:prstGeom prst="roundRect">
@@ -4058,7 +4276,7 @@
         </p:nvSpPr>
         <p:spPr>
           <a:xfrm>
-            <a:off x="1518621" y="1521382"/>
+            <a:off x="783009" y="1521382"/>
             <a:ext cx="1139438" cy="451511"/>
           </a:xfrm>
           <a:prstGeom prst="roundRect">
@@ -4117,7 +4335,7 @@
         </p:nvSpPr>
         <p:spPr>
           <a:xfrm>
-            <a:off x="1518621" y="4219600"/>
+            <a:off x="783009" y="4219600"/>
             <a:ext cx="1139438" cy="451511"/>
           </a:xfrm>
           <a:prstGeom prst="roundRect">
@@ -4176,8 +4394,537 @@
         </p:nvSpPr>
         <p:spPr>
           <a:xfrm>
-            <a:off x="3205001" y="1338418"/>
+            <a:off x="2469389" y="1338418"/>
             <a:ext cx="1330422" cy="451511"/>
+          </a:xfrm>
+          <a:prstGeom prst="roundRect">
+            <a:avLst>
+              <a:gd name="adj" fmla="val 14105"/>
+            </a:avLst>
+          </a:prstGeom>
+          <a:solidFill>
+            <a:schemeClr val="bg1"/>
+          </a:solidFill>
+          <a:ln w="12700">
+            <a:headEnd type="none" w="med" len="med"/>
+            <a:tailEnd type="triangle" w="med" len="med"/>
+          </a:ln>
+        </p:spPr>
+        <p:style>
+          <a:lnRef idx="2">
+            <a:schemeClr val="dk1"/>
+          </a:lnRef>
+          <a:fillRef idx="1">
+            <a:schemeClr val="lt1"/>
+          </a:fillRef>
+          <a:effectRef idx="0">
+            <a:schemeClr val="dk1"/>
+          </a:effectRef>
+          <a:fontRef idx="minor">
+            <a:schemeClr val="dk1"/>
+          </a:fontRef>
+        </p:style>
+        <p:txBody>
+          <a:bodyPr rtlCol="0" anchor="ctr"/>
+          <a:lstStyle/>
+          <a:p>
+            <a:pPr algn="ctr"/>
+            <a:r>
+              <a:rPr lang="en-US" altLang="ko-KR" sz="900" dirty="0"/>
+              <a:t>DNS Name, ClusterIP</a:t>
+            </a:r>
+          </a:p>
+          <a:p>
+            <a:pPr algn="ctr"/>
+            <a:r>
+              <a:rPr lang="en-US" altLang="ko-KR" sz="900" b="1" dirty="0"/>
+              <a:t>Frontend</a:t>
+            </a:r>
+            <a:endParaRPr lang="ko-KR" altLang="en-US" sz="900" b="1" dirty="0"/>
+          </a:p>
+        </p:txBody>
+      </p:sp>
+      <p:sp>
+        <p:nvSpPr>
+          <p:cNvPr id="19" name="사각형: 둥근 모서리 12">
+            <a:extLst>
+              <a:ext uri="{FF2B5EF4-FFF2-40B4-BE49-F238E27FC236}">
+                <a16:creationId xmlns:a16="http://schemas.microsoft.com/office/drawing/2014/main" id="{5C426528-7E7F-AF40-B09F-DC03107AAE23}"/>
+              </a:ext>
+            </a:extLst>
+          </p:cNvPr>
+          <p:cNvSpPr/>
+          <p:nvPr/>
+        </p:nvSpPr>
+        <p:spPr>
+          <a:xfrm>
+            <a:off x="4227048" y="1344655"/>
+            <a:ext cx="1104530" cy="445274"/>
+          </a:xfrm>
+          <a:prstGeom prst="roundRect">
+            <a:avLst>
+              <a:gd name="adj" fmla="val 14105"/>
+            </a:avLst>
+          </a:prstGeom>
+          <a:solidFill>
+            <a:schemeClr val="bg1"/>
+          </a:solidFill>
+          <a:ln w="12700">
+            <a:headEnd type="none" w="med" len="med"/>
+            <a:tailEnd type="triangle" w="med" len="med"/>
+          </a:ln>
+        </p:spPr>
+        <p:style>
+          <a:lnRef idx="2">
+            <a:schemeClr val="dk1"/>
+          </a:lnRef>
+          <a:fillRef idx="1">
+            <a:schemeClr val="lt1"/>
+          </a:fillRef>
+          <a:effectRef idx="0">
+            <a:schemeClr val="dk1"/>
+          </a:effectRef>
+          <a:fontRef idx="minor">
+            <a:schemeClr val="dk1"/>
+          </a:fontRef>
+        </p:style>
+        <p:txBody>
+          <a:bodyPr rtlCol="0" anchor="ctr"/>
+          <a:lstStyle/>
+          <a:p>
+            <a:pPr algn="ctr"/>
+            <a:r>
+              <a:rPr lang="en-US" altLang="ko-KR" sz="900" dirty="0"/>
+              <a:t>Endpoint IPs</a:t>
+            </a:r>
+          </a:p>
+          <a:p>
+            <a:pPr algn="ctr"/>
+            <a:r>
+              <a:rPr lang="en-US" altLang="ko-KR" sz="900" b="1" dirty="0"/>
+              <a:t>Backend</a:t>
+            </a:r>
+            <a:endParaRPr lang="ko-KR" altLang="en-US" sz="900" b="1" dirty="0"/>
+          </a:p>
+        </p:txBody>
+      </p:sp>
+      <p:sp>
+        <p:nvSpPr>
+          <p:cNvPr id="21" name="사각형: 둥근 모서리 12">
+            <a:extLst>
+              <a:ext uri="{FF2B5EF4-FFF2-40B4-BE49-F238E27FC236}">
+                <a16:creationId xmlns:a16="http://schemas.microsoft.com/office/drawing/2014/main" id="{DC4C280C-6B79-F1F7-15ED-50513C928F3A}"/>
+              </a:ext>
+            </a:extLst>
+          </p:cNvPr>
+          <p:cNvSpPr/>
+          <p:nvPr/>
+        </p:nvSpPr>
+        <p:spPr>
+          <a:xfrm>
+            <a:off x="5654892" y="1340841"/>
+            <a:ext cx="1139438" cy="451511"/>
+          </a:xfrm>
+          <a:prstGeom prst="roundRect">
+            <a:avLst>
+              <a:gd name="adj" fmla="val 14105"/>
+            </a:avLst>
+          </a:prstGeom>
+          <a:noFill/>
+          <a:ln w="12700">
+            <a:headEnd type="none" w="med" len="med"/>
+            <a:tailEnd type="triangle" w="med" len="med"/>
+          </a:ln>
+        </p:spPr>
+        <p:style>
+          <a:lnRef idx="2">
+            <a:schemeClr val="dk1"/>
+          </a:lnRef>
+          <a:fillRef idx="1">
+            <a:schemeClr val="lt1"/>
+          </a:fillRef>
+          <a:effectRef idx="0">
+            <a:schemeClr val="dk1"/>
+          </a:effectRef>
+          <a:fontRef idx="minor">
+            <a:schemeClr val="dk1"/>
+          </a:fontRef>
+        </p:style>
+        <p:txBody>
+          <a:bodyPr rtlCol="0" anchor="ctr"/>
+          <a:lstStyle/>
+          <a:p>
+            <a:pPr algn="ctr"/>
+            <a:r>
+              <a:rPr lang="en-US" altLang="ko-KR" sz="900"/>
+              <a:t>Server </a:t>
+            </a:r>
+            <a:r>
+              <a:rPr lang="en-US" altLang="ko-KR" sz="900" b="1" dirty="0"/>
+              <a:t>Deployment</a:t>
+            </a:r>
+            <a:endParaRPr lang="ko-KR" altLang="en-US" sz="900" b="1" dirty="0"/>
+          </a:p>
+        </p:txBody>
+      </p:sp>
+      <p:cxnSp>
+        <p:nvCxnSpPr>
+          <p:cNvPr id="46" name="직선 화살표 연결선 96">
+            <a:extLst>
+              <a:ext uri="{FF2B5EF4-FFF2-40B4-BE49-F238E27FC236}">
+                <a16:creationId xmlns:a16="http://schemas.microsoft.com/office/drawing/2014/main" id="{11E05A8C-2F0E-F71F-1F44-36263383F304}"/>
+              </a:ext>
+            </a:extLst>
+          </p:cNvPr>
+          <p:cNvCxnSpPr>
+            <a:cxnSpLocks/>
+            <a:stCxn id="122" idx="1"/>
+            <a:endCxn id="17" idx="2"/>
+          </p:cNvCxnSpPr>
+          <p:nvPr/>
+        </p:nvCxnSpPr>
+        <p:spPr>
+          <a:xfrm flipH="1" flipV="1">
+            <a:off x="3134600" y="1789929"/>
+            <a:ext cx="2518082" cy="473254"/>
+          </a:xfrm>
+          <a:prstGeom prst="straightConnector1">
+            <a:avLst/>
+          </a:prstGeom>
+          <a:ln w="12700">
+            <a:solidFill>
+              <a:schemeClr val="tx1"/>
+            </a:solidFill>
+            <a:prstDash val="solid"/>
+            <a:headEnd type="none" w="med" len="med"/>
+            <a:tailEnd type="triangle" w="med" len="med"/>
+          </a:ln>
+        </p:spPr>
+        <p:style>
+          <a:lnRef idx="1">
+            <a:schemeClr val="accent1"/>
+          </a:lnRef>
+          <a:fillRef idx="0">
+            <a:schemeClr val="accent1"/>
+          </a:fillRef>
+          <a:effectRef idx="0">
+            <a:schemeClr val="accent1"/>
+          </a:effectRef>
+          <a:fontRef idx="minor">
+            <a:schemeClr val="tx1"/>
+          </a:fontRef>
+        </p:style>
+      </p:cxnSp>
+      <p:cxnSp>
+        <p:nvCxnSpPr>
+          <p:cNvPr id="49" name="직선 화살표 연결선 96">
+            <a:extLst>
+              <a:ext uri="{FF2B5EF4-FFF2-40B4-BE49-F238E27FC236}">
+                <a16:creationId xmlns:a16="http://schemas.microsoft.com/office/drawing/2014/main" id="{D4917D88-590C-D824-26A5-E985D32A1AEE}"/>
+              </a:ext>
+            </a:extLst>
+          </p:cNvPr>
+          <p:cNvCxnSpPr>
+            <a:cxnSpLocks/>
+            <a:stCxn id="122" idx="1"/>
+            <a:endCxn id="19" idx="2"/>
+          </p:cNvCxnSpPr>
+          <p:nvPr/>
+        </p:nvCxnSpPr>
+        <p:spPr>
+          <a:xfrm flipH="1" flipV="1">
+            <a:off x="4779313" y="1789929"/>
+            <a:ext cx="873369" cy="473254"/>
+          </a:xfrm>
+          <a:prstGeom prst="straightConnector1">
+            <a:avLst/>
+          </a:prstGeom>
+          <a:ln w="12700">
+            <a:solidFill>
+              <a:schemeClr val="tx1"/>
+            </a:solidFill>
+            <a:prstDash val="solid"/>
+            <a:headEnd type="none" w="med" len="med"/>
+            <a:tailEnd type="triangle" w="med" len="med"/>
+          </a:ln>
+        </p:spPr>
+        <p:style>
+          <a:lnRef idx="1">
+            <a:schemeClr val="accent1"/>
+          </a:lnRef>
+          <a:fillRef idx="0">
+            <a:schemeClr val="accent1"/>
+          </a:fillRef>
+          <a:effectRef idx="0">
+            <a:schemeClr val="accent1"/>
+          </a:effectRef>
+          <a:fontRef idx="minor">
+            <a:schemeClr val="tx1"/>
+          </a:fontRef>
+        </p:style>
+      </p:cxnSp>
+      <p:sp>
+        <p:nvSpPr>
+          <p:cNvPr id="56" name="사각형: 둥근 모서리 12">
+            <a:extLst>
+              <a:ext uri="{FF2B5EF4-FFF2-40B4-BE49-F238E27FC236}">
+                <a16:creationId xmlns:a16="http://schemas.microsoft.com/office/drawing/2014/main" id="{78808AA9-A2FE-51F8-7011-E33BB1BAA35F}"/>
+              </a:ext>
+            </a:extLst>
+          </p:cNvPr>
+          <p:cNvSpPr/>
+          <p:nvPr/>
+        </p:nvSpPr>
+        <p:spPr>
+          <a:xfrm>
+            <a:off x="2359651" y="2452219"/>
+            <a:ext cx="3081988" cy="836785"/>
+          </a:xfrm>
+          <a:prstGeom prst="roundRect">
+            <a:avLst>
+              <a:gd name="adj" fmla="val 8995"/>
+            </a:avLst>
+          </a:prstGeom>
+          <a:noFill/>
+          <a:ln w="12700">
+            <a:headEnd type="none" w="med" len="med"/>
+            <a:tailEnd type="triangle" w="med" len="med"/>
+          </a:ln>
+        </p:spPr>
+        <p:style>
+          <a:lnRef idx="2">
+            <a:schemeClr val="dk1"/>
+          </a:lnRef>
+          <a:fillRef idx="1">
+            <a:schemeClr val="lt1"/>
+          </a:fillRef>
+          <a:effectRef idx="0">
+            <a:schemeClr val="dk1"/>
+          </a:effectRef>
+          <a:fontRef idx="minor">
+            <a:schemeClr val="dk1"/>
+          </a:fontRef>
+        </p:style>
+        <p:txBody>
+          <a:bodyPr rtlCol="0" anchor="t"/>
+          <a:lstStyle/>
+          <a:p>
+            <a:pPr algn="ctr"/>
+            <a:r>
+              <a:rPr lang="en-US" altLang="ko-KR" sz="900"/>
+              <a:t>Server Version 1 </a:t>
+            </a:r>
+            <a:r>
+              <a:rPr lang="en-US" altLang="ko-KR" sz="900" b="1" dirty="0"/>
+              <a:t>Service</a:t>
+            </a:r>
+            <a:endParaRPr lang="ko-KR" altLang="en-US" sz="900" b="1" dirty="0"/>
+          </a:p>
+        </p:txBody>
+      </p:sp>
+      <p:sp>
+        <p:nvSpPr>
+          <p:cNvPr id="57" name="사각형: 둥근 모서리 12">
+            <a:extLst>
+              <a:ext uri="{FF2B5EF4-FFF2-40B4-BE49-F238E27FC236}">
+                <a16:creationId xmlns:a16="http://schemas.microsoft.com/office/drawing/2014/main" id="{D1018987-E3F4-0741-B6E3-26D72BA02340}"/>
+              </a:ext>
+            </a:extLst>
+          </p:cNvPr>
+          <p:cNvSpPr/>
+          <p:nvPr/>
+        </p:nvSpPr>
+        <p:spPr>
+          <a:xfrm>
+            <a:off x="2469389" y="2733318"/>
+            <a:ext cx="1330422" cy="451511"/>
+          </a:xfrm>
+          <a:prstGeom prst="roundRect">
+            <a:avLst>
+              <a:gd name="adj" fmla="val 14105"/>
+            </a:avLst>
+          </a:prstGeom>
+          <a:solidFill>
+            <a:schemeClr val="bg1"/>
+          </a:solidFill>
+          <a:ln w="12700">
+            <a:headEnd type="none" w="med" len="med"/>
+            <a:tailEnd type="triangle" w="med" len="med"/>
+          </a:ln>
+        </p:spPr>
+        <p:style>
+          <a:lnRef idx="2">
+            <a:schemeClr val="dk1"/>
+          </a:lnRef>
+          <a:fillRef idx="1">
+            <a:schemeClr val="lt1"/>
+          </a:fillRef>
+          <a:effectRef idx="0">
+            <a:schemeClr val="dk1"/>
+          </a:effectRef>
+          <a:fontRef idx="minor">
+            <a:schemeClr val="dk1"/>
+          </a:fontRef>
+        </p:style>
+        <p:txBody>
+          <a:bodyPr rtlCol="0" anchor="ctr"/>
+          <a:lstStyle/>
+          <a:p>
+            <a:pPr algn="ctr"/>
+            <a:r>
+              <a:rPr lang="en-US" altLang="ko-KR" sz="900" dirty="0"/>
+              <a:t>DNS Name, ClusterIP</a:t>
+            </a:r>
+          </a:p>
+          <a:p>
+            <a:pPr algn="ctr"/>
+            <a:r>
+              <a:rPr lang="en-US" altLang="ko-KR" sz="900" b="1" dirty="0"/>
+              <a:t>Frontend</a:t>
+            </a:r>
+            <a:endParaRPr lang="ko-KR" altLang="en-US" sz="900" b="1" dirty="0"/>
+          </a:p>
+        </p:txBody>
+      </p:sp>
+      <p:sp>
+        <p:nvSpPr>
+          <p:cNvPr id="58" name="사각형: 둥근 모서리 12">
+            <a:extLst>
+              <a:ext uri="{FF2B5EF4-FFF2-40B4-BE49-F238E27FC236}">
+                <a16:creationId xmlns:a16="http://schemas.microsoft.com/office/drawing/2014/main" id="{97747399-1A2F-E531-DDCB-301B9A7B5B04}"/>
+              </a:ext>
+            </a:extLst>
+          </p:cNvPr>
+          <p:cNvSpPr/>
+          <p:nvPr/>
+        </p:nvSpPr>
+        <p:spPr>
+          <a:xfrm>
+            <a:off x="4227048" y="2739555"/>
+            <a:ext cx="1104530" cy="445274"/>
+          </a:xfrm>
+          <a:prstGeom prst="roundRect">
+            <a:avLst>
+              <a:gd name="adj" fmla="val 14105"/>
+            </a:avLst>
+          </a:prstGeom>
+          <a:solidFill>
+            <a:schemeClr val="bg1"/>
+          </a:solidFill>
+          <a:ln w="12700">
+            <a:headEnd type="none" w="med" len="med"/>
+            <a:tailEnd type="triangle" w="med" len="med"/>
+          </a:ln>
+        </p:spPr>
+        <p:style>
+          <a:lnRef idx="2">
+            <a:schemeClr val="dk1"/>
+          </a:lnRef>
+          <a:fillRef idx="1">
+            <a:schemeClr val="lt1"/>
+          </a:fillRef>
+          <a:effectRef idx="0">
+            <a:schemeClr val="dk1"/>
+          </a:effectRef>
+          <a:fontRef idx="minor">
+            <a:schemeClr val="dk1"/>
+          </a:fontRef>
+        </p:style>
+        <p:txBody>
+          <a:bodyPr rtlCol="0" anchor="ctr"/>
+          <a:lstStyle/>
+          <a:p>
+            <a:pPr algn="ctr"/>
+            <a:r>
+              <a:rPr lang="en-US" altLang="ko-KR" sz="900" dirty="0"/>
+              <a:t>Endpoint IPs</a:t>
+            </a:r>
+          </a:p>
+          <a:p>
+            <a:pPr algn="ctr"/>
+            <a:r>
+              <a:rPr lang="en-US" altLang="ko-KR" sz="900" b="1" dirty="0"/>
+              <a:t>Backend</a:t>
+            </a:r>
+            <a:endParaRPr lang="ko-KR" altLang="en-US" sz="900" b="1" dirty="0"/>
+          </a:p>
+        </p:txBody>
+      </p:sp>
+      <p:sp>
+        <p:nvSpPr>
+          <p:cNvPr id="59" name="사각형: 둥근 모서리 12">
+            <a:extLst>
+              <a:ext uri="{FF2B5EF4-FFF2-40B4-BE49-F238E27FC236}">
+                <a16:creationId xmlns:a16="http://schemas.microsoft.com/office/drawing/2014/main" id="{1E9FC243-B99F-FA2C-4475-649C63CA5C62}"/>
+              </a:ext>
+            </a:extLst>
+          </p:cNvPr>
+          <p:cNvSpPr/>
+          <p:nvPr/>
+        </p:nvSpPr>
+        <p:spPr>
+          <a:xfrm>
+            <a:off x="5654892" y="2736436"/>
+            <a:ext cx="1139438" cy="451511"/>
+          </a:xfrm>
+          <a:prstGeom prst="roundRect">
+            <a:avLst>
+              <a:gd name="adj" fmla="val 14105"/>
+            </a:avLst>
+          </a:prstGeom>
+          <a:noFill/>
+          <a:ln w="12700">
+            <a:headEnd type="none" w="med" len="med"/>
+            <a:tailEnd type="triangle" w="med" len="med"/>
+          </a:ln>
+        </p:spPr>
+        <p:style>
+          <a:lnRef idx="2">
+            <a:schemeClr val="dk1"/>
+          </a:lnRef>
+          <a:fillRef idx="1">
+            <a:schemeClr val="lt1"/>
+          </a:fillRef>
+          <a:effectRef idx="0">
+            <a:schemeClr val="dk1"/>
+          </a:effectRef>
+          <a:fontRef idx="minor">
+            <a:schemeClr val="dk1"/>
+          </a:fontRef>
+        </p:style>
+        <p:txBody>
+          <a:bodyPr rtlCol="0" anchor="ctr"/>
+          <a:lstStyle/>
+          <a:p>
+            <a:pPr algn="ctr"/>
+            <a:r>
+              <a:rPr lang="en-US" altLang="ko-KR" sz="900"/>
+              <a:t>Server Version 1 </a:t>
+            </a:r>
+            <a:r>
+              <a:rPr lang="en-US" altLang="ko-KR" sz="900" b="1" dirty="0"/>
+              <a:t>Deployment</a:t>
+            </a:r>
+            <a:endParaRPr lang="ko-KR" altLang="en-US" sz="900" b="1" dirty="0"/>
+          </a:p>
+        </p:txBody>
+      </p:sp>
+      <p:sp>
+        <p:nvSpPr>
+          <p:cNvPr id="61" name="사각형: 둥근 모서리 12">
+            <a:extLst>
+              <a:ext uri="{FF2B5EF4-FFF2-40B4-BE49-F238E27FC236}">
+                <a16:creationId xmlns:a16="http://schemas.microsoft.com/office/drawing/2014/main" id="{DA6BBA72-DCF3-EF61-65B2-2F2F53679187}"/>
+              </a:ext>
+            </a:extLst>
+          </p:cNvPr>
+          <p:cNvSpPr/>
+          <p:nvPr/>
+        </p:nvSpPr>
+        <p:spPr>
+          <a:xfrm>
+            <a:off x="783009" y="3522150"/>
+            <a:ext cx="1139438" cy="451511"/>
           </a:xfrm>
           <a:prstGeom prst="roundRect">
             <a:avLst>
@@ -4214,6 +4961,135 @@
           <a:p>
             <a:pPr algn="ctr"/>
             <a:r>
+              <a:rPr lang="en-US" altLang="ko-KR" sz="900"/>
+              <a:t>Server</a:t>
+            </a:r>
+          </a:p>
+          <a:p>
+            <a:pPr algn="ctr"/>
+            <a:r>
+              <a:rPr lang="en-US" altLang="ko-KR" sz="900" b="1"/>
+              <a:t>HTTPRoute</a:t>
+            </a:r>
+          </a:p>
+          <a:p>
+            <a:pPr algn="ctr"/>
+            <a:r>
+              <a:rPr lang="en-US" altLang="ko-KR" sz="900" b="1"/>
+              <a:t>(Consumer)</a:t>
+            </a:r>
+          </a:p>
+        </p:txBody>
+      </p:sp>
+      <p:sp>
+        <p:nvSpPr>
+          <p:cNvPr id="62" name="사각형: 둥근 모서리 12">
+            <a:extLst>
+              <a:ext uri="{FF2B5EF4-FFF2-40B4-BE49-F238E27FC236}">
+                <a16:creationId xmlns:a16="http://schemas.microsoft.com/office/drawing/2014/main" id="{D14C4EFA-EE95-4D39-5396-CD6BB98E0EFE}"/>
+              </a:ext>
+            </a:extLst>
+          </p:cNvPr>
+          <p:cNvSpPr/>
+          <p:nvPr/>
+        </p:nvSpPr>
+        <p:spPr>
+          <a:xfrm>
+            <a:off x="2356879" y="3847119"/>
+            <a:ext cx="3081988" cy="836785"/>
+          </a:xfrm>
+          <a:prstGeom prst="roundRect">
+            <a:avLst>
+              <a:gd name="adj" fmla="val 8995"/>
+            </a:avLst>
+          </a:prstGeom>
+          <a:noFill/>
+          <a:ln w="12700">
+            <a:headEnd type="none" w="med" len="med"/>
+            <a:tailEnd type="triangle" w="med" len="med"/>
+          </a:ln>
+        </p:spPr>
+        <p:style>
+          <a:lnRef idx="2">
+            <a:schemeClr val="dk1"/>
+          </a:lnRef>
+          <a:fillRef idx="1">
+            <a:schemeClr val="lt1"/>
+          </a:fillRef>
+          <a:effectRef idx="0">
+            <a:schemeClr val="dk1"/>
+          </a:effectRef>
+          <a:fontRef idx="minor">
+            <a:schemeClr val="dk1"/>
+          </a:fontRef>
+        </p:style>
+        <p:txBody>
+          <a:bodyPr rtlCol="0" anchor="t"/>
+          <a:lstStyle/>
+          <a:p>
+            <a:pPr algn="ctr"/>
+            <a:r>
+              <a:rPr lang="en-US" altLang="ko-KR" sz="900"/>
+              <a:t>Server Version 2 </a:t>
+            </a:r>
+            <a:r>
+              <a:rPr lang="en-US" altLang="ko-KR" sz="900" b="1" dirty="0"/>
+              <a:t>Service</a:t>
+            </a:r>
+            <a:endParaRPr lang="ko-KR" altLang="en-US" sz="900" b="1" dirty="0"/>
+          </a:p>
+        </p:txBody>
+      </p:sp>
+      <p:sp>
+        <p:nvSpPr>
+          <p:cNvPr id="63" name="사각형: 둥근 모서리 12">
+            <a:extLst>
+              <a:ext uri="{FF2B5EF4-FFF2-40B4-BE49-F238E27FC236}">
+                <a16:creationId xmlns:a16="http://schemas.microsoft.com/office/drawing/2014/main" id="{D8F7DE66-8BA9-8845-1F20-BD87EE5F0F20}"/>
+              </a:ext>
+            </a:extLst>
+          </p:cNvPr>
+          <p:cNvSpPr/>
+          <p:nvPr/>
+        </p:nvSpPr>
+        <p:spPr>
+          <a:xfrm>
+            <a:off x="2466617" y="4128218"/>
+            <a:ext cx="1330422" cy="451511"/>
+          </a:xfrm>
+          <a:prstGeom prst="roundRect">
+            <a:avLst>
+              <a:gd name="adj" fmla="val 14105"/>
+            </a:avLst>
+          </a:prstGeom>
+          <a:solidFill>
+            <a:schemeClr val="bg1"/>
+          </a:solidFill>
+          <a:ln w="12700">
+            <a:headEnd type="none" w="med" len="med"/>
+            <a:tailEnd type="triangle" w="med" len="med"/>
+          </a:ln>
+        </p:spPr>
+        <p:style>
+          <a:lnRef idx="2">
+            <a:schemeClr val="dk1"/>
+          </a:lnRef>
+          <a:fillRef idx="1">
+            <a:schemeClr val="lt1"/>
+          </a:fillRef>
+          <a:effectRef idx="0">
+            <a:schemeClr val="dk1"/>
+          </a:effectRef>
+          <a:fontRef idx="minor">
+            <a:schemeClr val="dk1"/>
+          </a:fontRef>
+        </p:style>
+        <p:txBody>
+          <a:bodyPr rtlCol="0" anchor="ctr"/>
+          <a:lstStyle/>
+          <a:p>
+            <a:pPr algn="ctr"/>
+            <a:r>
               <a:rPr lang="en-US" altLang="ko-KR" sz="900" dirty="0"/>
               <a:t>DNS Name, ClusterIP</a:t>
             </a:r>
@@ -4230,10 +5106,10 @@
       </p:sp>
       <p:sp>
         <p:nvSpPr>
-          <p:cNvPr id="19" name="사각형: 둥근 모서리 12">
-            <a:extLst>
-              <a:ext uri="{FF2B5EF4-FFF2-40B4-BE49-F238E27FC236}">
-                <a16:creationId xmlns:a16="http://schemas.microsoft.com/office/drawing/2014/main" id="{5C426528-7E7F-AF40-B09F-DC03107AAE23}"/>
+          <p:cNvPr id="64" name="사각형: 둥근 모서리 12">
+            <a:extLst>
+              <a:ext uri="{FF2B5EF4-FFF2-40B4-BE49-F238E27FC236}">
+                <a16:creationId xmlns:a16="http://schemas.microsoft.com/office/drawing/2014/main" id="{43531DC2-CD1A-F31D-B347-BE83FC61B041}"/>
               </a:ext>
             </a:extLst>
           </p:cNvPr>
@@ -4242,8 +5118,633 @@
         </p:nvSpPr>
         <p:spPr>
           <a:xfrm>
-            <a:off x="4962660" y="1344655"/>
+            <a:off x="4224276" y="4134455"/>
             <a:ext cx="1104530" cy="445274"/>
+          </a:xfrm>
+          <a:prstGeom prst="roundRect">
+            <a:avLst>
+              <a:gd name="adj" fmla="val 14105"/>
+            </a:avLst>
+          </a:prstGeom>
+          <a:solidFill>
+            <a:schemeClr val="bg1"/>
+          </a:solidFill>
+          <a:ln w="12700">
+            <a:headEnd type="none" w="med" len="med"/>
+            <a:tailEnd type="triangle" w="med" len="med"/>
+          </a:ln>
+        </p:spPr>
+        <p:style>
+          <a:lnRef idx="2">
+            <a:schemeClr val="dk1"/>
+          </a:lnRef>
+          <a:fillRef idx="1">
+            <a:schemeClr val="lt1"/>
+          </a:fillRef>
+          <a:effectRef idx="0">
+            <a:schemeClr val="dk1"/>
+          </a:effectRef>
+          <a:fontRef idx="minor">
+            <a:schemeClr val="dk1"/>
+          </a:fontRef>
+        </p:style>
+        <p:txBody>
+          <a:bodyPr rtlCol="0" anchor="ctr"/>
+          <a:lstStyle/>
+          <a:p>
+            <a:pPr algn="ctr"/>
+            <a:r>
+              <a:rPr lang="en-US" altLang="ko-KR" sz="900" dirty="0"/>
+              <a:t>Endpoint IPs</a:t>
+            </a:r>
+          </a:p>
+          <a:p>
+            <a:pPr algn="ctr"/>
+            <a:r>
+              <a:rPr lang="en-US" altLang="ko-KR" sz="900" b="1" dirty="0"/>
+              <a:t>Backend</a:t>
+            </a:r>
+            <a:endParaRPr lang="ko-KR" altLang="en-US" sz="900" b="1" dirty="0"/>
+          </a:p>
+        </p:txBody>
+      </p:sp>
+      <p:sp>
+        <p:nvSpPr>
+          <p:cNvPr id="65" name="사각형: 둥근 모서리 12">
+            <a:extLst>
+              <a:ext uri="{FF2B5EF4-FFF2-40B4-BE49-F238E27FC236}">
+                <a16:creationId xmlns:a16="http://schemas.microsoft.com/office/drawing/2014/main" id="{6C7B9173-A89D-C08C-D991-0297A4FEF256}"/>
+              </a:ext>
+            </a:extLst>
+          </p:cNvPr>
+          <p:cNvSpPr/>
+          <p:nvPr/>
+        </p:nvSpPr>
+        <p:spPr>
+          <a:xfrm>
+            <a:off x="5652120" y="4131336"/>
+            <a:ext cx="1139438" cy="451511"/>
+          </a:xfrm>
+          <a:prstGeom prst="roundRect">
+            <a:avLst>
+              <a:gd name="adj" fmla="val 14105"/>
+            </a:avLst>
+          </a:prstGeom>
+          <a:noFill/>
+          <a:ln w="12700">
+            <a:headEnd type="none" w="med" len="med"/>
+            <a:tailEnd type="triangle" w="med" len="med"/>
+          </a:ln>
+        </p:spPr>
+        <p:style>
+          <a:lnRef idx="2">
+            <a:schemeClr val="dk1"/>
+          </a:lnRef>
+          <a:fillRef idx="1">
+            <a:schemeClr val="lt1"/>
+          </a:fillRef>
+          <a:effectRef idx="0">
+            <a:schemeClr val="dk1"/>
+          </a:effectRef>
+          <a:fontRef idx="minor">
+            <a:schemeClr val="dk1"/>
+          </a:fontRef>
+        </p:style>
+        <p:txBody>
+          <a:bodyPr rtlCol="0" anchor="ctr"/>
+          <a:lstStyle/>
+          <a:p>
+            <a:pPr algn="ctr"/>
+            <a:r>
+              <a:rPr lang="en-US" altLang="ko-KR" sz="900"/>
+              <a:t>Server Version 2 </a:t>
+            </a:r>
+            <a:r>
+              <a:rPr lang="en-US" altLang="ko-KR" sz="900" b="1" dirty="0"/>
+              <a:t>Deployment</a:t>
+            </a:r>
+            <a:endParaRPr lang="ko-KR" altLang="en-US" sz="900" b="1" dirty="0"/>
+          </a:p>
+        </p:txBody>
+      </p:sp>
+      <p:cxnSp>
+        <p:nvCxnSpPr>
+          <p:cNvPr id="70" name="직선 화살표 연결선 96">
+            <a:extLst>
+              <a:ext uri="{FF2B5EF4-FFF2-40B4-BE49-F238E27FC236}">
+                <a16:creationId xmlns:a16="http://schemas.microsoft.com/office/drawing/2014/main" id="{51C48D84-C1B7-EE5D-A801-507C1006A504}"/>
+              </a:ext>
+            </a:extLst>
+          </p:cNvPr>
+          <p:cNvCxnSpPr>
+            <a:cxnSpLocks/>
+            <a:stCxn id="61" idx="3"/>
+            <a:endCxn id="17" idx="2"/>
+          </p:cNvCxnSpPr>
+          <p:nvPr/>
+        </p:nvCxnSpPr>
+        <p:spPr>
+          <a:xfrm flipV="1">
+            <a:off x="1922447" y="1789929"/>
+            <a:ext cx="1212153" cy="1957977"/>
+          </a:xfrm>
+          <a:prstGeom prst="straightConnector1">
+            <a:avLst/>
+          </a:prstGeom>
+          <a:ln w="12700">
+            <a:solidFill>
+              <a:schemeClr val="tx1"/>
+            </a:solidFill>
+            <a:prstDash val="solid"/>
+            <a:headEnd type="none" w="med" len="med"/>
+            <a:tailEnd type="triangle" w="med" len="med"/>
+          </a:ln>
+        </p:spPr>
+        <p:style>
+          <a:lnRef idx="1">
+            <a:schemeClr val="accent1"/>
+          </a:lnRef>
+          <a:fillRef idx="0">
+            <a:schemeClr val="accent1"/>
+          </a:fillRef>
+          <a:effectRef idx="0">
+            <a:schemeClr val="accent1"/>
+          </a:effectRef>
+          <a:fontRef idx="minor">
+            <a:schemeClr val="tx1"/>
+          </a:fontRef>
+        </p:style>
+      </p:cxnSp>
+      <p:cxnSp>
+        <p:nvCxnSpPr>
+          <p:cNvPr id="73" name="직선 화살표 연결선 96">
+            <a:extLst>
+              <a:ext uri="{FF2B5EF4-FFF2-40B4-BE49-F238E27FC236}">
+                <a16:creationId xmlns:a16="http://schemas.microsoft.com/office/drawing/2014/main" id="{4DBFB304-746D-48FF-52BE-65202C9DD39A}"/>
+              </a:ext>
+            </a:extLst>
+          </p:cNvPr>
+          <p:cNvCxnSpPr>
+            <a:cxnSpLocks/>
+            <a:stCxn id="61" idx="3"/>
+            <a:endCxn id="58" idx="2"/>
+          </p:cNvCxnSpPr>
+          <p:nvPr/>
+        </p:nvCxnSpPr>
+        <p:spPr>
+          <a:xfrm flipV="1">
+            <a:off x="1922447" y="3184829"/>
+            <a:ext cx="2856866" cy="563077"/>
+          </a:xfrm>
+          <a:prstGeom prst="straightConnector1">
+            <a:avLst/>
+          </a:prstGeom>
+          <a:ln w="12700">
+            <a:solidFill>
+              <a:schemeClr val="tx1"/>
+            </a:solidFill>
+            <a:prstDash val="solid"/>
+            <a:headEnd type="none" w="med" len="med"/>
+            <a:tailEnd type="triangle" w="med" len="med"/>
+          </a:ln>
+        </p:spPr>
+        <p:style>
+          <a:lnRef idx="1">
+            <a:schemeClr val="accent1"/>
+          </a:lnRef>
+          <a:fillRef idx="0">
+            <a:schemeClr val="accent1"/>
+          </a:fillRef>
+          <a:effectRef idx="0">
+            <a:schemeClr val="accent1"/>
+          </a:effectRef>
+          <a:fontRef idx="minor">
+            <a:schemeClr val="tx1"/>
+          </a:fontRef>
+        </p:style>
+      </p:cxnSp>
+      <p:cxnSp>
+        <p:nvCxnSpPr>
+          <p:cNvPr id="76" name="직선 화살표 연결선 96">
+            <a:extLst>
+              <a:ext uri="{FF2B5EF4-FFF2-40B4-BE49-F238E27FC236}">
+                <a16:creationId xmlns:a16="http://schemas.microsoft.com/office/drawing/2014/main" id="{F047C0B7-0897-C3EF-480C-07CCC67A9843}"/>
+              </a:ext>
+            </a:extLst>
+          </p:cNvPr>
+          <p:cNvCxnSpPr>
+            <a:cxnSpLocks/>
+            <a:stCxn id="61" idx="3"/>
+            <a:endCxn id="64" idx="0"/>
+          </p:cNvCxnSpPr>
+          <p:nvPr/>
+        </p:nvCxnSpPr>
+        <p:spPr>
+          <a:xfrm>
+            <a:off x="1922447" y="3747906"/>
+            <a:ext cx="2854094" cy="386549"/>
+          </a:xfrm>
+          <a:prstGeom prst="straightConnector1">
+            <a:avLst/>
+          </a:prstGeom>
+          <a:ln w="12700">
+            <a:solidFill>
+              <a:schemeClr val="tx1"/>
+            </a:solidFill>
+            <a:prstDash val="solid"/>
+            <a:headEnd type="none" w="med" len="med"/>
+            <a:tailEnd type="triangle" w="med" len="med"/>
+          </a:ln>
+        </p:spPr>
+        <p:style>
+          <a:lnRef idx="1">
+            <a:schemeClr val="accent1"/>
+          </a:lnRef>
+          <a:fillRef idx="0">
+            <a:schemeClr val="accent1"/>
+          </a:fillRef>
+          <a:effectRef idx="0">
+            <a:schemeClr val="accent1"/>
+          </a:effectRef>
+          <a:fontRef idx="minor">
+            <a:schemeClr val="tx1"/>
+          </a:fontRef>
+        </p:style>
+      </p:cxnSp>
+      <p:cxnSp>
+        <p:nvCxnSpPr>
+          <p:cNvPr id="79" name="직선 화살표 연결선 96">
+            <a:extLst>
+              <a:ext uri="{FF2B5EF4-FFF2-40B4-BE49-F238E27FC236}">
+                <a16:creationId xmlns:a16="http://schemas.microsoft.com/office/drawing/2014/main" id="{538885BE-B6BA-7559-8F46-4DB7ED5909A8}"/>
+              </a:ext>
+            </a:extLst>
+          </p:cNvPr>
+          <p:cNvCxnSpPr>
+            <a:cxnSpLocks/>
+            <a:stCxn id="12" idx="3"/>
+            <a:endCxn id="17" idx="1"/>
+          </p:cNvCxnSpPr>
+          <p:nvPr/>
+        </p:nvCxnSpPr>
+        <p:spPr>
+          <a:xfrm flipV="1">
+            <a:off x="1922447" y="1564174"/>
+            <a:ext cx="546942" cy="2881182"/>
+          </a:xfrm>
+          <a:prstGeom prst="straightConnector1">
+            <a:avLst/>
+          </a:prstGeom>
+          <a:ln w="12700">
+            <a:solidFill>
+              <a:schemeClr val="accent6"/>
+            </a:solidFill>
+            <a:prstDash val="solid"/>
+            <a:headEnd type="none" w="med" len="med"/>
+            <a:tailEnd type="triangle" w="med" len="med"/>
+          </a:ln>
+        </p:spPr>
+        <p:style>
+          <a:lnRef idx="1">
+            <a:schemeClr val="accent1"/>
+          </a:lnRef>
+          <a:fillRef idx="0">
+            <a:schemeClr val="accent1"/>
+          </a:fillRef>
+          <a:effectRef idx="0">
+            <a:schemeClr val="accent1"/>
+          </a:effectRef>
+          <a:fontRef idx="minor">
+            <a:schemeClr val="tx1"/>
+          </a:fontRef>
+        </p:style>
+      </p:cxnSp>
+      <p:cxnSp>
+        <p:nvCxnSpPr>
+          <p:cNvPr id="85" name="직선 화살표 연결선 96">
+            <a:extLst>
+              <a:ext uri="{FF2B5EF4-FFF2-40B4-BE49-F238E27FC236}">
+                <a16:creationId xmlns:a16="http://schemas.microsoft.com/office/drawing/2014/main" id="{951C7876-C85F-A332-209D-785084C11A0E}"/>
+              </a:ext>
+            </a:extLst>
+          </p:cNvPr>
+          <p:cNvCxnSpPr>
+            <a:cxnSpLocks/>
+            <a:stCxn id="64" idx="3"/>
+            <a:endCxn id="65" idx="1"/>
+          </p:cNvCxnSpPr>
+          <p:nvPr/>
+        </p:nvCxnSpPr>
+        <p:spPr>
+          <a:xfrm>
+            <a:off x="5328806" y="4357092"/>
+            <a:ext cx="323314" cy="0"/>
+          </a:xfrm>
+          <a:prstGeom prst="straightConnector1">
+            <a:avLst/>
+          </a:prstGeom>
+          <a:ln w="12700">
+            <a:solidFill>
+              <a:schemeClr val="accent6"/>
+            </a:solidFill>
+            <a:prstDash val="solid"/>
+            <a:headEnd type="none" w="med" len="med"/>
+            <a:tailEnd type="triangle" w="med" len="med"/>
+          </a:ln>
+        </p:spPr>
+        <p:style>
+          <a:lnRef idx="1">
+            <a:schemeClr val="accent1"/>
+          </a:lnRef>
+          <a:fillRef idx="0">
+            <a:schemeClr val="accent1"/>
+          </a:fillRef>
+          <a:effectRef idx="0">
+            <a:schemeClr val="accent1"/>
+          </a:effectRef>
+          <a:fontRef idx="minor">
+            <a:schemeClr val="tx1"/>
+          </a:fontRef>
+        </p:style>
+      </p:cxnSp>
+      <p:cxnSp>
+        <p:nvCxnSpPr>
+          <p:cNvPr id="88" name="직선 화살표 연결선 96">
+            <a:extLst>
+              <a:ext uri="{FF2B5EF4-FFF2-40B4-BE49-F238E27FC236}">
+                <a16:creationId xmlns:a16="http://schemas.microsoft.com/office/drawing/2014/main" id="{4C82DBCC-F5C1-D78E-407B-85C8449D840E}"/>
+              </a:ext>
+            </a:extLst>
+          </p:cNvPr>
+          <p:cNvCxnSpPr>
+            <a:cxnSpLocks/>
+            <a:stCxn id="58" idx="3"/>
+            <a:endCxn id="59" idx="1"/>
+          </p:cNvCxnSpPr>
+          <p:nvPr/>
+        </p:nvCxnSpPr>
+        <p:spPr>
+          <a:xfrm>
+            <a:off x="5331578" y="2962192"/>
+            <a:ext cx="323314" cy="0"/>
+          </a:xfrm>
+          <a:prstGeom prst="straightConnector1">
+            <a:avLst/>
+          </a:prstGeom>
+          <a:ln w="12700">
+            <a:solidFill>
+              <a:schemeClr val="accent6"/>
+            </a:solidFill>
+            <a:prstDash val="solid"/>
+            <a:headEnd type="none" w="med" len="med"/>
+            <a:tailEnd type="triangle" w="med" len="med"/>
+          </a:ln>
+        </p:spPr>
+        <p:style>
+          <a:lnRef idx="1">
+            <a:schemeClr val="accent1"/>
+          </a:lnRef>
+          <a:fillRef idx="0">
+            <a:schemeClr val="accent1"/>
+          </a:fillRef>
+          <a:effectRef idx="0">
+            <a:schemeClr val="accent1"/>
+          </a:effectRef>
+          <a:fontRef idx="minor">
+            <a:schemeClr val="tx1"/>
+          </a:fontRef>
+        </p:style>
+      </p:cxnSp>
+      <p:cxnSp>
+        <p:nvCxnSpPr>
+          <p:cNvPr id="91" name="직선 화살표 연결선 96">
+            <a:extLst>
+              <a:ext uri="{FF2B5EF4-FFF2-40B4-BE49-F238E27FC236}">
+                <a16:creationId xmlns:a16="http://schemas.microsoft.com/office/drawing/2014/main" id="{EBE4B398-BC14-08C5-1F59-F191B385F63D}"/>
+              </a:ext>
+            </a:extLst>
+          </p:cNvPr>
+          <p:cNvCxnSpPr>
+            <a:cxnSpLocks/>
+            <a:stCxn id="11" idx="3"/>
+            <a:endCxn id="17" idx="1"/>
+          </p:cNvCxnSpPr>
+          <p:nvPr/>
+        </p:nvCxnSpPr>
+        <p:spPr>
+          <a:xfrm flipV="1">
+            <a:off x="1922447" y="1564174"/>
+            <a:ext cx="546942" cy="182964"/>
+          </a:xfrm>
+          <a:prstGeom prst="straightConnector1">
+            <a:avLst/>
+          </a:prstGeom>
+          <a:ln w="12700">
+            <a:solidFill>
+              <a:srgbClr val="C00000"/>
+            </a:solidFill>
+            <a:prstDash val="solid"/>
+            <a:headEnd type="none" w="med" len="med"/>
+            <a:tailEnd type="triangle" w="med" len="med"/>
+          </a:ln>
+        </p:spPr>
+        <p:style>
+          <a:lnRef idx="1">
+            <a:schemeClr val="accent1"/>
+          </a:lnRef>
+          <a:fillRef idx="0">
+            <a:schemeClr val="accent1"/>
+          </a:fillRef>
+          <a:effectRef idx="0">
+            <a:schemeClr val="accent1"/>
+          </a:effectRef>
+          <a:fontRef idx="minor">
+            <a:schemeClr val="tx1"/>
+          </a:fontRef>
+        </p:style>
+      </p:cxnSp>
+      <p:cxnSp>
+        <p:nvCxnSpPr>
+          <p:cNvPr id="95" name="직선 화살표 연결선 96">
+            <a:extLst>
+              <a:ext uri="{FF2B5EF4-FFF2-40B4-BE49-F238E27FC236}">
+                <a16:creationId xmlns:a16="http://schemas.microsoft.com/office/drawing/2014/main" id="{32D3E944-B0B9-1EB8-C40C-914EEC5BEC27}"/>
+              </a:ext>
+            </a:extLst>
+          </p:cNvPr>
+          <p:cNvCxnSpPr>
+            <a:cxnSpLocks/>
+            <a:stCxn id="19" idx="3"/>
+            <a:endCxn id="21" idx="1"/>
+          </p:cNvCxnSpPr>
+          <p:nvPr/>
+        </p:nvCxnSpPr>
+        <p:spPr>
+          <a:xfrm flipV="1">
+            <a:off x="5331578" y="1566597"/>
+            <a:ext cx="323314" cy="695"/>
+          </a:xfrm>
+          <a:prstGeom prst="straightConnector1">
+            <a:avLst/>
+          </a:prstGeom>
+          <a:ln w="12700">
+            <a:solidFill>
+              <a:srgbClr val="C00000"/>
+            </a:solidFill>
+            <a:prstDash val="solid"/>
+            <a:headEnd type="none" w="med" len="med"/>
+            <a:tailEnd type="triangle" w="med" len="med"/>
+          </a:ln>
+        </p:spPr>
+        <p:style>
+          <a:lnRef idx="1">
+            <a:schemeClr val="accent1"/>
+          </a:lnRef>
+          <a:fillRef idx="0">
+            <a:schemeClr val="accent1"/>
+          </a:fillRef>
+          <a:effectRef idx="0">
+            <a:schemeClr val="accent1"/>
+          </a:effectRef>
+          <a:fontRef idx="minor">
+            <a:schemeClr val="tx1"/>
+          </a:fontRef>
+        </p:style>
+      </p:cxnSp>
+      <p:sp>
+        <p:nvSpPr>
+          <p:cNvPr id="111" name="사각형: 둥근 모서리 70">
+            <a:extLst>
+              <a:ext uri="{FF2B5EF4-FFF2-40B4-BE49-F238E27FC236}">
+                <a16:creationId xmlns:a16="http://schemas.microsoft.com/office/drawing/2014/main" id="{00560CDF-1B49-A010-9E61-44FE20B6971D}"/>
+              </a:ext>
+            </a:extLst>
+          </p:cNvPr>
+          <p:cNvSpPr/>
+          <p:nvPr/>
+        </p:nvSpPr>
+        <p:spPr>
+          <a:xfrm>
+            <a:off x="235987" y="2177255"/>
+            <a:ext cx="1800200" cy="892274"/>
+          </a:xfrm>
+          <a:prstGeom prst="roundRect">
+            <a:avLst>
+              <a:gd name="adj" fmla="val 8056"/>
+            </a:avLst>
+          </a:prstGeom>
+          <a:noFill/>
+          <a:ln w="12700">
+            <a:prstDash val="solid"/>
+            <a:headEnd type="none" w="med" len="med"/>
+            <a:tailEnd type="triangle" w="med" len="med"/>
+          </a:ln>
+        </p:spPr>
+        <p:style>
+          <a:lnRef idx="2">
+            <a:schemeClr val="dk1"/>
+          </a:lnRef>
+          <a:fillRef idx="1">
+            <a:schemeClr val="lt1"/>
+          </a:fillRef>
+          <a:effectRef idx="0">
+            <a:schemeClr val="dk1"/>
+          </a:effectRef>
+          <a:fontRef idx="minor">
+            <a:schemeClr val="dk1"/>
+          </a:fontRef>
+        </p:style>
+        <p:txBody>
+          <a:bodyPr rtlCol="0" anchor="t"/>
+          <a:lstStyle/>
+          <a:p>
+            <a:r>
+              <a:rPr lang="en-US" altLang="ko-KR" sz="1000" dirty="0"/>
+              <a:t>Client B </a:t>
+            </a:r>
+            <a:r>
+              <a:rPr lang="en-US" altLang="ko-KR" sz="1000" b="1" dirty="0"/>
+              <a:t>Namespace</a:t>
+            </a:r>
+            <a:endParaRPr lang="ko-KR" altLang="en-US" sz="1000" b="1" dirty="0"/>
+          </a:p>
+        </p:txBody>
+      </p:sp>
+      <p:sp>
+        <p:nvSpPr>
+          <p:cNvPr id="112" name="사각형: 둥근 모서리 12">
+            <a:extLst>
+              <a:ext uri="{FF2B5EF4-FFF2-40B4-BE49-F238E27FC236}">
+                <a16:creationId xmlns:a16="http://schemas.microsoft.com/office/drawing/2014/main" id="{0E8E6F72-661E-DA03-AB4E-C1AA91B15764}"/>
+              </a:ext>
+            </a:extLst>
+          </p:cNvPr>
+          <p:cNvSpPr/>
+          <p:nvPr/>
+        </p:nvSpPr>
+        <p:spPr>
+          <a:xfrm>
+            <a:off x="783009" y="2518078"/>
+            <a:ext cx="1139438" cy="451511"/>
+          </a:xfrm>
+          <a:prstGeom prst="roundRect">
+            <a:avLst>
+              <a:gd name="adj" fmla="val 14105"/>
+            </a:avLst>
+          </a:prstGeom>
+          <a:noFill/>
+          <a:ln w="12700">
+            <a:headEnd type="none" w="med" len="med"/>
+            <a:tailEnd type="triangle" w="med" len="med"/>
+          </a:ln>
+        </p:spPr>
+        <p:style>
+          <a:lnRef idx="2">
+            <a:schemeClr val="dk1"/>
+          </a:lnRef>
+          <a:fillRef idx="1">
+            <a:schemeClr val="lt1"/>
+          </a:fillRef>
+          <a:effectRef idx="0">
+            <a:schemeClr val="dk1"/>
+          </a:effectRef>
+          <a:fontRef idx="minor">
+            <a:schemeClr val="dk1"/>
+          </a:fontRef>
+        </p:style>
+        <p:txBody>
+          <a:bodyPr rtlCol="0" anchor="ctr"/>
+          <a:lstStyle/>
+          <a:p>
+            <a:pPr algn="ctr"/>
+            <a:r>
+              <a:rPr lang="en-US" altLang="ko-KR" sz="900"/>
+              <a:t>Client B </a:t>
+            </a:r>
+            <a:r>
+              <a:rPr lang="en-US" altLang="ko-KR" sz="900" b="1" dirty="0"/>
+              <a:t>Pod</a:t>
+            </a:r>
+            <a:endParaRPr lang="ko-KR" altLang="en-US" sz="900" b="1" dirty="0"/>
+          </a:p>
+        </p:txBody>
+      </p:sp>
+      <p:sp>
+        <p:nvSpPr>
+          <p:cNvPr id="122" name="사각형: 둥근 모서리 12">
+            <a:extLst>
+              <a:ext uri="{FF2B5EF4-FFF2-40B4-BE49-F238E27FC236}">
+                <a16:creationId xmlns:a16="http://schemas.microsoft.com/office/drawing/2014/main" id="{9F4F196D-5DC2-433D-8022-DD5A2CEEE453}"/>
+              </a:ext>
+            </a:extLst>
+          </p:cNvPr>
+          <p:cNvSpPr/>
+          <p:nvPr/>
+        </p:nvSpPr>
+        <p:spPr>
+          <a:xfrm>
+            <a:off x="5652682" y="2037427"/>
+            <a:ext cx="1139438" cy="451511"/>
           </a:xfrm>
           <a:prstGeom prst="roundRect">
             <a:avLst>
@@ -4280,26 +5781,482 @@
           <a:p>
             <a:pPr algn="ctr"/>
             <a:r>
-              <a:rPr lang="en-US" altLang="ko-KR" sz="900" dirty="0"/>
-              <a:t>Endpoint IPs</a:t>
+              <a:rPr lang="en-US" altLang="ko-KR" sz="900"/>
+              <a:t>Server</a:t>
             </a:r>
           </a:p>
           <a:p>
             <a:pPr algn="ctr"/>
             <a:r>
-              <a:rPr lang="en-US" altLang="ko-KR" sz="900" b="1" dirty="0"/>
-              <a:t>Backend</a:t>
-            </a:r>
-            <a:endParaRPr lang="ko-KR" altLang="en-US" sz="900" b="1" dirty="0"/>
-          </a:p>
-        </p:txBody>
-      </p:sp>
-      <p:sp>
-        <p:nvSpPr>
-          <p:cNvPr id="21" name="사각형: 둥근 모서리 12">
-            <a:extLst>
-              <a:ext uri="{FF2B5EF4-FFF2-40B4-BE49-F238E27FC236}">
-                <a16:creationId xmlns:a16="http://schemas.microsoft.com/office/drawing/2014/main" id="{DC4C280C-6B79-F1F7-15ED-50513C928F3A}"/>
+              <a:rPr lang="en-US" altLang="ko-KR" sz="900" b="1"/>
+              <a:t>HTTPRoute</a:t>
+            </a:r>
+          </a:p>
+          <a:p>
+            <a:pPr algn="ctr"/>
+            <a:r>
+              <a:rPr lang="en-US" altLang="ko-KR" sz="900" b="1"/>
+              <a:t>(Producer)</a:t>
+            </a:r>
+          </a:p>
+        </p:txBody>
+      </p:sp>
+      <p:cxnSp>
+        <p:nvCxnSpPr>
+          <p:cNvPr id="125" name="직선 화살표 연결선 96">
+            <a:extLst>
+              <a:ext uri="{FF2B5EF4-FFF2-40B4-BE49-F238E27FC236}">
+                <a16:creationId xmlns:a16="http://schemas.microsoft.com/office/drawing/2014/main" id="{6DCF6355-2581-B5B2-3107-40DEAE989C41}"/>
+              </a:ext>
+            </a:extLst>
+          </p:cNvPr>
+          <p:cNvCxnSpPr>
+            <a:cxnSpLocks/>
+            <a:stCxn id="112" idx="3"/>
+            <a:endCxn id="17" idx="1"/>
+          </p:cNvCxnSpPr>
+          <p:nvPr/>
+        </p:nvCxnSpPr>
+        <p:spPr>
+          <a:xfrm flipV="1">
+            <a:off x="1922447" y="1564174"/>
+            <a:ext cx="546942" cy="1179660"/>
+          </a:xfrm>
+          <a:prstGeom prst="straightConnector1">
+            <a:avLst/>
+          </a:prstGeom>
+          <a:ln w="12700">
+            <a:solidFill>
+              <a:srgbClr val="C00000"/>
+            </a:solidFill>
+            <a:prstDash val="solid"/>
+            <a:headEnd type="none" w="med" len="med"/>
+            <a:tailEnd type="triangle" w="med" len="med"/>
+          </a:ln>
+        </p:spPr>
+        <p:style>
+          <a:lnRef idx="1">
+            <a:schemeClr val="accent1"/>
+          </a:lnRef>
+          <a:fillRef idx="0">
+            <a:schemeClr val="accent1"/>
+          </a:fillRef>
+          <a:effectRef idx="0">
+            <a:schemeClr val="accent1"/>
+          </a:effectRef>
+          <a:fontRef idx="minor">
+            <a:schemeClr val="tx1"/>
+          </a:fontRef>
+        </p:style>
+      </p:cxnSp>
+      <p:cxnSp>
+        <p:nvCxnSpPr>
+          <p:cNvPr id="128" name="직선 화살표 연결선 96">
+            <a:extLst>
+              <a:ext uri="{FF2B5EF4-FFF2-40B4-BE49-F238E27FC236}">
+                <a16:creationId xmlns:a16="http://schemas.microsoft.com/office/drawing/2014/main" id="{50B5F23B-71A7-EA09-60E9-1A4BF7A217B9}"/>
+              </a:ext>
+            </a:extLst>
+          </p:cNvPr>
+          <p:cNvCxnSpPr>
+            <a:cxnSpLocks/>
+            <a:stCxn id="17" idx="3"/>
+            <a:endCxn id="19" idx="1"/>
+          </p:cNvCxnSpPr>
+          <p:nvPr/>
+        </p:nvCxnSpPr>
+        <p:spPr>
+          <a:xfrm>
+            <a:off x="3799811" y="1564174"/>
+            <a:ext cx="427237" cy="3118"/>
+          </a:xfrm>
+          <a:prstGeom prst="straightConnector1">
+            <a:avLst/>
+          </a:prstGeom>
+          <a:ln w="12700">
+            <a:solidFill>
+              <a:srgbClr val="C00000"/>
+            </a:solidFill>
+            <a:prstDash val="solid"/>
+            <a:headEnd type="none" w="med" len="med"/>
+            <a:tailEnd type="triangle" w="med" len="med"/>
+          </a:ln>
+        </p:spPr>
+        <p:style>
+          <a:lnRef idx="1">
+            <a:schemeClr val="accent1"/>
+          </a:lnRef>
+          <a:fillRef idx="0">
+            <a:schemeClr val="accent1"/>
+          </a:fillRef>
+          <a:effectRef idx="0">
+            <a:schemeClr val="accent1"/>
+          </a:effectRef>
+          <a:fontRef idx="minor">
+            <a:schemeClr val="tx1"/>
+          </a:fontRef>
+        </p:style>
+      </p:cxnSp>
+      <p:cxnSp>
+        <p:nvCxnSpPr>
+          <p:cNvPr id="144" name="직선 화살표 연결선 96">
+            <a:extLst>
+              <a:ext uri="{FF2B5EF4-FFF2-40B4-BE49-F238E27FC236}">
+                <a16:creationId xmlns:a16="http://schemas.microsoft.com/office/drawing/2014/main" id="{3F0D0A95-E8B4-37B3-26D1-0B115B7D41BB}"/>
+              </a:ext>
+            </a:extLst>
+          </p:cNvPr>
+          <p:cNvCxnSpPr>
+            <a:cxnSpLocks/>
+            <a:stCxn id="17" idx="3"/>
+            <a:endCxn id="58" idx="1"/>
+          </p:cNvCxnSpPr>
+          <p:nvPr/>
+        </p:nvCxnSpPr>
+        <p:spPr>
+          <a:xfrm>
+            <a:off x="3799811" y="1564174"/>
+            <a:ext cx="427237" cy="1398018"/>
+          </a:xfrm>
+          <a:prstGeom prst="straightConnector1">
+            <a:avLst/>
+          </a:prstGeom>
+          <a:ln w="12700">
+            <a:solidFill>
+              <a:schemeClr val="accent6"/>
+            </a:solidFill>
+            <a:prstDash val="solid"/>
+            <a:headEnd type="none" w="med" len="med"/>
+            <a:tailEnd type="triangle" w="med" len="med"/>
+          </a:ln>
+        </p:spPr>
+        <p:style>
+          <a:lnRef idx="1">
+            <a:schemeClr val="accent1"/>
+          </a:lnRef>
+          <a:fillRef idx="0">
+            <a:schemeClr val="accent1"/>
+          </a:fillRef>
+          <a:effectRef idx="0">
+            <a:schemeClr val="accent1"/>
+          </a:effectRef>
+          <a:fontRef idx="minor">
+            <a:schemeClr val="tx1"/>
+          </a:fontRef>
+        </p:style>
+      </p:cxnSp>
+      <p:cxnSp>
+        <p:nvCxnSpPr>
+          <p:cNvPr id="147" name="직선 화살표 연결선 96">
+            <a:extLst>
+              <a:ext uri="{FF2B5EF4-FFF2-40B4-BE49-F238E27FC236}">
+                <a16:creationId xmlns:a16="http://schemas.microsoft.com/office/drawing/2014/main" id="{45D16DEB-BCE9-A2AD-D40E-D536A606473F}"/>
+              </a:ext>
+            </a:extLst>
+          </p:cNvPr>
+          <p:cNvCxnSpPr>
+            <a:cxnSpLocks/>
+            <a:stCxn id="17" idx="3"/>
+            <a:endCxn id="64" idx="1"/>
+          </p:cNvCxnSpPr>
+          <p:nvPr/>
+        </p:nvCxnSpPr>
+        <p:spPr>
+          <a:xfrm>
+            <a:off x="3799811" y="1564174"/>
+            <a:ext cx="424465" cy="2792918"/>
+          </a:xfrm>
+          <a:prstGeom prst="straightConnector1">
+            <a:avLst/>
+          </a:prstGeom>
+          <a:ln w="12700">
+            <a:solidFill>
+              <a:schemeClr val="accent6"/>
+            </a:solidFill>
+            <a:prstDash val="solid"/>
+            <a:headEnd type="none" w="med" len="med"/>
+            <a:tailEnd type="triangle" w="med" len="med"/>
+          </a:ln>
+        </p:spPr>
+        <p:style>
+          <a:lnRef idx="1">
+            <a:schemeClr val="accent1"/>
+          </a:lnRef>
+          <a:fillRef idx="0">
+            <a:schemeClr val="accent1"/>
+          </a:fillRef>
+          <a:effectRef idx="0">
+            <a:schemeClr val="accent1"/>
+          </a:effectRef>
+          <a:fontRef idx="minor">
+            <a:schemeClr val="tx1"/>
+          </a:fontRef>
+        </p:style>
+      </p:cxnSp>
+      <p:cxnSp>
+        <p:nvCxnSpPr>
+          <p:cNvPr id="193" name="직선 화살표 연결선 96">
+            <a:extLst>
+              <a:ext uri="{FF2B5EF4-FFF2-40B4-BE49-F238E27FC236}">
+                <a16:creationId xmlns:a16="http://schemas.microsoft.com/office/drawing/2014/main" id="{A91FAB81-FC78-D00D-1CA2-447D9F9607F4}"/>
+              </a:ext>
+            </a:extLst>
+          </p:cNvPr>
+          <p:cNvCxnSpPr>
+            <a:cxnSpLocks/>
+          </p:cNvCxnSpPr>
+          <p:nvPr/>
+        </p:nvCxnSpPr>
+        <p:spPr>
+          <a:xfrm>
+            <a:off x="7138062" y="2160788"/>
+            <a:ext cx="323569" cy="0"/>
+          </a:xfrm>
+          <a:prstGeom prst="straightConnector1">
+            <a:avLst/>
+          </a:prstGeom>
+          <a:ln w="12700">
+            <a:solidFill>
+              <a:schemeClr val="tx1"/>
+            </a:solidFill>
+            <a:prstDash val="solid"/>
+            <a:headEnd type="none" w="med" len="med"/>
+            <a:tailEnd type="triangle" w="med" len="med"/>
+          </a:ln>
+        </p:spPr>
+        <p:style>
+          <a:lnRef idx="1">
+            <a:schemeClr val="accent1"/>
+          </a:lnRef>
+          <a:fillRef idx="0">
+            <a:schemeClr val="accent1"/>
+          </a:fillRef>
+          <a:effectRef idx="0">
+            <a:schemeClr val="accent1"/>
+          </a:effectRef>
+          <a:fontRef idx="minor">
+            <a:schemeClr val="tx1"/>
+          </a:fontRef>
+        </p:style>
+      </p:cxnSp>
+      <p:sp>
+        <p:nvSpPr>
+          <p:cNvPr id="194" name="TextBox 193">
+            <a:extLst>
+              <a:ext uri="{FF2B5EF4-FFF2-40B4-BE49-F238E27FC236}">
+                <a16:creationId xmlns:a16="http://schemas.microsoft.com/office/drawing/2014/main" id="{121D2660-7138-311D-AE9D-C67A1481E089}"/>
+              </a:ext>
+            </a:extLst>
+          </p:cNvPr>
+          <p:cNvSpPr txBox="1"/>
+          <p:nvPr/>
+        </p:nvSpPr>
+        <p:spPr>
+          <a:xfrm>
+            <a:off x="7433805" y="2043733"/>
+            <a:ext cx="702455" cy="230832"/>
+          </a:xfrm>
+          <a:prstGeom prst="rect">
+            <a:avLst/>
+          </a:prstGeom>
+          <a:noFill/>
+        </p:spPr>
+        <p:txBody>
+          <a:bodyPr wrap="square" rtlCol="0">
+            <a:spAutoFit/>
+          </a:bodyPr>
+          <a:lstStyle/>
+          <a:p>
+            <a:r>
+              <a:rPr lang="en-US" sz="900"/>
+              <a:t>Reference</a:t>
+            </a:r>
+            <a:endParaRPr lang="en-KR" sz="900"/>
+          </a:p>
+        </p:txBody>
+      </p:sp>
+      <p:sp>
+        <p:nvSpPr>
+          <p:cNvPr id="198" name="TextBox 197">
+            <a:extLst>
+              <a:ext uri="{FF2B5EF4-FFF2-40B4-BE49-F238E27FC236}">
+                <a16:creationId xmlns:a16="http://schemas.microsoft.com/office/drawing/2014/main" id="{3B6E0803-F121-79F7-77B4-28740CB8FF3D}"/>
+              </a:ext>
+            </a:extLst>
+          </p:cNvPr>
+          <p:cNvSpPr txBox="1"/>
+          <p:nvPr/>
+        </p:nvSpPr>
+        <p:spPr>
+          <a:xfrm>
+            <a:off x="7433057" y="2318834"/>
+            <a:ext cx="726519" cy="369332"/>
+          </a:xfrm>
+          <a:prstGeom prst="rect">
+            <a:avLst/>
+          </a:prstGeom>
+          <a:noFill/>
+        </p:spPr>
+        <p:txBody>
+          <a:bodyPr wrap="square" rtlCol="0">
+            <a:spAutoFit/>
+          </a:bodyPr>
+          <a:lstStyle/>
+          <a:p>
+            <a:r>
+              <a:rPr lang="en-US" sz="900"/>
+              <a:t>Client A/B</a:t>
+            </a:r>
+          </a:p>
+          <a:p>
+            <a:r>
+              <a:rPr lang="en-US" sz="900"/>
+              <a:t>Traffic</a:t>
+            </a:r>
+            <a:endParaRPr lang="en-KR" sz="900"/>
+          </a:p>
+        </p:txBody>
+      </p:sp>
+      <p:cxnSp>
+        <p:nvCxnSpPr>
+          <p:cNvPr id="201" name="직선 화살표 연결선 96">
+            <a:extLst>
+              <a:ext uri="{FF2B5EF4-FFF2-40B4-BE49-F238E27FC236}">
+                <a16:creationId xmlns:a16="http://schemas.microsoft.com/office/drawing/2014/main" id="{D04053F6-3309-797F-6D01-53ECB051304F}"/>
+              </a:ext>
+            </a:extLst>
+          </p:cNvPr>
+          <p:cNvCxnSpPr>
+            <a:cxnSpLocks/>
+          </p:cNvCxnSpPr>
+          <p:nvPr/>
+        </p:nvCxnSpPr>
+        <p:spPr>
+          <a:xfrm>
+            <a:off x="7137314" y="2504923"/>
+            <a:ext cx="323569" cy="0"/>
+          </a:xfrm>
+          <a:prstGeom prst="straightConnector1">
+            <a:avLst/>
+          </a:prstGeom>
+          <a:ln w="12700">
+            <a:solidFill>
+              <a:srgbClr val="C00000"/>
+            </a:solidFill>
+            <a:prstDash val="solid"/>
+            <a:headEnd type="none" w="med" len="med"/>
+            <a:tailEnd type="triangle" w="med" len="med"/>
+          </a:ln>
+        </p:spPr>
+        <p:style>
+          <a:lnRef idx="1">
+            <a:schemeClr val="accent1"/>
+          </a:lnRef>
+          <a:fillRef idx="0">
+            <a:schemeClr val="accent1"/>
+          </a:fillRef>
+          <a:effectRef idx="0">
+            <a:schemeClr val="accent1"/>
+          </a:effectRef>
+          <a:fontRef idx="minor">
+            <a:schemeClr val="tx1"/>
+          </a:fontRef>
+        </p:style>
+      </p:cxnSp>
+      <p:sp>
+        <p:nvSpPr>
+          <p:cNvPr id="202" name="TextBox 201">
+            <a:extLst>
+              <a:ext uri="{FF2B5EF4-FFF2-40B4-BE49-F238E27FC236}">
+                <a16:creationId xmlns:a16="http://schemas.microsoft.com/office/drawing/2014/main" id="{76D3978E-90CB-FF9F-675F-258289DADB81}"/>
+              </a:ext>
+            </a:extLst>
+          </p:cNvPr>
+          <p:cNvSpPr txBox="1"/>
+          <p:nvPr/>
+        </p:nvSpPr>
+        <p:spPr>
+          <a:xfrm>
+            <a:off x="7433057" y="2688166"/>
+            <a:ext cx="726519" cy="369332"/>
+          </a:xfrm>
+          <a:prstGeom prst="rect">
+            <a:avLst/>
+          </a:prstGeom>
+          <a:noFill/>
+        </p:spPr>
+        <p:txBody>
+          <a:bodyPr wrap="square" rtlCol="0">
+            <a:spAutoFit/>
+          </a:bodyPr>
+          <a:lstStyle/>
+          <a:p>
+            <a:r>
+              <a:rPr lang="en-US" sz="900"/>
+              <a:t>Client C</a:t>
+            </a:r>
+          </a:p>
+          <a:p>
+            <a:r>
+              <a:rPr lang="en-US" sz="900"/>
+              <a:t>Traffic</a:t>
+            </a:r>
+            <a:endParaRPr lang="en-KR" sz="900"/>
+          </a:p>
+        </p:txBody>
+      </p:sp>
+      <p:cxnSp>
+        <p:nvCxnSpPr>
+          <p:cNvPr id="203" name="직선 화살표 연결선 96">
+            <a:extLst>
+              <a:ext uri="{FF2B5EF4-FFF2-40B4-BE49-F238E27FC236}">
+                <a16:creationId xmlns:a16="http://schemas.microsoft.com/office/drawing/2014/main" id="{4EF1A01C-F81C-F134-985F-6E4DF37DBBE4}"/>
+              </a:ext>
+            </a:extLst>
+          </p:cNvPr>
+          <p:cNvCxnSpPr>
+            <a:cxnSpLocks/>
+          </p:cNvCxnSpPr>
+          <p:nvPr/>
+        </p:nvCxnSpPr>
+        <p:spPr>
+          <a:xfrm>
+            <a:off x="7137314" y="2874255"/>
+            <a:ext cx="323569" cy="0"/>
+          </a:xfrm>
+          <a:prstGeom prst="straightConnector1">
+            <a:avLst/>
+          </a:prstGeom>
+          <a:ln w="12700">
+            <a:solidFill>
+              <a:schemeClr val="accent6"/>
+            </a:solidFill>
+            <a:prstDash val="solid"/>
+            <a:headEnd type="none" w="med" len="med"/>
+            <a:tailEnd type="triangle" w="med" len="med"/>
+          </a:ln>
+        </p:spPr>
+        <p:style>
+          <a:lnRef idx="1">
+            <a:schemeClr val="accent1"/>
+          </a:lnRef>
+          <a:fillRef idx="0">
+            <a:schemeClr val="accent1"/>
+          </a:fillRef>
+          <a:effectRef idx="0">
+            <a:schemeClr val="accent1"/>
+          </a:effectRef>
+          <a:fontRef idx="minor">
+            <a:schemeClr val="tx1"/>
+          </a:fontRef>
+        </p:style>
+      </p:cxnSp>
+      <p:sp>
+        <p:nvSpPr>
+          <p:cNvPr id="7" name="사각형: 둥근 모서리 12">
+            <a:extLst>
+              <a:ext uri="{FF2B5EF4-FFF2-40B4-BE49-F238E27FC236}">
+                <a16:creationId xmlns:a16="http://schemas.microsoft.com/office/drawing/2014/main" id="{F909DEE9-E108-0FB0-3881-BBC146BC9264}"/>
               </a:ext>
             </a:extLst>
           </p:cNvPr>
@@ -4308,7 +6265,7 @@
         </p:nvSpPr>
         <p:spPr>
           <a:xfrm>
-            <a:off x="6390504" y="1340841"/>
+            <a:off x="7197596" y="1323081"/>
             <a:ext cx="1139438" cy="451511"/>
           </a:xfrm>
           <a:prstGeom prst="roundRect">
@@ -4316,7 +6273,11 @@
               <a:gd name="adj" fmla="val 14105"/>
             </a:avLst>
           </a:prstGeom>
-          <a:noFill/>
+          <a:solidFill>
+            <a:schemeClr val="bg2">
+              <a:lumMod val="90000"/>
+            </a:schemeClr>
+          </a:solidFill>
           <a:ln w="12700">
             <a:headEnd type="none" w="med" len="med"/>
             <a:tailEnd type="triangle" w="med" len="med"/>
@@ -4343,118 +6304,29 @@
             <a:pPr algn="ctr"/>
             <a:r>
               <a:rPr lang="en-US" altLang="ko-KR" sz="900"/>
-              <a:t>Server </a:t>
-            </a:r>
-            <a:r>
-              <a:rPr lang="en-US" altLang="ko-KR" sz="900" b="1" dirty="0"/>
+              <a:t>Gateway Controller</a:t>
+            </a:r>
+            <a:r>
+              <a:rPr lang="en-US" altLang="ko-KR" sz="900" b="1"/>
+              <a:t> </a:t>
+            </a:r>
+            <a:br>
+              <a:rPr lang="en-US" altLang="ko-KR" sz="900" b="1"/>
+            </a:br>
+            <a:r>
+              <a:rPr lang="en-US" altLang="ko-KR" sz="900" b="1"/>
               <a:t>Deployment</a:t>
             </a:r>
             <a:endParaRPr lang="ko-KR" altLang="en-US" sz="900" b="1" dirty="0"/>
           </a:p>
         </p:txBody>
       </p:sp>
-      <p:cxnSp>
-        <p:nvCxnSpPr>
-          <p:cNvPr id="46" name="직선 화살표 연결선 96">
-            <a:extLst>
-              <a:ext uri="{FF2B5EF4-FFF2-40B4-BE49-F238E27FC236}">
-                <a16:creationId xmlns:a16="http://schemas.microsoft.com/office/drawing/2014/main" id="{11E05A8C-2F0E-F71F-1F44-36263383F304}"/>
-              </a:ext>
-            </a:extLst>
-          </p:cNvPr>
-          <p:cNvCxnSpPr>
-            <a:cxnSpLocks/>
-            <a:stCxn id="122" idx="2"/>
-            <a:endCxn id="17" idx="0"/>
-          </p:cNvCxnSpPr>
-          <p:nvPr/>
-        </p:nvCxnSpPr>
-        <p:spPr>
-          <a:xfrm flipH="1">
-            <a:off x="3870212" y="904269"/>
-            <a:ext cx="1641941" cy="434149"/>
-          </a:xfrm>
-          <a:prstGeom prst="straightConnector1">
-            <a:avLst/>
-          </a:prstGeom>
-          <a:ln w="12700">
-            <a:solidFill>
-              <a:schemeClr val="tx2"/>
-            </a:solidFill>
-            <a:prstDash val="solid"/>
-            <a:headEnd type="none" w="med" len="med"/>
-            <a:tailEnd type="triangle" w="med" len="med"/>
-          </a:ln>
-        </p:spPr>
-        <p:style>
-          <a:lnRef idx="1">
-            <a:schemeClr val="accent1"/>
-          </a:lnRef>
-          <a:fillRef idx="0">
-            <a:schemeClr val="accent1"/>
-          </a:fillRef>
-          <a:effectRef idx="0">
-            <a:schemeClr val="accent1"/>
-          </a:effectRef>
-          <a:fontRef idx="minor">
-            <a:schemeClr val="tx1"/>
-          </a:fontRef>
-        </p:style>
-      </p:cxnSp>
-      <p:cxnSp>
-        <p:nvCxnSpPr>
-          <p:cNvPr id="49" name="직선 화살표 연결선 96">
-            <a:extLst>
-              <a:ext uri="{FF2B5EF4-FFF2-40B4-BE49-F238E27FC236}">
-                <a16:creationId xmlns:a16="http://schemas.microsoft.com/office/drawing/2014/main" id="{D4917D88-590C-D824-26A5-E985D32A1AEE}"/>
-              </a:ext>
-            </a:extLst>
-          </p:cNvPr>
-          <p:cNvCxnSpPr>
-            <a:cxnSpLocks/>
-            <a:stCxn id="122" idx="2"/>
-            <a:endCxn id="19" idx="0"/>
-          </p:cNvCxnSpPr>
-          <p:nvPr/>
-        </p:nvCxnSpPr>
-        <p:spPr>
-          <a:xfrm>
-            <a:off x="5512153" y="904269"/>
-            <a:ext cx="2772" cy="440386"/>
-          </a:xfrm>
-          <a:prstGeom prst="straightConnector1">
-            <a:avLst/>
-          </a:prstGeom>
-          <a:ln w="12700">
-            <a:solidFill>
-              <a:schemeClr val="accent3"/>
-            </a:solidFill>
-            <a:prstDash val="solid"/>
-            <a:headEnd type="none" w="med" len="med"/>
-            <a:tailEnd type="triangle" w="med" len="med"/>
-          </a:ln>
-        </p:spPr>
-        <p:style>
-          <a:lnRef idx="1">
-            <a:schemeClr val="accent1"/>
-          </a:lnRef>
-          <a:fillRef idx="0">
-            <a:schemeClr val="accent1"/>
-          </a:fillRef>
-          <a:effectRef idx="0">
-            <a:schemeClr val="accent1"/>
-          </a:effectRef>
-          <a:fontRef idx="minor">
-            <a:schemeClr val="tx1"/>
-          </a:fontRef>
-        </p:style>
-      </p:cxnSp>
-      <p:sp>
-        <p:nvSpPr>
-          <p:cNvPr id="56" name="사각형: 둥근 모서리 12">
-            <a:extLst>
-              <a:ext uri="{FF2B5EF4-FFF2-40B4-BE49-F238E27FC236}">
-                <a16:creationId xmlns:a16="http://schemas.microsoft.com/office/drawing/2014/main" id="{78808AA9-A2FE-51F8-7011-E33BB1BAA35F}"/>
+      <p:sp>
+        <p:nvSpPr>
+          <p:cNvPr id="8" name="사각형: 둥근 모서리 70">
+            <a:extLst>
+              <a:ext uri="{FF2B5EF4-FFF2-40B4-BE49-F238E27FC236}">
+                <a16:creationId xmlns:a16="http://schemas.microsoft.com/office/drawing/2014/main" id="{526F21C7-18BC-6323-658A-A6DECB17E90E}"/>
               </a:ext>
             </a:extLst>
           </p:cNvPr>
@@ -4463,16 +6335,17 @@
         </p:nvSpPr>
         <p:spPr>
           <a:xfrm>
-            <a:off x="3095263" y="2452219"/>
-            <a:ext cx="3081988" cy="836785"/>
+            <a:off x="7100758" y="920400"/>
+            <a:ext cx="1337932" cy="951484"/>
           </a:xfrm>
           <a:prstGeom prst="roundRect">
             <a:avLst>
-              <a:gd name="adj" fmla="val 8995"/>
+              <a:gd name="adj" fmla="val 7127"/>
             </a:avLst>
           </a:prstGeom>
           <a:noFill/>
           <a:ln w="12700">
+            <a:prstDash val="solid"/>
             <a:headEnd type="none" w="med" len="med"/>
             <a:tailEnd type="triangle" w="med" len="med"/>
           </a:ln>
@@ -4495,25 +6368,24 @@
           <a:bodyPr rtlCol="0" anchor="t"/>
           <a:lstStyle/>
           <a:p>
-            <a:pPr algn="ctr"/>
-            <a:r>
-              <a:rPr lang="en-US" altLang="ko-KR" sz="900"/>
-              <a:t>Server Version 1 </a:t>
-            </a:r>
-            <a:r>
-              <a:rPr lang="en-US" altLang="ko-KR" sz="900" b="1" dirty="0"/>
-              <a:t>Service</a:t>
-            </a:r>
-            <a:endParaRPr lang="ko-KR" altLang="en-US" sz="900" b="1" dirty="0"/>
-          </a:p>
-        </p:txBody>
-      </p:sp>
-      <p:sp>
-        <p:nvSpPr>
-          <p:cNvPr id="57" name="사각형: 둥근 모서리 12">
-            <a:extLst>
-              <a:ext uri="{FF2B5EF4-FFF2-40B4-BE49-F238E27FC236}">
-                <a16:creationId xmlns:a16="http://schemas.microsoft.com/office/drawing/2014/main" id="{D1018987-E3F4-0741-B6E3-26D72BA02340}"/>
+            <a:r>
+              <a:rPr lang="en-US" altLang="ko-KR" sz="1000" dirty="0"/>
+              <a:t>Controller </a:t>
+            </a:r>
+            <a:r>
+              <a:rPr lang="en-US" altLang="ko-KR" sz="1000" b="1" dirty="0"/>
+              <a:t>Namespace</a:t>
+            </a:r>
+            <a:endParaRPr lang="ko-KR" altLang="en-US" sz="1000" b="1" dirty="0"/>
+          </a:p>
+        </p:txBody>
+      </p:sp>
+      <p:sp>
+        <p:nvSpPr>
+          <p:cNvPr id="9" name="사각형: 둥근 모서리 12">
+            <a:extLst>
+              <a:ext uri="{FF2B5EF4-FFF2-40B4-BE49-F238E27FC236}">
+                <a16:creationId xmlns:a16="http://schemas.microsoft.com/office/drawing/2014/main" id="{60C41D8F-E093-FA55-4E6A-B2893E3C859E}"/>
               </a:ext>
             </a:extLst>
           </p:cNvPr>
@@ -4522,8 +6394,8 @@
         </p:nvSpPr>
         <p:spPr>
           <a:xfrm>
-            <a:off x="3205001" y="2733318"/>
-            <a:ext cx="1330422" cy="451511"/>
+            <a:off x="5652120" y="3433886"/>
+            <a:ext cx="1139438" cy="451511"/>
           </a:xfrm>
           <a:prstGeom prst="roundRect">
             <a:avLst>
@@ -4560,494 +6432,46 @@
           <a:p>
             <a:pPr algn="ctr"/>
             <a:r>
-              <a:rPr lang="en-US" altLang="ko-KR" sz="900" dirty="0"/>
-              <a:t>DNS Name, ClusterIP</a:t>
+              <a:rPr lang="en-US" altLang="ko-KR" sz="900"/>
+              <a:t>Client C</a:t>
             </a:r>
           </a:p>
           <a:p>
             <a:pPr algn="ctr"/>
             <a:r>
-              <a:rPr lang="en-US" altLang="ko-KR" sz="900" b="1" dirty="0"/>
-              <a:t>Frontend</a:t>
-            </a:r>
-            <a:endParaRPr lang="ko-KR" altLang="en-US" sz="900" b="1" dirty="0"/>
-          </a:p>
-        </p:txBody>
-      </p:sp>
-      <p:sp>
-        <p:nvSpPr>
-          <p:cNvPr id="58" name="사각형: 둥근 모서리 12">
-            <a:extLst>
-              <a:ext uri="{FF2B5EF4-FFF2-40B4-BE49-F238E27FC236}">
-                <a16:creationId xmlns:a16="http://schemas.microsoft.com/office/drawing/2014/main" id="{97747399-1A2F-E531-DDCB-301B9A7B5B04}"/>
-              </a:ext>
-            </a:extLst>
-          </p:cNvPr>
-          <p:cNvSpPr/>
-          <p:nvPr/>
-        </p:nvSpPr>
-        <p:spPr>
-          <a:xfrm>
-            <a:off x="4962660" y="2739555"/>
-            <a:ext cx="1104530" cy="445274"/>
-          </a:xfrm>
-          <a:prstGeom prst="roundRect">
-            <a:avLst>
-              <a:gd name="adj" fmla="val 14105"/>
-            </a:avLst>
-          </a:prstGeom>
-          <a:solidFill>
-            <a:schemeClr val="bg1">
-              <a:lumMod val="95000"/>
-            </a:schemeClr>
-          </a:solidFill>
-          <a:ln w="12700">
-            <a:headEnd type="none" w="med" len="med"/>
-            <a:tailEnd type="triangle" w="med" len="med"/>
-          </a:ln>
-        </p:spPr>
-        <p:style>
-          <a:lnRef idx="2">
-            <a:schemeClr val="dk1"/>
-          </a:lnRef>
-          <a:fillRef idx="1">
-            <a:schemeClr val="lt1"/>
-          </a:fillRef>
-          <a:effectRef idx="0">
-            <a:schemeClr val="dk1"/>
-          </a:effectRef>
-          <a:fontRef idx="minor">
-            <a:schemeClr val="dk1"/>
-          </a:fontRef>
-        </p:style>
-        <p:txBody>
-          <a:bodyPr rtlCol="0" anchor="ctr"/>
-          <a:lstStyle/>
-          <a:p>
-            <a:pPr algn="ctr"/>
-            <a:r>
-              <a:rPr lang="en-US" altLang="ko-KR" sz="900" dirty="0"/>
-              <a:t>Endpoint IPs</a:t>
-            </a:r>
-          </a:p>
-          <a:p>
-            <a:pPr algn="ctr"/>
-            <a:r>
-              <a:rPr lang="en-US" altLang="ko-KR" sz="900" b="1" dirty="0"/>
-              <a:t>Backend</a:t>
-            </a:r>
-            <a:endParaRPr lang="ko-KR" altLang="en-US" sz="900" b="1" dirty="0"/>
-          </a:p>
-        </p:txBody>
-      </p:sp>
-      <p:sp>
-        <p:nvSpPr>
-          <p:cNvPr id="59" name="사각형: 둥근 모서리 12">
-            <a:extLst>
-              <a:ext uri="{FF2B5EF4-FFF2-40B4-BE49-F238E27FC236}">
-                <a16:creationId xmlns:a16="http://schemas.microsoft.com/office/drawing/2014/main" id="{1E9FC243-B99F-FA2C-4475-649C63CA5C62}"/>
-              </a:ext>
-            </a:extLst>
-          </p:cNvPr>
-          <p:cNvSpPr/>
-          <p:nvPr/>
-        </p:nvSpPr>
-        <p:spPr>
-          <a:xfrm>
-            <a:off x="6390504" y="2736436"/>
-            <a:ext cx="1139438" cy="451511"/>
-          </a:xfrm>
-          <a:prstGeom prst="roundRect">
-            <a:avLst>
-              <a:gd name="adj" fmla="val 14105"/>
-            </a:avLst>
-          </a:prstGeom>
-          <a:noFill/>
-          <a:ln w="12700">
-            <a:headEnd type="none" w="med" len="med"/>
-            <a:tailEnd type="triangle" w="med" len="med"/>
-          </a:ln>
-        </p:spPr>
-        <p:style>
-          <a:lnRef idx="2">
-            <a:schemeClr val="dk1"/>
-          </a:lnRef>
-          <a:fillRef idx="1">
-            <a:schemeClr val="lt1"/>
-          </a:fillRef>
-          <a:effectRef idx="0">
-            <a:schemeClr val="dk1"/>
-          </a:effectRef>
-          <a:fontRef idx="minor">
-            <a:schemeClr val="dk1"/>
-          </a:fontRef>
-        </p:style>
-        <p:txBody>
-          <a:bodyPr rtlCol="0" anchor="ctr"/>
-          <a:lstStyle/>
-          <a:p>
-            <a:pPr algn="ctr"/>
-            <a:r>
-              <a:rPr lang="en-US" altLang="ko-KR" sz="900"/>
-              <a:t>Server Version 1 </a:t>
-            </a:r>
-            <a:r>
-              <a:rPr lang="en-US" altLang="ko-KR" sz="900" b="1" dirty="0"/>
-              <a:t>Deployment</a:t>
-            </a:r>
-            <a:endParaRPr lang="ko-KR" altLang="en-US" sz="900" b="1" dirty="0"/>
-          </a:p>
-        </p:txBody>
-      </p:sp>
-      <p:sp>
-        <p:nvSpPr>
-          <p:cNvPr id="61" name="사각형: 둥근 모서리 12">
-            <a:extLst>
-              <a:ext uri="{FF2B5EF4-FFF2-40B4-BE49-F238E27FC236}">
-                <a16:creationId xmlns:a16="http://schemas.microsoft.com/office/drawing/2014/main" id="{DA6BBA72-DCF3-EF61-65B2-2F2F53679187}"/>
-              </a:ext>
-            </a:extLst>
-          </p:cNvPr>
-          <p:cNvSpPr/>
-          <p:nvPr/>
-        </p:nvSpPr>
-        <p:spPr>
-          <a:xfrm>
-            <a:off x="1518621" y="3522150"/>
-            <a:ext cx="1139438" cy="451511"/>
-          </a:xfrm>
-          <a:prstGeom prst="roundRect">
-            <a:avLst>
-              <a:gd name="adj" fmla="val 14105"/>
-            </a:avLst>
-          </a:prstGeom>
-          <a:solidFill>
-            <a:schemeClr val="bg1">
-              <a:lumMod val="95000"/>
-            </a:schemeClr>
-          </a:solidFill>
-          <a:ln w="12700">
-            <a:headEnd type="none" w="med" len="med"/>
-            <a:tailEnd type="triangle" w="med" len="med"/>
-          </a:ln>
-        </p:spPr>
-        <p:style>
-          <a:lnRef idx="2">
-            <a:schemeClr val="dk1"/>
-          </a:lnRef>
-          <a:fillRef idx="1">
-            <a:schemeClr val="lt1"/>
-          </a:fillRef>
-          <a:effectRef idx="0">
-            <a:schemeClr val="dk1"/>
-          </a:effectRef>
-          <a:fontRef idx="minor">
-            <a:schemeClr val="dk1"/>
-          </a:fontRef>
-        </p:style>
-        <p:txBody>
-          <a:bodyPr rtlCol="0" anchor="ctr"/>
-          <a:lstStyle/>
-          <a:p>
-            <a:pPr algn="ctr"/>
-            <a:r>
-              <a:rPr lang="en-US" altLang="ko-KR" sz="900"/>
-              <a:t>Server</a:t>
-            </a:r>
-          </a:p>
-          <a:p>
-            <a:pPr algn="ctr"/>
-            <a:r>
               <a:rPr lang="en-US" altLang="ko-KR" sz="900" b="1"/>
-              <a:t>HTTPRoute</a:t>
-            </a:r>
-          </a:p>
-          <a:p>
-            <a:pPr algn="ctr"/>
-            <a:r>
-              <a:rPr lang="en-US" altLang="ko-KR" sz="900" b="1"/>
-              <a:t>(Consumer)</a:t>
-            </a:r>
-          </a:p>
-        </p:txBody>
-      </p:sp>
-      <p:sp>
-        <p:nvSpPr>
-          <p:cNvPr id="62" name="사각형: 둥근 모서리 12">
-            <a:extLst>
-              <a:ext uri="{FF2B5EF4-FFF2-40B4-BE49-F238E27FC236}">
-                <a16:creationId xmlns:a16="http://schemas.microsoft.com/office/drawing/2014/main" id="{D14C4EFA-EE95-4D39-5396-CD6BB98E0EFE}"/>
-              </a:ext>
-            </a:extLst>
-          </p:cNvPr>
-          <p:cNvSpPr/>
-          <p:nvPr/>
-        </p:nvSpPr>
-        <p:spPr>
-          <a:xfrm>
-            <a:off x="3092491" y="3847119"/>
-            <a:ext cx="3081988" cy="836785"/>
-          </a:xfrm>
-          <a:prstGeom prst="roundRect">
-            <a:avLst>
-              <a:gd name="adj" fmla="val 8995"/>
-            </a:avLst>
-          </a:prstGeom>
-          <a:noFill/>
-          <a:ln w="12700">
-            <a:headEnd type="none" w="med" len="med"/>
-            <a:tailEnd type="triangle" w="med" len="med"/>
-          </a:ln>
-        </p:spPr>
-        <p:style>
-          <a:lnRef idx="2">
-            <a:schemeClr val="dk1"/>
-          </a:lnRef>
-          <a:fillRef idx="1">
-            <a:schemeClr val="lt1"/>
-          </a:fillRef>
-          <a:effectRef idx="0">
-            <a:schemeClr val="dk1"/>
-          </a:effectRef>
-          <a:fontRef idx="minor">
-            <a:schemeClr val="dk1"/>
-          </a:fontRef>
-        </p:style>
-        <p:txBody>
-          <a:bodyPr rtlCol="0" anchor="t"/>
-          <a:lstStyle/>
-          <a:p>
-            <a:pPr algn="ctr"/>
-            <a:r>
-              <a:rPr lang="en-US" altLang="ko-KR" sz="900"/>
-              <a:t>Server Version 2 </a:t>
-            </a:r>
-            <a:r>
-              <a:rPr lang="en-US" altLang="ko-KR" sz="900" b="1" dirty="0"/>
-              <a:t>Service</a:t>
-            </a:r>
-            <a:endParaRPr lang="ko-KR" altLang="en-US" sz="900" b="1" dirty="0"/>
-          </a:p>
-        </p:txBody>
-      </p:sp>
-      <p:sp>
-        <p:nvSpPr>
-          <p:cNvPr id="63" name="사각형: 둥근 모서리 12">
-            <a:extLst>
-              <a:ext uri="{FF2B5EF4-FFF2-40B4-BE49-F238E27FC236}">
-                <a16:creationId xmlns:a16="http://schemas.microsoft.com/office/drawing/2014/main" id="{D8F7DE66-8BA9-8845-1F20-BD87EE5F0F20}"/>
-              </a:ext>
-            </a:extLst>
-          </p:cNvPr>
-          <p:cNvSpPr/>
-          <p:nvPr/>
-        </p:nvSpPr>
-        <p:spPr>
-          <a:xfrm>
-            <a:off x="3202229" y="4128218"/>
-            <a:ext cx="1330422" cy="451511"/>
-          </a:xfrm>
-          <a:prstGeom prst="roundRect">
-            <a:avLst>
-              <a:gd name="adj" fmla="val 14105"/>
-            </a:avLst>
-          </a:prstGeom>
-          <a:solidFill>
-            <a:schemeClr val="bg1">
-              <a:lumMod val="95000"/>
-            </a:schemeClr>
-          </a:solidFill>
-          <a:ln w="12700">
-            <a:headEnd type="none" w="med" len="med"/>
-            <a:tailEnd type="triangle" w="med" len="med"/>
-          </a:ln>
-        </p:spPr>
-        <p:style>
-          <a:lnRef idx="2">
-            <a:schemeClr val="dk1"/>
-          </a:lnRef>
-          <a:fillRef idx="1">
-            <a:schemeClr val="lt1"/>
-          </a:fillRef>
-          <a:effectRef idx="0">
-            <a:schemeClr val="dk1"/>
-          </a:effectRef>
-          <a:fontRef idx="minor">
-            <a:schemeClr val="dk1"/>
-          </a:fontRef>
-        </p:style>
-        <p:txBody>
-          <a:bodyPr rtlCol="0" anchor="ctr"/>
-          <a:lstStyle/>
-          <a:p>
-            <a:pPr algn="ctr"/>
-            <a:r>
-              <a:rPr lang="en-US" altLang="ko-KR" sz="900" dirty="0"/>
-              <a:t>DNS Name, ClusterIP</a:t>
-            </a:r>
-          </a:p>
-          <a:p>
-            <a:pPr algn="ctr"/>
-            <a:r>
-              <a:rPr lang="en-US" altLang="ko-KR" sz="900" b="1" dirty="0"/>
-              <a:t>Frontend</a:t>
-            </a:r>
-            <a:endParaRPr lang="ko-KR" altLang="en-US" sz="900" b="1" dirty="0"/>
-          </a:p>
-        </p:txBody>
-      </p:sp>
-      <p:sp>
-        <p:nvSpPr>
-          <p:cNvPr id="64" name="사각형: 둥근 모서리 12">
-            <a:extLst>
-              <a:ext uri="{FF2B5EF4-FFF2-40B4-BE49-F238E27FC236}">
-                <a16:creationId xmlns:a16="http://schemas.microsoft.com/office/drawing/2014/main" id="{43531DC2-CD1A-F31D-B347-BE83FC61B041}"/>
-              </a:ext>
-            </a:extLst>
-          </p:cNvPr>
-          <p:cNvSpPr/>
-          <p:nvPr/>
-        </p:nvSpPr>
-        <p:spPr>
-          <a:xfrm>
-            <a:off x="4959888" y="4134455"/>
-            <a:ext cx="1104530" cy="445274"/>
-          </a:xfrm>
-          <a:prstGeom prst="roundRect">
-            <a:avLst>
-              <a:gd name="adj" fmla="val 14105"/>
-            </a:avLst>
-          </a:prstGeom>
-          <a:solidFill>
-            <a:schemeClr val="bg1">
-              <a:lumMod val="95000"/>
-            </a:schemeClr>
-          </a:solidFill>
-          <a:ln w="12700">
-            <a:headEnd type="none" w="med" len="med"/>
-            <a:tailEnd type="triangle" w="med" len="med"/>
-          </a:ln>
-        </p:spPr>
-        <p:style>
-          <a:lnRef idx="2">
-            <a:schemeClr val="dk1"/>
-          </a:lnRef>
-          <a:fillRef idx="1">
-            <a:schemeClr val="lt1"/>
-          </a:fillRef>
-          <a:effectRef idx="0">
-            <a:schemeClr val="dk1"/>
-          </a:effectRef>
-          <a:fontRef idx="minor">
-            <a:schemeClr val="dk1"/>
-          </a:fontRef>
-        </p:style>
-        <p:txBody>
-          <a:bodyPr rtlCol="0" anchor="ctr"/>
-          <a:lstStyle/>
-          <a:p>
-            <a:pPr algn="ctr"/>
-            <a:r>
-              <a:rPr lang="en-US" altLang="ko-KR" sz="900" dirty="0"/>
-              <a:t>Endpoint IPs</a:t>
-            </a:r>
-          </a:p>
-          <a:p>
-            <a:pPr algn="ctr"/>
-            <a:r>
-              <a:rPr lang="en-US" altLang="ko-KR" sz="900" b="1" dirty="0"/>
-              <a:t>Backend</a:t>
-            </a:r>
-            <a:endParaRPr lang="ko-KR" altLang="en-US" sz="900" b="1" dirty="0"/>
-          </a:p>
-        </p:txBody>
-      </p:sp>
-      <p:sp>
-        <p:nvSpPr>
-          <p:cNvPr id="65" name="사각형: 둥근 모서리 12">
-            <a:extLst>
-              <a:ext uri="{FF2B5EF4-FFF2-40B4-BE49-F238E27FC236}">
-                <a16:creationId xmlns:a16="http://schemas.microsoft.com/office/drawing/2014/main" id="{6C7B9173-A89D-C08C-D991-0297A4FEF256}"/>
-              </a:ext>
-            </a:extLst>
-          </p:cNvPr>
-          <p:cNvSpPr/>
-          <p:nvPr/>
-        </p:nvSpPr>
-        <p:spPr>
-          <a:xfrm>
-            <a:off x="6387732" y="4131336"/>
-            <a:ext cx="1139438" cy="451511"/>
-          </a:xfrm>
-          <a:prstGeom prst="roundRect">
-            <a:avLst>
-              <a:gd name="adj" fmla="val 14105"/>
-            </a:avLst>
-          </a:prstGeom>
-          <a:noFill/>
-          <a:ln w="12700">
-            <a:headEnd type="none" w="med" len="med"/>
-            <a:tailEnd type="triangle" w="med" len="med"/>
-          </a:ln>
-        </p:spPr>
-        <p:style>
-          <a:lnRef idx="2">
-            <a:schemeClr val="dk1"/>
-          </a:lnRef>
-          <a:fillRef idx="1">
-            <a:schemeClr val="lt1"/>
-          </a:fillRef>
-          <a:effectRef idx="0">
-            <a:schemeClr val="dk1"/>
-          </a:effectRef>
-          <a:fontRef idx="minor">
-            <a:schemeClr val="dk1"/>
-          </a:fontRef>
-        </p:style>
-        <p:txBody>
-          <a:bodyPr rtlCol="0" anchor="ctr"/>
-          <a:lstStyle/>
-          <a:p>
-            <a:pPr algn="ctr"/>
-            <a:r>
-              <a:rPr lang="en-US" altLang="ko-KR" sz="900"/>
-              <a:t>Server Version 2 </a:t>
-            </a:r>
-            <a:r>
-              <a:rPr lang="en-US" altLang="ko-KR" sz="900" b="1" dirty="0"/>
-              <a:t>Deployment</a:t>
-            </a:r>
-            <a:endParaRPr lang="ko-KR" altLang="en-US" sz="900" b="1" dirty="0"/>
+              <a:t>ReferenceGrant</a:t>
+            </a:r>
           </a:p>
         </p:txBody>
       </p:sp>
       <p:cxnSp>
         <p:nvCxnSpPr>
-          <p:cNvPr id="70" name="직선 화살표 연결선 96">
-            <a:extLst>
-              <a:ext uri="{FF2B5EF4-FFF2-40B4-BE49-F238E27FC236}">
-                <a16:creationId xmlns:a16="http://schemas.microsoft.com/office/drawing/2014/main" id="{51C48D84-C1B7-EE5D-A801-507C1006A504}"/>
+          <p:cNvPr id="13" name="직선 화살표 연결선 96">
+            <a:extLst>
+              <a:ext uri="{FF2B5EF4-FFF2-40B4-BE49-F238E27FC236}">
+                <a16:creationId xmlns:a16="http://schemas.microsoft.com/office/drawing/2014/main" id="{965F0931-C2DF-76D3-F5DE-B424AC4D9054}"/>
               </a:ext>
             </a:extLst>
           </p:cNvPr>
           <p:cNvCxnSpPr>
             <a:cxnSpLocks/>
-            <a:stCxn id="61" idx="3"/>
-            <a:endCxn id="17" idx="2"/>
+            <a:stCxn id="9" idx="1"/>
+            <a:endCxn id="3" idx="3"/>
           </p:cNvCxnSpPr>
           <p:nvPr/>
         </p:nvCxnSpPr>
         <p:spPr>
-          <a:xfrm flipV="1">
-            <a:off x="2658059" y="1789929"/>
-            <a:ext cx="1212153" cy="1957977"/>
+          <a:xfrm flipH="1">
+            <a:off x="2036187" y="3659642"/>
+            <a:ext cx="3615933" cy="322762"/>
           </a:xfrm>
           <a:prstGeom prst="straightConnector1">
             <a:avLst/>
           </a:prstGeom>
           <a:ln w="12700">
             <a:solidFill>
-              <a:schemeClr val="tx2"/>
+              <a:schemeClr val="tx1"/>
             </a:solidFill>
             <a:prstDash val="solid"/>
             <a:headEnd type="none" w="med" len="med"/>
@@ -5071,31 +6495,31 @@
       </p:cxnSp>
       <p:cxnSp>
         <p:nvCxnSpPr>
-          <p:cNvPr id="73" name="직선 화살표 연결선 96">
-            <a:extLst>
-              <a:ext uri="{FF2B5EF4-FFF2-40B4-BE49-F238E27FC236}">
-                <a16:creationId xmlns:a16="http://schemas.microsoft.com/office/drawing/2014/main" id="{4DBFB304-746D-48FF-52BE-65202C9DD39A}"/>
+          <p:cNvPr id="16" name="직선 화살표 연결선 96">
+            <a:extLst>
+              <a:ext uri="{FF2B5EF4-FFF2-40B4-BE49-F238E27FC236}">
+                <a16:creationId xmlns:a16="http://schemas.microsoft.com/office/drawing/2014/main" id="{0630B5A5-5AAF-DD9F-8CE2-2BC59B23CA6B}"/>
               </a:ext>
             </a:extLst>
           </p:cNvPr>
           <p:cNvCxnSpPr>
             <a:cxnSpLocks/>
-            <a:stCxn id="61" idx="3"/>
+            <a:stCxn id="9" idx="1"/>
             <a:endCxn id="58" idx="2"/>
           </p:cNvCxnSpPr>
           <p:nvPr/>
         </p:nvCxnSpPr>
         <p:spPr>
-          <a:xfrm flipV="1">
-            <a:off x="2658059" y="3184829"/>
-            <a:ext cx="2856866" cy="563077"/>
+          <a:xfrm flipH="1" flipV="1">
+            <a:off x="4779313" y="3184829"/>
+            <a:ext cx="872807" cy="474813"/>
           </a:xfrm>
           <a:prstGeom prst="straightConnector1">
             <a:avLst/>
           </a:prstGeom>
           <a:ln w="12700">
             <a:solidFill>
-              <a:schemeClr val="accent3"/>
+              <a:schemeClr val="tx1"/>
             </a:solidFill>
             <a:prstDash val="solid"/>
             <a:headEnd type="none" w="med" len="med"/>
@@ -5119,1302 +6543,31 @@
       </p:cxnSp>
       <p:cxnSp>
         <p:nvCxnSpPr>
-          <p:cNvPr id="76" name="직선 화살표 연결선 96">
-            <a:extLst>
-              <a:ext uri="{FF2B5EF4-FFF2-40B4-BE49-F238E27FC236}">
-                <a16:creationId xmlns:a16="http://schemas.microsoft.com/office/drawing/2014/main" id="{F047C0B7-0897-C3EF-480C-07CCC67A9843}"/>
+          <p:cNvPr id="23" name="직선 화살표 연결선 96">
+            <a:extLst>
+              <a:ext uri="{FF2B5EF4-FFF2-40B4-BE49-F238E27FC236}">
+                <a16:creationId xmlns:a16="http://schemas.microsoft.com/office/drawing/2014/main" id="{A068F081-9F96-54C1-4A29-42B48E39BDBD}"/>
               </a:ext>
             </a:extLst>
           </p:cNvPr>
           <p:cNvCxnSpPr>
             <a:cxnSpLocks/>
-            <a:stCxn id="61" idx="3"/>
+            <a:stCxn id="9" idx="1"/>
             <a:endCxn id="64" idx="0"/>
           </p:cNvCxnSpPr>
           <p:nvPr/>
         </p:nvCxnSpPr>
         <p:spPr>
-          <a:xfrm>
-            <a:off x="2658059" y="3747906"/>
-            <a:ext cx="2854094" cy="386549"/>
+          <a:xfrm flipH="1">
+            <a:off x="4776541" y="3659642"/>
+            <a:ext cx="875579" cy="474813"/>
           </a:xfrm>
           <a:prstGeom prst="straightConnector1">
             <a:avLst/>
           </a:prstGeom>
           <a:ln w="12700">
             <a:solidFill>
-              <a:schemeClr val="accent3"/>
-            </a:solidFill>
-            <a:prstDash val="solid"/>
-            <a:headEnd type="none" w="med" len="med"/>
-            <a:tailEnd type="triangle" w="med" len="med"/>
-          </a:ln>
-        </p:spPr>
-        <p:style>
-          <a:lnRef idx="1">
-            <a:schemeClr val="accent1"/>
-          </a:lnRef>
-          <a:fillRef idx="0">
-            <a:schemeClr val="accent1"/>
-          </a:fillRef>
-          <a:effectRef idx="0">
-            <a:schemeClr val="accent1"/>
-          </a:effectRef>
-          <a:fontRef idx="minor">
-            <a:schemeClr val="tx1"/>
-          </a:fontRef>
-        </p:style>
-      </p:cxnSp>
-      <p:cxnSp>
-        <p:nvCxnSpPr>
-          <p:cNvPr id="79" name="직선 화살표 연결선 96">
-            <a:extLst>
-              <a:ext uri="{FF2B5EF4-FFF2-40B4-BE49-F238E27FC236}">
-                <a16:creationId xmlns:a16="http://schemas.microsoft.com/office/drawing/2014/main" id="{538885BE-B6BA-7559-8F46-4DB7ED5909A8}"/>
-              </a:ext>
-            </a:extLst>
-          </p:cNvPr>
-          <p:cNvCxnSpPr>
-            <a:cxnSpLocks/>
-            <a:stCxn id="12" idx="3"/>
-            <a:endCxn id="17" idx="1"/>
-          </p:cNvCxnSpPr>
-          <p:nvPr/>
-        </p:nvCxnSpPr>
-        <p:spPr>
-          <a:xfrm flipV="1">
-            <a:off x="2658059" y="1564174"/>
-            <a:ext cx="546942" cy="2881182"/>
-          </a:xfrm>
-          <a:prstGeom prst="straightConnector1">
-            <a:avLst/>
-          </a:prstGeom>
-          <a:ln w="12700">
-            <a:solidFill>
-              <a:schemeClr val="accent6"/>
-            </a:solidFill>
-            <a:prstDash val="solid"/>
-            <a:headEnd type="none" w="med" len="med"/>
-            <a:tailEnd type="triangle" w="med" len="med"/>
-          </a:ln>
-        </p:spPr>
-        <p:style>
-          <a:lnRef idx="1">
-            <a:schemeClr val="accent1"/>
-          </a:lnRef>
-          <a:fillRef idx="0">
-            <a:schemeClr val="accent1"/>
-          </a:fillRef>
-          <a:effectRef idx="0">
-            <a:schemeClr val="accent1"/>
-          </a:effectRef>
-          <a:fontRef idx="minor">
-            <a:schemeClr val="tx1"/>
-          </a:fontRef>
-        </p:style>
-      </p:cxnSp>
-      <p:cxnSp>
-        <p:nvCxnSpPr>
-          <p:cNvPr id="85" name="직선 화살표 연결선 96">
-            <a:extLst>
-              <a:ext uri="{FF2B5EF4-FFF2-40B4-BE49-F238E27FC236}">
-                <a16:creationId xmlns:a16="http://schemas.microsoft.com/office/drawing/2014/main" id="{951C7876-C85F-A332-209D-785084C11A0E}"/>
-              </a:ext>
-            </a:extLst>
-          </p:cNvPr>
-          <p:cNvCxnSpPr>
-            <a:cxnSpLocks/>
-            <a:stCxn id="64" idx="3"/>
-            <a:endCxn id="65" idx="1"/>
-          </p:cNvCxnSpPr>
-          <p:nvPr/>
-        </p:nvCxnSpPr>
-        <p:spPr>
-          <a:xfrm>
-            <a:off x="6064418" y="4357092"/>
-            <a:ext cx="323314" cy="0"/>
-          </a:xfrm>
-          <a:prstGeom prst="straightConnector1">
-            <a:avLst/>
-          </a:prstGeom>
-          <a:ln w="12700">
-            <a:solidFill>
-              <a:schemeClr val="accent6"/>
-            </a:solidFill>
-            <a:prstDash val="solid"/>
-            <a:headEnd type="none" w="med" len="med"/>
-            <a:tailEnd type="triangle" w="med" len="med"/>
-          </a:ln>
-        </p:spPr>
-        <p:style>
-          <a:lnRef idx="1">
-            <a:schemeClr val="accent1"/>
-          </a:lnRef>
-          <a:fillRef idx="0">
-            <a:schemeClr val="accent1"/>
-          </a:fillRef>
-          <a:effectRef idx="0">
-            <a:schemeClr val="accent1"/>
-          </a:effectRef>
-          <a:fontRef idx="minor">
-            <a:schemeClr val="tx1"/>
-          </a:fontRef>
-        </p:style>
-      </p:cxnSp>
-      <p:cxnSp>
-        <p:nvCxnSpPr>
-          <p:cNvPr id="88" name="직선 화살표 연결선 96">
-            <a:extLst>
-              <a:ext uri="{FF2B5EF4-FFF2-40B4-BE49-F238E27FC236}">
-                <a16:creationId xmlns:a16="http://schemas.microsoft.com/office/drawing/2014/main" id="{4C82DBCC-F5C1-D78E-407B-85C8449D840E}"/>
-              </a:ext>
-            </a:extLst>
-          </p:cNvPr>
-          <p:cNvCxnSpPr>
-            <a:cxnSpLocks/>
-            <a:stCxn id="58" idx="3"/>
-            <a:endCxn id="59" idx="1"/>
-          </p:cNvCxnSpPr>
-          <p:nvPr/>
-        </p:nvCxnSpPr>
-        <p:spPr>
-          <a:xfrm>
-            <a:off x="6067190" y="2962192"/>
-            <a:ext cx="323314" cy="0"/>
-          </a:xfrm>
-          <a:prstGeom prst="straightConnector1">
-            <a:avLst/>
-          </a:prstGeom>
-          <a:ln w="12700">
-            <a:solidFill>
-              <a:schemeClr val="accent6"/>
-            </a:solidFill>
-            <a:prstDash val="solid"/>
-            <a:headEnd type="none" w="med" len="med"/>
-            <a:tailEnd type="triangle" w="med" len="med"/>
-          </a:ln>
-        </p:spPr>
-        <p:style>
-          <a:lnRef idx="1">
-            <a:schemeClr val="accent1"/>
-          </a:lnRef>
-          <a:fillRef idx="0">
-            <a:schemeClr val="accent1"/>
-          </a:fillRef>
-          <a:effectRef idx="0">
-            <a:schemeClr val="accent1"/>
-          </a:effectRef>
-          <a:fontRef idx="minor">
-            <a:schemeClr val="tx1"/>
-          </a:fontRef>
-        </p:style>
-      </p:cxnSp>
-      <p:cxnSp>
-        <p:nvCxnSpPr>
-          <p:cNvPr id="91" name="직선 화살표 연결선 96">
-            <a:extLst>
-              <a:ext uri="{FF2B5EF4-FFF2-40B4-BE49-F238E27FC236}">
-                <a16:creationId xmlns:a16="http://schemas.microsoft.com/office/drawing/2014/main" id="{EBE4B398-BC14-08C5-1F59-F191B385F63D}"/>
-              </a:ext>
-            </a:extLst>
-          </p:cNvPr>
-          <p:cNvCxnSpPr>
-            <a:cxnSpLocks/>
-            <a:stCxn id="11" idx="3"/>
-            <a:endCxn id="17" idx="1"/>
-          </p:cNvCxnSpPr>
-          <p:nvPr/>
-        </p:nvCxnSpPr>
-        <p:spPr>
-          <a:xfrm flipV="1">
-            <a:off x="2658059" y="1564174"/>
-            <a:ext cx="546942" cy="182964"/>
-          </a:xfrm>
-          <a:prstGeom prst="straightConnector1">
-            <a:avLst/>
-          </a:prstGeom>
-          <a:ln w="12700">
-            <a:solidFill>
-              <a:srgbClr val="C00000"/>
-            </a:solidFill>
-            <a:prstDash val="solid"/>
-            <a:headEnd type="none" w="med" len="med"/>
-            <a:tailEnd type="triangle" w="med" len="med"/>
-          </a:ln>
-        </p:spPr>
-        <p:style>
-          <a:lnRef idx="1">
-            <a:schemeClr val="accent1"/>
-          </a:lnRef>
-          <a:fillRef idx="0">
-            <a:schemeClr val="accent1"/>
-          </a:fillRef>
-          <a:effectRef idx="0">
-            <a:schemeClr val="accent1"/>
-          </a:effectRef>
-          <a:fontRef idx="minor">
-            <a:schemeClr val="tx1"/>
-          </a:fontRef>
-        </p:style>
-      </p:cxnSp>
-      <p:cxnSp>
-        <p:nvCxnSpPr>
-          <p:cNvPr id="95" name="직선 화살표 연결선 96">
-            <a:extLst>
-              <a:ext uri="{FF2B5EF4-FFF2-40B4-BE49-F238E27FC236}">
-                <a16:creationId xmlns:a16="http://schemas.microsoft.com/office/drawing/2014/main" id="{32D3E944-B0B9-1EB8-C40C-914EEC5BEC27}"/>
-              </a:ext>
-            </a:extLst>
-          </p:cNvPr>
-          <p:cNvCxnSpPr>
-            <a:cxnSpLocks/>
-            <a:stCxn id="19" idx="3"/>
-            <a:endCxn id="21" idx="1"/>
-          </p:cNvCxnSpPr>
-          <p:nvPr/>
-        </p:nvCxnSpPr>
-        <p:spPr>
-          <a:xfrm flipV="1">
-            <a:off x="6067190" y="1566597"/>
-            <a:ext cx="323314" cy="695"/>
-          </a:xfrm>
-          <a:prstGeom prst="straightConnector1">
-            <a:avLst/>
-          </a:prstGeom>
-          <a:ln w="12700">
-            <a:solidFill>
-              <a:srgbClr val="C00000"/>
-            </a:solidFill>
-            <a:prstDash val="solid"/>
-            <a:headEnd type="none" w="med" len="med"/>
-            <a:tailEnd type="triangle" w="med" len="med"/>
-          </a:ln>
-        </p:spPr>
-        <p:style>
-          <a:lnRef idx="1">
-            <a:schemeClr val="accent1"/>
-          </a:lnRef>
-          <a:fillRef idx="0">
-            <a:schemeClr val="accent1"/>
-          </a:fillRef>
-          <a:effectRef idx="0">
-            <a:schemeClr val="accent1"/>
-          </a:effectRef>
-          <a:fontRef idx="minor">
-            <a:schemeClr val="tx1"/>
-          </a:fontRef>
-        </p:style>
-      </p:cxnSp>
-      <p:sp>
-        <p:nvSpPr>
-          <p:cNvPr id="111" name="사각형: 둥근 모서리 70">
-            <a:extLst>
-              <a:ext uri="{FF2B5EF4-FFF2-40B4-BE49-F238E27FC236}">
-                <a16:creationId xmlns:a16="http://schemas.microsoft.com/office/drawing/2014/main" id="{00560CDF-1B49-A010-9E61-44FE20B6971D}"/>
-              </a:ext>
-            </a:extLst>
-          </p:cNvPr>
-          <p:cNvSpPr/>
-          <p:nvPr/>
-        </p:nvSpPr>
-        <p:spPr>
-          <a:xfrm>
-            <a:off x="971599" y="2177255"/>
-            <a:ext cx="1800200" cy="892274"/>
-          </a:xfrm>
-          <a:prstGeom prst="roundRect">
-            <a:avLst>
-              <a:gd name="adj" fmla="val 8056"/>
-            </a:avLst>
-          </a:prstGeom>
-          <a:noFill/>
-          <a:ln w="12700">
-            <a:prstDash val="solid"/>
-            <a:headEnd type="none" w="med" len="med"/>
-            <a:tailEnd type="triangle" w="med" len="med"/>
-          </a:ln>
-        </p:spPr>
-        <p:style>
-          <a:lnRef idx="2">
-            <a:schemeClr val="dk1"/>
-          </a:lnRef>
-          <a:fillRef idx="1">
-            <a:schemeClr val="lt1"/>
-          </a:fillRef>
-          <a:effectRef idx="0">
-            <a:schemeClr val="dk1"/>
-          </a:effectRef>
-          <a:fontRef idx="minor">
-            <a:schemeClr val="dk1"/>
-          </a:fontRef>
-        </p:style>
-        <p:txBody>
-          <a:bodyPr rtlCol="0" anchor="t"/>
-          <a:lstStyle/>
-          <a:p>
-            <a:r>
-              <a:rPr lang="en-US" altLang="ko-KR" sz="1000" dirty="0"/>
-              <a:t>Client B </a:t>
-            </a:r>
-            <a:r>
-              <a:rPr lang="en-US" altLang="ko-KR" sz="1000" b="1" dirty="0"/>
-              <a:t>Namespace</a:t>
-            </a:r>
-            <a:endParaRPr lang="ko-KR" altLang="en-US" sz="1000" b="1" dirty="0"/>
-          </a:p>
-        </p:txBody>
-      </p:sp>
-      <p:sp>
-        <p:nvSpPr>
-          <p:cNvPr id="112" name="사각형: 둥근 모서리 12">
-            <a:extLst>
-              <a:ext uri="{FF2B5EF4-FFF2-40B4-BE49-F238E27FC236}">
-                <a16:creationId xmlns:a16="http://schemas.microsoft.com/office/drawing/2014/main" id="{0E8E6F72-661E-DA03-AB4E-C1AA91B15764}"/>
-              </a:ext>
-            </a:extLst>
-          </p:cNvPr>
-          <p:cNvSpPr/>
-          <p:nvPr/>
-        </p:nvSpPr>
-        <p:spPr>
-          <a:xfrm>
-            <a:off x="1518621" y="2518078"/>
-            <a:ext cx="1139438" cy="451511"/>
-          </a:xfrm>
-          <a:prstGeom prst="roundRect">
-            <a:avLst>
-              <a:gd name="adj" fmla="val 14105"/>
-            </a:avLst>
-          </a:prstGeom>
-          <a:noFill/>
-          <a:ln w="12700">
-            <a:headEnd type="none" w="med" len="med"/>
-            <a:tailEnd type="triangle" w="med" len="med"/>
-          </a:ln>
-        </p:spPr>
-        <p:style>
-          <a:lnRef idx="2">
-            <a:schemeClr val="dk1"/>
-          </a:lnRef>
-          <a:fillRef idx="1">
-            <a:schemeClr val="lt1"/>
-          </a:fillRef>
-          <a:effectRef idx="0">
-            <a:schemeClr val="dk1"/>
-          </a:effectRef>
-          <a:fontRef idx="minor">
-            <a:schemeClr val="dk1"/>
-          </a:fontRef>
-        </p:style>
-        <p:txBody>
-          <a:bodyPr rtlCol="0" anchor="ctr"/>
-          <a:lstStyle/>
-          <a:p>
-            <a:pPr algn="ctr"/>
-            <a:r>
-              <a:rPr lang="en-US" altLang="ko-KR" sz="900"/>
-              <a:t>Client B </a:t>
-            </a:r>
-            <a:r>
-              <a:rPr lang="en-US" altLang="ko-KR" sz="900" b="1" dirty="0"/>
-              <a:t>Pod</a:t>
-            </a:r>
-            <a:endParaRPr lang="ko-KR" altLang="en-US" sz="900" b="1" dirty="0"/>
-          </a:p>
-        </p:txBody>
-      </p:sp>
-      <p:sp>
-        <p:nvSpPr>
-          <p:cNvPr id="122" name="사각형: 둥근 모서리 12">
-            <a:extLst>
-              <a:ext uri="{FF2B5EF4-FFF2-40B4-BE49-F238E27FC236}">
-                <a16:creationId xmlns:a16="http://schemas.microsoft.com/office/drawing/2014/main" id="{9F4F196D-5DC2-433D-8022-DD5A2CEEE453}"/>
-              </a:ext>
-            </a:extLst>
-          </p:cNvPr>
-          <p:cNvSpPr/>
-          <p:nvPr/>
-        </p:nvSpPr>
-        <p:spPr>
-          <a:xfrm>
-            <a:off x="4942434" y="452758"/>
-            <a:ext cx="1139438" cy="451511"/>
-          </a:xfrm>
-          <a:prstGeom prst="roundRect">
-            <a:avLst>
-              <a:gd name="adj" fmla="val 14105"/>
-            </a:avLst>
-          </a:prstGeom>
-          <a:solidFill>
-            <a:schemeClr val="bg1">
-              <a:lumMod val="95000"/>
-            </a:schemeClr>
-          </a:solidFill>
-          <a:ln w="12700">
-            <a:headEnd type="none" w="med" len="med"/>
-            <a:tailEnd type="triangle" w="med" len="med"/>
-          </a:ln>
-        </p:spPr>
-        <p:style>
-          <a:lnRef idx="2">
-            <a:schemeClr val="dk1"/>
-          </a:lnRef>
-          <a:fillRef idx="1">
-            <a:schemeClr val="lt1"/>
-          </a:fillRef>
-          <a:effectRef idx="0">
-            <a:schemeClr val="dk1"/>
-          </a:effectRef>
-          <a:fontRef idx="minor">
-            <a:schemeClr val="dk1"/>
-          </a:fontRef>
-        </p:style>
-        <p:txBody>
-          <a:bodyPr rtlCol="0" anchor="ctr"/>
-          <a:lstStyle/>
-          <a:p>
-            <a:pPr algn="ctr"/>
-            <a:r>
-              <a:rPr lang="en-US" altLang="ko-KR" sz="900"/>
-              <a:t>Server</a:t>
-            </a:r>
-          </a:p>
-          <a:p>
-            <a:pPr algn="ctr"/>
-            <a:r>
-              <a:rPr lang="en-US" altLang="ko-KR" sz="900" b="1"/>
-              <a:t>HTTPRoute</a:t>
-            </a:r>
-          </a:p>
-          <a:p>
-            <a:pPr algn="ctr"/>
-            <a:r>
-              <a:rPr lang="en-US" altLang="ko-KR" sz="900" b="1"/>
-              <a:t>(Producer)</a:t>
-            </a:r>
-          </a:p>
-        </p:txBody>
-      </p:sp>
-      <p:cxnSp>
-        <p:nvCxnSpPr>
-          <p:cNvPr id="125" name="직선 화살표 연결선 96">
-            <a:extLst>
-              <a:ext uri="{FF2B5EF4-FFF2-40B4-BE49-F238E27FC236}">
-                <a16:creationId xmlns:a16="http://schemas.microsoft.com/office/drawing/2014/main" id="{6DCF6355-2581-B5B2-3107-40DEAE989C41}"/>
-              </a:ext>
-            </a:extLst>
-          </p:cNvPr>
-          <p:cNvCxnSpPr>
-            <a:cxnSpLocks/>
-            <a:stCxn id="112" idx="3"/>
-            <a:endCxn id="17" idx="1"/>
-          </p:cNvCxnSpPr>
-          <p:nvPr/>
-        </p:nvCxnSpPr>
-        <p:spPr>
-          <a:xfrm flipV="1">
-            <a:off x="2658059" y="1564174"/>
-            <a:ext cx="546942" cy="1179660"/>
-          </a:xfrm>
-          <a:prstGeom prst="straightConnector1">
-            <a:avLst/>
-          </a:prstGeom>
-          <a:ln w="12700">
-            <a:solidFill>
-              <a:srgbClr val="C00000"/>
-            </a:solidFill>
-            <a:prstDash val="solid"/>
-            <a:headEnd type="none" w="med" len="med"/>
-            <a:tailEnd type="triangle" w="med" len="med"/>
-          </a:ln>
-        </p:spPr>
-        <p:style>
-          <a:lnRef idx="1">
-            <a:schemeClr val="accent1"/>
-          </a:lnRef>
-          <a:fillRef idx="0">
-            <a:schemeClr val="accent1"/>
-          </a:fillRef>
-          <a:effectRef idx="0">
-            <a:schemeClr val="accent1"/>
-          </a:effectRef>
-          <a:fontRef idx="minor">
-            <a:schemeClr val="tx1"/>
-          </a:fontRef>
-        </p:style>
-      </p:cxnSp>
-      <p:cxnSp>
-        <p:nvCxnSpPr>
-          <p:cNvPr id="128" name="직선 화살표 연결선 96">
-            <a:extLst>
-              <a:ext uri="{FF2B5EF4-FFF2-40B4-BE49-F238E27FC236}">
-                <a16:creationId xmlns:a16="http://schemas.microsoft.com/office/drawing/2014/main" id="{50B5F23B-71A7-EA09-60E9-1A4BF7A217B9}"/>
-              </a:ext>
-            </a:extLst>
-          </p:cNvPr>
-          <p:cNvCxnSpPr>
-            <a:cxnSpLocks/>
-            <a:stCxn id="17" idx="3"/>
-            <a:endCxn id="19" idx="1"/>
-          </p:cNvCxnSpPr>
-          <p:nvPr/>
-        </p:nvCxnSpPr>
-        <p:spPr>
-          <a:xfrm>
-            <a:off x="4535423" y="1564174"/>
-            <a:ext cx="427237" cy="3118"/>
-          </a:xfrm>
-          <a:prstGeom prst="straightConnector1">
-            <a:avLst/>
-          </a:prstGeom>
-          <a:ln w="12700">
-            <a:solidFill>
-              <a:srgbClr val="C00000"/>
-            </a:solidFill>
-            <a:prstDash val="solid"/>
-            <a:headEnd type="none" w="med" len="med"/>
-            <a:tailEnd type="triangle" w="med" len="med"/>
-          </a:ln>
-        </p:spPr>
-        <p:style>
-          <a:lnRef idx="1">
-            <a:schemeClr val="accent1"/>
-          </a:lnRef>
-          <a:fillRef idx="0">
-            <a:schemeClr val="accent1"/>
-          </a:fillRef>
-          <a:effectRef idx="0">
-            <a:schemeClr val="accent1"/>
-          </a:effectRef>
-          <a:fontRef idx="minor">
-            <a:schemeClr val="tx1"/>
-          </a:fontRef>
-        </p:style>
-      </p:cxnSp>
-      <p:cxnSp>
-        <p:nvCxnSpPr>
-          <p:cNvPr id="144" name="직선 화살표 연결선 96">
-            <a:extLst>
-              <a:ext uri="{FF2B5EF4-FFF2-40B4-BE49-F238E27FC236}">
-                <a16:creationId xmlns:a16="http://schemas.microsoft.com/office/drawing/2014/main" id="{3F0D0A95-E8B4-37B3-26D1-0B115B7D41BB}"/>
-              </a:ext>
-            </a:extLst>
-          </p:cNvPr>
-          <p:cNvCxnSpPr>
-            <a:cxnSpLocks/>
-            <a:stCxn id="17" idx="3"/>
-            <a:endCxn id="58" idx="1"/>
-          </p:cNvCxnSpPr>
-          <p:nvPr/>
-        </p:nvCxnSpPr>
-        <p:spPr>
-          <a:xfrm>
-            <a:off x="4535423" y="1564174"/>
-            <a:ext cx="427237" cy="1398018"/>
-          </a:xfrm>
-          <a:prstGeom prst="straightConnector1">
-            <a:avLst/>
-          </a:prstGeom>
-          <a:ln w="12700">
-            <a:solidFill>
-              <a:schemeClr val="accent6"/>
-            </a:solidFill>
-            <a:prstDash val="solid"/>
-            <a:headEnd type="none" w="med" len="med"/>
-            <a:tailEnd type="triangle" w="med" len="med"/>
-          </a:ln>
-        </p:spPr>
-        <p:style>
-          <a:lnRef idx="1">
-            <a:schemeClr val="accent1"/>
-          </a:lnRef>
-          <a:fillRef idx="0">
-            <a:schemeClr val="accent1"/>
-          </a:fillRef>
-          <a:effectRef idx="0">
-            <a:schemeClr val="accent1"/>
-          </a:effectRef>
-          <a:fontRef idx="minor">
-            <a:schemeClr val="tx1"/>
-          </a:fontRef>
-        </p:style>
-      </p:cxnSp>
-      <p:cxnSp>
-        <p:nvCxnSpPr>
-          <p:cNvPr id="147" name="직선 화살표 연결선 96">
-            <a:extLst>
-              <a:ext uri="{FF2B5EF4-FFF2-40B4-BE49-F238E27FC236}">
-                <a16:creationId xmlns:a16="http://schemas.microsoft.com/office/drawing/2014/main" id="{45D16DEB-BCE9-A2AD-D40E-D536A606473F}"/>
-              </a:ext>
-            </a:extLst>
-          </p:cNvPr>
-          <p:cNvCxnSpPr>
-            <a:cxnSpLocks/>
-            <a:stCxn id="17" idx="3"/>
-            <a:endCxn id="64" idx="1"/>
-          </p:cNvCxnSpPr>
-          <p:nvPr/>
-        </p:nvCxnSpPr>
-        <p:spPr>
-          <a:xfrm>
-            <a:off x="4535423" y="1564174"/>
-            <a:ext cx="424465" cy="2792918"/>
-          </a:xfrm>
-          <a:prstGeom prst="straightConnector1">
-            <a:avLst/>
-          </a:prstGeom>
-          <a:ln w="12700">
-            <a:solidFill>
-              <a:schemeClr val="accent6"/>
-            </a:solidFill>
-            <a:prstDash val="solid"/>
-            <a:headEnd type="none" w="med" len="med"/>
-            <a:tailEnd type="triangle" w="med" len="med"/>
-          </a:ln>
-        </p:spPr>
-        <p:style>
-          <a:lnRef idx="1">
-            <a:schemeClr val="accent1"/>
-          </a:lnRef>
-          <a:fillRef idx="0">
-            <a:schemeClr val="accent1"/>
-          </a:fillRef>
-          <a:effectRef idx="0">
-            <a:schemeClr val="accent1"/>
-          </a:effectRef>
-          <a:fontRef idx="minor">
-            <a:schemeClr val="tx1"/>
-          </a:fontRef>
-        </p:style>
-      </p:cxnSp>
-      <p:cxnSp>
-        <p:nvCxnSpPr>
-          <p:cNvPr id="193" name="직선 화살표 연결선 96">
-            <a:extLst>
-              <a:ext uri="{FF2B5EF4-FFF2-40B4-BE49-F238E27FC236}">
-                <a16:creationId xmlns:a16="http://schemas.microsoft.com/office/drawing/2014/main" id="{A91FAB81-FC78-D00D-1CA2-447D9F9607F4}"/>
-              </a:ext>
-            </a:extLst>
-          </p:cNvPr>
-          <p:cNvCxnSpPr>
-            <a:cxnSpLocks/>
-          </p:cNvCxnSpPr>
-          <p:nvPr/>
-        </p:nvCxnSpPr>
-        <p:spPr>
-          <a:xfrm>
-            <a:off x="994672" y="656760"/>
-            <a:ext cx="323569" cy="0"/>
-          </a:xfrm>
-          <a:prstGeom prst="straightConnector1">
-            <a:avLst/>
-          </a:prstGeom>
-          <a:ln w="12700">
-            <a:solidFill>
-              <a:schemeClr val="tx2"/>
-            </a:solidFill>
-            <a:prstDash val="solid"/>
-            <a:headEnd type="none" w="med" len="med"/>
-            <a:tailEnd type="triangle" w="med" len="med"/>
-          </a:ln>
-        </p:spPr>
-        <p:style>
-          <a:lnRef idx="1">
-            <a:schemeClr val="accent1"/>
-          </a:lnRef>
-          <a:fillRef idx="0">
-            <a:schemeClr val="accent1"/>
-          </a:fillRef>
-          <a:effectRef idx="0">
-            <a:schemeClr val="accent1"/>
-          </a:effectRef>
-          <a:fontRef idx="minor">
-            <a:schemeClr val="tx1"/>
-          </a:fontRef>
-        </p:style>
-      </p:cxnSp>
-      <p:sp>
-        <p:nvSpPr>
-          <p:cNvPr id="194" name="TextBox 193">
-            <a:extLst>
-              <a:ext uri="{FF2B5EF4-FFF2-40B4-BE49-F238E27FC236}">
-                <a16:creationId xmlns:a16="http://schemas.microsoft.com/office/drawing/2014/main" id="{121D2660-7138-311D-AE9D-C67A1481E089}"/>
-              </a:ext>
-            </a:extLst>
-          </p:cNvPr>
-          <p:cNvSpPr txBox="1"/>
-          <p:nvPr/>
-        </p:nvSpPr>
-        <p:spPr>
-          <a:xfrm>
-            <a:off x="1290415" y="462747"/>
-            <a:ext cx="702455" cy="369332"/>
-          </a:xfrm>
-          <a:prstGeom prst="rect">
-            <a:avLst/>
-          </a:prstGeom>
-          <a:noFill/>
-        </p:spPr>
-        <p:txBody>
-          <a:bodyPr wrap="square" rtlCol="0">
-            <a:spAutoFit/>
-          </a:bodyPr>
-          <a:lstStyle/>
-          <a:p>
-            <a:r>
-              <a:rPr lang="en-US" sz="900"/>
-              <a:t>Frontend</a:t>
-            </a:r>
-          </a:p>
-          <a:p>
-            <a:r>
-              <a:rPr lang="en-US" sz="900"/>
-              <a:t>Reference</a:t>
-            </a:r>
-            <a:endParaRPr lang="en-KR" sz="900"/>
-          </a:p>
-        </p:txBody>
-      </p:sp>
-      <p:sp>
-        <p:nvSpPr>
-          <p:cNvPr id="198" name="TextBox 197">
-            <a:extLst>
-              <a:ext uri="{FF2B5EF4-FFF2-40B4-BE49-F238E27FC236}">
-                <a16:creationId xmlns:a16="http://schemas.microsoft.com/office/drawing/2014/main" id="{3B6E0803-F121-79F7-77B4-28740CB8FF3D}"/>
-              </a:ext>
-            </a:extLst>
-          </p:cNvPr>
-          <p:cNvSpPr txBox="1"/>
-          <p:nvPr/>
-        </p:nvSpPr>
-        <p:spPr>
-          <a:xfrm>
-            <a:off x="1289667" y="814806"/>
-            <a:ext cx="726519" cy="369332"/>
-          </a:xfrm>
-          <a:prstGeom prst="rect">
-            <a:avLst/>
-          </a:prstGeom>
-          <a:noFill/>
-        </p:spPr>
-        <p:txBody>
-          <a:bodyPr wrap="square" rtlCol="0">
-            <a:spAutoFit/>
-          </a:bodyPr>
-          <a:lstStyle/>
-          <a:p>
-            <a:r>
-              <a:rPr lang="en-US" sz="900"/>
-              <a:t>Client A/B</a:t>
-            </a:r>
-          </a:p>
-          <a:p>
-            <a:r>
-              <a:rPr lang="en-US" sz="900"/>
-              <a:t>Traffic</a:t>
-            </a:r>
-            <a:endParaRPr lang="en-KR" sz="900"/>
-          </a:p>
-        </p:txBody>
-      </p:sp>
-      <p:cxnSp>
-        <p:nvCxnSpPr>
-          <p:cNvPr id="199" name="직선 화살표 연결선 96">
-            <a:extLst>
-              <a:ext uri="{FF2B5EF4-FFF2-40B4-BE49-F238E27FC236}">
-                <a16:creationId xmlns:a16="http://schemas.microsoft.com/office/drawing/2014/main" id="{21434A67-D8D1-4238-F51B-313289C34606}"/>
-              </a:ext>
-            </a:extLst>
-          </p:cNvPr>
-          <p:cNvCxnSpPr>
-            <a:cxnSpLocks/>
-          </p:cNvCxnSpPr>
-          <p:nvPr/>
-        </p:nvCxnSpPr>
-        <p:spPr>
-          <a:xfrm>
-            <a:off x="1993388" y="662282"/>
-            <a:ext cx="323569" cy="0"/>
-          </a:xfrm>
-          <a:prstGeom prst="straightConnector1">
-            <a:avLst/>
-          </a:prstGeom>
-          <a:ln w="12700">
-            <a:solidFill>
-              <a:schemeClr val="accent3"/>
-            </a:solidFill>
-            <a:prstDash val="solid"/>
-            <a:headEnd type="none" w="med" len="med"/>
-            <a:tailEnd type="triangle" w="med" len="med"/>
-          </a:ln>
-        </p:spPr>
-        <p:style>
-          <a:lnRef idx="1">
-            <a:schemeClr val="accent1"/>
-          </a:lnRef>
-          <a:fillRef idx="0">
-            <a:schemeClr val="accent1"/>
-          </a:fillRef>
-          <a:effectRef idx="0">
-            <a:schemeClr val="accent1"/>
-          </a:effectRef>
-          <a:fontRef idx="minor">
-            <a:schemeClr val="tx1"/>
-          </a:fontRef>
-        </p:style>
-      </p:cxnSp>
-      <p:sp>
-        <p:nvSpPr>
-          <p:cNvPr id="200" name="TextBox 199">
-            <a:extLst>
-              <a:ext uri="{FF2B5EF4-FFF2-40B4-BE49-F238E27FC236}">
-                <a16:creationId xmlns:a16="http://schemas.microsoft.com/office/drawing/2014/main" id="{86DEBD98-E394-9849-1D0B-E704BCAFE10D}"/>
-              </a:ext>
-            </a:extLst>
-          </p:cNvPr>
-          <p:cNvSpPr txBox="1"/>
-          <p:nvPr/>
-        </p:nvSpPr>
-        <p:spPr>
-          <a:xfrm>
-            <a:off x="2289131" y="468269"/>
-            <a:ext cx="702455" cy="369332"/>
-          </a:xfrm>
-          <a:prstGeom prst="rect">
-            <a:avLst/>
-          </a:prstGeom>
-          <a:noFill/>
-        </p:spPr>
-        <p:txBody>
-          <a:bodyPr wrap="square" rtlCol="0">
-            <a:spAutoFit/>
-          </a:bodyPr>
-          <a:lstStyle/>
-          <a:p>
-            <a:r>
-              <a:rPr lang="en-US" sz="900"/>
-              <a:t>Backend</a:t>
-            </a:r>
-          </a:p>
-          <a:p>
-            <a:r>
-              <a:rPr lang="en-US" sz="900"/>
-              <a:t>Reference</a:t>
-            </a:r>
-            <a:endParaRPr lang="en-KR" sz="900"/>
-          </a:p>
-        </p:txBody>
-      </p:sp>
-      <p:cxnSp>
-        <p:nvCxnSpPr>
-          <p:cNvPr id="201" name="직선 화살표 연결선 96">
-            <a:extLst>
-              <a:ext uri="{FF2B5EF4-FFF2-40B4-BE49-F238E27FC236}">
-                <a16:creationId xmlns:a16="http://schemas.microsoft.com/office/drawing/2014/main" id="{D04053F6-3309-797F-6D01-53ECB051304F}"/>
-              </a:ext>
-            </a:extLst>
-          </p:cNvPr>
-          <p:cNvCxnSpPr>
-            <a:cxnSpLocks/>
-          </p:cNvCxnSpPr>
-          <p:nvPr/>
-        </p:nvCxnSpPr>
-        <p:spPr>
-          <a:xfrm>
-            <a:off x="993924" y="1000895"/>
-            <a:ext cx="323569" cy="0"/>
-          </a:xfrm>
-          <a:prstGeom prst="straightConnector1">
-            <a:avLst/>
-          </a:prstGeom>
-          <a:ln w="12700">
-            <a:solidFill>
-              <a:srgbClr val="C00000"/>
-            </a:solidFill>
-            <a:prstDash val="solid"/>
-            <a:headEnd type="none" w="med" len="med"/>
-            <a:tailEnd type="triangle" w="med" len="med"/>
-          </a:ln>
-        </p:spPr>
-        <p:style>
-          <a:lnRef idx="1">
-            <a:schemeClr val="accent1"/>
-          </a:lnRef>
-          <a:fillRef idx="0">
-            <a:schemeClr val="accent1"/>
-          </a:fillRef>
-          <a:effectRef idx="0">
-            <a:schemeClr val="accent1"/>
-          </a:effectRef>
-          <a:fontRef idx="minor">
-            <a:schemeClr val="tx1"/>
-          </a:fontRef>
-        </p:style>
-      </p:cxnSp>
-      <p:sp>
-        <p:nvSpPr>
-          <p:cNvPr id="202" name="TextBox 201">
-            <a:extLst>
-              <a:ext uri="{FF2B5EF4-FFF2-40B4-BE49-F238E27FC236}">
-                <a16:creationId xmlns:a16="http://schemas.microsoft.com/office/drawing/2014/main" id="{76D3978E-90CB-FF9F-675F-258289DADB81}"/>
-              </a:ext>
-            </a:extLst>
-          </p:cNvPr>
-          <p:cNvSpPr txBox="1"/>
-          <p:nvPr/>
-        </p:nvSpPr>
-        <p:spPr>
-          <a:xfrm>
-            <a:off x="2292632" y="815618"/>
-            <a:ext cx="726519" cy="369332"/>
-          </a:xfrm>
-          <a:prstGeom prst="rect">
-            <a:avLst/>
-          </a:prstGeom>
-          <a:noFill/>
-        </p:spPr>
-        <p:txBody>
-          <a:bodyPr wrap="square" rtlCol="0">
-            <a:spAutoFit/>
-          </a:bodyPr>
-          <a:lstStyle/>
-          <a:p>
-            <a:r>
-              <a:rPr lang="en-US" sz="900"/>
-              <a:t>Client C</a:t>
-            </a:r>
-          </a:p>
-          <a:p>
-            <a:r>
-              <a:rPr lang="en-US" sz="900"/>
-              <a:t>Traffic</a:t>
-            </a:r>
-            <a:endParaRPr lang="en-KR" sz="900"/>
-          </a:p>
-        </p:txBody>
-      </p:sp>
-      <p:cxnSp>
-        <p:nvCxnSpPr>
-          <p:cNvPr id="203" name="직선 화살표 연결선 96">
-            <a:extLst>
-              <a:ext uri="{FF2B5EF4-FFF2-40B4-BE49-F238E27FC236}">
-                <a16:creationId xmlns:a16="http://schemas.microsoft.com/office/drawing/2014/main" id="{4EF1A01C-F81C-F134-985F-6E4DF37DBBE4}"/>
-              </a:ext>
-            </a:extLst>
-          </p:cNvPr>
-          <p:cNvCxnSpPr>
-            <a:cxnSpLocks/>
-          </p:cNvCxnSpPr>
-          <p:nvPr/>
-        </p:nvCxnSpPr>
-        <p:spPr>
-          <a:xfrm>
-            <a:off x="1996889" y="1001707"/>
-            <a:ext cx="323569" cy="0"/>
-          </a:xfrm>
-          <a:prstGeom prst="straightConnector1">
-            <a:avLst/>
-          </a:prstGeom>
-          <a:ln w="12700">
-            <a:solidFill>
-              <a:schemeClr val="accent6"/>
-            </a:solidFill>
-            <a:prstDash val="solid"/>
-            <a:headEnd type="none" w="med" len="med"/>
-            <a:tailEnd type="triangle" w="med" len="med"/>
-          </a:ln>
-        </p:spPr>
-        <p:style>
-          <a:lnRef idx="1">
-            <a:schemeClr val="accent1"/>
-          </a:lnRef>
-          <a:fillRef idx="0">
-            <a:schemeClr val="accent1"/>
-          </a:fillRef>
-          <a:effectRef idx="0">
-            <a:schemeClr val="accent1"/>
-          </a:effectRef>
-          <a:fontRef idx="minor">
-            <a:schemeClr val="tx1"/>
-          </a:fontRef>
-        </p:style>
-      </p:cxnSp>
-      <p:sp>
-        <p:nvSpPr>
-          <p:cNvPr id="6" name="사각형: 둥근 모서리 12">
-            <a:extLst>
-              <a:ext uri="{FF2B5EF4-FFF2-40B4-BE49-F238E27FC236}">
-                <a16:creationId xmlns:a16="http://schemas.microsoft.com/office/drawing/2014/main" id="{77D11D02-1E49-AF9E-AC6C-A6664C059122}"/>
-              </a:ext>
-            </a:extLst>
-          </p:cNvPr>
-          <p:cNvSpPr/>
-          <p:nvPr/>
-        </p:nvSpPr>
-        <p:spPr>
-          <a:xfrm>
-            <a:off x="3297795" y="452758"/>
-            <a:ext cx="1139438" cy="451511"/>
-          </a:xfrm>
-          <a:prstGeom prst="roundRect">
-            <a:avLst>
-              <a:gd name="adj" fmla="val 14105"/>
-            </a:avLst>
-          </a:prstGeom>
-          <a:solidFill>
-            <a:schemeClr val="bg1">
-              <a:lumMod val="95000"/>
-            </a:schemeClr>
-          </a:solidFill>
-          <a:ln w="12700">
-            <a:headEnd type="none" w="med" len="med"/>
-            <a:tailEnd type="triangle" w="med" len="med"/>
-          </a:ln>
-        </p:spPr>
-        <p:style>
-          <a:lnRef idx="2">
-            <a:schemeClr val="dk1"/>
-          </a:lnRef>
-          <a:fillRef idx="1">
-            <a:schemeClr val="lt1"/>
-          </a:fillRef>
-          <a:effectRef idx="0">
-            <a:schemeClr val="dk1"/>
-          </a:effectRef>
-          <a:fontRef idx="minor">
-            <a:schemeClr val="dk1"/>
-          </a:fontRef>
-        </p:style>
-        <p:txBody>
-          <a:bodyPr rtlCol="0" anchor="ctr"/>
-          <a:lstStyle/>
-          <a:p>
-            <a:pPr algn="ctr"/>
-            <a:r>
-              <a:rPr lang="en-US" altLang="ko-KR" sz="900"/>
-              <a:t>Client C</a:t>
-            </a:r>
-          </a:p>
-          <a:p>
-            <a:pPr algn="ctr"/>
-            <a:r>
-              <a:rPr lang="en-US" altLang="ko-KR" sz="900" b="1"/>
-              <a:t>ReferenceGrant</a:t>
-            </a:r>
-          </a:p>
-        </p:txBody>
-      </p:sp>
-      <p:cxnSp>
-        <p:nvCxnSpPr>
-          <p:cNvPr id="20" name="직선 화살표 연결선 96">
-            <a:extLst>
-              <a:ext uri="{FF2B5EF4-FFF2-40B4-BE49-F238E27FC236}">
-                <a16:creationId xmlns:a16="http://schemas.microsoft.com/office/drawing/2014/main" id="{E84D4C24-FE0D-AF1A-4DDA-70D1649C213D}"/>
-              </a:ext>
-            </a:extLst>
-          </p:cNvPr>
-          <p:cNvCxnSpPr>
-            <a:cxnSpLocks/>
-            <a:stCxn id="6" idx="3"/>
-            <a:endCxn id="56" idx="0"/>
-          </p:cNvCxnSpPr>
-          <p:nvPr/>
-        </p:nvCxnSpPr>
-        <p:spPr>
-          <a:xfrm>
-            <a:off x="4437233" y="678514"/>
-            <a:ext cx="199024" cy="1773705"/>
-          </a:xfrm>
-          <a:prstGeom prst="straightConnector1">
-            <a:avLst/>
-          </a:prstGeom>
-          <a:ln w="12700">
-            <a:solidFill>
-              <a:schemeClr val="accent5"/>
-            </a:solidFill>
-            <a:prstDash val="solid"/>
-            <a:headEnd type="none" w="med" len="med"/>
-            <a:tailEnd type="triangle" w="med" len="med"/>
-          </a:ln>
-        </p:spPr>
-        <p:style>
-          <a:lnRef idx="1">
-            <a:schemeClr val="accent1"/>
-          </a:lnRef>
-          <a:fillRef idx="0">
-            <a:schemeClr val="accent1"/>
-          </a:fillRef>
-          <a:effectRef idx="0">
-            <a:schemeClr val="accent1"/>
-          </a:effectRef>
-          <a:fontRef idx="minor">
-            <a:schemeClr val="tx1"/>
-          </a:fontRef>
-        </p:style>
-      </p:cxnSp>
-      <p:cxnSp>
-        <p:nvCxnSpPr>
-          <p:cNvPr id="24" name="직선 화살표 연결선 96">
-            <a:extLst>
-              <a:ext uri="{FF2B5EF4-FFF2-40B4-BE49-F238E27FC236}">
-                <a16:creationId xmlns:a16="http://schemas.microsoft.com/office/drawing/2014/main" id="{B10D6ABB-BD76-0C7E-7B29-0981554A7760}"/>
-              </a:ext>
-            </a:extLst>
-          </p:cNvPr>
-          <p:cNvCxnSpPr>
-            <a:cxnSpLocks/>
-            <a:stCxn id="6" idx="1"/>
-            <a:endCxn id="3" idx="0"/>
-          </p:cNvCxnSpPr>
-          <p:nvPr/>
-        </p:nvCxnSpPr>
-        <p:spPr>
-          <a:xfrm flipH="1">
-            <a:off x="1871699" y="678514"/>
-            <a:ext cx="1426096" cy="2495437"/>
-          </a:xfrm>
-          <a:prstGeom prst="straightConnector1">
-            <a:avLst/>
-          </a:prstGeom>
-          <a:ln w="12700">
-            <a:solidFill>
-              <a:schemeClr val="accent5"/>
-            </a:solidFill>
-            <a:prstDash val="solid"/>
-            <a:headEnd type="none" w="med" len="med"/>
-            <a:tailEnd type="triangle" w="med" len="med"/>
-          </a:ln>
-        </p:spPr>
-        <p:style>
-          <a:lnRef idx="1">
-            <a:schemeClr val="accent1"/>
-          </a:lnRef>
-          <a:fillRef idx="0">
-            <a:schemeClr val="accent1"/>
-          </a:fillRef>
-          <a:effectRef idx="0">
-            <a:schemeClr val="accent1"/>
-          </a:effectRef>
-          <a:fontRef idx="minor">
-            <a:schemeClr val="tx1"/>
-          </a:fontRef>
-        </p:style>
-      </p:cxnSp>
-      <p:cxnSp>
-        <p:nvCxnSpPr>
-          <p:cNvPr id="52" name="직선 화살표 연결선 96">
-            <a:extLst>
-              <a:ext uri="{FF2B5EF4-FFF2-40B4-BE49-F238E27FC236}">
-                <a16:creationId xmlns:a16="http://schemas.microsoft.com/office/drawing/2014/main" id="{93586644-569E-1AF4-4BE0-1B546F303AFE}"/>
-              </a:ext>
-            </a:extLst>
-          </p:cNvPr>
-          <p:cNvCxnSpPr>
-            <a:cxnSpLocks/>
-          </p:cNvCxnSpPr>
-          <p:nvPr/>
-        </p:nvCxnSpPr>
-        <p:spPr>
-          <a:xfrm>
-            <a:off x="994672" y="331128"/>
-            <a:ext cx="323569" cy="0"/>
-          </a:xfrm>
-          <a:prstGeom prst="straightConnector1">
-            <a:avLst/>
-          </a:prstGeom>
-          <a:ln w="12700">
-            <a:solidFill>
-              <a:schemeClr val="accent5"/>
-            </a:solidFill>
-            <a:prstDash val="solid"/>
-            <a:headEnd type="none" w="med" len="med"/>
-            <a:tailEnd type="triangle" w="med" len="med"/>
-          </a:ln>
-        </p:spPr>
-        <p:style>
-          <a:lnRef idx="1">
-            <a:schemeClr val="accent1"/>
-          </a:lnRef>
-          <a:fillRef idx="0">
-            <a:schemeClr val="accent1"/>
-          </a:fillRef>
-          <a:effectRef idx="0">
-            <a:schemeClr val="accent1"/>
-          </a:effectRef>
-          <a:fontRef idx="minor">
-            <a:schemeClr val="tx1"/>
-          </a:fontRef>
-        </p:style>
-      </p:cxnSp>
-      <p:sp>
-        <p:nvSpPr>
-          <p:cNvPr id="53" name="TextBox 52">
-            <a:extLst>
-              <a:ext uri="{FF2B5EF4-FFF2-40B4-BE49-F238E27FC236}">
-                <a16:creationId xmlns:a16="http://schemas.microsoft.com/office/drawing/2014/main" id="{E05CD93B-7849-D65F-1F35-772024B3134F}"/>
-              </a:ext>
-            </a:extLst>
-          </p:cNvPr>
-          <p:cNvSpPr txBox="1"/>
-          <p:nvPr/>
-        </p:nvSpPr>
-        <p:spPr>
-          <a:xfrm>
-            <a:off x="1290415" y="137115"/>
-            <a:ext cx="702455" cy="369332"/>
-          </a:xfrm>
-          <a:prstGeom prst="rect">
-            <a:avLst/>
-          </a:prstGeom>
-          <a:noFill/>
-        </p:spPr>
-        <p:txBody>
-          <a:bodyPr wrap="square" rtlCol="0">
-            <a:spAutoFit/>
-          </a:bodyPr>
-          <a:lstStyle/>
-          <a:p>
-            <a:r>
-              <a:rPr lang="en-US" sz="900"/>
-              <a:t>Grant</a:t>
-            </a:r>
-          </a:p>
-          <a:p>
-            <a:r>
-              <a:rPr lang="en-US" sz="900"/>
-              <a:t>Reference</a:t>
-            </a:r>
-            <a:endParaRPr lang="en-KR" sz="900"/>
-          </a:p>
-        </p:txBody>
-      </p:sp>
-      <p:cxnSp>
-        <p:nvCxnSpPr>
-          <p:cNvPr id="10" name="직선 화살표 연결선 96">
-            <a:extLst>
-              <a:ext uri="{FF2B5EF4-FFF2-40B4-BE49-F238E27FC236}">
-                <a16:creationId xmlns:a16="http://schemas.microsoft.com/office/drawing/2014/main" id="{B8CD6875-703B-6FF9-A31D-5C51192C3EE0}"/>
-              </a:ext>
-            </a:extLst>
-          </p:cNvPr>
-          <p:cNvCxnSpPr>
-            <a:cxnSpLocks/>
-            <a:stCxn id="6" idx="3"/>
-            <a:endCxn id="62" idx="0"/>
-          </p:cNvCxnSpPr>
-          <p:nvPr/>
-        </p:nvCxnSpPr>
-        <p:spPr>
-          <a:xfrm>
-            <a:off x="4437233" y="678514"/>
-            <a:ext cx="196252" cy="3168605"/>
-          </a:xfrm>
-          <a:prstGeom prst="straightConnector1">
-            <a:avLst/>
-          </a:prstGeom>
-          <a:ln w="12700">
-            <a:solidFill>
-              <a:schemeClr val="accent5"/>
+              <a:schemeClr val="tx1"/>
             </a:solidFill>
             <a:prstDash val="solid"/>
             <a:headEnd type="none" w="med" len="med"/>
@@ -6450,6 +6603,2800 @@
 </file>
 
 <file path=ppt/slides/slide2.xml><?xml version="1.0" encoding="utf-8"?>
+<p:sld xmlns:a="http://schemas.openxmlformats.org/drawingml/2006/main" xmlns:r="http://schemas.openxmlformats.org/officeDocument/2006/relationships" xmlns:p="http://schemas.openxmlformats.org/presentationml/2006/main">
+  <p:cSld>
+    <p:spTree>
+      <p:nvGrpSpPr>
+        <p:cNvPr id="1" name="">
+          <a:extLst>
+            <a:ext uri="{FF2B5EF4-FFF2-40B4-BE49-F238E27FC236}">
+              <a16:creationId xmlns:a16="http://schemas.microsoft.com/office/drawing/2014/main" id="{69994D79-42F3-E8BD-1D8F-49C178228860}"/>
+            </a:ext>
+          </a:extLst>
+        </p:cNvPr>
+        <p:cNvGrpSpPr/>
+        <p:nvPr/>
+      </p:nvGrpSpPr>
+      <p:grpSpPr>
+        <a:xfrm>
+          <a:off x="0" y="0"/>
+          <a:ext cx="0" cy="0"/>
+          <a:chOff x="0" y="0"/>
+          <a:chExt cx="0" cy="0"/>
+        </a:xfrm>
+      </p:grpSpPr>
+      <p:sp>
+        <p:nvSpPr>
+          <p:cNvPr id="2" name="사각형: 둥근 모서리 70">
+            <a:extLst>
+              <a:ext uri="{FF2B5EF4-FFF2-40B4-BE49-F238E27FC236}">
+                <a16:creationId xmlns:a16="http://schemas.microsoft.com/office/drawing/2014/main" id="{C3C04E03-B5D5-BABF-0C37-5D1F71543D15}"/>
+              </a:ext>
+            </a:extLst>
+          </p:cNvPr>
+          <p:cNvSpPr/>
+          <p:nvPr/>
+        </p:nvSpPr>
+        <p:spPr>
+          <a:xfrm>
+            <a:off x="971599" y="1180559"/>
+            <a:ext cx="1800200" cy="892274"/>
+          </a:xfrm>
+          <a:prstGeom prst="roundRect">
+            <a:avLst>
+              <a:gd name="adj" fmla="val 8056"/>
+            </a:avLst>
+          </a:prstGeom>
+          <a:noFill/>
+          <a:ln w="12700">
+            <a:prstDash val="solid"/>
+            <a:headEnd type="none" w="med" len="med"/>
+            <a:tailEnd type="triangle" w="med" len="med"/>
+          </a:ln>
+        </p:spPr>
+        <p:style>
+          <a:lnRef idx="2">
+            <a:schemeClr val="dk1"/>
+          </a:lnRef>
+          <a:fillRef idx="1">
+            <a:schemeClr val="lt1"/>
+          </a:fillRef>
+          <a:effectRef idx="0">
+            <a:schemeClr val="dk1"/>
+          </a:effectRef>
+          <a:fontRef idx="minor">
+            <a:schemeClr val="dk1"/>
+          </a:fontRef>
+        </p:style>
+        <p:txBody>
+          <a:bodyPr rtlCol="0" anchor="t"/>
+          <a:lstStyle/>
+          <a:p>
+            <a:r>
+              <a:rPr lang="en-US" altLang="ko-KR" sz="1000" dirty="0"/>
+              <a:t>Client A </a:t>
+            </a:r>
+            <a:r>
+              <a:rPr lang="en-US" altLang="ko-KR" sz="1000" b="1" dirty="0"/>
+              <a:t>Namespace</a:t>
+            </a:r>
+            <a:endParaRPr lang="ko-KR" altLang="en-US" sz="1000" b="1" dirty="0"/>
+          </a:p>
+        </p:txBody>
+      </p:sp>
+      <p:sp>
+        <p:nvSpPr>
+          <p:cNvPr id="3" name="사각형: 둥근 모서리 70">
+            <a:extLst>
+              <a:ext uri="{FF2B5EF4-FFF2-40B4-BE49-F238E27FC236}">
+                <a16:creationId xmlns:a16="http://schemas.microsoft.com/office/drawing/2014/main" id="{876966A7-AD2D-98A5-6041-3571BB13282C}"/>
+              </a:ext>
+            </a:extLst>
+          </p:cNvPr>
+          <p:cNvSpPr/>
+          <p:nvPr/>
+        </p:nvSpPr>
+        <p:spPr>
+          <a:xfrm>
+            <a:off x="971599" y="3173951"/>
+            <a:ext cx="1800200" cy="1616906"/>
+          </a:xfrm>
+          <a:prstGeom prst="roundRect">
+            <a:avLst>
+              <a:gd name="adj" fmla="val 5325"/>
+            </a:avLst>
+          </a:prstGeom>
+          <a:noFill/>
+          <a:ln w="12700">
+            <a:prstDash val="solid"/>
+            <a:headEnd type="none" w="med" len="med"/>
+            <a:tailEnd type="triangle" w="med" len="med"/>
+          </a:ln>
+        </p:spPr>
+        <p:style>
+          <a:lnRef idx="2">
+            <a:schemeClr val="dk1"/>
+          </a:lnRef>
+          <a:fillRef idx="1">
+            <a:schemeClr val="lt1"/>
+          </a:fillRef>
+          <a:effectRef idx="0">
+            <a:schemeClr val="dk1"/>
+          </a:effectRef>
+          <a:fontRef idx="minor">
+            <a:schemeClr val="dk1"/>
+          </a:fontRef>
+        </p:style>
+        <p:txBody>
+          <a:bodyPr rtlCol="0" anchor="t"/>
+          <a:lstStyle/>
+          <a:p>
+            <a:r>
+              <a:rPr lang="en-US" altLang="ko-KR" sz="1000" dirty="0"/>
+              <a:t>Client C </a:t>
+            </a:r>
+            <a:r>
+              <a:rPr lang="en-US" altLang="ko-KR" sz="1000" b="1" dirty="0"/>
+              <a:t>Namespace</a:t>
+            </a:r>
+            <a:endParaRPr lang="ko-KR" altLang="en-US" sz="1000" b="1" dirty="0"/>
+          </a:p>
+        </p:txBody>
+      </p:sp>
+      <p:sp>
+        <p:nvSpPr>
+          <p:cNvPr id="4" name="사각형: 둥근 모서리 70">
+            <a:extLst>
+              <a:ext uri="{FF2B5EF4-FFF2-40B4-BE49-F238E27FC236}">
+                <a16:creationId xmlns:a16="http://schemas.microsoft.com/office/drawing/2014/main" id="{55A3DFD7-CB31-1CCE-B2E9-4B52EE6BC516}"/>
+              </a:ext>
+            </a:extLst>
+          </p:cNvPr>
+          <p:cNvSpPr/>
+          <p:nvPr/>
+        </p:nvSpPr>
+        <p:spPr>
+          <a:xfrm>
+            <a:off x="2987824" y="352643"/>
+            <a:ext cx="4637503" cy="4438214"/>
+          </a:xfrm>
+          <a:prstGeom prst="roundRect">
+            <a:avLst>
+              <a:gd name="adj" fmla="val 2531"/>
+            </a:avLst>
+          </a:prstGeom>
+          <a:noFill/>
+          <a:ln w="12700">
+            <a:prstDash val="solid"/>
+            <a:headEnd type="none" w="med" len="med"/>
+            <a:tailEnd type="triangle" w="med" len="med"/>
+          </a:ln>
+        </p:spPr>
+        <p:style>
+          <a:lnRef idx="2">
+            <a:schemeClr val="dk1"/>
+          </a:lnRef>
+          <a:fillRef idx="1">
+            <a:schemeClr val="lt1"/>
+          </a:fillRef>
+          <a:effectRef idx="0">
+            <a:schemeClr val="dk1"/>
+          </a:effectRef>
+          <a:fontRef idx="minor">
+            <a:schemeClr val="dk1"/>
+          </a:fontRef>
+        </p:style>
+        <p:txBody>
+          <a:bodyPr rtlCol="0" anchor="t"/>
+          <a:lstStyle/>
+          <a:p>
+            <a:pPr algn="r"/>
+            <a:r>
+              <a:rPr lang="en-US" altLang="ko-KR" sz="1000" dirty="0"/>
+              <a:t>Server </a:t>
+            </a:r>
+            <a:r>
+              <a:rPr lang="en-US" altLang="ko-KR" sz="1000" b="1" dirty="0"/>
+              <a:t>Namespace</a:t>
+            </a:r>
+            <a:endParaRPr lang="ko-KR" altLang="en-US" sz="1000" b="1" dirty="0"/>
+          </a:p>
+        </p:txBody>
+      </p:sp>
+      <p:sp>
+        <p:nvSpPr>
+          <p:cNvPr id="5" name="사각형: 둥근 모서리 12">
+            <a:extLst>
+              <a:ext uri="{FF2B5EF4-FFF2-40B4-BE49-F238E27FC236}">
+                <a16:creationId xmlns:a16="http://schemas.microsoft.com/office/drawing/2014/main" id="{6D87E767-1CA8-8218-A2D0-972887BA53D4}"/>
+              </a:ext>
+            </a:extLst>
+          </p:cNvPr>
+          <p:cNvSpPr/>
+          <p:nvPr/>
+        </p:nvSpPr>
+        <p:spPr>
+          <a:xfrm>
+            <a:off x="3095263" y="1057319"/>
+            <a:ext cx="3081988" cy="836785"/>
+          </a:xfrm>
+          <a:prstGeom prst="roundRect">
+            <a:avLst>
+              <a:gd name="adj" fmla="val 8995"/>
+            </a:avLst>
+          </a:prstGeom>
+          <a:noFill/>
+          <a:ln w="12700">
+            <a:headEnd type="none" w="med" len="med"/>
+            <a:tailEnd type="triangle" w="med" len="med"/>
+          </a:ln>
+        </p:spPr>
+        <p:style>
+          <a:lnRef idx="2">
+            <a:schemeClr val="dk1"/>
+          </a:lnRef>
+          <a:fillRef idx="1">
+            <a:schemeClr val="lt1"/>
+          </a:fillRef>
+          <a:effectRef idx="0">
+            <a:schemeClr val="dk1"/>
+          </a:effectRef>
+          <a:fontRef idx="minor">
+            <a:schemeClr val="dk1"/>
+          </a:fontRef>
+        </p:style>
+        <p:txBody>
+          <a:bodyPr rtlCol="0" anchor="t"/>
+          <a:lstStyle/>
+          <a:p>
+            <a:pPr algn="ctr"/>
+            <a:r>
+              <a:rPr lang="en-US" altLang="ko-KR" sz="900"/>
+              <a:t>Server </a:t>
+            </a:r>
+            <a:r>
+              <a:rPr lang="en-US" altLang="ko-KR" sz="900" b="1" dirty="0"/>
+              <a:t>Service</a:t>
+            </a:r>
+            <a:endParaRPr lang="ko-KR" altLang="en-US" sz="900" b="1" dirty="0"/>
+          </a:p>
+        </p:txBody>
+      </p:sp>
+      <p:sp>
+        <p:nvSpPr>
+          <p:cNvPr id="11" name="사각형: 둥근 모서리 12">
+            <a:extLst>
+              <a:ext uri="{FF2B5EF4-FFF2-40B4-BE49-F238E27FC236}">
+                <a16:creationId xmlns:a16="http://schemas.microsoft.com/office/drawing/2014/main" id="{331CF7BD-FE4E-8AE3-9D88-C8D623C9E769}"/>
+              </a:ext>
+            </a:extLst>
+          </p:cNvPr>
+          <p:cNvSpPr/>
+          <p:nvPr/>
+        </p:nvSpPr>
+        <p:spPr>
+          <a:xfrm>
+            <a:off x="1518621" y="1521382"/>
+            <a:ext cx="1139438" cy="451511"/>
+          </a:xfrm>
+          <a:prstGeom prst="roundRect">
+            <a:avLst>
+              <a:gd name="adj" fmla="val 14105"/>
+            </a:avLst>
+          </a:prstGeom>
+          <a:noFill/>
+          <a:ln w="12700">
+            <a:headEnd type="none" w="med" len="med"/>
+            <a:tailEnd type="triangle" w="med" len="med"/>
+          </a:ln>
+        </p:spPr>
+        <p:style>
+          <a:lnRef idx="2">
+            <a:schemeClr val="dk1"/>
+          </a:lnRef>
+          <a:fillRef idx="1">
+            <a:schemeClr val="lt1"/>
+          </a:fillRef>
+          <a:effectRef idx="0">
+            <a:schemeClr val="dk1"/>
+          </a:effectRef>
+          <a:fontRef idx="minor">
+            <a:schemeClr val="dk1"/>
+          </a:fontRef>
+        </p:style>
+        <p:txBody>
+          <a:bodyPr rtlCol="0" anchor="ctr"/>
+          <a:lstStyle/>
+          <a:p>
+            <a:pPr algn="ctr"/>
+            <a:r>
+              <a:rPr lang="en-US" altLang="ko-KR" sz="900"/>
+              <a:t>Client A </a:t>
+            </a:r>
+            <a:r>
+              <a:rPr lang="en-US" altLang="ko-KR" sz="900" b="1" dirty="0"/>
+              <a:t>Pod</a:t>
+            </a:r>
+            <a:endParaRPr lang="ko-KR" altLang="en-US" sz="900" b="1" dirty="0"/>
+          </a:p>
+        </p:txBody>
+      </p:sp>
+      <p:sp>
+        <p:nvSpPr>
+          <p:cNvPr id="12" name="사각형: 둥근 모서리 12">
+            <a:extLst>
+              <a:ext uri="{FF2B5EF4-FFF2-40B4-BE49-F238E27FC236}">
+                <a16:creationId xmlns:a16="http://schemas.microsoft.com/office/drawing/2014/main" id="{954C477B-60C6-38EA-1A1B-CB29C19F9F70}"/>
+              </a:ext>
+            </a:extLst>
+          </p:cNvPr>
+          <p:cNvSpPr/>
+          <p:nvPr/>
+        </p:nvSpPr>
+        <p:spPr>
+          <a:xfrm>
+            <a:off x="1518621" y="4219600"/>
+            <a:ext cx="1139438" cy="451511"/>
+          </a:xfrm>
+          <a:prstGeom prst="roundRect">
+            <a:avLst>
+              <a:gd name="adj" fmla="val 14105"/>
+            </a:avLst>
+          </a:prstGeom>
+          <a:noFill/>
+          <a:ln w="12700">
+            <a:headEnd type="none" w="med" len="med"/>
+            <a:tailEnd type="triangle" w="med" len="med"/>
+          </a:ln>
+        </p:spPr>
+        <p:style>
+          <a:lnRef idx="2">
+            <a:schemeClr val="dk1"/>
+          </a:lnRef>
+          <a:fillRef idx="1">
+            <a:schemeClr val="lt1"/>
+          </a:fillRef>
+          <a:effectRef idx="0">
+            <a:schemeClr val="dk1"/>
+          </a:effectRef>
+          <a:fontRef idx="minor">
+            <a:schemeClr val="dk1"/>
+          </a:fontRef>
+        </p:style>
+        <p:txBody>
+          <a:bodyPr rtlCol="0" anchor="ctr"/>
+          <a:lstStyle/>
+          <a:p>
+            <a:pPr algn="ctr"/>
+            <a:r>
+              <a:rPr lang="en-US" altLang="ko-KR" sz="900"/>
+              <a:t>Client C </a:t>
+            </a:r>
+            <a:r>
+              <a:rPr lang="en-US" altLang="ko-KR" sz="900" b="1" dirty="0"/>
+              <a:t>Pod</a:t>
+            </a:r>
+            <a:endParaRPr lang="ko-KR" altLang="en-US" sz="900" b="1" dirty="0"/>
+          </a:p>
+        </p:txBody>
+      </p:sp>
+      <p:sp>
+        <p:nvSpPr>
+          <p:cNvPr id="17" name="사각형: 둥근 모서리 12">
+            <a:extLst>
+              <a:ext uri="{FF2B5EF4-FFF2-40B4-BE49-F238E27FC236}">
+                <a16:creationId xmlns:a16="http://schemas.microsoft.com/office/drawing/2014/main" id="{D9976800-7BF0-4F39-3D0F-2D54AFF9A8E2}"/>
+              </a:ext>
+            </a:extLst>
+          </p:cNvPr>
+          <p:cNvSpPr/>
+          <p:nvPr/>
+        </p:nvSpPr>
+        <p:spPr>
+          <a:xfrm>
+            <a:off x="3205001" y="1338418"/>
+            <a:ext cx="1330422" cy="451511"/>
+          </a:xfrm>
+          <a:prstGeom prst="roundRect">
+            <a:avLst>
+              <a:gd name="adj" fmla="val 14105"/>
+            </a:avLst>
+          </a:prstGeom>
+          <a:solidFill>
+            <a:schemeClr val="bg1">
+              <a:lumMod val="95000"/>
+            </a:schemeClr>
+          </a:solidFill>
+          <a:ln w="12700">
+            <a:headEnd type="none" w="med" len="med"/>
+            <a:tailEnd type="triangle" w="med" len="med"/>
+          </a:ln>
+        </p:spPr>
+        <p:style>
+          <a:lnRef idx="2">
+            <a:schemeClr val="dk1"/>
+          </a:lnRef>
+          <a:fillRef idx="1">
+            <a:schemeClr val="lt1"/>
+          </a:fillRef>
+          <a:effectRef idx="0">
+            <a:schemeClr val="dk1"/>
+          </a:effectRef>
+          <a:fontRef idx="minor">
+            <a:schemeClr val="dk1"/>
+          </a:fontRef>
+        </p:style>
+        <p:txBody>
+          <a:bodyPr rtlCol="0" anchor="ctr"/>
+          <a:lstStyle/>
+          <a:p>
+            <a:pPr algn="ctr"/>
+            <a:r>
+              <a:rPr lang="en-US" altLang="ko-KR" sz="900" dirty="0"/>
+              <a:t>DNS Name, ClusterIP</a:t>
+            </a:r>
+          </a:p>
+          <a:p>
+            <a:pPr algn="ctr"/>
+            <a:r>
+              <a:rPr lang="en-US" altLang="ko-KR" sz="900" b="1" dirty="0"/>
+              <a:t>Frontend</a:t>
+            </a:r>
+            <a:endParaRPr lang="ko-KR" altLang="en-US" sz="900" b="1" dirty="0"/>
+          </a:p>
+        </p:txBody>
+      </p:sp>
+      <p:sp>
+        <p:nvSpPr>
+          <p:cNvPr id="19" name="사각형: 둥근 모서리 12">
+            <a:extLst>
+              <a:ext uri="{FF2B5EF4-FFF2-40B4-BE49-F238E27FC236}">
+                <a16:creationId xmlns:a16="http://schemas.microsoft.com/office/drawing/2014/main" id="{670926A3-B13A-B3CA-05B1-987D706514C5}"/>
+              </a:ext>
+            </a:extLst>
+          </p:cNvPr>
+          <p:cNvSpPr/>
+          <p:nvPr/>
+        </p:nvSpPr>
+        <p:spPr>
+          <a:xfrm>
+            <a:off x="4962660" y="1344655"/>
+            <a:ext cx="1104530" cy="445274"/>
+          </a:xfrm>
+          <a:prstGeom prst="roundRect">
+            <a:avLst>
+              <a:gd name="adj" fmla="val 14105"/>
+            </a:avLst>
+          </a:prstGeom>
+          <a:solidFill>
+            <a:schemeClr val="bg1">
+              <a:lumMod val="95000"/>
+            </a:schemeClr>
+          </a:solidFill>
+          <a:ln w="12700">
+            <a:headEnd type="none" w="med" len="med"/>
+            <a:tailEnd type="triangle" w="med" len="med"/>
+          </a:ln>
+        </p:spPr>
+        <p:style>
+          <a:lnRef idx="2">
+            <a:schemeClr val="dk1"/>
+          </a:lnRef>
+          <a:fillRef idx="1">
+            <a:schemeClr val="lt1"/>
+          </a:fillRef>
+          <a:effectRef idx="0">
+            <a:schemeClr val="dk1"/>
+          </a:effectRef>
+          <a:fontRef idx="minor">
+            <a:schemeClr val="dk1"/>
+          </a:fontRef>
+        </p:style>
+        <p:txBody>
+          <a:bodyPr rtlCol="0" anchor="ctr"/>
+          <a:lstStyle/>
+          <a:p>
+            <a:pPr algn="ctr"/>
+            <a:r>
+              <a:rPr lang="en-US" altLang="ko-KR" sz="900" dirty="0"/>
+              <a:t>Endpoint IPs</a:t>
+            </a:r>
+          </a:p>
+          <a:p>
+            <a:pPr algn="ctr"/>
+            <a:r>
+              <a:rPr lang="en-US" altLang="ko-KR" sz="900" b="1" dirty="0"/>
+              <a:t>Backend</a:t>
+            </a:r>
+            <a:endParaRPr lang="ko-KR" altLang="en-US" sz="900" b="1" dirty="0"/>
+          </a:p>
+        </p:txBody>
+      </p:sp>
+      <p:sp>
+        <p:nvSpPr>
+          <p:cNvPr id="21" name="사각형: 둥근 모서리 12">
+            <a:extLst>
+              <a:ext uri="{FF2B5EF4-FFF2-40B4-BE49-F238E27FC236}">
+                <a16:creationId xmlns:a16="http://schemas.microsoft.com/office/drawing/2014/main" id="{A2E3353E-021A-BAD7-9A4E-F2AC3C31957C}"/>
+              </a:ext>
+            </a:extLst>
+          </p:cNvPr>
+          <p:cNvSpPr/>
+          <p:nvPr/>
+        </p:nvSpPr>
+        <p:spPr>
+          <a:xfrm>
+            <a:off x="6390504" y="1340841"/>
+            <a:ext cx="1139438" cy="451511"/>
+          </a:xfrm>
+          <a:prstGeom prst="roundRect">
+            <a:avLst>
+              <a:gd name="adj" fmla="val 14105"/>
+            </a:avLst>
+          </a:prstGeom>
+          <a:noFill/>
+          <a:ln w="12700">
+            <a:headEnd type="none" w="med" len="med"/>
+            <a:tailEnd type="triangle" w="med" len="med"/>
+          </a:ln>
+        </p:spPr>
+        <p:style>
+          <a:lnRef idx="2">
+            <a:schemeClr val="dk1"/>
+          </a:lnRef>
+          <a:fillRef idx="1">
+            <a:schemeClr val="lt1"/>
+          </a:fillRef>
+          <a:effectRef idx="0">
+            <a:schemeClr val="dk1"/>
+          </a:effectRef>
+          <a:fontRef idx="minor">
+            <a:schemeClr val="dk1"/>
+          </a:fontRef>
+        </p:style>
+        <p:txBody>
+          <a:bodyPr rtlCol="0" anchor="ctr"/>
+          <a:lstStyle/>
+          <a:p>
+            <a:pPr algn="ctr"/>
+            <a:r>
+              <a:rPr lang="en-US" altLang="ko-KR" sz="900"/>
+              <a:t>Server </a:t>
+            </a:r>
+            <a:r>
+              <a:rPr lang="en-US" altLang="ko-KR" sz="900" b="1" dirty="0"/>
+              <a:t>Deployment</a:t>
+            </a:r>
+            <a:endParaRPr lang="ko-KR" altLang="en-US" sz="900" b="1" dirty="0"/>
+          </a:p>
+        </p:txBody>
+      </p:sp>
+      <p:cxnSp>
+        <p:nvCxnSpPr>
+          <p:cNvPr id="46" name="직선 화살표 연결선 96">
+            <a:extLst>
+              <a:ext uri="{FF2B5EF4-FFF2-40B4-BE49-F238E27FC236}">
+                <a16:creationId xmlns:a16="http://schemas.microsoft.com/office/drawing/2014/main" id="{E36B0E00-9FD6-F98F-D29A-F11FD510A7DA}"/>
+              </a:ext>
+            </a:extLst>
+          </p:cNvPr>
+          <p:cNvCxnSpPr>
+            <a:cxnSpLocks/>
+            <a:stCxn id="122" idx="2"/>
+            <a:endCxn id="17" idx="0"/>
+          </p:cNvCxnSpPr>
+          <p:nvPr/>
+        </p:nvCxnSpPr>
+        <p:spPr>
+          <a:xfrm flipH="1">
+            <a:off x="3870212" y="904269"/>
+            <a:ext cx="1641941" cy="434149"/>
+          </a:xfrm>
+          <a:prstGeom prst="straightConnector1">
+            <a:avLst/>
+          </a:prstGeom>
+          <a:ln w="12700">
+            <a:solidFill>
+              <a:schemeClr val="tx2"/>
+            </a:solidFill>
+            <a:prstDash val="solid"/>
+            <a:headEnd type="none" w="med" len="med"/>
+            <a:tailEnd type="triangle" w="med" len="med"/>
+          </a:ln>
+        </p:spPr>
+        <p:style>
+          <a:lnRef idx="1">
+            <a:schemeClr val="accent1"/>
+          </a:lnRef>
+          <a:fillRef idx="0">
+            <a:schemeClr val="accent1"/>
+          </a:fillRef>
+          <a:effectRef idx="0">
+            <a:schemeClr val="accent1"/>
+          </a:effectRef>
+          <a:fontRef idx="minor">
+            <a:schemeClr val="tx1"/>
+          </a:fontRef>
+        </p:style>
+      </p:cxnSp>
+      <p:cxnSp>
+        <p:nvCxnSpPr>
+          <p:cNvPr id="49" name="직선 화살표 연결선 96">
+            <a:extLst>
+              <a:ext uri="{FF2B5EF4-FFF2-40B4-BE49-F238E27FC236}">
+                <a16:creationId xmlns:a16="http://schemas.microsoft.com/office/drawing/2014/main" id="{BD82616C-F2AC-8EA9-4243-8FD041F43334}"/>
+              </a:ext>
+            </a:extLst>
+          </p:cNvPr>
+          <p:cNvCxnSpPr>
+            <a:cxnSpLocks/>
+            <a:stCxn id="122" idx="2"/>
+            <a:endCxn id="19" idx="0"/>
+          </p:cNvCxnSpPr>
+          <p:nvPr/>
+        </p:nvCxnSpPr>
+        <p:spPr>
+          <a:xfrm>
+            <a:off x="5512153" y="904269"/>
+            <a:ext cx="2772" cy="440386"/>
+          </a:xfrm>
+          <a:prstGeom prst="straightConnector1">
+            <a:avLst/>
+          </a:prstGeom>
+          <a:ln w="12700">
+            <a:solidFill>
+              <a:schemeClr val="accent3"/>
+            </a:solidFill>
+            <a:prstDash val="solid"/>
+            <a:headEnd type="none" w="med" len="med"/>
+            <a:tailEnd type="triangle" w="med" len="med"/>
+          </a:ln>
+        </p:spPr>
+        <p:style>
+          <a:lnRef idx="1">
+            <a:schemeClr val="accent1"/>
+          </a:lnRef>
+          <a:fillRef idx="0">
+            <a:schemeClr val="accent1"/>
+          </a:fillRef>
+          <a:effectRef idx="0">
+            <a:schemeClr val="accent1"/>
+          </a:effectRef>
+          <a:fontRef idx="minor">
+            <a:schemeClr val="tx1"/>
+          </a:fontRef>
+        </p:style>
+      </p:cxnSp>
+      <p:sp>
+        <p:nvSpPr>
+          <p:cNvPr id="56" name="사각형: 둥근 모서리 12">
+            <a:extLst>
+              <a:ext uri="{FF2B5EF4-FFF2-40B4-BE49-F238E27FC236}">
+                <a16:creationId xmlns:a16="http://schemas.microsoft.com/office/drawing/2014/main" id="{05164898-8F4B-6C5D-56AD-62D4984C8D6E}"/>
+              </a:ext>
+            </a:extLst>
+          </p:cNvPr>
+          <p:cNvSpPr/>
+          <p:nvPr/>
+        </p:nvSpPr>
+        <p:spPr>
+          <a:xfrm>
+            <a:off x="3095263" y="2452219"/>
+            <a:ext cx="3081988" cy="836785"/>
+          </a:xfrm>
+          <a:prstGeom prst="roundRect">
+            <a:avLst>
+              <a:gd name="adj" fmla="val 8995"/>
+            </a:avLst>
+          </a:prstGeom>
+          <a:noFill/>
+          <a:ln w="12700">
+            <a:headEnd type="none" w="med" len="med"/>
+            <a:tailEnd type="triangle" w="med" len="med"/>
+          </a:ln>
+        </p:spPr>
+        <p:style>
+          <a:lnRef idx="2">
+            <a:schemeClr val="dk1"/>
+          </a:lnRef>
+          <a:fillRef idx="1">
+            <a:schemeClr val="lt1"/>
+          </a:fillRef>
+          <a:effectRef idx="0">
+            <a:schemeClr val="dk1"/>
+          </a:effectRef>
+          <a:fontRef idx="minor">
+            <a:schemeClr val="dk1"/>
+          </a:fontRef>
+        </p:style>
+        <p:txBody>
+          <a:bodyPr rtlCol="0" anchor="t"/>
+          <a:lstStyle/>
+          <a:p>
+            <a:pPr algn="ctr"/>
+            <a:r>
+              <a:rPr lang="en-US" altLang="ko-KR" sz="900"/>
+              <a:t>Server Version 1 </a:t>
+            </a:r>
+            <a:r>
+              <a:rPr lang="en-US" altLang="ko-KR" sz="900" b="1" dirty="0"/>
+              <a:t>Service</a:t>
+            </a:r>
+            <a:endParaRPr lang="ko-KR" altLang="en-US" sz="900" b="1" dirty="0"/>
+          </a:p>
+        </p:txBody>
+      </p:sp>
+      <p:sp>
+        <p:nvSpPr>
+          <p:cNvPr id="57" name="사각형: 둥근 모서리 12">
+            <a:extLst>
+              <a:ext uri="{FF2B5EF4-FFF2-40B4-BE49-F238E27FC236}">
+                <a16:creationId xmlns:a16="http://schemas.microsoft.com/office/drawing/2014/main" id="{C5CD8D45-4FE7-858A-7F40-60BDF02F91DE}"/>
+              </a:ext>
+            </a:extLst>
+          </p:cNvPr>
+          <p:cNvSpPr/>
+          <p:nvPr/>
+        </p:nvSpPr>
+        <p:spPr>
+          <a:xfrm>
+            <a:off x="3205001" y="2733318"/>
+            <a:ext cx="1330422" cy="451511"/>
+          </a:xfrm>
+          <a:prstGeom prst="roundRect">
+            <a:avLst>
+              <a:gd name="adj" fmla="val 14105"/>
+            </a:avLst>
+          </a:prstGeom>
+          <a:solidFill>
+            <a:schemeClr val="bg1">
+              <a:lumMod val="95000"/>
+            </a:schemeClr>
+          </a:solidFill>
+          <a:ln w="12700">
+            <a:headEnd type="none" w="med" len="med"/>
+            <a:tailEnd type="triangle" w="med" len="med"/>
+          </a:ln>
+        </p:spPr>
+        <p:style>
+          <a:lnRef idx="2">
+            <a:schemeClr val="dk1"/>
+          </a:lnRef>
+          <a:fillRef idx="1">
+            <a:schemeClr val="lt1"/>
+          </a:fillRef>
+          <a:effectRef idx="0">
+            <a:schemeClr val="dk1"/>
+          </a:effectRef>
+          <a:fontRef idx="minor">
+            <a:schemeClr val="dk1"/>
+          </a:fontRef>
+        </p:style>
+        <p:txBody>
+          <a:bodyPr rtlCol="0" anchor="ctr"/>
+          <a:lstStyle/>
+          <a:p>
+            <a:pPr algn="ctr"/>
+            <a:r>
+              <a:rPr lang="en-US" altLang="ko-KR" sz="900" dirty="0"/>
+              <a:t>DNS Name, ClusterIP</a:t>
+            </a:r>
+          </a:p>
+          <a:p>
+            <a:pPr algn="ctr"/>
+            <a:r>
+              <a:rPr lang="en-US" altLang="ko-KR" sz="900" b="1" dirty="0"/>
+              <a:t>Frontend</a:t>
+            </a:r>
+            <a:endParaRPr lang="ko-KR" altLang="en-US" sz="900" b="1" dirty="0"/>
+          </a:p>
+        </p:txBody>
+      </p:sp>
+      <p:sp>
+        <p:nvSpPr>
+          <p:cNvPr id="58" name="사각형: 둥근 모서리 12">
+            <a:extLst>
+              <a:ext uri="{FF2B5EF4-FFF2-40B4-BE49-F238E27FC236}">
+                <a16:creationId xmlns:a16="http://schemas.microsoft.com/office/drawing/2014/main" id="{98948318-2BB0-5826-C67D-30D588EAE234}"/>
+              </a:ext>
+            </a:extLst>
+          </p:cNvPr>
+          <p:cNvSpPr/>
+          <p:nvPr/>
+        </p:nvSpPr>
+        <p:spPr>
+          <a:xfrm>
+            <a:off x="4962660" y="2739555"/>
+            <a:ext cx="1104530" cy="445274"/>
+          </a:xfrm>
+          <a:prstGeom prst="roundRect">
+            <a:avLst>
+              <a:gd name="adj" fmla="val 14105"/>
+            </a:avLst>
+          </a:prstGeom>
+          <a:solidFill>
+            <a:schemeClr val="bg1">
+              <a:lumMod val="95000"/>
+            </a:schemeClr>
+          </a:solidFill>
+          <a:ln w="12700">
+            <a:headEnd type="none" w="med" len="med"/>
+            <a:tailEnd type="triangle" w="med" len="med"/>
+          </a:ln>
+        </p:spPr>
+        <p:style>
+          <a:lnRef idx="2">
+            <a:schemeClr val="dk1"/>
+          </a:lnRef>
+          <a:fillRef idx="1">
+            <a:schemeClr val="lt1"/>
+          </a:fillRef>
+          <a:effectRef idx="0">
+            <a:schemeClr val="dk1"/>
+          </a:effectRef>
+          <a:fontRef idx="minor">
+            <a:schemeClr val="dk1"/>
+          </a:fontRef>
+        </p:style>
+        <p:txBody>
+          <a:bodyPr rtlCol="0" anchor="ctr"/>
+          <a:lstStyle/>
+          <a:p>
+            <a:pPr algn="ctr"/>
+            <a:r>
+              <a:rPr lang="en-US" altLang="ko-KR" sz="900" dirty="0"/>
+              <a:t>Endpoint IPs</a:t>
+            </a:r>
+          </a:p>
+          <a:p>
+            <a:pPr algn="ctr"/>
+            <a:r>
+              <a:rPr lang="en-US" altLang="ko-KR" sz="900" b="1" dirty="0"/>
+              <a:t>Backend</a:t>
+            </a:r>
+            <a:endParaRPr lang="ko-KR" altLang="en-US" sz="900" b="1" dirty="0"/>
+          </a:p>
+        </p:txBody>
+      </p:sp>
+      <p:sp>
+        <p:nvSpPr>
+          <p:cNvPr id="59" name="사각형: 둥근 모서리 12">
+            <a:extLst>
+              <a:ext uri="{FF2B5EF4-FFF2-40B4-BE49-F238E27FC236}">
+                <a16:creationId xmlns:a16="http://schemas.microsoft.com/office/drawing/2014/main" id="{7F518C8C-C96B-E37C-91F0-3A172BFC165D}"/>
+              </a:ext>
+            </a:extLst>
+          </p:cNvPr>
+          <p:cNvSpPr/>
+          <p:nvPr/>
+        </p:nvSpPr>
+        <p:spPr>
+          <a:xfrm>
+            <a:off x="6390504" y="2736436"/>
+            <a:ext cx="1139438" cy="451511"/>
+          </a:xfrm>
+          <a:prstGeom prst="roundRect">
+            <a:avLst>
+              <a:gd name="adj" fmla="val 14105"/>
+            </a:avLst>
+          </a:prstGeom>
+          <a:noFill/>
+          <a:ln w="12700">
+            <a:headEnd type="none" w="med" len="med"/>
+            <a:tailEnd type="triangle" w="med" len="med"/>
+          </a:ln>
+        </p:spPr>
+        <p:style>
+          <a:lnRef idx="2">
+            <a:schemeClr val="dk1"/>
+          </a:lnRef>
+          <a:fillRef idx="1">
+            <a:schemeClr val="lt1"/>
+          </a:fillRef>
+          <a:effectRef idx="0">
+            <a:schemeClr val="dk1"/>
+          </a:effectRef>
+          <a:fontRef idx="minor">
+            <a:schemeClr val="dk1"/>
+          </a:fontRef>
+        </p:style>
+        <p:txBody>
+          <a:bodyPr rtlCol="0" anchor="ctr"/>
+          <a:lstStyle/>
+          <a:p>
+            <a:pPr algn="ctr"/>
+            <a:r>
+              <a:rPr lang="en-US" altLang="ko-KR" sz="900"/>
+              <a:t>Server Version 1 </a:t>
+            </a:r>
+            <a:r>
+              <a:rPr lang="en-US" altLang="ko-KR" sz="900" b="1" dirty="0"/>
+              <a:t>Deployment</a:t>
+            </a:r>
+            <a:endParaRPr lang="ko-KR" altLang="en-US" sz="900" b="1" dirty="0"/>
+          </a:p>
+        </p:txBody>
+      </p:sp>
+      <p:sp>
+        <p:nvSpPr>
+          <p:cNvPr id="61" name="사각형: 둥근 모서리 12">
+            <a:extLst>
+              <a:ext uri="{FF2B5EF4-FFF2-40B4-BE49-F238E27FC236}">
+                <a16:creationId xmlns:a16="http://schemas.microsoft.com/office/drawing/2014/main" id="{E840DDFE-94CD-7CA6-022C-A49D5917CD41}"/>
+              </a:ext>
+            </a:extLst>
+          </p:cNvPr>
+          <p:cNvSpPr/>
+          <p:nvPr/>
+        </p:nvSpPr>
+        <p:spPr>
+          <a:xfrm>
+            <a:off x="1518621" y="3522150"/>
+            <a:ext cx="1139438" cy="451511"/>
+          </a:xfrm>
+          <a:prstGeom prst="roundRect">
+            <a:avLst>
+              <a:gd name="adj" fmla="val 14105"/>
+            </a:avLst>
+          </a:prstGeom>
+          <a:solidFill>
+            <a:schemeClr val="bg1">
+              <a:lumMod val="95000"/>
+            </a:schemeClr>
+          </a:solidFill>
+          <a:ln w="12700">
+            <a:headEnd type="none" w="med" len="med"/>
+            <a:tailEnd type="triangle" w="med" len="med"/>
+          </a:ln>
+        </p:spPr>
+        <p:style>
+          <a:lnRef idx="2">
+            <a:schemeClr val="dk1"/>
+          </a:lnRef>
+          <a:fillRef idx="1">
+            <a:schemeClr val="lt1"/>
+          </a:fillRef>
+          <a:effectRef idx="0">
+            <a:schemeClr val="dk1"/>
+          </a:effectRef>
+          <a:fontRef idx="minor">
+            <a:schemeClr val="dk1"/>
+          </a:fontRef>
+        </p:style>
+        <p:txBody>
+          <a:bodyPr rtlCol="0" anchor="ctr"/>
+          <a:lstStyle/>
+          <a:p>
+            <a:pPr algn="ctr"/>
+            <a:r>
+              <a:rPr lang="en-US" altLang="ko-KR" sz="900"/>
+              <a:t>Server</a:t>
+            </a:r>
+          </a:p>
+          <a:p>
+            <a:pPr algn="ctr"/>
+            <a:r>
+              <a:rPr lang="en-US" altLang="ko-KR" sz="900" b="1"/>
+              <a:t>HTTPRoute</a:t>
+            </a:r>
+          </a:p>
+          <a:p>
+            <a:pPr algn="ctr"/>
+            <a:r>
+              <a:rPr lang="en-US" altLang="ko-KR" sz="900" b="1"/>
+              <a:t>(Consumer)</a:t>
+            </a:r>
+          </a:p>
+        </p:txBody>
+      </p:sp>
+      <p:sp>
+        <p:nvSpPr>
+          <p:cNvPr id="62" name="사각형: 둥근 모서리 12">
+            <a:extLst>
+              <a:ext uri="{FF2B5EF4-FFF2-40B4-BE49-F238E27FC236}">
+                <a16:creationId xmlns:a16="http://schemas.microsoft.com/office/drawing/2014/main" id="{BD812359-3ABA-2ABE-7EEF-C392F09E2251}"/>
+              </a:ext>
+            </a:extLst>
+          </p:cNvPr>
+          <p:cNvSpPr/>
+          <p:nvPr/>
+        </p:nvSpPr>
+        <p:spPr>
+          <a:xfrm>
+            <a:off x="3092491" y="3847119"/>
+            <a:ext cx="3081988" cy="836785"/>
+          </a:xfrm>
+          <a:prstGeom prst="roundRect">
+            <a:avLst>
+              <a:gd name="adj" fmla="val 8995"/>
+            </a:avLst>
+          </a:prstGeom>
+          <a:noFill/>
+          <a:ln w="12700">
+            <a:headEnd type="none" w="med" len="med"/>
+            <a:tailEnd type="triangle" w="med" len="med"/>
+          </a:ln>
+        </p:spPr>
+        <p:style>
+          <a:lnRef idx="2">
+            <a:schemeClr val="dk1"/>
+          </a:lnRef>
+          <a:fillRef idx="1">
+            <a:schemeClr val="lt1"/>
+          </a:fillRef>
+          <a:effectRef idx="0">
+            <a:schemeClr val="dk1"/>
+          </a:effectRef>
+          <a:fontRef idx="minor">
+            <a:schemeClr val="dk1"/>
+          </a:fontRef>
+        </p:style>
+        <p:txBody>
+          <a:bodyPr rtlCol="0" anchor="t"/>
+          <a:lstStyle/>
+          <a:p>
+            <a:pPr algn="ctr"/>
+            <a:r>
+              <a:rPr lang="en-US" altLang="ko-KR" sz="900"/>
+              <a:t>Server Version 2 </a:t>
+            </a:r>
+            <a:r>
+              <a:rPr lang="en-US" altLang="ko-KR" sz="900" b="1" dirty="0"/>
+              <a:t>Service</a:t>
+            </a:r>
+            <a:endParaRPr lang="ko-KR" altLang="en-US" sz="900" b="1" dirty="0"/>
+          </a:p>
+        </p:txBody>
+      </p:sp>
+      <p:sp>
+        <p:nvSpPr>
+          <p:cNvPr id="63" name="사각형: 둥근 모서리 12">
+            <a:extLst>
+              <a:ext uri="{FF2B5EF4-FFF2-40B4-BE49-F238E27FC236}">
+                <a16:creationId xmlns:a16="http://schemas.microsoft.com/office/drawing/2014/main" id="{EA7C5059-9308-66EE-5AD0-DD2981540C12}"/>
+              </a:ext>
+            </a:extLst>
+          </p:cNvPr>
+          <p:cNvSpPr/>
+          <p:nvPr/>
+        </p:nvSpPr>
+        <p:spPr>
+          <a:xfrm>
+            <a:off x="3202229" y="4128218"/>
+            <a:ext cx="1330422" cy="451511"/>
+          </a:xfrm>
+          <a:prstGeom prst="roundRect">
+            <a:avLst>
+              <a:gd name="adj" fmla="val 14105"/>
+            </a:avLst>
+          </a:prstGeom>
+          <a:solidFill>
+            <a:schemeClr val="bg1">
+              <a:lumMod val="95000"/>
+            </a:schemeClr>
+          </a:solidFill>
+          <a:ln w="12700">
+            <a:headEnd type="none" w="med" len="med"/>
+            <a:tailEnd type="triangle" w="med" len="med"/>
+          </a:ln>
+        </p:spPr>
+        <p:style>
+          <a:lnRef idx="2">
+            <a:schemeClr val="dk1"/>
+          </a:lnRef>
+          <a:fillRef idx="1">
+            <a:schemeClr val="lt1"/>
+          </a:fillRef>
+          <a:effectRef idx="0">
+            <a:schemeClr val="dk1"/>
+          </a:effectRef>
+          <a:fontRef idx="minor">
+            <a:schemeClr val="dk1"/>
+          </a:fontRef>
+        </p:style>
+        <p:txBody>
+          <a:bodyPr rtlCol="0" anchor="ctr"/>
+          <a:lstStyle/>
+          <a:p>
+            <a:pPr algn="ctr"/>
+            <a:r>
+              <a:rPr lang="en-US" altLang="ko-KR" sz="900" dirty="0"/>
+              <a:t>DNS Name, ClusterIP</a:t>
+            </a:r>
+          </a:p>
+          <a:p>
+            <a:pPr algn="ctr"/>
+            <a:r>
+              <a:rPr lang="en-US" altLang="ko-KR" sz="900" b="1" dirty="0"/>
+              <a:t>Frontend</a:t>
+            </a:r>
+            <a:endParaRPr lang="ko-KR" altLang="en-US" sz="900" b="1" dirty="0"/>
+          </a:p>
+        </p:txBody>
+      </p:sp>
+      <p:sp>
+        <p:nvSpPr>
+          <p:cNvPr id="64" name="사각형: 둥근 모서리 12">
+            <a:extLst>
+              <a:ext uri="{FF2B5EF4-FFF2-40B4-BE49-F238E27FC236}">
+                <a16:creationId xmlns:a16="http://schemas.microsoft.com/office/drawing/2014/main" id="{71EA2532-FEBA-78F2-0AB7-13516E3522BD}"/>
+              </a:ext>
+            </a:extLst>
+          </p:cNvPr>
+          <p:cNvSpPr/>
+          <p:nvPr/>
+        </p:nvSpPr>
+        <p:spPr>
+          <a:xfrm>
+            <a:off x="4959888" y="4134455"/>
+            <a:ext cx="1104530" cy="445274"/>
+          </a:xfrm>
+          <a:prstGeom prst="roundRect">
+            <a:avLst>
+              <a:gd name="adj" fmla="val 14105"/>
+            </a:avLst>
+          </a:prstGeom>
+          <a:solidFill>
+            <a:schemeClr val="bg1">
+              <a:lumMod val="95000"/>
+            </a:schemeClr>
+          </a:solidFill>
+          <a:ln w="12700">
+            <a:headEnd type="none" w="med" len="med"/>
+            <a:tailEnd type="triangle" w="med" len="med"/>
+          </a:ln>
+        </p:spPr>
+        <p:style>
+          <a:lnRef idx="2">
+            <a:schemeClr val="dk1"/>
+          </a:lnRef>
+          <a:fillRef idx="1">
+            <a:schemeClr val="lt1"/>
+          </a:fillRef>
+          <a:effectRef idx="0">
+            <a:schemeClr val="dk1"/>
+          </a:effectRef>
+          <a:fontRef idx="minor">
+            <a:schemeClr val="dk1"/>
+          </a:fontRef>
+        </p:style>
+        <p:txBody>
+          <a:bodyPr rtlCol="0" anchor="ctr"/>
+          <a:lstStyle/>
+          <a:p>
+            <a:pPr algn="ctr"/>
+            <a:r>
+              <a:rPr lang="en-US" altLang="ko-KR" sz="900" dirty="0"/>
+              <a:t>Endpoint IPs</a:t>
+            </a:r>
+          </a:p>
+          <a:p>
+            <a:pPr algn="ctr"/>
+            <a:r>
+              <a:rPr lang="en-US" altLang="ko-KR" sz="900" b="1" dirty="0"/>
+              <a:t>Backend</a:t>
+            </a:r>
+            <a:endParaRPr lang="ko-KR" altLang="en-US" sz="900" b="1" dirty="0"/>
+          </a:p>
+        </p:txBody>
+      </p:sp>
+      <p:sp>
+        <p:nvSpPr>
+          <p:cNvPr id="65" name="사각형: 둥근 모서리 12">
+            <a:extLst>
+              <a:ext uri="{FF2B5EF4-FFF2-40B4-BE49-F238E27FC236}">
+                <a16:creationId xmlns:a16="http://schemas.microsoft.com/office/drawing/2014/main" id="{3CE7BB7C-FFCE-FE42-8839-088530B24FBB}"/>
+              </a:ext>
+            </a:extLst>
+          </p:cNvPr>
+          <p:cNvSpPr/>
+          <p:nvPr/>
+        </p:nvSpPr>
+        <p:spPr>
+          <a:xfrm>
+            <a:off x="6387732" y="4131336"/>
+            <a:ext cx="1139438" cy="451511"/>
+          </a:xfrm>
+          <a:prstGeom prst="roundRect">
+            <a:avLst>
+              <a:gd name="adj" fmla="val 14105"/>
+            </a:avLst>
+          </a:prstGeom>
+          <a:noFill/>
+          <a:ln w="12700">
+            <a:headEnd type="none" w="med" len="med"/>
+            <a:tailEnd type="triangle" w="med" len="med"/>
+          </a:ln>
+        </p:spPr>
+        <p:style>
+          <a:lnRef idx="2">
+            <a:schemeClr val="dk1"/>
+          </a:lnRef>
+          <a:fillRef idx="1">
+            <a:schemeClr val="lt1"/>
+          </a:fillRef>
+          <a:effectRef idx="0">
+            <a:schemeClr val="dk1"/>
+          </a:effectRef>
+          <a:fontRef idx="minor">
+            <a:schemeClr val="dk1"/>
+          </a:fontRef>
+        </p:style>
+        <p:txBody>
+          <a:bodyPr rtlCol="0" anchor="ctr"/>
+          <a:lstStyle/>
+          <a:p>
+            <a:pPr algn="ctr"/>
+            <a:r>
+              <a:rPr lang="en-US" altLang="ko-KR" sz="900"/>
+              <a:t>Server Version 2 </a:t>
+            </a:r>
+            <a:r>
+              <a:rPr lang="en-US" altLang="ko-KR" sz="900" b="1" dirty="0"/>
+              <a:t>Deployment</a:t>
+            </a:r>
+            <a:endParaRPr lang="ko-KR" altLang="en-US" sz="900" b="1" dirty="0"/>
+          </a:p>
+        </p:txBody>
+      </p:sp>
+      <p:cxnSp>
+        <p:nvCxnSpPr>
+          <p:cNvPr id="70" name="직선 화살표 연결선 96">
+            <a:extLst>
+              <a:ext uri="{FF2B5EF4-FFF2-40B4-BE49-F238E27FC236}">
+                <a16:creationId xmlns:a16="http://schemas.microsoft.com/office/drawing/2014/main" id="{171DC11F-D350-D02D-7EE0-019C844D63D6}"/>
+              </a:ext>
+            </a:extLst>
+          </p:cNvPr>
+          <p:cNvCxnSpPr>
+            <a:cxnSpLocks/>
+            <a:stCxn id="61" idx="3"/>
+            <a:endCxn id="17" idx="2"/>
+          </p:cNvCxnSpPr>
+          <p:nvPr/>
+        </p:nvCxnSpPr>
+        <p:spPr>
+          <a:xfrm flipV="1">
+            <a:off x="2658059" y="1789929"/>
+            <a:ext cx="1212153" cy="1957977"/>
+          </a:xfrm>
+          <a:prstGeom prst="straightConnector1">
+            <a:avLst/>
+          </a:prstGeom>
+          <a:ln w="12700">
+            <a:solidFill>
+              <a:schemeClr val="tx2"/>
+            </a:solidFill>
+            <a:prstDash val="solid"/>
+            <a:headEnd type="none" w="med" len="med"/>
+            <a:tailEnd type="triangle" w="med" len="med"/>
+          </a:ln>
+        </p:spPr>
+        <p:style>
+          <a:lnRef idx="1">
+            <a:schemeClr val="accent1"/>
+          </a:lnRef>
+          <a:fillRef idx="0">
+            <a:schemeClr val="accent1"/>
+          </a:fillRef>
+          <a:effectRef idx="0">
+            <a:schemeClr val="accent1"/>
+          </a:effectRef>
+          <a:fontRef idx="minor">
+            <a:schemeClr val="tx1"/>
+          </a:fontRef>
+        </p:style>
+      </p:cxnSp>
+      <p:cxnSp>
+        <p:nvCxnSpPr>
+          <p:cNvPr id="73" name="직선 화살표 연결선 96">
+            <a:extLst>
+              <a:ext uri="{FF2B5EF4-FFF2-40B4-BE49-F238E27FC236}">
+                <a16:creationId xmlns:a16="http://schemas.microsoft.com/office/drawing/2014/main" id="{18650D90-A11E-892B-5631-E1720012C291}"/>
+              </a:ext>
+            </a:extLst>
+          </p:cNvPr>
+          <p:cNvCxnSpPr>
+            <a:cxnSpLocks/>
+            <a:stCxn id="61" idx="3"/>
+            <a:endCxn id="58" idx="2"/>
+          </p:cNvCxnSpPr>
+          <p:nvPr/>
+        </p:nvCxnSpPr>
+        <p:spPr>
+          <a:xfrm flipV="1">
+            <a:off x="2658059" y="3184829"/>
+            <a:ext cx="2856866" cy="563077"/>
+          </a:xfrm>
+          <a:prstGeom prst="straightConnector1">
+            <a:avLst/>
+          </a:prstGeom>
+          <a:ln w="12700">
+            <a:solidFill>
+              <a:schemeClr val="accent3"/>
+            </a:solidFill>
+            <a:prstDash val="solid"/>
+            <a:headEnd type="none" w="med" len="med"/>
+            <a:tailEnd type="triangle" w="med" len="med"/>
+          </a:ln>
+        </p:spPr>
+        <p:style>
+          <a:lnRef idx="1">
+            <a:schemeClr val="accent1"/>
+          </a:lnRef>
+          <a:fillRef idx="0">
+            <a:schemeClr val="accent1"/>
+          </a:fillRef>
+          <a:effectRef idx="0">
+            <a:schemeClr val="accent1"/>
+          </a:effectRef>
+          <a:fontRef idx="minor">
+            <a:schemeClr val="tx1"/>
+          </a:fontRef>
+        </p:style>
+      </p:cxnSp>
+      <p:cxnSp>
+        <p:nvCxnSpPr>
+          <p:cNvPr id="76" name="직선 화살표 연결선 96">
+            <a:extLst>
+              <a:ext uri="{FF2B5EF4-FFF2-40B4-BE49-F238E27FC236}">
+                <a16:creationId xmlns:a16="http://schemas.microsoft.com/office/drawing/2014/main" id="{46C43CF7-220F-15AA-08FF-543618E40D49}"/>
+              </a:ext>
+            </a:extLst>
+          </p:cNvPr>
+          <p:cNvCxnSpPr>
+            <a:cxnSpLocks/>
+            <a:stCxn id="61" idx="3"/>
+            <a:endCxn id="64" idx="0"/>
+          </p:cNvCxnSpPr>
+          <p:nvPr/>
+        </p:nvCxnSpPr>
+        <p:spPr>
+          <a:xfrm>
+            <a:off x="2658059" y="3747906"/>
+            <a:ext cx="2854094" cy="386549"/>
+          </a:xfrm>
+          <a:prstGeom prst="straightConnector1">
+            <a:avLst/>
+          </a:prstGeom>
+          <a:ln w="12700">
+            <a:solidFill>
+              <a:schemeClr val="accent3"/>
+            </a:solidFill>
+            <a:prstDash val="solid"/>
+            <a:headEnd type="none" w="med" len="med"/>
+            <a:tailEnd type="triangle" w="med" len="med"/>
+          </a:ln>
+        </p:spPr>
+        <p:style>
+          <a:lnRef idx="1">
+            <a:schemeClr val="accent1"/>
+          </a:lnRef>
+          <a:fillRef idx="0">
+            <a:schemeClr val="accent1"/>
+          </a:fillRef>
+          <a:effectRef idx="0">
+            <a:schemeClr val="accent1"/>
+          </a:effectRef>
+          <a:fontRef idx="minor">
+            <a:schemeClr val="tx1"/>
+          </a:fontRef>
+        </p:style>
+      </p:cxnSp>
+      <p:cxnSp>
+        <p:nvCxnSpPr>
+          <p:cNvPr id="79" name="직선 화살표 연결선 96">
+            <a:extLst>
+              <a:ext uri="{FF2B5EF4-FFF2-40B4-BE49-F238E27FC236}">
+                <a16:creationId xmlns:a16="http://schemas.microsoft.com/office/drawing/2014/main" id="{E80E0A36-7E80-CBBA-6D06-5A91EEFA6793}"/>
+              </a:ext>
+            </a:extLst>
+          </p:cNvPr>
+          <p:cNvCxnSpPr>
+            <a:cxnSpLocks/>
+            <a:stCxn id="12" idx="3"/>
+            <a:endCxn id="17" idx="1"/>
+          </p:cNvCxnSpPr>
+          <p:nvPr/>
+        </p:nvCxnSpPr>
+        <p:spPr>
+          <a:xfrm flipV="1">
+            <a:off x="2658059" y="1564174"/>
+            <a:ext cx="546942" cy="2881182"/>
+          </a:xfrm>
+          <a:prstGeom prst="straightConnector1">
+            <a:avLst/>
+          </a:prstGeom>
+          <a:ln w="12700">
+            <a:solidFill>
+              <a:schemeClr val="accent6"/>
+            </a:solidFill>
+            <a:prstDash val="solid"/>
+            <a:headEnd type="none" w="med" len="med"/>
+            <a:tailEnd type="triangle" w="med" len="med"/>
+          </a:ln>
+        </p:spPr>
+        <p:style>
+          <a:lnRef idx="1">
+            <a:schemeClr val="accent1"/>
+          </a:lnRef>
+          <a:fillRef idx="0">
+            <a:schemeClr val="accent1"/>
+          </a:fillRef>
+          <a:effectRef idx="0">
+            <a:schemeClr val="accent1"/>
+          </a:effectRef>
+          <a:fontRef idx="minor">
+            <a:schemeClr val="tx1"/>
+          </a:fontRef>
+        </p:style>
+      </p:cxnSp>
+      <p:cxnSp>
+        <p:nvCxnSpPr>
+          <p:cNvPr id="85" name="직선 화살표 연결선 96">
+            <a:extLst>
+              <a:ext uri="{FF2B5EF4-FFF2-40B4-BE49-F238E27FC236}">
+                <a16:creationId xmlns:a16="http://schemas.microsoft.com/office/drawing/2014/main" id="{B737D1FB-3BF4-5850-FE9C-E9E78BCEE349}"/>
+              </a:ext>
+            </a:extLst>
+          </p:cNvPr>
+          <p:cNvCxnSpPr>
+            <a:cxnSpLocks/>
+            <a:stCxn id="64" idx="3"/>
+            <a:endCxn id="65" idx="1"/>
+          </p:cNvCxnSpPr>
+          <p:nvPr/>
+        </p:nvCxnSpPr>
+        <p:spPr>
+          <a:xfrm>
+            <a:off x="6064418" y="4357092"/>
+            <a:ext cx="323314" cy="0"/>
+          </a:xfrm>
+          <a:prstGeom prst="straightConnector1">
+            <a:avLst/>
+          </a:prstGeom>
+          <a:ln w="12700">
+            <a:solidFill>
+              <a:schemeClr val="accent6"/>
+            </a:solidFill>
+            <a:prstDash val="solid"/>
+            <a:headEnd type="none" w="med" len="med"/>
+            <a:tailEnd type="triangle" w="med" len="med"/>
+          </a:ln>
+        </p:spPr>
+        <p:style>
+          <a:lnRef idx="1">
+            <a:schemeClr val="accent1"/>
+          </a:lnRef>
+          <a:fillRef idx="0">
+            <a:schemeClr val="accent1"/>
+          </a:fillRef>
+          <a:effectRef idx="0">
+            <a:schemeClr val="accent1"/>
+          </a:effectRef>
+          <a:fontRef idx="minor">
+            <a:schemeClr val="tx1"/>
+          </a:fontRef>
+        </p:style>
+      </p:cxnSp>
+      <p:cxnSp>
+        <p:nvCxnSpPr>
+          <p:cNvPr id="88" name="직선 화살표 연결선 96">
+            <a:extLst>
+              <a:ext uri="{FF2B5EF4-FFF2-40B4-BE49-F238E27FC236}">
+                <a16:creationId xmlns:a16="http://schemas.microsoft.com/office/drawing/2014/main" id="{15C499C8-E496-2B72-6482-183811BA8AA7}"/>
+              </a:ext>
+            </a:extLst>
+          </p:cNvPr>
+          <p:cNvCxnSpPr>
+            <a:cxnSpLocks/>
+            <a:stCxn id="58" idx="3"/>
+            <a:endCxn id="59" idx="1"/>
+          </p:cNvCxnSpPr>
+          <p:nvPr/>
+        </p:nvCxnSpPr>
+        <p:spPr>
+          <a:xfrm>
+            <a:off x="6067190" y="2962192"/>
+            <a:ext cx="323314" cy="0"/>
+          </a:xfrm>
+          <a:prstGeom prst="straightConnector1">
+            <a:avLst/>
+          </a:prstGeom>
+          <a:ln w="12700">
+            <a:solidFill>
+              <a:schemeClr val="accent6"/>
+            </a:solidFill>
+            <a:prstDash val="solid"/>
+            <a:headEnd type="none" w="med" len="med"/>
+            <a:tailEnd type="triangle" w="med" len="med"/>
+          </a:ln>
+        </p:spPr>
+        <p:style>
+          <a:lnRef idx="1">
+            <a:schemeClr val="accent1"/>
+          </a:lnRef>
+          <a:fillRef idx="0">
+            <a:schemeClr val="accent1"/>
+          </a:fillRef>
+          <a:effectRef idx="0">
+            <a:schemeClr val="accent1"/>
+          </a:effectRef>
+          <a:fontRef idx="minor">
+            <a:schemeClr val="tx1"/>
+          </a:fontRef>
+        </p:style>
+      </p:cxnSp>
+      <p:cxnSp>
+        <p:nvCxnSpPr>
+          <p:cNvPr id="91" name="직선 화살표 연결선 96">
+            <a:extLst>
+              <a:ext uri="{FF2B5EF4-FFF2-40B4-BE49-F238E27FC236}">
+                <a16:creationId xmlns:a16="http://schemas.microsoft.com/office/drawing/2014/main" id="{BF4D4D71-B205-064A-8FB5-C4C6AD7B21A5}"/>
+              </a:ext>
+            </a:extLst>
+          </p:cNvPr>
+          <p:cNvCxnSpPr>
+            <a:cxnSpLocks/>
+            <a:stCxn id="11" idx="3"/>
+            <a:endCxn id="17" idx="1"/>
+          </p:cNvCxnSpPr>
+          <p:nvPr/>
+        </p:nvCxnSpPr>
+        <p:spPr>
+          <a:xfrm flipV="1">
+            <a:off x="2658059" y="1564174"/>
+            <a:ext cx="546942" cy="182964"/>
+          </a:xfrm>
+          <a:prstGeom prst="straightConnector1">
+            <a:avLst/>
+          </a:prstGeom>
+          <a:ln w="12700">
+            <a:solidFill>
+              <a:srgbClr val="C00000"/>
+            </a:solidFill>
+            <a:prstDash val="solid"/>
+            <a:headEnd type="none" w="med" len="med"/>
+            <a:tailEnd type="triangle" w="med" len="med"/>
+          </a:ln>
+        </p:spPr>
+        <p:style>
+          <a:lnRef idx="1">
+            <a:schemeClr val="accent1"/>
+          </a:lnRef>
+          <a:fillRef idx="0">
+            <a:schemeClr val="accent1"/>
+          </a:fillRef>
+          <a:effectRef idx="0">
+            <a:schemeClr val="accent1"/>
+          </a:effectRef>
+          <a:fontRef idx="minor">
+            <a:schemeClr val="tx1"/>
+          </a:fontRef>
+        </p:style>
+      </p:cxnSp>
+      <p:cxnSp>
+        <p:nvCxnSpPr>
+          <p:cNvPr id="95" name="직선 화살표 연결선 96">
+            <a:extLst>
+              <a:ext uri="{FF2B5EF4-FFF2-40B4-BE49-F238E27FC236}">
+                <a16:creationId xmlns:a16="http://schemas.microsoft.com/office/drawing/2014/main" id="{676F0D0D-3694-1E28-3124-25EC96D1DE95}"/>
+              </a:ext>
+            </a:extLst>
+          </p:cNvPr>
+          <p:cNvCxnSpPr>
+            <a:cxnSpLocks/>
+            <a:stCxn id="19" idx="3"/>
+            <a:endCxn id="21" idx="1"/>
+          </p:cNvCxnSpPr>
+          <p:nvPr/>
+        </p:nvCxnSpPr>
+        <p:spPr>
+          <a:xfrm flipV="1">
+            <a:off x="6067190" y="1566597"/>
+            <a:ext cx="323314" cy="695"/>
+          </a:xfrm>
+          <a:prstGeom prst="straightConnector1">
+            <a:avLst/>
+          </a:prstGeom>
+          <a:ln w="12700">
+            <a:solidFill>
+              <a:srgbClr val="C00000"/>
+            </a:solidFill>
+            <a:prstDash val="solid"/>
+            <a:headEnd type="none" w="med" len="med"/>
+            <a:tailEnd type="triangle" w="med" len="med"/>
+          </a:ln>
+        </p:spPr>
+        <p:style>
+          <a:lnRef idx="1">
+            <a:schemeClr val="accent1"/>
+          </a:lnRef>
+          <a:fillRef idx="0">
+            <a:schemeClr val="accent1"/>
+          </a:fillRef>
+          <a:effectRef idx="0">
+            <a:schemeClr val="accent1"/>
+          </a:effectRef>
+          <a:fontRef idx="minor">
+            <a:schemeClr val="tx1"/>
+          </a:fontRef>
+        </p:style>
+      </p:cxnSp>
+      <p:sp>
+        <p:nvSpPr>
+          <p:cNvPr id="111" name="사각형: 둥근 모서리 70">
+            <a:extLst>
+              <a:ext uri="{FF2B5EF4-FFF2-40B4-BE49-F238E27FC236}">
+                <a16:creationId xmlns:a16="http://schemas.microsoft.com/office/drawing/2014/main" id="{6C1FA1E0-95DB-0182-7531-5D89E773D3FE}"/>
+              </a:ext>
+            </a:extLst>
+          </p:cNvPr>
+          <p:cNvSpPr/>
+          <p:nvPr/>
+        </p:nvSpPr>
+        <p:spPr>
+          <a:xfrm>
+            <a:off x="971599" y="2177255"/>
+            <a:ext cx="1800200" cy="892274"/>
+          </a:xfrm>
+          <a:prstGeom prst="roundRect">
+            <a:avLst>
+              <a:gd name="adj" fmla="val 8056"/>
+            </a:avLst>
+          </a:prstGeom>
+          <a:noFill/>
+          <a:ln w="12700">
+            <a:prstDash val="solid"/>
+            <a:headEnd type="none" w="med" len="med"/>
+            <a:tailEnd type="triangle" w="med" len="med"/>
+          </a:ln>
+        </p:spPr>
+        <p:style>
+          <a:lnRef idx="2">
+            <a:schemeClr val="dk1"/>
+          </a:lnRef>
+          <a:fillRef idx="1">
+            <a:schemeClr val="lt1"/>
+          </a:fillRef>
+          <a:effectRef idx="0">
+            <a:schemeClr val="dk1"/>
+          </a:effectRef>
+          <a:fontRef idx="minor">
+            <a:schemeClr val="dk1"/>
+          </a:fontRef>
+        </p:style>
+        <p:txBody>
+          <a:bodyPr rtlCol="0" anchor="t"/>
+          <a:lstStyle/>
+          <a:p>
+            <a:r>
+              <a:rPr lang="en-US" altLang="ko-KR" sz="1000" dirty="0"/>
+              <a:t>Client B </a:t>
+            </a:r>
+            <a:r>
+              <a:rPr lang="en-US" altLang="ko-KR" sz="1000" b="1" dirty="0"/>
+              <a:t>Namespace</a:t>
+            </a:r>
+            <a:endParaRPr lang="ko-KR" altLang="en-US" sz="1000" b="1" dirty="0"/>
+          </a:p>
+        </p:txBody>
+      </p:sp>
+      <p:sp>
+        <p:nvSpPr>
+          <p:cNvPr id="112" name="사각형: 둥근 모서리 12">
+            <a:extLst>
+              <a:ext uri="{FF2B5EF4-FFF2-40B4-BE49-F238E27FC236}">
+                <a16:creationId xmlns:a16="http://schemas.microsoft.com/office/drawing/2014/main" id="{9526F2B0-8072-F39E-BC22-0102C45506DF}"/>
+              </a:ext>
+            </a:extLst>
+          </p:cNvPr>
+          <p:cNvSpPr/>
+          <p:nvPr/>
+        </p:nvSpPr>
+        <p:spPr>
+          <a:xfrm>
+            <a:off x="1518621" y="2518078"/>
+            <a:ext cx="1139438" cy="451511"/>
+          </a:xfrm>
+          <a:prstGeom prst="roundRect">
+            <a:avLst>
+              <a:gd name="adj" fmla="val 14105"/>
+            </a:avLst>
+          </a:prstGeom>
+          <a:noFill/>
+          <a:ln w="12700">
+            <a:headEnd type="none" w="med" len="med"/>
+            <a:tailEnd type="triangle" w="med" len="med"/>
+          </a:ln>
+        </p:spPr>
+        <p:style>
+          <a:lnRef idx="2">
+            <a:schemeClr val="dk1"/>
+          </a:lnRef>
+          <a:fillRef idx="1">
+            <a:schemeClr val="lt1"/>
+          </a:fillRef>
+          <a:effectRef idx="0">
+            <a:schemeClr val="dk1"/>
+          </a:effectRef>
+          <a:fontRef idx="minor">
+            <a:schemeClr val="dk1"/>
+          </a:fontRef>
+        </p:style>
+        <p:txBody>
+          <a:bodyPr rtlCol="0" anchor="ctr"/>
+          <a:lstStyle/>
+          <a:p>
+            <a:pPr algn="ctr"/>
+            <a:r>
+              <a:rPr lang="en-US" altLang="ko-KR" sz="900"/>
+              <a:t>Client B </a:t>
+            </a:r>
+            <a:r>
+              <a:rPr lang="en-US" altLang="ko-KR" sz="900" b="1" dirty="0"/>
+              <a:t>Pod</a:t>
+            </a:r>
+            <a:endParaRPr lang="ko-KR" altLang="en-US" sz="900" b="1" dirty="0"/>
+          </a:p>
+        </p:txBody>
+      </p:sp>
+      <p:sp>
+        <p:nvSpPr>
+          <p:cNvPr id="122" name="사각형: 둥근 모서리 12">
+            <a:extLst>
+              <a:ext uri="{FF2B5EF4-FFF2-40B4-BE49-F238E27FC236}">
+                <a16:creationId xmlns:a16="http://schemas.microsoft.com/office/drawing/2014/main" id="{1ADC1D98-34C0-2847-2872-D42ADD503C0F}"/>
+              </a:ext>
+            </a:extLst>
+          </p:cNvPr>
+          <p:cNvSpPr/>
+          <p:nvPr/>
+        </p:nvSpPr>
+        <p:spPr>
+          <a:xfrm>
+            <a:off x="4942434" y="452758"/>
+            <a:ext cx="1139438" cy="451511"/>
+          </a:xfrm>
+          <a:prstGeom prst="roundRect">
+            <a:avLst>
+              <a:gd name="adj" fmla="val 14105"/>
+            </a:avLst>
+          </a:prstGeom>
+          <a:solidFill>
+            <a:schemeClr val="bg1">
+              <a:lumMod val="95000"/>
+            </a:schemeClr>
+          </a:solidFill>
+          <a:ln w="12700">
+            <a:headEnd type="none" w="med" len="med"/>
+            <a:tailEnd type="triangle" w="med" len="med"/>
+          </a:ln>
+        </p:spPr>
+        <p:style>
+          <a:lnRef idx="2">
+            <a:schemeClr val="dk1"/>
+          </a:lnRef>
+          <a:fillRef idx="1">
+            <a:schemeClr val="lt1"/>
+          </a:fillRef>
+          <a:effectRef idx="0">
+            <a:schemeClr val="dk1"/>
+          </a:effectRef>
+          <a:fontRef idx="minor">
+            <a:schemeClr val="dk1"/>
+          </a:fontRef>
+        </p:style>
+        <p:txBody>
+          <a:bodyPr rtlCol="0" anchor="ctr"/>
+          <a:lstStyle/>
+          <a:p>
+            <a:pPr algn="ctr"/>
+            <a:r>
+              <a:rPr lang="en-US" altLang="ko-KR" sz="900"/>
+              <a:t>Server</a:t>
+            </a:r>
+          </a:p>
+          <a:p>
+            <a:pPr algn="ctr"/>
+            <a:r>
+              <a:rPr lang="en-US" altLang="ko-KR" sz="900" b="1"/>
+              <a:t>HTTPRoute</a:t>
+            </a:r>
+          </a:p>
+          <a:p>
+            <a:pPr algn="ctr"/>
+            <a:r>
+              <a:rPr lang="en-US" altLang="ko-KR" sz="900" b="1"/>
+              <a:t>(Producer)</a:t>
+            </a:r>
+          </a:p>
+        </p:txBody>
+      </p:sp>
+      <p:cxnSp>
+        <p:nvCxnSpPr>
+          <p:cNvPr id="125" name="직선 화살표 연결선 96">
+            <a:extLst>
+              <a:ext uri="{FF2B5EF4-FFF2-40B4-BE49-F238E27FC236}">
+                <a16:creationId xmlns:a16="http://schemas.microsoft.com/office/drawing/2014/main" id="{38C12286-4CFF-91D9-C91E-E0FB3C19E1D6}"/>
+              </a:ext>
+            </a:extLst>
+          </p:cNvPr>
+          <p:cNvCxnSpPr>
+            <a:cxnSpLocks/>
+            <a:stCxn id="112" idx="3"/>
+            <a:endCxn id="17" idx="1"/>
+          </p:cNvCxnSpPr>
+          <p:nvPr/>
+        </p:nvCxnSpPr>
+        <p:spPr>
+          <a:xfrm flipV="1">
+            <a:off x="2658059" y="1564174"/>
+            <a:ext cx="546942" cy="1179660"/>
+          </a:xfrm>
+          <a:prstGeom prst="straightConnector1">
+            <a:avLst/>
+          </a:prstGeom>
+          <a:ln w="12700">
+            <a:solidFill>
+              <a:srgbClr val="C00000"/>
+            </a:solidFill>
+            <a:prstDash val="solid"/>
+            <a:headEnd type="none" w="med" len="med"/>
+            <a:tailEnd type="triangle" w="med" len="med"/>
+          </a:ln>
+        </p:spPr>
+        <p:style>
+          <a:lnRef idx="1">
+            <a:schemeClr val="accent1"/>
+          </a:lnRef>
+          <a:fillRef idx="0">
+            <a:schemeClr val="accent1"/>
+          </a:fillRef>
+          <a:effectRef idx="0">
+            <a:schemeClr val="accent1"/>
+          </a:effectRef>
+          <a:fontRef idx="minor">
+            <a:schemeClr val="tx1"/>
+          </a:fontRef>
+        </p:style>
+      </p:cxnSp>
+      <p:cxnSp>
+        <p:nvCxnSpPr>
+          <p:cNvPr id="128" name="직선 화살표 연결선 96">
+            <a:extLst>
+              <a:ext uri="{FF2B5EF4-FFF2-40B4-BE49-F238E27FC236}">
+                <a16:creationId xmlns:a16="http://schemas.microsoft.com/office/drawing/2014/main" id="{AD76CA5E-CCE6-7B6C-1F46-C8D5639B30A0}"/>
+              </a:ext>
+            </a:extLst>
+          </p:cNvPr>
+          <p:cNvCxnSpPr>
+            <a:cxnSpLocks/>
+            <a:stCxn id="17" idx="3"/>
+            <a:endCxn id="19" idx="1"/>
+          </p:cNvCxnSpPr>
+          <p:nvPr/>
+        </p:nvCxnSpPr>
+        <p:spPr>
+          <a:xfrm>
+            <a:off x="4535423" y="1564174"/>
+            <a:ext cx="427237" cy="3118"/>
+          </a:xfrm>
+          <a:prstGeom prst="straightConnector1">
+            <a:avLst/>
+          </a:prstGeom>
+          <a:ln w="12700">
+            <a:solidFill>
+              <a:srgbClr val="C00000"/>
+            </a:solidFill>
+            <a:prstDash val="solid"/>
+            <a:headEnd type="none" w="med" len="med"/>
+            <a:tailEnd type="triangle" w="med" len="med"/>
+          </a:ln>
+        </p:spPr>
+        <p:style>
+          <a:lnRef idx="1">
+            <a:schemeClr val="accent1"/>
+          </a:lnRef>
+          <a:fillRef idx="0">
+            <a:schemeClr val="accent1"/>
+          </a:fillRef>
+          <a:effectRef idx="0">
+            <a:schemeClr val="accent1"/>
+          </a:effectRef>
+          <a:fontRef idx="minor">
+            <a:schemeClr val="tx1"/>
+          </a:fontRef>
+        </p:style>
+      </p:cxnSp>
+      <p:cxnSp>
+        <p:nvCxnSpPr>
+          <p:cNvPr id="144" name="직선 화살표 연결선 96">
+            <a:extLst>
+              <a:ext uri="{FF2B5EF4-FFF2-40B4-BE49-F238E27FC236}">
+                <a16:creationId xmlns:a16="http://schemas.microsoft.com/office/drawing/2014/main" id="{3A8CDCA5-7507-E2A2-F8CC-BED93937AC1B}"/>
+              </a:ext>
+            </a:extLst>
+          </p:cNvPr>
+          <p:cNvCxnSpPr>
+            <a:cxnSpLocks/>
+            <a:stCxn id="17" idx="3"/>
+            <a:endCxn id="58" idx="1"/>
+          </p:cNvCxnSpPr>
+          <p:nvPr/>
+        </p:nvCxnSpPr>
+        <p:spPr>
+          <a:xfrm>
+            <a:off x="4535423" y="1564174"/>
+            <a:ext cx="427237" cy="1398018"/>
+          </a:xfrm>
+          <a:prstGeom prst="straightConnector1">
+            <a:avLst/>
+          </a:prstGeom>
+          <a:ln w="12700">
+            <a:solidFill>
+              <a:schemeClr val="accent6"/>
+            </a:solidFill>
+            <a:prstDash val="solid"/>
+            <a:headEnd type="none" w="med" len="med"/>
+            <a:tailEnd type="triangle" w="med" len="med"/>
+          </a:ln>
+        </p:spPr>
+        <p:style>
+          <a:lnRef idx="1">
+            <a:schemeClr val="accent1"/>
+          </a:lnRef>
+          <a:fillRef idx="0">
+            <a:schemeClr val="accent1"/>
+          </a:fillRef>
+          <a:effectRef idx="0">
+            <a:schemeClr val="accent1"/>
+          </a:effectRef>
+          <a:fontRef idx="minor">
+            <a:schemeClr val="tx1"/>
+          </a:fontRef>
+        </p:style>
+      </p:cxnSp>
+      <p:cxnSp>
+        <p:nvCxnSpPr>
+          <p:cNvPr id="147" name="직선 화살표 연결선 96">
+            <a:extLst>
+              <a:ext uri="{FF2B5EF4-FFF2-40B4-BE49-F238E27FC236}">
+                <a16:creationId xmlns:a16="http://schemas.microsoft.com/office/drawing/2014/main" id="{4322B416-9C24-DBFE-A77D-0B8A78CED9E6}"/>
+              </a:ext>
+            </a:extLst>
+          </p:cNvPr>
+          <p:cNvCxnSpPr>
+            <a:cxnSpLocks/>
+            <a:stCxn id="17" idx="3"/>
+            <a:endCxn id="64" idx="1"/>
+          </p:cNvCxnSpPr>
+          <p:nvPr/>
+        </p:nvCxnSpPr>
+        <p:spPr>
+          <a:xfrm>
+            <a:off x="4535423" y="1564174"/>
+            <a:ext cx="424465" cy="2792918"/>
+          </a:xfrm>
+          <a:prstGeom prst="straightConnector1">
+            <a:avLst/>
+          </a:prstGeom>
+          <a:ln w="12700">
+            <a:solidFill>
+              <a:schemeClr val="accent6"/>
+            </a:solidFill>
+            <a:prstDash val="solid"/>
+            <a:headEnd type="none" w="med" len="med"/>
+            <a:tailEnd type="triangle" w="med" len="med"/>
+          </a:ln>
+        </p:spPr>
+        <p:style>
+          <a:lnRef idx="1">
+            <a:schemeClr val="accent1"/>
+          </a:lnRef>
+          <a:fillRef idx="0">
+            <a:schemeClr val="accent1"/>
+          </a:fillRef>
+          <a:effectRef idx="0">
+            <a:schemeClr val="accent1"/>
+          </a:effectRef>
+          <a:fontRef idx="minor">
+            <a:schemeClr val="tx1"/>
+          </a:fontRef>
+        </p:style>
+      </p:cxnSp>
+      <p:cxnSp>
+        <p:nvCxnSpPr>
+          <p:cNvPr id="193" name="직선 화살표 연결선 96">
+            <a:extLst>
+              <a:ext uri="{FF2B5EF4-FFF2-40B4-BE49-F238E27FC236}">
+                <a16:creationId xmlns:a16="http://schemas.microsoft.com/office/drawing/2014/main" id="{D296070E-7C3A-1FE5-6B0B-1566B0F18AD3}"/>
+              </a:ext>
+            </a:extLst>
+          </p:cNvPr>
+          <p:cNvCxnSpPr>
+            <a:cxnSpLocks/>
+          </p:cNvCxnSpPr>
+          <p:nvPr/>
+        </p:nvCxnSpPr>
+        <p:spPr>
+          <a:xfrm>
+            <a:off x="994672" y="656760"/>
+            <a:ext cx="323569" cy="0"/>
+          </a:xfrm>
+          <a:prstGeom prst="straightConnector1">
+            <a:avLst/>
+          </a:prstGeom>
+          <a:ln w="12700">
+            <a:solidFill>
+              <a:schemeClr val="tx2"/>
+            </a:solidFill>
+            <a:prstDash val="solid"/>
+            <a:headEnd type="none" w="med" len="med"/>
+            <a:tailEnd type="triangle" w="med" len="med"/>
+          </a:ln>
+        </p:spPr>
+        <p:style>
+          <a:lnRef idx="1">
+            <a:schemeClr val="accent1"/>
+          </a:lnRef>
+          <a:fillRef idx="0">
+            <a:schemeClr val="accent1"/>
+          </a:fillRef>
+          <a:effectRef idx="0">
+            <a:schemeClr val="accent1"/>
+          </a:effectRef>
+          <a:fontRef idx="minor">
+            <a:schemeClr val="tx1"/>
+          </a:fontRef>
+        </p:style>
+      </p:cxnSp>
+      <p:sp>
+        <p:nvSpPr>
+          <p:cNvPr id="194" name="TextBox 193">
+            <a:extLst>
+              <a:ext uri="{FF2B5EF4-FFF2-40B4-BE49-F238E27FC236}">
+                <a16:creationId xmlns:a16="http://schemas.microsoft.com/office/drawing/2014/main" id="{A7640699-CF9A-AB9C-9C92-280D8A010701}"/>
+              </a:ext>
+            </a:extLst>
+          </p:cNvPr>
+          <p:cNvSpPr txBox="1"/>
+          <p:nvPr/>
+        </p:nvSpPr>
+        <p:spPr>
+          <a:xfrm>
+            <a:off x="1290415" y="462747"/>
+            <a:ext cx="702455" cy="369332"/>
+          </a:xfrm>
+          <a:prstGeom prst="rect">
+            <a:avLst/>
+          </a:prstGeom>
+          <a:noFill/>
+        </p:spPr>
+        <p:txBody>
+          <a:bodyPr wrap="square" rtlCol="0">
+            <a:spAutoFit/>
+          </a:bodyPr>
+          <a:lstStyle/>
+          <a:p>
+            <a:r>
+              <a:rPr lang="en-US" sz="900"/>
+              <a:t>Frontend</a:t>
+            </a:r>
+          </a:p>
+          <a:p>
+            <a:r>
+              <a:rPr lang="en-US" sz="900"/>
+              <a:t>Reference</a:t>
+            </a:r>
+            <a:endParaRPr lang="en-KR" sz="900"/>
+          </a:p>
+        </p:txBody>
+      </p:sp>
+      <p:sp>
+        <p:nvSpPr>
+          <p:cNvPr id="198" name="TextBox 197">
+            <a:extLst>
+              <a:ext uri="{FF2B5EF4-FFF2-40B4-BE49-F238E27FC236}">
+                <a16:creationId xmlns:a16="http://schemas.microsoft.com/office/drawing/2014/main" id="{B39A48E2-3C1C-4202-616A-5E5A742A7B1E}"/>
+              </a:ext>
+            </a:extLst>
+          </p:cNvPr>
+          <p:cNvSpPr txBox="1"/>
+          <p:nvPr/>
+        </p:nvSpPr>
+        <p:spPr>
+          <a:xfrm>
+            <a:off x="1289667" y="814806"/>
+            <a:ext cx="726519" cy="369332"/>
+          </a:xfrm>
+          <a:prstGeom prst="rect">
+            <a:avLst/>
+          </a:prstGeom>
+          <a:noFill/>
+        </p:spPr>
+        <p:txBody>
+          <a:bodyPr wrap="square" rtlCol="0">
+            <a:spAutoFit/>
+          </a:bodyPr>
+          <a:lstStyle/>
+          <a:p>
+            <a:r>
+              <a:rPr lang="en-US" sz="900"/>
+              <a:t>Client A/B</a:t>
+            </a:r>
+          </a:p>
+          <a:p>
+            <a:r>
+              <a:rPr lang="en-US" sz="900"/>
+              <a:t>Traffic</a:t>
+            </a:r>
+            <a:endParaRPr lang="en-KR" sz="900"/>
+          </a:p>
+        </p:txBody>
+      </p:sp>
+      <p:cxnSp>
+        <p:nvCxnSpPr>
+          <p:cNvPr id="199" name="직선 화살표 연결선 96">
+            <a:extLst>
+              <a:ext uri="{FF2B5EF4-FFF2-40B4-BE49-F238E27FC236}">
+                <a16:creationId xmlns:a16="http://schemas.microsoft.com/office/drawing/2014/main" id="{C5F7DBFB-8556-894F-9FDE-05D07B94F03E}"/>
+              </a:ext>
+            </a:extLst>
+          </p:cNvPr>
+          <p:cNvCxnSpPr>
+            <a:cxnSpLocks/>
+          </p:cNvCxnSpPr>
+          <p:nvPr/>
+        </p:nvCxnSpPr>
+        <p:spPr>
+          <a:xfrm>
+            <a:off x="1993388" y="662282"/>
+            <a:ext cx="323569" cy="0"/>
+          </a:xfrm>
+          <a:prstGeom prst="straightConnector1">
+            <a:avLst/>
+          </a:prstGeom>
+          <a:ln w="12700">
+            <a:solidFill>
+              <a:schemeClr val="accent3"/>
+            </a:solidFill>
+            <a:prstDash val="solid"/>
+            <a:headEnd type="none" w="med" len="med"/>
+            <a:tailEnd type="triangle" w="med" len="med"/>
+          </a:ln>
+        </p:spPr>
+        <p:style>
+          <a:lnRef idx="1">
+            <a:schemeClr val="accent1"/>
+          </a:lnRef>
+          <a:fillRef idx="0">
+            <a:schemeClr val="accent1"/>
+          </a:fillRef>
+          <a:effectRef idx="0">
+            <a:schemeClr val="accent1"/>
+          </a:effectRef>
+          <a:fontRef idx="minor">
+            <a:schemeClr val="tx1"/>
+          </a:fontRef>
+        </p:style>
+      </p:cxnSp>
+      <p:sp>
+        <p:nvSpPr>
+          <p:cNvPr id="200" name="TextBox 199">
+            <a:extLst>
+              <a:ext uri="{FF2B5EF4-FFF2-40B4-BE49-F238E27FC236}">
+                <a16:creationId xmlns:a16="http://schemas.microsoft.com/office/drawing/2014/main" id="{B3BE3EA0-C5C1-C269-BA06-7264B11180CA}"/>
+              </a:ext>
+            </a:extLst>
+          </p:cNvPr>
+          <p:cNvSpPr txBox="1"/>
+          <p:nvPr/>
+        </p:nvSpPr>
+        <p:spPr>
+          <a:xfrm>
+            <a:off x="2289131" y="468269"/>
+            <a:ext cx="702455" cy="369332"/>
+          </a:xfrm>
+          <a:prstGeom prst="rect">
+            <a:avLst/>
+          </a:prstGeom>
+          <a:noFill/>
+        </p:spPr>
+        <p:txBody>
+          <a:bodyPr wrap="square" rtlCol="0">
+            <a:spAutoFit/>
+          </a:bodyPr>
+          <a:lstStyle/>
+          <a:p>
+            <a:r>
+              <a:rPr lang="en-US" sz="900"/>
+              <a:t>Backend</a:t>
+            </a:r>
+          </a:p>
+          <a:p>
+            <a:r>
+              <a:rPr lang="en-US" sz="900"/>
+              <a:t>Reference</a:t>
+            </a:r>
+            <a:endParaRPr lang="en-KR" sz="900"/>
+          </a:p>
+        </p:txBody>
+      </p:sp>
+      <p:cxnSp>
+        <p:nvCxnSpPr>
+          <p:cNvPr id="201" name="직선 화살표 연결선 96">
+            <a:extLst>
+              <a:ext uri="{FF2B5EF4-FFF2-40B4-BE49-F238E27FC236}">
+                <a16:creationId xmlns:a16="http://schemas.microsoft.com/office/drawing/2014/main" id="{589B1F90-1A88-509E-E319-D9FBB0AE03DA}"/>
+              </a:ext>
+            </a:extLst>
+          </p:cNvPr>
+          <p:cNvCxnSpPr>
+            <a:cxnSpLocks/>
+          </p:cNvCxnSpPr>
+          <p:nvPr/>
+        </p:nvCxnSpPr>
+        <p:spPr>
+          <a:xfrm>
+            <a:off x="993924" y="1000895"/>
+            <a:ext cx="323569" cy="0"/>
+          </a:xfrm>
+          <a:prstGeom prst="straightConnector1">
+            <a:avLst/>
+          </a:prstGeom>
+          <a:ln w="12700">
+            <a:solidFill>
+              <a:srgbClr val="C00000"/>
+            </a:solidFill>
+            <a:prstDash val="solid"/>
+            <a:headEnd type="none" w="med" len="med"/>
+            <a:tailEnd type="triangle" w="med" len="med"/>
+          </a:ln>
+        </p:spPr>
+        <p:style>
+          <a:lnRef idx="1">
+            <a:schemeClr val="accent1"/>
+          </a:lnRef>
+          <a:fillRef idx="0">
+            <a:schemeClr val="accent1"/>
+          </a:fillRef>
+          <a:effectRef idx="0">
+            <a:schemeClr val="accent1"/>
+          </a:effectRef>
+          <a:fontRef idx="minor">
+            <a:schemeClr val="tx1"/>
+          </a:fontRef>
+        </p:style>
+      </p:cxnSp>
+      <p:sp>
+        <p:nvSpPr>
+          <p:cNvPr id="202" name="TextBox 201">
+            <a:extLst>
+              <a:ext uri="{FF2B5EF4-FFF2-40B4-BE49-F238E27FC236}">
+                <a16:creationId xmlns:a16="http://schemas.microsoft.com/office/drawing/2014/main" id="{C81DE8A8-B8A0-3DED-9B23-53BD8D625DDF}"/>
+              </a:ext>
+            </a:extLst>
+          </p:cNvPr>
+          <p:cNvSpPr txBox="1"/>
+          <p:nvPr/>
+        </p:nvSpPr>
+        <p:spPr>
+          <a:xfrm>
+            <a:off x="2292632" y="815618"/>
+            <a:ext cx="726519" cy="369332"/>
+          </a:xfrm>
+          <a:prstGeom prst="rect">
+            <a:avLst/>
+          </a:prstGeom>
+          <a:noFill/>
+        </p:spPr>
+        <p:txBody>
+          <a:bodyPr wrap="square" rtlCol="0">
+            <a:spAutoFit/>
+          </a:bodyPr>
+          <a:lstStyle/>
+          <a:p>
+            <a:r>
+              <a:rPr lang="en-US" sz="900"/>
+              <a:t>Client C</a:t>
+            </a:r>
+          </a:p>
+          <a:p>
+            <a:r>
+              <a:rPr lang="en-US" sz="900"/>
+              <a:t>Traffic</a:t>
+            </a:r>
+            <a:endParaRPr lang="en-KR" sz="900"/>
+          </a:p>
+        </p:txBody>
+      </p:sp>
+      <p:cxnSp>
+        <p:nvCxnSpPr>
+          <p:cNvPr id="203" name="직선 화살표 연결선 96">
+            <a:extLst>
+              <a:ext uri="{FF2B5EF4-FFF2-40B4-BE49-F238E27FC236}">
+                <a16:creationId xmlns:a16="http://schemas.microsoft.com/office/drawing/2014/main" id="{8FF7C769-4649-F53F-C8C3-7701CE6186E9}"/>
+              </a:ext>
+            </a:extLst>
+          </p:cNvPr>
+          <p:cNvCxnSpPr>
+            <a:cxnSpLocks/>
+          </p:cNvCxnSpPr>
+          <p:nvPr/>
+        </p:nvCxnSpPr>
+        <p:spPr>
+          <a:xfrm>
+            <a:off x="1996889" y="1001707"/>
+            <a:ext cx="323569" cy="0"/>
+          </a:xfrm>
+          <a:prstGeom prst="straightConnector1">
+            <a:avLst/>
+          </a:prstGeom>
+          <a:ln w="12700">
+            <a:solidFill>
+              <a:schemeClr val="accent6"/>
+            </a:solidFill>
+            <a:prstDash val="solid"/>
+            <a:headEnd type="none" w="med" len="med"/>
+            <a:tailEnd type="triangle" w="med" len="med"/>
+          </a:ln>
+        </p:spPr>
+        <p:style>
+          <a:lnRef idx="1">
+            <a:schemeClr val="accent1"/>
+          </a:lnRef>
+          <a:fillRef idx="0">
+            <a:schemeClr val="accent1"/>
+          </a:fillRef>
+          <a:effectRef idx="0">
+            <a:schemeClr val="accent1"/>
+          </a:effectRef>
+          <a:fontRef idx="minor">
+            <a:schemeClr val="tx1"/>
+          </a:fontRef>
+        </p:style>
+      </p:cxnSp>
+      <p:sp>
+        <p:nvSpPr>
+          <p:cNvPr id="6" name="사각형: 둥근 모서리 12">
+            <a:extLst>
+              <a:ext uri="{FF2B5EF4-FFF2-40B4-BE49-F238E27FC236}">
+                <a16:creationId xmlns:a16="http://schemas.microsoft.com/office/drawing/2014/main" id="{AEB9499F-7944-70A8-7123-2082202BB41F}"/>
+              </a:ext>
+            </a:extLst>
+          </p:cNvPr>
+          <p:cNvSpPr/>
+          <p:nvPr/>
+        </p:nvSpPr>
+        <p:spPr>
+          <a:xfrm>
+            <a:off x="3297795" y="452758"/>
+            <a:ext cx="1139438" cy="451511"/>
+          </a:xfrm>
+          <a:prstGeom prst="roundRect">
+            <a:avLst>
+              <a:gd name="adj" fmla="val 14105"/>
+            </a:avLst>
+          </a:prstGeom>
+          <a:solidFill>
+            <a:schemeClr val="bg1">
+              <a:lumMod val="95000"/>
+            </a:schemeClr>
+          </a:solidFill>
+          <a:ln w="12700">
+            <a:headEnd type="none" w="med" len="med"/>
+            <a:tailEnd type="triangle" w="med" len="med"/>
+          </a:ln>
+        </p:spPr>
+        <p:style>
+          <a:lnRef idx="2">
+            <a:schemeClr val="dk1"/>
+          </a:lnRef>
+          <a:fillRef idx="1">
+            <a:schemeClr val="lt1"/>
+          </a:fillRef>
+          <a:effectRef idx="0">
+            <a:schemeClr val="dk1"/>
+          </a:effectRef>
+          <a:fontRef idx="minor">
+            <a:schemeClr val="dk1"/>
+          </a:fontRef>
+        </p:style>
+        <p:txBody>
+          <a:bodyPr rtlCol="0" anchor="ctr"/>
+          <a:lstStyle/>
+          <a:p>
+            <a:pPr algn="ctr"/>
+            <a:r>
+              <a:rPr lang="en-US" altLang="ko-KR" sz="900"/>
+              <a:t>Client C</a:t>
+            </a:r>
+          </a:p>
+          <a:p>
+            <a:pPr algn="ctr"/>
+            <a:r>
+              <a:rPr lang="en-US" altLang="ko-KR" sz="900" b="1"/>
+              <a:t>ReferenceGrant</a:t>
+            </a:r>
+          </a:p>
+        </p:txBody>
+      </p:sp>
+      <p:cxnSp>
+        <p:nvCxnSpPr>
+          <p:cNvPr id="20" name="직선 화살표 연결선 96">
+            <a:extLst>
+              <a:ext uri="{FF2B5EF4-FFF2-40B4-BE49-F238E27FC236}">
+                <a16:creationId xmlns:a16="http://schemas.microsoft.com/office/drawing/2014/main" id="{8FB7A4AF-E5CE-F331-5394-820EA6A70C46}"/>
+              </a:ext>
+            </a:extLst>
+          </p:cNvPr>
+          <p:cNvCxnSpPr>
+            <a:cxnSpLocks/>
+            <a:stCxn id="6" idx="3"/>
+            <a:endCxn id="56" idx="0"/>
+          </p:cNvCxnSpPr>
+          <p:nvPr/>
+        </p:nvCxnSpPr>
+        <p:spPr>
+          <a:xfrm>
+            <a:off x="4437233" y="678514"/>
+            <a:ext cx="199024" cy="1773705"/>
+          </a:xfrm>
+          <a:prstGeom prst="straightConnector1">
+            <a:avLst/>
+          </a:prstGeom>
+          <a:ln w="12700">
+            <a:solidFill>
+              <a:schemeClr val="accent5"/>
+            </a:solidFill>
+            <a:prstDash val="solid"/>
+            <a:headEnd type="none" w="med" len="med"/>
+            <a:tailEnd type="triangle" w="med" len="med"/>
+          </a:ln>
+        </p:spPr>
+        <p:style>
+          <a:lnRef idx="1">
+            <a:schemeClr val="accent1"/>
+          </a:lnRef>
+          <a:fillRef idx="0">
+            <a:schemeClr val="accent1"/>
+          </a:fillRef>
+          <a:effectRef idx="0">
+            <a:schemeClr val="accent1"/>
+          </a:effectRef>
+          <a:fontRef idx="minor">
+            <a:schemeClr val="tx1"/>
+          </a:fontRef>
+        </p:style>
+      </p:cxnSp>
+      <p:cxnSp>
+        <p:nvCxnSpPr>
+          <p:cNvPr id="24" name="직선 화살표 연결선 96">
+            <a:extLst>
+              <a:ext uri="{FF2B5EF4-FFF2-40B4-BE49-F238E27FC236}">
+                <a16:creationId xmlns:a16="http://schemas.microsoft.com/office/drawing/2014/main" id="{CB4406E9-65D0-81FA-F87B-D4AE9B4C54A4}"/>
+              </a:ext>
+            </a:extLst>
+          </p:cNvPr>
+          <p:cNvCxnSpPr>
+            <a:cxnSpLocks/>
+            <a:stCxn id="6" idx="1"/>
+            <a:endCxn id="3" idx="0"/>
+          </p:cNvCxnSpPr>
+          <p:nvPr/>
+        </p:nvCxnSpPr>
+        <p:spPr>
+          <a:xfrm flipH="1">
+            <a:off x="1871699" y="678514"/>
+            <a:ext cx="1426096" cy="2495437"/>
+          </a:xfrm>
+          <a:prstGeom prst="straightConnector1">
+            <a:avLst/>
+          </a:prstGeom>
+          <a:ln w="12700">
+            <a:solidFill>
+              <a:schemeClr val="accent5"/>
+            </a:solidFill>
+            <a:prstDash val="solid"/>
+            <a:headEnd type="none" w="med" len="med"/>
+            <a:tailEnd type="triangle" w="med" len="med"/>
+          </a:ln>
+        </p:spPr>
+        <p:style>
+          <a:lnRef idx="1">
+            <a:schemeClr val="accent1"/>
+          </a:lnRef>
+          <a:fillRef idx="0">
+            <a:schemeClr val="accent1"/>
+          </a:fillRef>
+          <a:effectRef idx="0">
+            <a:schemeClr val="accent1"/>
+          </a:effectRef>
+          <a:fontRef idx="minor">
+            <a:schemeClr val="tx1"/>
+          </a:fontRef>
+        </p:style>
+      </p:cxnSp>
+      <p:cxnSp>
+        <p:nvCxnSpPr>
+          <p:cNvPr id="52" name="직선 화살표 연결선 96">
+            <a:extLst>
+              <a:ext uri="{FF2B5EF4-FFF2-40B4-BE49-F238E27FC236}">
+                <a16:creationId xmlns:a16="http://schemas.microsoft.com/office/drawing/2014/main" id="{75F76F39-D386-ABC3-AEFF-201199BEC0E0}"/>
+              </a:ext>
+            </a:extLst>
+          </p:cNvPr>
+          <p:cNvCxnSpPr>
+            <a:cxnSpLocks/>
+          </p:cNvCxnSpPr>
+          <p:nvPr/>
+        </p:nvCxnSpPr>
+        <p:spPr>
+          <a:xfrm>
+            <a:off x="994672" y="331128"/>
+            <a:ext cx="323569" cy="0"/>
+          </a:xfrm>
+          <a:prstGeom prst="straightConnector1">
+            <a:avLst/>
+          </a:prstGeom>
+          <a:ln w="12700">
+            <a:solidFill>
+              <a:schemeClr val="accent5"/>
+            </a:solidFill>
+            <a:prstDash val="solid"/>
+            <a:headEnd type="none" w="med" len="med"/>
+            <a:tailEnd type="triangle" w="med" len="med"/>
+          </a:ln>
+        </p:spPr>
+        <p:style>
+          <a:lnRef idx="1">
+            <a:schemeClr val="accent1"/>
+          </a:lnRef>
+          <a:fillRef idx="0">
+            <a:schemeClr val="accent1"/>
+          </a:fillRef>
+          <a:effectRef idx="0">
+            <a:schemeClr val="accent1"/>
+          </a:effectRef>
+          <a:fontRef idx="minor">
+            <a:schemeClr val="tx1"/>
+          </a:fontRef>
+        </p:style>
+      </p:cxnSp>
+      <p:sp>
+        <p:nvSpPr>
+          <p:cNvPr id="53" name="TextBox 52">
+            <a:extLst>
+              <a:ext uri="{FF2B5EF4-FFF2-40B4-BE49-F238E27FC236}">
+                <a16:creationId xmlns:a16="http://schemas.microsoft.com/office/drawing/2014/main" id="{CEEDB517-CF3F-1108-BEE5-63506F13E2DB}"/>
+              </a:ext>
+            </a:extLst>
+          </p:cNvPr>
+          <p:cNvSpPr txBox="1"/>
+          <p:nvPr/>
+        </p:nvSpPr>
+        <p:spPr>
+          <a:xfrm>
+            <a:off x="1290415" y="137115"/>
+            <a:ext cx="702455" cy="369332"/>
+          </a:xfrm>
+          <a:prstGeom prst="rect">
+            <a:avLst/>
+          </a:prstGeom>
+          <a:noFill/>
+        </p:spPr>
+        <p:txBody>
+          <a:bodyPr wrap="square" rtlCol="0">
+            <a:spAutoFit/>
+          </a:bodyPr>
+          <a:lstStyle/>
+          <a:p>
+            <a:r>
+              <a:rPr lang="en-US" sz="900"/>
+              <a:t>Grant</a:t>
+            </a:r>
+          </a:p>
+          <a:p>
+            <a:r>
+              <a:rPr lang="en-US" sz="900"/>
+              <a:t>Reference</a:t>
+            </a:r>
+            <a:endParaRPr lang="en-KR" sz="900"/>
+          </a:p>
+        </p:txBody>
+      </p:sp>
+      <p:cxnSp>
+        <p:nvCxnSpPr>
+          <p:cNvPr id="10" name="직선 화살표 연결선 96">
+            <a:extLst>
+              <a:ext uri="{FF2B5EF4-FFF2-40B4-BE49-F238E27FC236}">
+                <a16:creationId xmlns:a16="http://schemas.microsoft.com/office/drawing/2014/main" id="{A06C340A-B66D-4254-E8B0-2E3D49004E24}"/>
+              </a:ext>
+            </a:extLst>
+          </p:cNvPr>
+          <p:cNvCxnSpPr>
+            <a:cxnSpLocks/>
+            <a:stCxn id="6" idx="3"/>
+            <a:endCxn id="62" idx="0"/>
+          </p:cNvCxnSpPr>
+          <p:nvPr/>
+        </p:nvCxnSpPr>
+        <p:spPr>
+          <a:xfrm>
+            <a:off x="4437233" y="678514"/>
+            <a:ext cx="196252" cy="3168605"/>
+          </a:xfrm>
+          <a:prstGeom prst="straightConnector1">
+            <a:avLst/>
+          </a:prstGeom>
+          <a:ln w="12700">
+            <a:solidFill>
+              <a:schemeClr val="accent5"/>
+            </a:solidFill>
+            <a:prstDash val="solid"/>
+            <a:headEnd type="none" w="med" len="med"/>
+            <a:tailEnd type="triangle" w="med" len="med"/>
+          </a:ln>
+        </p:spPr>
+        <p:style>
+          <a:lnRef idx="1">
+            <a:schemeClr val="accent1"/>
+          </a:lnRef>
+          <a:fillRef idx="0">
+            <a:schemeClr val="accent1"/>
+          </a:fillRef>
+          <a:effectRef idx="0">
+            <a:schemeClr val="accent1"/>
+          </a:effectRef>
+          <a:fontRef idx="minor">
+            <a:schemeClr val="tx1"/>
+          </a:fontRef>
+        </p:style>
+      </p:cxnSp>
+      <p:sp>
+        <p:nvSpPr>
+          <p:cNvPr id="7" name="사각형: 둥근 모서리 12">
+            <a:extLst>
+              <a:ext uri="{FF2B5EF4-FFF2-40B4-BE49-F238E27FC236}">
+                <a16:creationId xmlns:a16="http://schemas.microsoft.com/office/drawing/2014/main" id="{CEDBA0DE-EEDD-D407-C1AC-B335AA0265D8}"/>
+              </a:ext>
+            </a:extLst>
+          </p:cNvPr>
+          <p:cNvSpPr/>
+          <p:nvPr/>
+        </p:nvSpPr>
+        <p:spPr>
+          <a:xfrm>
+            <a:off x="7821712" y="761059"/>
+            <a:ext cx="1139438" cy="451511"/>
+          </a:xfrm>
+          <a:prstGeom prst="roundRect">
+            <a:avLst>
+              <a:gd name="adj" fmla="val 14105"/>
+            </a:avLst>
+          </a:prstGeom>
+          <a:solidFill>
+            <a:schemeClr val="bg2">
+              <a:lumMod val="90000"/>
+            </a:schemeClr>
+          </a:solidFill>
+          <a:ln w="12700">
+            <a:headEnd type="none" w="med" len="med"/>
+            <a:tailEnd type="triangle" w="med" len="med"/>
+          </a:ln>
+        </p:spPr>
+        <p:style>
+          <a:lnRef idx="2">
+            <a:schemeClr val="dk1"/>
+          </a:lnRef>
+          <a:fillRef idx="1">
+            <a:schemeClr val="lt1"/>
+          </a:fillRef>
+          <a:effectRef idx="0">
+            <a:schemeClr val="dk1"/>
+          </a:effectRef>
+          <a:fontRef idx="minor">
+            <a:schemeClr val="dk1"/>
+          </a:fontRef>
+        </p:style>
+        <p:txBody>
+          <a:bodyPr rtlCol="0" anchor="ctr"/>
+          <a:lstStyle/>
+          <a:p>
+            <a:pPr algn="ctr"/>
+            <a:r>
+              <a:rPr lang="en-US" altLang="ko-KR" sz="900"/>
+              <a:t>Gateway Controller</a:t>
+            </a:r>
+            <a:r>
+              <a:rPr lang="en-US" altLang="ko-KR" sz="900" b="1"/>
+              <a:t> </a:t>
+            </a:r>
+            <a:br>
+              <a:rPr lang="en-US" altLang="ko-KR" sz="900" b="1"/>
+            </a:br>
+            <a:r>
+              <a:rPr lang="en-US" altLang="ko-KR" sz="900" b="1"/>
+              <a:t>Deployment</a:t>
+            </a:r>
+            <a:endParaRPr lang="ko-KR" altLang="en-US" sz="900" b="1" dirty="0"/>
+          </a:p>
+        </p:txBody>
+      </p:sp>
+      <p:sp>
+        <p:nvSpPr>
+          <p:cNvPr id="8" name="사각형: 둥근 모서리 70">
+            <a:extLst>
+              <a:ext uri="{FF2B5EF4-FFF2-40B4-BE49-F238E27FC236}">
+                <a16:creationId xmlns:a16="http://schemas.microsoft.com/office/drawing/2014/main" id="{085F5C34-B86D-A780-CCC6-6D4FFC2045D8}"/>
+              </a:ext>
+            </a:extLst>
+          </p:cNvPr>
+          <p:cNvSpPr/>
+          <p:nvPr/>
+        </p:nvSpPr>
+        <p:spPr>
+          <a:xfrm>
+            <a:off x="7724874" y="358378"/>
+            <a:ext cx="1337932" cy="951484"/>
+          </a:xfrm>
+          <a:prstGeom prst="roundRect">
+            <a:avLst>
+              <a:gd name="adj" fmla="val 7127"/>
+            </a:avLst>
+          </a:prstGeom>
+          <a:noFill/>
+          <a:ln w="12700">
+            <a:prstDash val="solid"/>
+            <a:headEnd type="none" w="med" len="med"/>
+            <a:tailEnd type="triangle" w="med" len="med"/>
+          </a:ln>
+        </p:spPr>
+        <p:style>
+          <a:lnRef idx="2">
+            <a:schemeClr val="dk1"/>
+          </a:lnRef>
+          <a:fillRef idx="1">
+            <a:schemeClr val="lt1"/>
+          </a:fillRef>
+          <a:effectRef idx="0">
+            <a:schemeClr val="dk1"/>
+          </a:effectRef>
+          <a:fontRef idx="minor">
+            <a:schemeClr val="dk1"/>
+          </a:fontRef>
+        </p:style>
+        <p:txBody>
+          <a:bodyPr rtlCol="0" anchor="t"/>
+          <a:lstStyle/>
+          <a:p>
+            <a:r>
+              <a:rPr lang="en-US" altLang="ko-KR" sz="1000" dirty="0"/>
+              <a:t>Controller </a:t>
+            </a:r>
+            <a:r>
+              <a:rPr lang="en-US" altLang="ko-KR" sz="1000" b="1" dirty="0"/>
+              <a:t>Namespace</a:t>
+            </a:r>
+            <a:endParaRPr lang="ko-KR" altLang="en-US" sz="1000" b="1" dirty="0"/>
+          </a:p>
+        </p:txBody>
+      </p:sp>
+    </p:spTree>
+    <p:extLst>
+      <p:ext uri="{BB962C8B-B14F-4D97-AF65-F5344CB8AC3E}">
+        <p14:creationId xmlns:p14="http://schemas.microsoft.com/office/powerpoint/2010/main" val="371339211"/>
+      </p:ext>
+    </p:extLst>
+  </p:cSld>
+  <p:clrMapOvr>
+    <a:masterClrMapping/>
+  </p:clrMapOvr>
+</p:sld>
+</file>
+
+<file path=ppt/slides/slide3.xml><?xml version="1.0" encoding="utf-8"?>
 <p:sld xmlns:a="http://schemas.openxmlformats.org/drawingml/2006/main" xmlns:r="http://schemas.openxmlformats.org/officeDocument/2006/relationships" xmlns:p="http://schemas.openxmlformats.org/presentationml/2006/main">
   <p:cSld>
     <p:spTree>
@@ -6485,7 +9432,2672 @@
 </p:sld>
 </file>
 
-<file path=ppt/slides/slide3.xml><?xml version="1.0" encoding="utf-8"?>
+<file path=ppt/slides/slide4.xml><?xml version="1.0" encoding="utf-8"?>
+<p:sld xmlns:a="http://schemas.openxmlformats.org/drawingml/2006/main" xmlns:r="http://schemas.openxmlformats.org/officeDocument/2006/relationships" xmlns:p="http://schemas.openxmlformats.org/presentationml/2006/main">
+  <p:cSld>
+    <p:spTree>
+      <p:nvGrpSpPr>
+        <p:cNvPr id="1" name="">
+          <a:extLst>
+            <a:ext uri="{FF2B5EF4-FFF2-40B4-BE49-F238E27FC236}">
+              <a16:creationId xmlns:a16="http://schemas.microsoft.com/office/drawing/2014/main" id="{FE606439-ABD8-4A0B-7B97-E4888545BF9B}"/>
+            </a:ext>
+          </a:extLst>
+        </p:cNvPr>
+        <p:cNvGrpSpPr/>
+        <p:nvPr/>
+      </p:nvGrpSpPr>
+      <p:grpSpPr>
+        <a:xfrm>
+          <a:off x="0" y="0"/>
+          <a:ext cx="0" cy="0"/>
+          <a:chOff x="0" y="0"/>
+          <a:chExt cx="0" cy="0"/>
+        </a:xfrm>
+      </p:grpSpPr>
+      <p:sp>
+        <p:nvSpPr>
+          <p:cNvPr id="2" name="사각형: 둥근 모서리 70">
+            <a:extLst>
+              <a:ext uri="{FF2B5EF4-FFF2-40B4-BE49-F238E27FC236}">
+                <a16:creationId xmlns:a16="http://schemas.microsoft.com/office/drawing/2014/main" id="{1E65933F-63C2-6553-8CE8-7CAEAEDBE7BD}"/>
+              </a:ext>
+            </a:extLst>
+          </p:cNvPr>
+          <p:cNvSpPr/>
+          <p:nvPr/>
+        </p:nvSpPr>
+        <p:spPr>
+          <a:xfrm>
+            <a:off x="971599" y="1180559"/>
+            <a:ext cx="1800200" cy="892274"/>
+          </a:xfrm>
+          <a:prstGeom prst="roundRect">
+            <a:avLst>
+              <a:gd name="adj" fmla="val 8056"/>
+            </a:avLst>
+          </a:prstGeom>
+          <a:noFill/>
+          <a:ln w="12700">
+            <a:prstDash val="solid"/>
+            <a:headEnd type="none" w="med" len="med"/>
+            <a:tailEnd type="triangle" w="med" len="med"/>
+          </a:ln>
+        </p:spPr>
+        <p:style>
+          <a:lnRef idx="2">
+            <a:schemeClr val="dk1"/>
+          </a:lnRef>
+          <a:fillRef idx="1">
+            <a:schemeClr val="lt1"/>
+          </a:fillRef>
+          <a:effectRef idx="0">
+            <a:schemeClr val="dk1"/>
+          </a:effectRef>
+          <a:fontRef idx="minor">
+            <a:schemeClr val="dk1"/>
+          </a:fontRef>
+        </p:style>
+        <p:txBody>
+          <a:bodyPr rtlCol="0" anchor="t"/>
+          <a:lstStyle/>
+          <a:p>
+            <a:r>
+              <a:rPr lang="en-US" altLang="ko-KR" sz="1000" dirty="0"/>
+              <a:t>Client A </a:t>
+            </a:r>
+            <a:r>
+              <a:rPr lang="en-US" altLang="ko-KR" sz="1000" b="1" dirty="0"/>
+              <a:t>Namespace</a:t>
+            </a:r>
+            <a:endParaRPr lang="ko-KR" altLang="en-US" sz="1000" b="1" dirty="0"/>
+          </a:p>
+        </p:txBody>
+      </p:sp>
+      <p:sp>
+        <p:nvSpPr>
+          <p:cNvPr id="3" name="사각형: 둥근 모서리 70">
+            <a:extLst>
+              <a:ext uri="{FF2B5EF4-FFF2-40B4-BE49-F238E27FC236}">
+                <a16:creationId xmlns:a16="http://schemas.microsoft.com/office/drawing/2014/main" id="{0B7DF7D0-D4AD-08AC-488A-EAF3C14E1224}"/>
+              </a:ext>
+            </a:extLst>
+          </p:cNvPr>
+          <p:cNvSpPr/>
+          <p:nvPr/>
+        </p:nvSpPr>
+        <p:spPr>
+          <a:xfrm>
+            <a:off x="971599" y="3173951"/>
+            <a:ext cx="1800200" cy="1616906"/>
+          </a:xfrm>
+          <a:prstGeom prst="roundRect">
+            <a:avLst>
+              <a:gd name="adj" fmla="val 5325"/>
+            </a:avLst>
+          </a:prstGeom>
+          <a:noFill/>
+          <a:ln w="12700">
+            <a:prstDash val="solid"/>
+            <a:headEnd type="none" w="med" len="med"/>
+            <a:tailEnd type="triangle" w="med" len="med"/>
+          </a:ln>
+        </p:spPr>
+        <p:style>
+          <a:lnRef idx="2">
+            <a:schemeClr val="dk1"/>
+          </a:lnRef>
+          <a:fillRef idx="1">
+            <a:schemeClr val="lt1"/>
+          </a:fillRef>
+          <a:effectRef idx="0">
+            <a:schemeClr val="dk1"/>
+          </a:effectRef>
+          <a:fontRef idx="minor">
+            <a:schemeClr val="dk1"/>
+          </a:fontRef>
+        </p:style>
+        <p:txBody>
+          <a:bodyPr rtlCol="0" anchor="t"/>
+          <a:lstStyle/>
+          <a:p>
+            <a:r>
+              <a:rPr lang="en-US" altLang="ko-KR" sz="1000" dirty="0"/>
+              <a:t>Client C </a:t>
+            </a:r>
+            <a:r>
+              <a:rPr lang="en-US" altLang="ko-KR" sz="1000" b="1" dirty="0"/>
+              <a:t>Namespace</a:t>
+            </a:r>
+            <a:endParaRPr lang="ko-KR" altLang="en-US" sz="1000" b="1" dirty="0"/>
+          </a:p>
+        </p:txBody>
+      </p:sp>
+      <p:sp>
+        <p:nvSpPr>
+          <p:cNvPr id="4" name="사각형: 둥근 모서리 70">
+            <a:extLst>
+              <a:ext uri="{FF2B5EF4-FFF2-40B4-BE49-F238E27FC236}">
+                <a16:creationId xmlns:a16="http://schemas.microsoft.com/office/drawing/2014/main" id="{63CFC739-0DD2-AF85-F9C3-25640F280C95}"/>
+              </a:ext>
+            </a:extLst>
+          </p:cNvPr>
+          <p:cNvSpPr/>
+          <p:nvPr/>
+        </p:nvSpPr>
+        <p:spPr>
+          <a:xfrm>
+            <a:off x="2987824" y="352643"/>
+            <a:ext cx="4637503" cy="4438214"/>
+          </a:xfrm>
+          <a:prstGeom prst="roundRect">
+            <a:avLst>
+              <a:gd name="adj" fmla="val 2531"/>
+            </a:avLst>
+          </a:prstGeom>
+          <a:noFill/>
+          <a:ln w="12700">
+            <a:prstDash val="solid"/>
+            <a:headEnd type="none" w="med" len="med"/>
+            <a:tailEnd type="triangle" w="med" len="med"/>
+          </a:ln>
+        </p:spPr>
+        <p:style>
+          <a:lnRef idx="2">
+            <a:schemeClr val="dk1"/>
+          </a:lnRef>
+          <a:fillRef idx="1">
+            <a:schemeClr val="lt1"/>
+          </a:fillRef>
+          <a:effectRef idx="0">
+            <a:schemeClr val="dk1"/>
+          </a:effectRef>
+          <a:fontRef idx="minor">
+            <a:schemeClr val="dk1"/>
+          </a:fontRef>
+        </p:style>
+        <p:txBody>
+          <a:bodyPr rtlCol="0" anchor="t"/>
+          <a:lstStyle/>
+          <a:p>
+            <a:pPr algn="r"/>
+            <a:r>
+              <a:rPr lang="en-US" altLang="ko-KR" sz="1000" dirty="0"/>
+              <a:t>Server </a:t>
+            </a:r>
+            <a:r>
+              <a:rPr lang="en-US" altLang="ko-KR" sz="1000" b="1" dirty="0"/>
+              <a:t>Namespace</a:t>
+            </a:r>
+            <a:endParaRPr lang="ko-KR" altLang="en-US" sz="1000" b="1" dirty="0"/>
+          </a:p>
+        </p:txBody>
+      </p:sp>
+      <p:sp>
+        <p:nvSpPr>
+          <p:cNvPr id="5" name="사각형: 둥근 모서리 12">
+            <a:extLst>
+              <a:ext uri="{FF2B5EF4-FFF2-40B4-BE49-F238E27FC236}">
+                <a16:creationId xmlns:a16="http://schemas.microsoft.com/office/drawing/2014/main" id="{8CF7CF04-4294-15E7-066F-E74B5E974310}"/>
+              </a:ext>
+            </a:extLst>
+          </p:cNvPr>
+          <p:cNvSpPr/>
+          <p:nvPr/>
+        </p:nvSpPr>
+        <p:spPr>
+          <a:xfrm>
+            <a:off x="3095263" y="1057319"/>
+            <a:ext cx="3081988" cy="836785"/>
+          </a:xfrm>
+          <a:prstGeom prst="roundRect">
+            <a:avLst>
+              <a:gd name="adj" fmla="val 8995"/>
+            </a:avLst>
+          </a:prstGeom>
+          <a:noFill/>
+          <a:ln w="12700">
+            <a:headEnd type="none" w="med" len="med"/>
+            <a:tailEnd type="triangle" w="med" len="med"/>
+          </a:ln>
+        </p:spPr>
+        <p:style>
+          <a:lnRef idx="2">
+            <a:schemeClr val="dk1"/>
+          </a:lnRef>
+          <a:fillRef idx="1">
+            <a:schemeClr val="lt1"/>
+          </a:fillRef>
+          <a:effectRef idx="0">
+            <a:schemeClr val="dk1"/>
+          </a:effectRef>
+          <a:fontRef idx="minor">
+            <a:schemeClr val="dk1"/>
+          </a:fontRef>
+        </p:style>
+        <p:txBody>
+          <a:bodyPr rtlCol="0" anchor="t"/>
+          <a:lstStyle/>
+          <a:p>
+            <a:pPr algn="ctr"/>
+            <a:r>
+              <a:rPr lang="en-US" altLang="ko-KR" sz="900"/>
+              <a:t>Server </a:t>
+            </a:r>
+            <a:r>
+              <a:rPr lang="en-US" altLang="ko-KR" sz="900" b="1" dirty="0"/>
+              <a:t>Service</a:t>
+            </a:r>
+            <a:endParaRPr lang="ko-KR" altLang="en-US" sz="900" b="1" dirty="0"/>
+          </a:p>
+        </p:txBody>
+      </p:sp>
+      <p:sp>
+        <p:nvSpPr>
+          <p:cNvPr id="11" name="사각형: 둥근 모서리 12">
+            <a:extLst>
+              <a:ext uri="{FF2B5EF4-FFF2-40B4-BE49-F238E27FC236}">
+                <a16:creationId xmlns:a16="http://schemas.microsoft.com/office/drawing/2014/main" id="{7BD3CAFE-D2A1-80CF-0BDE-ADBC463B92E8}"/>
+              </a:ext>
+            </a:extLst>
+          </p:cNvPr>
+          <p:cNvSpPr/>
+          <p:nvPr/>
+        </p:nvSpPr>
+        <p:spPr>
+          <a:xfrm>
+            <a:off x="1518621" y="1521382"/>
+            <a:ext cx="1139438" cy="451511"/>
+          </a:xfrm>
+          <a:prstGeom prst="roundRect">
+            <a:avLst>
+              <a:gd name="adj" fmla="val 14105"/>
+            </a:avLst>
+          </a:prstGeom>
+          <a:noFill/>
+          <a:ln w="12700">
+            <a:headEnd type="none" w="med" len="med"/>
+            <a:tailEnd type="triangle" w="med" len="med"/>
+          </a:ln>
+        </p:spPr>
+        <p:style>
+          <a:lnRef idx="2">
+            <a:schemeClr val="dk1"/>
+          </a:lnRef>
+          <a:fillRef idx="1">
+            <a:schemeClr val="lt1"/>
+          </a:fillRef>
+          <a:effectRef idx="0">
+            <a:schemeClr val="dk1"/>
+          </a:effectRef>
+          <a:fontRef idx="minor">
+            <a:schemeClr val="dk1"/>
+          </a:fontRef>
+        </p:style>
+        <p:txBody>
+          <a:bodyPr rtlCol="0" anchor="ctr"/>
+          <a:lstStyle/>
+          <a:p>
+            <a:pPr algn="ctr"/>
+            <a:r>
+              <a:rPr lang="en-US" altLang="ko-KR" sz="900"/>
+              <a:t>Client A </a:t>
+            </a:r>
+            <a:r>
+              <a:rPr lang="en-US" altLang="ko-KR" sz="900" b="1" dirty="0"/>
+              <a:t>Pod</a:t>
+            </a:r>
+            <a:endParaRPr lang="ko-KR" altLang="en-US" sz="900" b="1" dirty="0"/>
+          </a:p>
+        </p:txBody>
+      </p:sp>
+      <p:sp>
+        <p:nvSpPr>
+          <p:cNvPr id="12" name="사각형: 둥근 모서리 12">
+            <a:extLst>
+              <a:ext uri="{FF2B5EF4-FFF2-40B4-BE49-F238E27FC236}">
+                <a16:creationId xmlns:a16="http://schemas.microsoft.com/office/drawing/2014/main" id="{29F2F3B9-5475-211B-758B-446DFDD2B5C8}"/>
+              </a:ext>
+            </a:extLst>
+          </p:cNvPr>
+          <p:cNvSpPr/>
+          <p:nvPr/>
+        </p:nvSpPr>
+        <p:spPr>
+          <a:xfrm>
+            <a:off x="1518621" y="4219600"/>
+            <a:ext cx="1139438" cy="451511"/>
+          </a:xfrm>
+          <a:prstGeom prst="roundRect">
+            <a:avLst>
+              <a:gd name="adj" fmla="val 14105"/>
+            </a:avLst>
+          </a:prstGeom>
+          <a:noFill/>
+          <a:ln w="12700">
+            <a:headEnd type="none" w="med" len="med"/>
+            <a:tailEnd type="triangle" w="med" len="med"/>
+          </a:ln>
+        </p:spPr>
+        <p:style>
+          <a:lnRef idx="2">
+            <a:schemeClr val="dk1"/>
+          </a:lnRef>
+          <a:fillRef idx="1">
+            <a:schemeClr val="lt1"/>
+          </a:fillRef>
+          <a:effectRef idx="0">
+            <a:schemeClr val="dk1"/>
+          </a:effectRef>
+          <a:fontRef idx="minor">
+            <a:schemeClr val="dk1"/>
+          </a:fontRef>
+        </p:style>
+        <p:txBody>
+          <a:bodyPr rtlCol="0" anchor="ctr"/>
+          <a:lstStyle/>
+          <a:p>
+            <a:pPr algn="ctr"/>
+            <a:r>
+              <a:rPr lang="en-US" altLang="ko-KR" sz="900"/>
+              <a:t>Client C </a:t>
+            </a:r>
+            <a:r>
+              <a:rPr lang="en-US" altLang="ko-KR" sz="900" b="1" dirty="0"/>
+              <a:t>Pod</a:t>
+            </a:r>
+            <a:endParaRPr lang="ko-KR" altLang="en-US" sz="900" b="1" dirty="0"/>
+          </a:p>
+        </p:txBody>
+      </p:sp>
+      <p:sp>
+        <p:nvSpPr>
+          <p:cNvPr id="17" name="사각형: 둥근 모서리 12">
+            <a:extLst>
+              <a:ext uri="{FF2B5EF4-FFF2-40B4-BE49-F238E27FC236}">
+                <a16:creationId xmlns:a16="http://schemas.microsoft.com/office/drawing/2014/main" id="{7C3F983B-129A-608E-D129-28EF1523BCC3}"/>
+              </a:ext>
+            </a:extLst>
+          </p:cNvPr>
+          <p:cNvSpPr/>
+          <p:nvPr/>
+        </p:nvSpPr>
+        <p:spPr>
+          <a:xfrm>
+            <a:off x="3205001" y="1338418"/>
+            <a:ext cx="1330422" cy="451511"/>
+          </a:xfrm>
+          <a:prstGeom prst="roundRect">
+            <a:avLst>
+              <a:gd name="adj" fmla="val 14105"/>
+            </a:avLst>
+          </a:prstGeom>
+          <a:solidFill>
+            <a:schemeClr val="bg1">
+              <a:lumMod val="95000"/>
+            </a:schemeClr>
+          </a:solidFill>
+          <a:ln w="12700">
+            <a:headEnd type="none" w="med" len="med"/>
+            <a:tailEnd type="triangle" w="med" len="med"/>
+          </a:ln>
+        </p:spPr>
+        <p:style>
+          <a:lnRef idx="2">
+            <a:schemeClr val="dk1"/>
+          </a:lnRef>
+          <a:fillRef idx="1">
+            <a:schemeClr val="lt1"/>
+          </a:fillRef>
+          <a:effectRef idx="0">
+            <a:schemeClr val="dk1"/>
+          </a:effectRef>
+          <a:fontRef idx="minor">
+            <a:schemeClr val="dk1"/>
+          </a:fontRef>
+        </p:style>
+        <p:txBody>
+          <a:bodyPr rtlCol="0" anchor="ctr"/>
+          <a:lstStyle/>
+          <a:p>
+            <a:pPr algn="ctr"/>
+            <a:r>
+              <a:rPr lang="en-US" altLang="ko-KR" sz="900" dirty="0"/>
+              <a:t>DNS Name, ClusterIP</a:t>
+            </a:r>
+          </a:p>
+          <a:p>
+            <a:pPr algn="ctr"/>
+            <a:r>
+              <a:rPr lang="en-US" altLang="ko-KR" sz="900" b="1" dirty="0"/>
+              <a:t>Frontend</a:t>
+            </a:r>
+            <a:endParaRPr lang="ko-KR" altLang="en-US" sz="900" b="1" dirty="0"/>
+          </a:p>
+        </p:txBody>
+      </p:sp>
+      <p:sp>
+        <p:nvSpPr>
+          <p:cNvPr id="19" name="사각형: 둥근 모서리 12">
+            <a:extLst>
+              <a:ext uri="{FF2B5EF4-FFF2-40B4-BE49-F238E27FC236}">
+                <a16:creationId xmlns:a16="http://schemas.microsoft.com/office/drawing/2014/main" id="{5E865DBB-1F4A-3575-89BD-9780E3648D73}"/>
+              </a:ext>
+            </a:extLst>
+          </p:cNvPr>
+          <p:cNvSpPr/>
+          <p:nvPr/>
+        </p:nvSpPr>
+        <p:spPr>
+          <a:xfrm>
+            <a:off x="4962660" y="1344655"/>
+            <a:ext cx="1104530" cy="445274"/>
+          </a:xfrm>
+          <a:prstGeom prst="roundRect">
+            <a:avLst>
+              <a:gd name="adj" fmla="val 14105"/>
+            </a:avLst>
+          </a:prstGeom>
+          <a:solidFill>
+            <a:schemeClr val="bg1">
+              <a:lumMod val="95000"/>
+            </a:schemeClr>
+          </a:solidFill>
+          <a:ln w="12700">
+            <a:headEnd type="none" w="med" len="med"/>
+            <a:tailEnd type="triangle" w="med" len="med"/>
+          </a:ln>
+        </p:spPr>
+        <p:style>
+          <a:lnRef idx="2">
+            <a:schemeClr val="dk1"/>
+          </a:lnRef>
+          <a:fillRef idx="1">
+            <a:schemeClr val="lt1"/>
+          </a:fillRef>
+          <a:effectRef idx="0">
+            <a:schemeClr val="dk1"/>
+          </a:effectRef>
+          <a:fontRef idx="minor">
+            <a:schemeClr val="dk1"/>
+          </a:fontRef>
+        </p:style>
+        <p:txBody>
+          <a:bodyPr rtlCol="0" anchor="ctr"/>
+          <a:lstStyle/>
+          <a:p>
+            <a:pPr algn="ctr"/>
+            <a:r>
+              <a:rPr lang="en-US" altLang="ko-KR" sz="900" dirty="0"/>
+              <a:t>Endpoint IPs</a:t>
+            </a:r>
+          </a:p>
+          <a:p>
+            <a:pPr algn="ctr"/>
+            <a:r>
+              <a:rPr lang="en-US" altLang="ko-KR" sz="900" b="1" dirty="0"/>
+              <a:t>Backend</a:t>
+            </a:r>
+            <a:endParaRPr lang="ko-KR" altLang="en-US" sz="900" b="1" dirty="0"/>
+          </a:p>
+        </p:txBody>
+      </p:sp>
+      <p:sp>
+        <p:nvSpPr>
+          <p:cNvPr id="21" name="사각형: 둥근 모서리 12">
+            <a:extLst>
+              <a:ext uri="{FF2B5EF4-FFF2-40B4-BE49-F238E27FC236}">
+                <a16:creationId xmlns:a16="http://schemas.microsoft.com/office/drawing/2014/main" id="{E85CE645-DEC6-9434-3FFB-3641A9977649}"/>
+              </a:ext>
+            </a:extLst>
+          </p:cNvPr>
+          <p:cNvSpPr/>
+          <p:nvPr/>
+        </p:nvSpPr>
+        <p:spPr>
+          <a:xfrm>
+            <a:off x="6390504" y="1340841"/>
+            <a:ext cx="1139438" cy="451511"/>
+          </a:xfrm>
+          <a:prstGeom prst="roundRect">
+            <a:avLst>
+              <a:gd name="adj" fmla="val 14105"/>
+            </a:avLst>
+          </a:prstGeom>
+          <a:noFill/>
+          <a:ln w="12700">
+            <a:headEnd type="none" w="med" len="med"/>
+            <a:tailEnd type="triangle" w="med" len="med"/>
+          </a:ln>
+        </p:spPr>
+        <p:style>
+          <a:lnRef idx="2">
+            <a:schemeClr val="dk1"/>
+          </a:lnRef>
+          <a:fillRef idx="1">
+            <a:schemeClr val="lt1"/>
+          </a:fillRef>
+          <a:effectRef idx="0">
+            <a:schemeClr val="dk1"/>
+          </a:effectRef>
+          <a:fontRef idx="minor">
+            <a:schemeClr val="dk1"/>
+          </a:fontRef>
+        </p:style>
+        <p:txBody>
+          <a:bodyPr rtlCol="0" anchor="ctr"/>
+          <a:lstStyle/>
+          <a:p>
+            <a:pPr algn="ctr"/>
+            <a:r>
+              <a:rPr lang="en-US" altLang="ko-KR" sz="900"/>
+              <a:t>Server </a:t>
+            </a:r>
+            <a:r>
+              <a:rPr lang="en-US" altLang="ko-KR" sz="900" b="1" dirty="0"/>
+              <a:t>Deployment</a:t>
+            </a:r>
+            <a:endParaRPr lang="ko-KR" altLang="en-US" sz="900" b="1" dirty="0"/>
+          </a:p>
+        </p:txBody>
+      </p:sp>
+      <p:cxnSp>
+        <p:nvCxnSpPr>
+          <p:cNvPr id="46" name="직선 화살표 연결선 96">
+            <a:extLst>
+              <a:ext uri="{FF2B5EF4-FFF2-40B4-BE49-F238E27FC236}">
+                <a16:creationId xmlns:a16="http://schemas.microsoft.com/office/drawing/2014/main" id="{9D9C5447-B78E-74F2-240B-C281C3197519}"/>
+              </a:ext>
+            </a:extLst>
+          </p:cNvPr>
+          <p:cNvCxnSpPr>
+            <a:cxnSpLocks/>
+            <a:stCxn id="122" idx="2"/>
+            <a:endCxn id="17" idx="0"/>
+          </p:cNvCxnSpPr>
+          <p:nvPr/>
+        </p:nvCxnSpPr>
+        <p:spPr>
+          <a:xfrm flipH="1">
+            <a:off x="3870212" y="904269"/>
+            <a:ext cx="1641941" cy="434149"/>
+          </a:xfrm>
+          <a:prstGeom prst="straightConnector1">
+            <a:avLst/>
+          </a:prstGeom>
+          <a:ln w="12700">
+            <a:solidFill>
+              <a:schemeClr val="tx2"/>
+            </a:solidFill>
+            <a:prstDash val="solid"/>
+            <a:headEnd type="none" w="med" len="med"/>
+            <a:tailEnd type="triangle" w="med" len="med"/>
+          </a:ln>
+        </p:spPr>
+        <p:style>
+          <a:lnRef idx="1">
+            <a:schemeClr val="accent1"/>
+          </a:lnRef>
+          <a:fillRef idx="0">
+            <a:schemeClr val="accent1"/>
+          </a:fillRef>
+          <a:effectRef idx="0">
+            <a:schemeClr val="accent1"/>
+          </a:effectRef>
+          <a:fontRef idx="minor">
+            <a:schemeClr val="tx1"/>
+          </a:fontRef>
+        </p:style>
+      </p:cxnSp>
+      <p:cxnSp>
+        <p:nvCxnSpPr>
+          <p:cNvPr id="49" name="직선 화살표 연결선 96">
+            <a:extLst>
+              <a:ext uri="{FF2B5EF4-FFF2-40B4-BE49-F238E27FC236}">
+                <a16:creationId xmlns:a16="http://schemas.microsoft.com/office/drawing/2014/main" id="{4D581308-A4D9-6645-7B24-7D553A994A1B}"/>
+              </a:ext>
+            </a:extLst>
+          </p:cNvPr>
+          <p:cNvCxnSpPr>
+            <a:cxnSpLocks/>
+            <a:stCxn id="122" idx="2"/>
+            <a:endCxn id="19" idx="0"/>
+          </p:cNvCxnSpPr>
+          <p:nvPr/>
+        </p:nvCxnSpPr>
+        <p:spPr>
+          <a:xfrm>
+            <a:off x="5512153" y="904269"/>
+            <a:ext cx="2772" cy="440386"/>
+          </a:xfrm>
+          <a:prstGeom prst="straightConnector1">
+            <a:avLst/>
+          </a:prstGeom>
+          <a:ln w="12700">
+            <a:solidFill>
+              <a:schemeClr val="accent3"/>
+            </a:solidFill>
+            <a:prstDash val="solid"/>
+            <a:headEnd type="none" w="med" len="med"/>
+            <a:tailEnd type="triangle" w="med" len="med"/>
+          </a:ln>
+        </p:spPr>
+        <p:style>
+          <a:lnRef idx="1">
+            <a:schemeClr val="accent1"/>
+          </a:lnRef>
+          <a:fillRef idx="0">
+            <a:schemeClr val="accent1"/>
+          </a:fillRef>
+          <a:effectRef idx="0">
+            <a:schemeClr val="accent1"/>
+          </a:effectRef>
+          <a:fontRef idx="minor">
+            <a:schemeClr val="tx1"/>
+          </a:fontRef>
+        </p:style>
+      </p:cxnSp>
+      <p:sp>
+        <p:nvSpPr>
+          <p:cNvPr id="56" name="사각형: 둥근 모서리 12">
+            <a:extLst>
+              <a:ext uri="{FF2B5EF4-FFF2-40B4-BE49-F238E27FC236}">
+                <a16:creationId xmlns:a16="http://schemas.microsoft.com/office/drawing/2014/main" id="{E0E6970A-D96F-74E8-49BE-9A719E329878}"/>
+              </a:ext>
+            </a:extLst>
+          </p:cNvPr>
+          <p:cNvSpPr/>
+          <p:nvPr/>
+        </p:nvSpPr>
+        <p:spPr>
+          <a:xfrm>
+            <a:off x="3095263" y="2452219"/>
+            <a:ext cx="3081988" cy="836785"/>
+          </a:xfrm>
+          <a:prstGeom prst="roundRect">
+            <a:avLst>
+              <a:gd name="adj" fmla="val 8995"/>
+            </a:avLst>
+          </a:prstGeom>
+          <a:noFill/>
+          <a:ln w="12700">
+            <a:headEnd type="none" w="med" len="med"/>
+            <a:tailEnd type="triangle" w="med" len="med"/>
+          </a:ln>
+        </p:spPr>
+        <p:style>
+          <a:lnRef idx="2">
+            <a:schemeClr val="dk1"/>
+          </a:lnRef>
+          <a:fillRef idx="1">
+            <a:schemeClr val="lt1"/>
+          </a:fillRef>
+          <a:effectRef idx="0">
+            <a:schemeClr val="dk1"/>
+          </a:effectRef>
+          <a:fontRef idx="minor">
+            <a:schemeClr val="dk1"/>
+          </a:fontRef>
+        </p:style>
+        <p:txBody>
+          <a:bodyPr rtlCol="0" anchor="t"/>
+          <a:lstStyle/>
+          <a:p>
+            <a:pPr algn="ctr"/>
+            <a:r>
+              <a:rPr lang="en-US" altLang="ko-KR" sz="900"/>
+              <a:t>Server Version 1 </a:t>
+            </a:r>
+            <a:r>
+              <a:rPr lang="en-US" altLang="ko-KR" sz="900" b="1" dirty="0"/>
+              <a:t>Service</a:t>
+            </a:r>
+            <a:endParaRPr lang="ko-KR" altLang="en-US" sz="900" b="1" dirty="0"/>
+          </a:p>
+        </p:txBody>
+      </p:sp>
+      <p:sp>
+        <p:nvSpPr>
+          <p:cNvPr id="57" name="사각형: 둥근 모서리 12">
+            <a:extLst>
+              <a:ext uri="{FF2B5EF4-FFF2-40B4-BE49-F238E27FC236}">
+                <a16:creationId xmlns:a16="http://schemas.microsoft.com/office/drawing/2014/main" id="{6AFCF108-45A3-ACFA-0DA9-CA4AF5C0AF27}"/>
+              </a:ext>
+            </a:extLst>
+          </p:cNvPr>
+          <p:cNvSpPr/>
+          <p:nvPr/>
+        </p:nvSpPr>
+        <p:spPr>
+          <a:xfrm>
+            <a:off x="3205001" y="2733318"/>
+            <a:ext cx="1330422" cy="451511"/>
+          </a:xfrm>
+          <a:prstGeom prst="roundRect">
+            <a:avLst>
+              <a:gd name="adj" fmla="val 14105"/>
+            </a:avLst>
+          </a:prstGeom>
+          <a:solidFill>
+            <a:schemeClr val="bg1">
+              <a:lumMod val="95000"/>
+            </a:schemeClr>
+          </a:solidFill>
+          <a:ln w="12700">
+            <a:headEnd type="none" w="med" len="med"/>
+            <a:tailEnd type="triangle" w="med" len="med"/>
+          </a:ln>
+        </p:spPr>
+        <p:style>
+          <a:lnRef idx="2">
+            <a:schemeClr val="dk1"/>
+          </a:lnRef>
+          <a:fillRef idx="1">
+            <a:schemeClr val="lt1"/>
+          </a:fillRef>
+          <a:effectRef idx="0">
+            <a:schemeClr val="dk1"/>
+          </a:effectRef>
+          <a:fontRef idx="minor">
+            <a:schemeClr val="dk1"/>
+          </a:fontRef>
+        </p:style>
+        <p:txBody>
+          <a:bodyPr rtlCol="0" anchor="ctr"/>
+          <a:lstStyle/>
+          <a:p>
+            <a:pPr algn="ctr"/>
+            <a:r>
+              <a:rPr lang="en-US" altLang="ko-KR" sz="900" dirty="0"/>
+              <a:t>DNS Name, ClusterIP</a:t>
+            </a:r>
+          </a:p>
+          <a:p>
+            <a:pPr algn="ctr"/>
+            <a:r>
+              <a:rPr lang="en-US" altLang="ko-KR" sz="900" b="1" dirty="0"/>
+              <a:t>Frontend</a:t>
+            </a:r>
+            <a:endParaRPr lang="ko-KR" altLang="en-US" sz="900" b="1" dirty="0"/>
+          </a:p>
+        </p:txBody>
+      </p:sp>
+      <p:sp>
+        <p:nvSpPr>
+          <p:cNvPr id="58" name="사각형: 둥근 모서리 12">
+            <a:extLst>
+              <a:ext uri="{FF2B5EF4-FFF2-40B4-BE49-F238E27FC236}">
+                <a16:creationId xmlns:a16="http://schemas.microsoft.com/office/drawing/2014/main" id="{9E72E5BD-1036-D7B7-61D1-E7BFF9F161B2}"/>
+              </a:ext>
+            </a:extLst>
+          </p:cNvPr>
+          <p:cNvSpPr/>
+          <p:nvPr/>
+        </p:nvSpPr>
+        <p:spPr>
+          <a:xfrm>
+            <a:off x="4962660" y="2739555"/>
+            <a:ext cx="1104530" cy="445274"/>
+          </a:xfrm>
+          <a:prstGeom prst="roundRect">
+            <a:avLst>
+              <a:gd name="adj" fmla="val 14105"/>
+            </a:avLst>
+          </a:prstGeom>
+          <a:solidFill>
+            <a:schemeClr val="bg1">
+              <a:lumMod val="95000"/>
+            </a:schemeClr>
+          </a:solidFill>
+          <a:ln w="12700">
+            <a:headEnd type="none" w="med" len="med"/>
+            <a:tailEnd type="triangle" w="med" len="med"/>
+          </a:ln>
+        </p:spPr>
+        <p:style>
+          <a:lnRef idx="2">
+            <a:schemeClr val="dk1"/>
+          </a:lnRef>
+          <a:fillRef idx="1">
+            <a:schemeClr val="lt1"/>
+          </a:fillRef>
+          <a:effectRef idx="0">
+            <a:schemeClr val="dk1"/>
+          </a:effectRef>
+          <a:fontRef idx="minor">
+            <a:schemeClr val="dk1"/>
+          </a:fontRef>
+        </p:style>
+        <p:txBody>
+          <a:bodyPr rtlCol="0" anchor="ctr"/>
+          <a:lstStyle/>
+          <a:p>
+            <a:pPr algn="ctr"/>
+            <a:r>
+              <a:rPr lang="en-US" altLang="ko-KR" sz="900" dirty="0"/>
+              <a:t>Endpoint IPs</a:t>
+            </a:r>
+          </a:p>
+          <a:p>
+            <a:pPr algn="ctr"/>
+            <a:r>
+              <a:rPr lang="en-US" altLang="ko-KR" sz="900" b="1" dirty="0"/>
+              <a:t>Backend</a:t>
+            </a:r>
+            <a:endParaRPr lang="ko-KR" altLang="en-US" sz="900" b="1" dirty="0"/>
+          </a:p>
+        </p:txBody>
+      </p:sp>
+      <p:sp>
+        <p:nvSpPr>
+          <p:cNvPr id="59" name="사각형: 둥근 모서리 12">
+            <a:extLst>
+              <a:ext uri="{FF2B5EF4-FFF2-40B4-BE49-F238E27FC236}">
+                <a16:creationId xmlns:a16="http://schemas.microsoft.com/office/drawing/2014/main" id="{33E48C8C-F38B-139B-6A29-18AE1EAA45DB}"/>
+              </a:ext>
+            </a:extLst>
+          </p:cNvPr>
+          <p:cNvSpPr/>
+          <p:nvPr/>
+        </p:nvSpPr>
+        <p:spPr>
+          <a:xfrm>
+            <a:off x="6390504" y="2736436"/>
+            <a:ext cx="1139438" cy="451511"/>
+          </a:xfrm>
+          <a:prstGeom prst="roundRect">
+            <a:avLst>
+              <a:gd name="adj" fmla="val 14105"/>
+            </a:avLst>
+          </a:prstGeom>
+          <a:noFill/>
+          <a:ln w="12700">
+            <a:headEnd type="none" w="med" len="med"/>
+            <a:tailEnd type="triangle" w="med" len="med"/>
+          </a:ln>
+        </p:spPr>
+        <p:style>
+          <a:lnRef idx="2">
+            <a:schemeClr val="dk1"/>
+          </a:lnRef>
+          <a:fillRef idx="1">
+            <a:schemeClr val="lt1"/>
+          </a:fillRef>
+          <a:effectRef idx="0">
+            <a:schemeClr val="dk1"/>
+          </a:effectRef>
+          <a:fontRef idx="minor">
+            <a:schemeClr val="dk1"/>
+          </a:fontRef>
+        </p:style>
+        <p:txBody>
+          <a:bodyPr rtlCol="0" anchor="ctr"/>
+          <a:lstStyle/>
+          <a:p>
+            <a:pPr algn="ctr"/>
+            <a:r>
+              <a:rPr lang="en-US" altLang="ko-KR" sz="900"/>
+              <a:t>Server Version 1 </a:t>
+            </a:r>
+            <a:r>
+              <a:rPr lang="en-US" altLang="ko-KR" sz="900" b="1" dirty="0"/>
+              <a:t>Deployment</a:t>
+            </a:r>
+            <a:endParaRPr lang="ko-KR" altLang="en-US" sz="900" b="1" dirty="0"/>
+          </a:p>
+        </p:txBody>
+      </p:sp>
+      <p:sp>
+        <p:nvSpPr>
+          <p:cNvPr id="61" name="사각형: 둥근 모서리 12">
+            <a:extLst>
+              <a:ext uri="{FF2B5EF4-FFF2-40B4-BE49-F238E27FC236}">
+                <a16:creationId xmlns:a16="http://schemas.microsoft.com/office/drawing/2014/main" id="{1DA3BADF-FCA6-C5EC-2E64-5D6CBD210C1F}"/>
+              </a:ext>
+            </a:extLst>
+          </p:cNvPr>
+          <p:cNvSpPr/>
+          <p:nvPr/>
+        </p:nvSpPr>
+        <p:spPr>
+          <a:xfrm>
+            <a:off x="1518621" y="3522150"/>
+            <a:ext cx="1139438" cy="451511"/>
+          </a:xfrm>
+          <a:prstGeom prst="roundRect">
+            <a:avLst>
+              <a:gd name="adj" fmla="val 14105"/>
+            </a:avLst>
+          </a:prstGeom>
+          <a:solidFill>
+            <a:schemeClr val="bg1">
+              <a:lumMod val="95000"/>
+            </a:schemeClr>
+          </a:solidFill>
+          <a:ln w="12700">
+            <a:headEnd type="none" w="med" len="med"/>
+            <a:tailEnd type="triangle" w="med" len="med"/>
+          </a:ln>
+        </p:spPr>
+        <p:style>
+          <a:lnRef idx="2">
+            <a:schemeClr val="dk1"/>
+          </a:lnRef>
+          <a:fillRef idx="1">
+            <a:schemeClr val="lt1"/>
+          </a:fillRef>
+          <a:effectRef idx="0">
+            <a:schemeClr val="dk1"/>
+          </a:effectRef>
+          <a:fontRef idx="minor">
+            <a:schemeClr val="dk1"/>
+          </a:fontRef>
+        </p:style>
+        <p:txBody>
+          <a:bodyPr rtlCol="0" anchor="ctr"/>
+          <a:lstStyle/>
+          <a:p>
+            <a:pPr algn="ctr"/>
+            <a:r>
+              <a:rPr lang="en-US" altLang="ko-KR" sz="900"/>
+              <a:t>Server</a:t>
+            </a:r>
+          </a:p>
+          <a:p>
+            <a:pPr algn="ctr"/>
+            <a:r>
+              <a:rPr lang="en-US" altLang="ko-KR" sz="900" b="1"/>
+              <a:t>HTTPRoute</a:t>
+            </a:r>
+          </a:p>
+          <a:p>
+            <a:pPr algn="ctr"/>
+            <a:r>
+              <a:rPr lang="en-US" altLang="ko-KR" sz="900" b="1"/>
+              <a:t>(Consumer)</a:t>
+            </a:r>
+          </a:p>
+        </p:txBody>
+      </p:sp>
+      <p:sp>
+        <p:nvSpPr>
+          <p:cNvPr id="62" name="사각형: 둥근 모서리 12">
+            <a:extLst>
+              <a:ext uri="{FF2B5EF4-FFF2-40B4-BE49-F238E27FC236}">
+                <a16:creationId xmlns:a16="http://schemas.microsoft.com/office/drawing/2014/main" id="{6EBE49B4-96DC-B4B1-72A3-7EF9FEEA3513}"/>
+              </a:ext>
+            </a:extLst>
+          </p:cNvPr>
+          <p:cNvSpPr/>
+          <p:nvPr/>
+        </p:nvSpPr>
+        <p:spPr>
+          <a:xfrm>
+            <a:off x="3092491" y="3847119"/>
+            <a:ext cx="3081988" cy="836785"/>
+          </a:xfrm>
+          <a:prstGeom prst="roundRect">
+            <a:avLst>
+              <a:gd name="adj" fmla="val 8995"/>
+            </a:avLst>
+          </a:prstGeom>
+          <a:noFill/>
+          <a:ln w="12700">
+            <a:headEnd type="none" w="med" len="med"/>
+            <a:tailEnd type="triangle" w="med" len="med"/>
+          </a:ln>
+        </p:spPr>
+        <p:style>
+          <a:lnRef idx="2">
+            <a:schemeClr val="dk1"/>
+          </a:lnRef>
+          <a:fillRef idx="1">
+            <a:schemeClr val="lt1"/>
+          </a:fillRef>
+          <a:effectRef idx="0">
+            <a:schemeClr val="dk1"/>
+          </a:effectRef>
+          <a:fontRef idx="minor">
+            <a:schemeClr val="dk1"/>
+          </a:fontRef>
+        </p:style>
+        <p:txBody>
+          <a:bodyPr rtlCol="0" anchor="t"/>
+          <a:lstStyle/>
+          <a:p>
+            <a:pPr algn="ctr"/>
+            <a:r>
+              <a:rPr lang="en-US" altLang="ko-KR" sz="900"/>
+              <a:t>Server Version 2 </a:t>
+            </a:r>
+            <a:r>
+              <a:rPr lang="en-US" altLang="ko-KR" sz="900" b="1" dirty="0"/>
+              <a:t>Service</a:t>
+            </a:r>
+            <a:endParaRPr lang="ko-KR" altLang="en-US" sz="900" b="1" dirty="0"/>
+          </a:p>
+        </p:txBody>
+      </p:sp>
+      <p:sp>
+        <p:nvSpPr>
+          <p:cNvPr id="63" name="사각형: 둥근 모서리 12">
+            <a:extLst>
+              <a:ext uri="{FF2B5EF4-FFF2-40B4-BE49-F238E27FC236}">
+                <a16:creationId xmlns:a16="http://schemas.microsoft.com/office/drawing/2014/main" id="{C4C8D8B9-1CCF-85C1-B2B3-B92A959AE532}"/>
+              </a:ext>
+            </a:extLst>
+          </p:cNvPr>
+          <p:cNvSpPr/>
+          <p:nvPr/>
+        </p:nvSpPr>
+        <p:spPr>
+          <a:xfrm>
+            <a:off x="3202229" y="4128218"/>
+            <a:ext cx="1330422" cy="451511"/>
+          </a:xfrm>
+          <a:prstGeom prst="roundRect">
+            <a:avLst>
+              <a:gd name="adj" fmla="val 14105"/>
+            </a:avLst>
+          </a:prstGeom>
+          <a:solidFill>
+            <a:schemeClr val="bg1">
+              <a:lumMod val="95000"/>
+            </a:schemeClr>
+          </a:solidFill>
+          <a:ln w="12700">
+            <a:headEnd type="none" w="med" len="med"/>
+            <a:tailEnd type="triangle" w="med" len="med"/>
+          </a:ln>
+        </p:spPr>
+        <p:style>
+          <a:lnRef idx="2">
+            <a:schemeClr val="dk1"/>
+          </a:lnRef>
+          <a:fillRef idx="1">
+            <a:schemeClr val="lt1"/>
+          </a:fillRef>
+          <a:effectRef idx="0">
+            <a:schemeClr val="dk1"/>
+          </a:effectRef>
+          <a:fontRef idx="minor">
+            <a:schemeClr val="dk1"/>
+          </a:fontRef>
+        </p:style>
+        <p:txBody>
+          <a:bodyPr rtlCol="0" anchor="ctr"/>
+          <a:lstStyle/>
+          <a:p>
+            <a:pPr algn="ctr"/>
+            <a:r>
+              <a:rPr lang="en-US" altLang="ko-KR" sz="900" dirty="0"/>
+              <a:t>DNS Name, ClusterIP</a:t>
+            </a:r>
+          </a:p>
+          <a:p>
+            <a:pPr algn="ctr"/>
+            <a:r>
+              <a:rPr lang="en-US" altLang="ko-KR" sz="900" b="1" dirty="0"/>
+              <a:t>Frontend</a:t>
+            </a:r>
+            <a:endParaRPr lang="ko-KR" altLang="en-US" sz="900" b="1" dirty="0"/>
+          </a:p>
+        </p:txBody>
+      </p:sp>
+      <p:sp>
+        <p:nvSpPr>
+          <p:cNvPr id="64" name="사각형: 둥근 모서리 12">
+            <a:extLst>
+              <a:ext uri="{FF2B5EF4-FFF2-40B4-BE49-F238E27FC236}">
+                <a16:creationId xmlns:a16="http://schemas.microsoft.com/office/drawing/2014/main" id="{E1712FB6-6AEC-5759-61E0-B1A789B78076}"/>
+              </a:ext>
+            </a:extLst>
+          </p:cNvPr>
+          <p:cNvSpPr/>
+          <p:nvPr/>
+        </p:nvSpPr>
+        <p:spPr>
+          <a:xfrm>
+            <a:off x="4959888" y="4134455"/>
+            <a:ext cx="1104530" cy="445274"/>
+          </a:xfrm>
+          <a:prstGeom prst="roundRect">
+            <a:avLst>
+              <a:gd name="adj" fmla="val 14105"/>
+            </a:avLst>
+          </a:prstGeom>
+          <a:solidFill>
+            <a:schemeClr val="bg1">
+              <a:lumMod val="95000"/>
+            </a:schemeClr>
+          </a:solidFill>
+          <a:ln w="12700">
+            <a:headEnd type="none" w="med" len="med"/>
+            <a:tailEnd type="triangle" w="med" len="med"/>
+          </a:ln>
+        </p:spPr>
+        <p:style>
+          <a:lnRef idx="2">
+            <a:schemeClr val="dk1"/>
+          </a:lnRef>
+          <a:fillRef idx="1">
+            <a:schemeClr val="lt1"/>
+          </a:fillRef>
+          <a:effectRef idx="0">
+            <a:schemeClr val="dk1"/>
+          </a:effectRef>
+          <a:fontRef idx="minor">
+            <a:schemeClr val="dk1"/>
+          </a:fontRef>
+        </p:style>
+        <p:txBody>
+          <a:bodyPr rtlCol="0" anchor="ctr"/>
+          <a:lstStyle/>
+          <a:p>
+            <a:pPr algn="ctr"/>
+            <a:r>
+              <a:rPr lang="en-US" altLang="ko-KR" sz="900" dirty="0"/>
+              <a:t>Endpoint IPs</a:t>
+            </a:r>
+          </a:p>
+          <a:p>
+            <a:pPr algn="ctr"/>
+            <a:r>
+              <a:rPr lang="en-US" altLang="ko-KR" sz="900" b="1" dirty="0"/>
+              <a:t>Backend</a:t>
+            </a:r>
+            <a:endParaRPr lang="ko-KR" altLang="en-US" sz="900" b="1" dirty="0"/>
+          </a:p>
+        </p:txBody>
+      </p:sp>
+      <p:sp>
+        <p:nvSpPr>
+          <p:cNvPr id="65" name="사각형: 둥근 모서리 12">
+            <a:extLst>
+              <a:ext uri="{FF2B5EF4-FFF2-40B4-BE49-F238E27FC236}">
+                <a16:creationId xmlns:a16="http://schemas.microsoft.com/office/drawing/2014/main" id="{0AF98280-7E0D-D037-AAF0-57BFBF9F743B}"/>
+              </a:ext>
+            </a:extLst>
+          </p:cNvPr>
+          <p:cNvSpPr/>
+          <p:nvPr/>
+        </p:nvSpPr>
+        <p:spPr>
+          <a:xfrm>
+            <a:off x="6387732" y="4131336"/>
+            <a:ext cx="1139438" cy="451511"/>
+          </a:xfrm>
+          <a:prstGeom prst="roundRect">
+            <a:avLst>
+              <a:gd name="adj" fmla="val 14105"/>
+            </a:avLst>
+          </a:prstGeom>
+          <a:noFill/>
+          <a:ln w="12700">
+            <a:headEnd type="none" w="med" len="med"/>
+            <a:tailEnd type="triangle" w="med" len="med"/>
+          </a:ln>
+        </p:spPr>
+        <p:style>
+          <a:lnRef idx="2">
+            <a:schemeClr val="dk1"/>
+          </a:lnRef>
+          <a:fillRef idx="1">
+            <a:schemeClr val="lt1"/>
+          </a:fillRef>
+          <a:effectRef idx="0">
+            <a:schemeClr val="dk1"/>
+          </a:effectRef>
+          <a:fontRef idx="minor">
+            <a:schemeClr val="dk1"/>
+          </a:fontRef>
+        </p:style>
+        <p:txBody>
+          <a:bodyPr rtlCol="0" anchor="ctr"/>
+          <a:lstStyle/>
+          <a:p>
+            <a:pPr algn="ctr"/>
+            <a:r>
+              <a:rPr lang="en-US" altLang="ko-KR" sz="900"/>
+              <a:t>Server Version 2 </a:t>
+            </a:r>
+            <a:r>
+              <a:rPr lang="en-US" altLang="ko-KR" sz="900" b="1" dirty="0"/>
+              <a:t>Deployment</a:t>
+            </a:r>
+            <a:endParaRPr lang="ko-KR" altLang="en-US" sz="900" b="1" dirty="0"/>
+          </a:p>
+        </p:txBody>
+      </p:sp>
+      <p:cxnSp>
+        <p:nvCxnSpPr>
+          <p:cNvPr id="70" name="직선 화살표 연결선 96">
+            <a:extLst>
+              <a:ext uri="{FF2B5EF4-FFF2-40B4-BE49-F238E27FC236}">
+                <a16:creationId xmlns:a16="http://schemas.microsoft.com/office/drawing/2014/main" id="{9ED2704B-9C65-E8AA-53EA-588B79061632}"/>
+              </a:ext>
+            </a:extLst>
+          </p:cNvPr>
+          <p:cNvCxnSpPr>
+            <a:cxnSpLocks/>
+            <a:stCxn id="61" idx="3"/>
+            <a:endCxn id="17" idx="2"/>
+          </p:cNvCxnSpPr>
+          <p:nvPr/>
+        </p:nvCxnSpPr>
+        <p:spPr>
+          <a:xfrm flipV="1">
+            <a:off x="2658059" y="1789929"/>
+            <a:ext cx="1212153" cy="1957977"/>
+          </a:xfrm>
+          <a:prstGeom prst="straightConnector1">
+            <a:avLst/>
+          </a:prstGeom>
+          <a:ln w="12700">
+            <a:solidFill>
+              <a:schemeClr val="tx2"/>
+            </a:solidFill>
+            <a:prstDash val="solid"/>
+            <a:headEnd type="none" w="med" len="med"/>
+            <a:tailEnd type="triangle" w="med" len="med"/>
+          </a:ln>
+        </p:spPr>
+        <p:style>
+          <a:lnRef idx="1">
+            <a:schemeClr val="accent1"/>
+          </a:lnRef>
+          <a:fillRef idx="0">
+            <a:schemeClr val="accent1"/>
+          </a:fillRef>
+          <a:effectRef idx="0">
+            <a:schemeClr val="accent1"/>
+          </a:effectRef>
+          <a:fontRef idx="minor">
+            <a:schemeClr val="tx1"/>
+          </a:fontRef>
+        </p:style>
+      </p:cxnSp>
+      <p:cxnSp>
+        <p:nvCxnSpPr>
+          <p:cNvPr id="73" name="직선 화살표 연결선 96">
+            <a:extLst>
+              <a:ext uri="{FF2B5EF4-FFF2-40B4-BE49-F238E27FC236}">
+                <a16:creationId xmlns:a16="http://schemas.microsoft.com/office/drawing/2014/main" id="{8F692253-767C-FDAD-F8AA-49525C17D77B}"/>
+              </a:ext>
+            </a:extLst>
+          </p:cNvPr>
+          <p:cNvCxnSpPr>
+            <a:cxnSpLocks/>
+            <a:stCxn id="61" idx="3"/>
+            <a:endCxn id="58" idx="2"/>
+          </p:cNvCxnSpPr>
+          <p:nvPr/>
+        </p:nvCxnSpPr>
+        <p:spPr>
+          <a:xfrm flipV="1">
+            <a:off x="2658059" y="3184829"/>
+            <a:ext cx="2856866" cy="563077"/>
+          </a:xfrm>
+          <a:prstGeom prst="straightConnector1">
+            <a:avLst/>
+          </a:prstGeom>
+          <a:ln w="12700">
+            <a:solidFill>
+              <a:schemeClr val="accent3"/>
+            </a:solidFill>
+            <a:prstDash val="solid"/>
+            <a:headEnd type="none" w="med" len="med"/>
+            <a:tailEnd type="triangle" w="med" len="med"/>
+          </a:ln>
+        </p:spPr>
+        <p:style>
+          <a:lnRef idx="1">
+            <a:schemeClr val="accent1"/>
+          </a:lnRef>
+          <a:fillRef idx="0">
+            <a:schemeClr val="accent1"/>
+          </a:fillRef>
+          <a:effectRef idx="0">
+            <a:schemeClr val="accent1"/>
+          </a:effectRef>
+          <a:fontRef idx="minor">
+            <a:schemeClr val="tx1"/>
+          </a:fontRef>
+        </p:style>
+      </p:cxnSp>
+      <p:cxnSp>
+        <p:nvCxnSpPr>
+          <p:cNvPr id="76" name="직선 화살표 연결선 96">
+            <a:extLst>
+              <a:ext uri="{FF2B5EF4-FFF2-40B4-BE49-F238E27FC236}">
+                <a16:creationId xmlns:a16="http://schemas.microsoft.com/office/drawing/2014/main" id="{2148CD5D-0249-DC24-C709-A6CF8D9295EA}"/>
+              </a:ext>
+            </a:extLst>
+          </p:cNvPr>
+          <p:cNvCxnSpPr>
+            <a:cxnSpLocks/>
+            <a:stCxn id="61" idx="3"/>
+            <a:endCxn id="64" idx="0"/>
+          </p:cNvCxnSpPr>
+          <p:nvPr/>
+        </p:nvCxnSpPr>
+        <p:spPr>
+          <a:xfrm>
+            <a:off x="2658059" y="3747906"/>
+            <a:ext cx="2854094" cy="386549"/>
+          </a:xfrm>
+          <a:prstGeom prst="straightConnector1">
+            <a:avLst/>
+          </a:prstGeom>
+          <a:ln w="12700">
+            <a:solidFill>
+              <a:schemeClr val="accent3"/>
+            </a:solidFill>
+            <a:prstDash val="solid"/>
+            <a:headEnd type="none" w="med" len="med"/>
+            <a:tailEnd type="triangle" w="med" len="med"/>
+          </a:ln>
+        </p:spPr>
+        <p:style>
+          <a:lnRef idx="1">
+            <a:schemeClr val="accent1"/>
+          </a:lnRef>
+          <a:fillRef idx="0">
+            <a:schemeClr val="accent1"/>
+          </a:fillRef>
+          <a:effectRef idx="0">
+            <a:schemeClr val="accent1"/>
+          </a:effectRef>
+          <a:fontRef idx="minor">
+            <a:schemeClr val="tx1"/>
+          </a:fontRef>
+        </p:style>
+      </p:cxnSp>
+      <p:cxnSp>
+        <p:nvCxnSpPr>
+          <p:cNvPr id="79" name="직선 화살표 연결선 96">
+            <a:extLst>
+              <a:ext uri="{FF2B5EF4-FFF2-40B4-BE49-F238E27FC236}">
+                <a16:creationId xmlns:a16="http://schemas.microsoft.com/office/drawing/2014/main" id="{592D1BB7-F00F-437B-B3A8-2024FDC5D6D2}"/>
+              </a:ext>
+            </a:extLst>
+          </p:cNvPr>
+          <p:cNvCxnSpPr>
+            <a:cxnSpLocks/>
+            <a:stCxn id="12" idx="3"/>
+            <a:endCxn id="17" idx="1"/>
+          </p:cNvCxnSpPr>
+          <p:nvPr/>
+        </p:nvCxnSpPr>
+        <p:spPr>
+          <a:xfrm flipV="1">
+            <a:off x="2658059" y="1564174"/>
+            <a:ext cx="546942" cy="2881182"/>
+          </a:xfrm>
+          <a:prstGeom prst="straightConnector1">
+            <a:avLst/>
+          </a:prstGeom>
+          <a:ln w="12700">
+            <a:solidFill>
+              <a:schemeClr val="accent6"/>
+            </a:solidFill>
+            <a:prstDash val="solid"/>
+            <a:headEnd type="none" w="med" len="med"/>
+            <a:tailEnd type="triangle" w="med" len="med"/>
+          </a:ln>
+        </p:spPr>
+        <p:style>
+          <a:lnRef idx="1">
+            <a:schemeClr val="accent1"/>
+          </a:lnRef>
+          <a:fillRef idx="0">
+            <a:schemeClr val="accent1"/>
+          </a:fillRef>
+          <a:effectRef idx="0">
+            <a:schemeClr val="accent1"/>
+          </a:effectRef>
+          <a:fontRef idx="minor">
+            <a:schemeClr val="tx1"/>
+          </a:fontRef>
+        </p:style>
+      </p:cxnSp>
+      <p:cxnSp>
+        <p:nvCxnSpPr>
+          <p:cNvPr id="85" name="직선 화살표 연결선 96">
+            <a:extLst>
+              <a:ext uri="{FF2B5EF4-FFF2-40B4-BE49-F238E27FC236}">
+                <a16:creationId xmlns:a16="http://schemas.microsoft.com/office/drawing/2014/main" id="{EB192AFA-30A5-7DEC-BA85-8F66C274997D}"/>
+              </a:ext>
+            </a:extLst>
+          </p:cNvPr>
+          <p:cNvCxnSpPr>
+            <a:cxnSpLocks/>
+            <a:stCxn id="64" idx="3"/>
+            <a:endCxn id="65" idx="1"/>
+          </p:cNvCxnSpPr>
+          <p:nvPr/>
+        </p:nvCxnSpPr>
+        <p:spPr>
+          <a:xfrm>
+            <a:off x="6064418" y="4357092"/>
+            <a:ext cx="323314" cy="0"/>
+          </a:xfrm>
+          <a:prstGeom prst="straightConnector1">
+            <a:avLst/>
+          </a:prstGeom>
+          <a:ln w="12700">
+            <a:solidFill>
+              <a:schemeClr val="accent6"/>
+            </a:solidFill>
+            <a:prstDash val="solid"/>
+            <a:headEnd type="none" w="med" len="med"/>
+            <a:tailEnd type="triangle" w="med" len="med"/>
+          </a:ln>
+        </p:spPr>
+        <p:style>
+          <a:lnRef idx="1">
+            <a:schemeClr val="accent1"/>
+          </a:lnRef>
+          <a:fillRef idx="0">
+            <a:schemeClr val="accent1"/>
+          </a:fillRef>
+          <a:effectRef idx="0">
+            <a:schemeClr val="accent1"/>
+          </a:effectRef>
+          <a:fontRef idx="minor">
+            <a:schemeClr val="tx1"/>
+          </a:fontRef>
+        </p:style>
+      </p:cxnSp>
+      <p:cxnSp>
+        <p:nvCxnSpPr>
+          <p:cNvPr id="88" name="직선 화살표 연결선 96">
+            <a:extLst>
+              <a:ext uri="{FF2B5EF4-FFF2-40B4-BE49-F238E27FC236}">
+                <a16:creationId xmlns:a16="http://schemas.microsoft.com/office/drawing/2014/main" id="{FFFCF6F8-0588-C3EB-0FCE-93CB0660BD17}"/>
+              </a:ext>
+            </a:extLst>
+          </p:cNvPr>
+          <p:cNvCxnSpPr>
+            <a:cxnSpLocks/>
+            <a:stCxn id="58" idx="3"/>
+            <a:endCxn id="59" idx="1"/>
+          </p:cNvCxnSpPr>
+          <p:nvPr/>
+        </p:nvCxnSpPr>
+        <p:spPr>
+          <a:xfrm>
+            <a:off x="6067190" y="2962192"/>
+            <a:ext cx="323314" cy="0"/>
+          </a:xfrm>
+          <a:prstGeom prst="straightConnector1">
+            <a:avLst/>
+          </a:prstGeom>
+          <a:ln w="12700">
+            <a:solidFill>
+              <a:schemeClr val="accent6"/>
+            </a:solidFill>
+            <a:prstDash val="solid"/>
+            <a:headEnd type="none" w="med" len="med"/>
+            <a:tailEnd type="triangle" w="med" len="med"/>
+          </a:ln>
+        </p:spPr>
+        <p:style>
+          <a:lnRef idx="1">
+            <a:schemeClr val="accent1"/>
+          </a:lnRef>
+          <a:fillRef idx="0">
+            <a:schemeClr val="accent1"/>
+          </a:fillRef>
+          <a:effectRef idx="0">
+            <a:schemeClr val="accent1"/>
+          </a:effectRef>
+          <a:fontRef idx="minor">
+            <a:schemeClr val="tx1"/>
+          </a:fontRef>
+        </p:style>
+      </p:cxnSp>
+      <p:cxnSp>
+        <p:nvCxnSpPr>
+          <p:cNvPr id="91" name="직선 화살표 연결선 96">
+            <a:extLst>
+              <a:ext uri="{FF2B5EF4-FFF2-40B4-BE49-F238E27FC236}">
+                <a16:creationId xmlns:a16="http://schemas.microsoft.com/office/drawing/2014/main" id="{E233B400-02E9-AEE7-033A-619F71625119}"/>
+              </a:ext>
+            </a:extLst>
+          </p:cNvPr>
+          <p:cNvCxnSpPr>
+            <a:cxnSpLocks/>
+            <a:stCxn id="11" idx="3"/>
+            <a:endCxn id="17" idx="1"/>
+          </p:cNvCxnSpPr>
+          <p:nvPr/>
+        </p:nvCxnSpPr>
+        <p:spPr>
+          <a:xfrm flipV="1">
+            <a:off x="2658059" y="1564174"/>
+            <a:ext cx="546942" cy="182964"/>
+          </a:xfrm>
+          <a:prstGeom prst="straightConnector1">
+            <a:avLst/>
+          </a:prstGeom>
+          <a:ln w="12700">
+            <a:solidFill>
+              <a:srgbClr val="C00000"/>
+            </a:solidFill>
+            <a:prstDash val="solid"/>
+            <a:headEnd type="none" w="med" len="med"/>
+            <a:tailEnd type="triangle" w="med" len="med"/>
+          </a:ln>
+        </p:spPr>
+        <p:style>
+          <a:lnRef idx="1">
+            <a:schemeClr val="accent1"/>
+          </a:lnRef>
+          <a:fillRef idx="0">
+            <a:schemeClr val="accent1"/>
+          </a:fillRef>
+          <a:effectRef idx="0">
+            <a:schemeClr val="accent1"/>
+          </a:effectRef>
+          <a:fontRef idx="minor">
+            <a:schemeClr val="tx1"/>
+          </a:fontRef>
+        </p:style>
+      </p:cxnSp>
+      <p:cxnSp>
+        <p:nvCxnSpPr>
+          <p:cNvPr id="95" name="직선 화살표 연결선 96">
+            <a:extLst>
+              <a:ext uri="{FF2B5EF4-FFF2-40B4-BE49-F238E27FC236}">
+                <a16:creationId xmlns:a16="http://schemas.microsoft.com/office/drawing/2014/main" id="{51E05FBC-58EA-716E-A3B5-01CB9F3AA017}"/>
+              </a:ext>
+            </a:extLst>
+          </p:cNvPr>
+          <p:cNvCxnSpPr>
+            <a:cxnSpLocks/>
+            <a:stCxn id="19" idx="3"/>
+            <a:endCxn id="21" idx="1"/>
+          </p:cNvCxnSpPr>
+          <p:nvPr/>
+        </p:nvCxnSpPr>
+        <p:spPr>
+          <a:xfrm flipV="1">
+            <a:off x="6067190" y="1566597"/>
+            <a:ext cx="323314" cy="695"/>
+          </a:xfrm>
+          <a:prstGeom prst="straightConnector1">
+            <a:avLst/>
+          </a:prstGeom>
+          <a:ln w="12700">
+            <a:solidFill>
+              <a:srgbClr val="C00000"/>
+            </a:solidFill>
+            <a:prstDash val="solid"/>
+            <a:headEnd type="none" w="med" len="med"/>
+            <a:tailEnd type="triangle" w="med" len="med"/>
+          </a:ln>
+        </p:spPr>
+        <p:style>
+          <a:lnRef idx="1">
+            <a:schemeClr val="accent1"/>
+          </a:lnRef>
+          <a:fillRef idx="0">
+            <a:schemeClr val="accent1"/>
+          </a:fillRef>
+          <a:effectRef idx="0">
+            <a:schemeClr val="accent1"/>
+          </a:effectRef>
+          <a:fontRef idx="minor">
+            <a:schemeClr val="tx1"/>
+          </a:fontRef>
+        </p:style>
+      </p:cxnSp>
+      <p:sp>
+        <p:nvSpPr>
+          <p:cNvPr id="111" name="사각형: 둥근 모서리 70">
+            <a:extLst>
+              <a:ext uri="{FF2B5EF4-FFF2-40B4-BE49-F238E27FC236}">
+                <a16:creationId xmlns:a16="http://schemas.microsoft.com/office/drawing/2014/main" id="{29C8C9CF-AA48-C579-07B7-A89F4FCE7083}"/>
+              </a:ext>
+            </a:extLst>
+          </p:cNvPr>
+          <p:cNvSpPr/>
+          <p:nvPr/>
+        </p:nvSpPr>
+        <p:spPr>
+          <a:xfrm>
+            <a:off x="971599" y="2177255"/>
+            <a:ext cx="1800200" cy="892274"/>
+          </a:xfrm>
+          <a:prstGeom prst="roundRect">
+            <a:avLst>
+              <a:gd name="adj" fmla="val 8056"/>
+            </a:avLst>
+          </a:prstGeom>
+          <a:noFill/>
+          <a:ln w="12700">
+            <a:prstDash val="solid"/>
+            <a:headEnd type="none" w="med" len="med"/>
+            <a:tailEnd type="triangle" w="med" len="med"/>
+          </a:ln>
+        </p:spPr>
+        <p:style>
+          <a:lnRef idx="2">
+            <a:schemeClr val="dk1"/>
+          </a:lnRef>
+          <a:fillRef idx="1">
+            <a:schemeClr val="lt1"/>
+          </a:fillRef>
+          <a:effectRef idx="0">
+            <a:schemeClr val="dk1"/>
+          </a:effectRef>
+          <a:fontRef idx="minor">
+            <a:schemeClr val="dk1"/>
+          </a:fontRef>
+        </p:style>
+        <p:txBody>
+          <a:bodyPr rtlCol="0" anchor="t"/>
+          <a:lstStyle/>
+          <a:p>
+            <a:r>
+              <a:rPr lang="en-US" altLang="ko-KR" sz="1000" dirty="0"/>
+              <a:t>Client B </a:t>
+            </a:r>
+            <a:r>
+              <a:rPr lang="en-US" altLang="ko-KR" sz="1000" b="1" dirty="0"/>
+              <a:t>Namespace</a:t>
+            </a:r>
+            <a:endParaRPr lang="ko-KR" altLang="en-US" sz="1000" b="1" dirty="0"/>
+          </a:p>
+        </p:txBody>
+      </p:sp>
+      <p:sp>
+        <p:nvSpPr>
+          <p:cNvPr id="112" name="사각형: 둥근 모서리 12">
+            <a:extLst>
+              <a:ext uri="{FF2B5EF4-FFF2-40B4-BE49-F238E27FC236}">
+                <a16:creationId xmlns:a16="http://schemas.microsoft.com/office/drawing/2014/main" id="{9F02B2F9-B976-61BD-A20D-788D0EAEAC66}"/>
+              </a:ext>
+            </a:extLst>
+          </p:cNvPr>
+          <p:cNvSpPr/>
+          <p:nvPr/>
+        </p:nvSpPr>
+        <p:spPr>
+          <a:xfrm>
+            <a:off x="1518621" y="2518078"/>
+            <a:ext cx="1139438" cy="451511"/>
+          </a:xfrm>
+          <a:prstGeom prst="roundRect">
+            <a:avLst>
+              <a:gd name="adj" fmla="val 14105"/>
+            </a:avLst>
+          </a:prstGeom>
+          <a:noFill/>
+          <a:ln w="12700">
+            <a:headEnd type="none" w="med" len="med"/>
+            <a:tailEnd type="triangle" w="med" len="med"/>
+          </a:ln>
+        </p:spPr>
+        <p:style>
+          <a:lnRef idx="2">
+            <a:schemeClr val="dk1"/>
+          </a:lnRef>
+          <a:fillRef idx="1">
+            <a:schemeClr val="lt1"/>
+          </a:fillRef>
+          <a:effectRef idx="0">
+            <a:schemeClr val="dk1"/>
+          </a:effectRef>
+          <a:fontRef idx="minor">
+            <a:schemeClr val="dk1"/>
+          </a:fontRef>
+        </p:style>
+        <p:txBody>
+          <a:bodyPr rtlCol="0" anchor="ctr"/>
+          <a:lstStyle/>
+          <a:p>
+            <a:pPr algn="ctr"/>
+            <a:r>
+              <a:rPr lang="en-US" altLang="ko-KR" sz="900"/>
+              <a:t>Client B </a:t>
+            </a:r>
+            <a:r>
+              <a:rPr lang="en-US" altLang="ko-KR" sz="900" b="1" dirty="0"/>
+              <a:t>Pod</a:t>
+            </a:r>
+            <a:endParaRPr lang="ko-KR" altLang="en-US" sz="900" b="1" dirty="0"/>
+          </a:p>
+        </p:txBody>
+      </p:sp>
+      <p:sp>
+        <p:nvSpPr>
+          <p:cNvPr id="122" name="사각형: 둥근 모서리 12">
+            <a:extLst>
+              <a:ext uri="{FF2B5EF4-FFF2-40B4-BE49-F238E27FC236}">
+                <a16:creationId xmlns:a16="http://schemas.microsoft.com/office/drawing/2014/main" id="{5072D22D-8EA5-0FB0-FD98-7E3421159E92}"/>
+              </a:ext>
+            </a:extLst>
+          </p:cNvPr>
+          <p:cNvSpPr/>
+          <p:nvPr/>
+        </p:nvSpPr>
+        <p:spPr>
+          <a:xfrm>
+            <a:off x="4942434" y="452758"/>
+            <a:ext cx="1139438" cy="451511"/>
+          </a:xfrm>
+          <a:prstGeom prst="roundRect">
+            <a:avLst>
+              <a:gd name="adj" fmla="val 14105"/>
+            </a:avLst>
+          </a:prstGeom>
+          <a:solidFill>
+            <a:schemeClr val="bg1">
+              <a:lumMod val="95000"/>
+            </a:schemeClr>
+          </a:solidFill>
+          <a:ln w="12700">
+            <a:headEnd type="none" w="med" len="med"/>
+            <a:tailEnd type="triangle" w="med" len="med"/>
+          </a:ln>
+        </p:spPr>
+        <p:style>
+          <a:lnRef idx="2">
+            <a:schemeClr val="dk1"/>
+          </a:lnRef>
+          <a:fillRef idx="1">
+            <a:schemeClr val="lt1"/>
+          </a:fillRef>
+          <a:effectRef idx="0">
+            <a:schemeClr val="dk1"/>
+          </a:effectRef>
+          <a:fontRef idx="minor">
+            <a:schemeClr val="dk1"/>
+          </a:fontRef>
+        </p:style>
+        <p:txBody>
+          <a:bodyPr rtlCol="0" anchor="ctr"/>
+          <a:lstStyle/>
+          <a:p>
+            <a:pPr algn="ctr"/>
+            <a:r>
+              <a:rPr lang="en-US" altLang="ko-KR" sz="900"/>
+              <a:t>Server</a:t>
+            </a:r>
+          </a:p>
+          <a:p>
+            <a:pPr algn="ctr"/>
+            <a:r>
+              <a:rPr lang="en-US" altLang="ko-KR" sz="900" b="1"/>
+              <a:t>HTTPRoute</a:t>
+            </a:r>
+          </a:p>
+          <a:p>
+            <a:pPr algn="ctr"/>
+            <a:r>
+              <a:rPr lang="en-US" altLang="ko-KR" sz="900" b="1"/>
+              <a:t>(Producer)</a:t>
+            </a:r>
+          </a:p>
+        </p:txBody>
+      </p:sp>
+      <p:cxnSp>
+        <p:nvCxnSpPr>
+          <p:cNvPr id="125" name="직선 화살표 연결선 96">
+            <a:extLst>
+              <a:ext uri="{FF2B5EF4-FFF2-40B4-BE49-F238E27FC236}">
+                <a16:creationId xmlns:a16="http://schemas.microsoft.com/office/drawing/2014/main" id="{5530FD57-E695-7C0D-BC68-0C425A696910}"/>
+              </a:ext>
+            </a:extLst>
+          </p:cNvPr>
+          <p:cNvCxnSpPr>
+            <a:cxnSpLocks/>
+            <a:stCxn id="112" idx="3"/>
+            <a:endCxn id="17" idx="1"/>
+          </p:cNvCxnSpPr>
+          <p:nvPr/>
+        </p:nvCxnSpPr>
+        <p:spPr>
+          <a:xfrm flipV="1">
+            <a:off x="2658059" y="1564174"/>
+            <a:ext cx="546942" cy="1179660"/>
+          </a:xfrm>
+          <a:prstGeom prst="straightConnector1">
+            <a:avLst/>
+          </a:prstGeom>
+          <a:ln w="12700">
+            <a:solidFill>
+              <a:srgbClr val="C00000"/>
+            </a:solidFill>
+            <a:prstDash val="solid"/>
+            <a:headEnd type="none" w="med" len="med"/>
+            <a:tailEnd type="triangle" w="med" len="med"/>
+          </a:ln>
+        </p:spPr>
+        <p:style>
+          <a:lnRef idx="1">
+            <a:schemeClr val="accent1"/>
+          </a:lnRef>
+          <a:fillRef idx="0">
+            <a:schemeClr val="accent1"/>
+          </a:fillRef>
+          <a:effectRef idx="0">
+            <a:schemeClr val="accent1"/>
+          </a:effectRef>
+          <a:fontRef idx="minor">
+            <a:schemeClr val="tx1"/>
+          </a:fontRef>
+        </p:style>
+      </p:cxnSp>
+      <p:cxnSp>
+        <p:nvCxnSpPr>
+          <p:cNvPr id="128" name="직선 화살표 연결선 96">
+            <a:extLst>
+              <a:ext uri="{FF2B5EF4-FFF2-40B4-BE49-F238E27FC236}">
+                <a16:creationId xmlns:a16="http://schemas.microsoft.com/office/drawing/2014/main" id="{02A222BA-F0ED-8A32-BA81-6D93BC0F7659}"/>
+              </a:ext>
+            </a:extLst>
+          </p:cNvPr>
+          <p:cNvCxnSpPr>
+            <a:cxnSpLocks/>
+            <a:stCxn id="17" idx="3"/>
+            <a:endCxn id="19" idx="1"/>
+          </p:cNvCxnSpPr>
+          <p:nvPr/>
+        </p:nvCxnSpPr>
+        <p:spPr>
+          <a:xfrm>
+            <a:off x="4535423" y="1564174"/>
+            <a:ext cx="427237" cy="3118"/>
+          </a:xfrm>
+          <a:prstGeom prst="straightConnector1">
+            <a:avLst/>
+          </a:prstGeom>
+          <a:ln w="12700">
+            <a:solidFill>
+              <a:srgbClr val="C00000"/>
+            </a:solidFill>
+            <a:prstDash val="solid"/>
+            <a:headEnd type="none" w="med" len="med"/>
+            <a:tailEnd type="triangle" w="med" len="med"/>
+          </a:ln>
+        </p:spPr>
+        <p:style>
+          <a:lnRef idx="1">
+            <a:schemeClr val="accent1"/>
+          </a:lnRef>
+          <a:fillRef idx="0">
+            <a:schemeClr val="accent1"/>
+          </a:fillRef>
+          <a:effectRef idx="0">
+            <a:schemeClr val="accent1"/>
+          </a:effectRef>
+          <a:fontRef idx="minor">
+            <a:schemeClr val="tx1"/>
+          </a:fontRef>
+        </p:style>
+      </p:cxnSp>
+      <p:cxnSp>
+        <p:nvCxnSpPr>
+          <p:cNvPr id="144" name="직선 화살표 연결선 96">
+            <a:extLst>
+              <a:ext uri="{FF2B5EF4-FFF2-40B4-BE49-F238E27FC236}">
+                <a16:creationId xmlns:a16="http://schemas.microsoft.com/office/drawing/2014/main" id="{4C50C3D1-04A2-8C3F-1733-B3B35E6A5AFD}"/>
+              </a:ext>
+            </a:extLst>
+          </p:cNvPr>
+          <p:cNvCxnSpPr>
+            <a:cxnSpLocks/>
+            <a:stCxn id="17" idx="3"/>
+            <a:endCxn id="58" idx="1"/>
+          </p:cNvCxnSpPr>
+          <p:nvPr/>
+        </p:nvCxnSpPr>
+        <p:spPr>
+          <a:xfrm>
+            <a:off x="4535423" y="1564174"/>
+            <a:ext cx="427237" cy="1398018"/>
+          </a:xfrm>
+          <a:prstGeom prst="straightConnector1">
+            <a:avLst/>
+          </a:prstGeom>
+          <a:ln w="12700">
+            <a:solidFill>
+              <a:schemeClr val="accent6"/>
+            </a:solidFill>
+            <a:prstDash val="solid"/>
+            <a:headEnd type="none" w="med" len="med"/>
+            <a:tailEnd type="triangle" w="med" len="med"/>
+          </a:ln>
+        </p:spPr>
+        <p:style>
+          <a:lnRef idx="1">
+            <a:schemeClr val="accent1"/>
+          </a:lnRef>
+          <a:fillRef idx="0">
+            <a:schemeClr val="accent1"/>
+          </a:fillRef>
+          <a:effectRef idx="0">
+            <a:schemeClr val="accent1"/>
+          </a:effectRef>
+          <a:fontRef idx="minor">
+            <a:schemeClr val="tx1"/>
+          </a:fontRef>
+        </p:style>
+      </p:cxnSp>
+      <p:cxnSp>
+        <p:nvCxnSpPr>
+          <p:cNvPr id="147" name="직선 화살표 연결선 96">
+            <a:extLst>
+              <a:ext uri="{FF2B5EF4-FFF2-40B4-BE49-F238E27FC236}">
+                <a16:creationId xmlns:a16="http://schemas.microsoft.com/office/drawing/2014/main" id="{9BCA38B7-315C-EBC1-3690-3D8530CB9536}"/>
+              </a:ext>
+            </a:extLst>
+          </p:cNvPr>
+          <p:cNvCxnSpPr>
+            <a:cxnSpLocks/>
+            <a:stCxn id="17" idx="3"/>
+            <a:endCxn id="64" idx="1"/>
+          </p:cNvCxnSpPr>
+          <p:nvPr/>
+        </p:nvCxnSpPr>
+        <p:spPr>
+          <a:xfrm>
+            <a:off x="4535423" y="1564174"/>
+            <a:ext cx="424465" cy="2792918"/>
+          </a:xfrm>
+          <a:prstGeom prst="straightConnector1">
+            <a:avLst/>
+          </a:prstGeom>
+          <a:ln w="12700">
+            <a:solidFill>
+              <a:schemeClr val="accent6"/>
+            </a:solidFill>
+            <a:prstDash val="solid"/>
+            <a:headEnd type="none" w="med" len="med"/>
+            <a:tailEnd type="triangle" w="med" len="med"/>
+          </a:ln>
+        </p:spPr>
+        <p:style>
+          <a:lnRef idx="1">
+            <a:schemeClr val="accent1"/>
+          </a:lnRef>
+          <a:fillRef idx="0">
+            <a:schemeClr val="accent1"/>
+          </a:fillRef>
+          <a:effectRef idx="0">
+            <a:schemeClr val="accent1"/>
+          </a:effectRef>
+          <a:fontRef idx="minor">
+            <a:schemeClr val="tx1"/>
+          </a:fontRef>
+        </p:style>
+      </p:cxnSp>
+      <p:cxnSp>
+        <p:nvCxnSpPr>
+          <p:cNvPr id="193" name="직선 화살표 연결선 96">
+            <a:extLst>
+              <a:ext uri="{FF2B5EF4-FFF2-40B4-BE49-F238E27FC236}">
+                <a16:creationId xmlns:a16="http://schemas.microsoft.com/office/drawing/2014/main" id="{27C96170-A15C-24BE-3B77-23E0D7D76EBB}"/>
+              </a:ext>
+            </a:extLst>
+          </p:cNvPr>
+          <p:cNvCxnSpPr>
+            <a:cxnSpLocks/>
+          </p:cNvCxnSpPr>
+          <p:nvPr/>
+        </p:nvCxnSpPr>
+        <p:spPr>
+          <a:xfrm>
+            <a:off x="994672" y="656760"/>
+            <a:ext cx="323569" cy="0"/>
+          </a:xfrm>
+          <a:prstGeom prst="straightConnector1">
+            <a:avLst/>
+          </a:prstGeom>
+          <a:ln w="12700">
+            <a:solidFill>
+              <a:schemeClr val="tx2"/>
+            </a:solidFill>
+            <a:prstDash val="solid"/>
+            <a:headEnd type="none" w="med" len="med"/>
+            <a:tailEnd type="triangle" w="med" len="med"/>
+          </a:ln>
+        </p:spPr>
+        <p:style>
+          <a:lnRef idx="1">
+            <a:schemeClr val="accent1"/>
+          </a:lnRef>
+          <a:fillRef idx="0">
+            <a:schemeClr val="accent1"/>
+          </a:fillRef>
+          <a:effectRef idx="0">
+            <a:schemeClr val="accent1"/>
+          </a:effectRef>
+          <a:fontRef idx="minor">
+            <a:schemeClr val="tx1"/>
+          </a:fontRef>
+        </p:style>
+      </p:cxnSp>
+      <p:sp>
+        <p:nvSpPr>
+          <p:cNvPr id="194" name="TextBox 193">
+            <a:extLst>
+              <a:ext uri="{FF2B5EF4-FFF2-40B4-BE49-F238E27FC236}">
+                <a16:creationId xmlns:a16="http://schemas.microsoft.com/office/drawing/2014/main" id="{76D98CAC-D411-1040-1008-1ADA8917F22A}"/>
+              </a:ext>
+            </a:extLst>
+          </p:cNvPr>
+          <p:cNvSpPr txBox="1"/>
+          <p:nvPr/>
+        </p:nvSpPr>
+        <p:spPr>
+          <a:xfrm>
+            <a:off x="1290415" y="462747"/>
+            <a:ext cx="702455" cy="369332"/>
+          </a:xfrm>
+          <a:prstGeom prst="rect">
+            <a:avLst/>
+          </a:prstGeom>
+          <a:noFill/>
+        </p:spPr>
+        <p:txBody>
+          <a:bodyPr wrap="square" rtlCol="0">
+            <a:spAutoFit/>
+          </a:bodyPr>
+          <a:lstStyle/>
+          <a:p>
+            <a:r>
+              <a:rPr lang="en-US" sz="900"/>
+              <a:t>Frontend</a:t>
+            </a:r>
+          </a:p>
+          <a:p>
+            <a:r>
+              <a:rPr lang="en-US" sz="900"/>
+              <a:t>Reference</a:t>
+            </a:r>
+            <a:endParaRPr lang="en-KR" sz="900"/>
+          </a:p>
+        </p:txBody>
+      </p:sp>
+      <p:sp>
+        <p:nvSpPr>
+          <p:cNvPr id="198" name="TextBox 197">
+            <a:extLst>
+              <a:ext uri="{FF2B5EF4-FFF2-40B4-BE49-F238E27FC236}">
+                <a16:creationId xmlns:a16="http://schemas.microsoft.com/office/drawing/2014/main" id="{30765BD0-F700-59E4-158D-E06337E508A8}"/>
+              </a:ext>
+            </a:extLst>
+          </p:cNvPr>
+          <p:cNvSpPr txBox="1"/>
+          <p:nvPr/>
+        </p:nvSpPr>
+        <p:spPr>
+          <a:xfrm>
+            <a:off x="1289667" y="814806"/>
+            <a:ext cx="726519" cy="369332"/>
+          </a:xfrm>
+          <a:prstGeom prst="rect">
+            <a:avLst/>
+          </a:prstGeom>
+          <a:noFill/>
+        </p:spPr>
+        <p:txBody>
+          <a:bodyPr wrap="square" rtlCol="0">
+            <a:spAutoFit/>
+          </a:bodyPr>
+          <a:lstStyle/>
+          <a:p>
+            <a:r>
+              <a:rPr lang="en-US" sz="900"/>
+              <a:t>Client A/B</a:t>
+            </a:r>
+          </a:p>
+          <a:p>
+            <a:r>
+              <a:rPr lang="en-US" sz="900"/>
+              <a:t>Traffic</a:t>
+            </a:r>
+            <a:endParaRPr lang="en-KR" sz="900"/>
+          </a:p>
+        </p:txBody>
+      </p:sp>
+      <p:cxnSp>
+        <p:nvCxnSpPr>
+          <p:cNvPr id="199" name="직선 화살표 연결선 96">
+            <a:extLst>
+              <a:ext uri="{FF2B5EF4-FFF2-40B4-BE49-F238E27FC236}">
+                <a16:creationId xmlns:a16="http://schemas.microsoft.com/office/drawing/2014/main" id="{B7F08DF8-E1E3-0F36-7BEE-EA6C4357ED16}"/>
+              </a:ext>
+            </a:extLst>
+          </p:cNvPr>
+          <p:cNvCxnSpPr>
+            <a:cxnSpLocks/>
+          </p:cNvCxnSpPr>
+          <p:nvPr/>
+        </p:nvCxnSpPr>
+        <p:spPr>
+          <a:xfrm>
+            <a:off x="1993388" y="662282"/>
+            <a:ext cx="323569" cy="0"/>
+          </a:xfrm>
+          <a:prstGeom prst="straightConnector1">
+            <a:avLst/>
+          </a:prstGeom>
+          <a:ln w="12700">
+            <a:solidFill>
+              <a:schemeClr val="accent3"/>
+            </a:solidFill>
+            <a:prstDash val="solid"/>
+            <a:headEnd type="none" w="med" len="med"/>
+            <a:tailEnd type="triangle" w="med" len="med"/>
+          </a:ln>
+        </p:spPr>
+        <p:style>
+          <a:lnRef idx="1">
+            <a:schemeClr val="accent1"/>
+          </a:lnRef>
+          <a:fillRef idx="0">
+            <a:schemeClr val="accent1"/>
+          </a:fillRef>
+          <a:effectRef idx="0">
+            <a:schemeClr val="accent1"/>
+          </a:effectRef>
+          <a:fontRef idx="minor">
+            <a:schemeClr val="tx1"/>
+          </a:fontRef>
+        </p:style>
+      </p:cxnSp>
+      <p:sp>
+        <p:nvSpPr>
+          <p:cNvPr id="200" name="TextBox 199">
+            <a:extLst>
+              <a:ext uri="{FF2B5EF4-FFF2-40B4-BE49-F238E27FC236}">
+                <a16:creationId xmlns:a16="http://schemas.microsoft.com/office/drawing/2014/main" id="{CAAC7164-7B95-0EF1-A60E-F2F0F2ECE525}"/>
+              </a:ext>
+            </a:extLst>
+          </p:cNvPr>
+          <p:cNvSpPr txBox="1"/>
+          <p:nvPr/>
+        </p:nvSpPr>
+        <p:spPr>
+          <a:xfrm>
+            <a:off x="2289131" y="468269"/>
+            <a:ext cx="702455" cy="369332"/>
+          </a:xfrm>
+          <a:prstGeom prst="rect">
+            <a:avLst/>
+          </a:prstGeom>
+          <a:noFill/>
+        </p:spPr>
+        <p:txBody>
+          <a:bodyPr wrap="square" rtlCol="0">
+            <a:spAutoFit/>
+          </a:bodyPr>
+          <a:lstStyle/>
+          <a:p>
+            <a:r>
+              <a:rPr lang="en-US" sz="900"/>
+              <a:t>Backend</a:t>
+            </a:r>
+          </a:p>
+          <a:p>
+            <a:r>
+              <a:rPr lang="en-US" sz="900"/>
+              <a:t>Reference</a:t>
+            </a:r>
+            <a:endParaRPr lang="en-KR" sz="900"/>
+          </a:p>
+        </p:txBody>
+      </p:sp>
+      <p:cxnSp>
+        <p:nvCxnSpPr>
+          <p:cNvPr id="201" name="직선 화살표 연결선 96">
+            <a:extLst>
+              <a:ext uri="{FF2B5EF4-FFF2-40B4-BE49-F238E27FC236}">
+                <a16:creationId xmlns:a16="http://schemas.microsoft.com/office/drawing/2014/main" id="{E0F11B9B-1C30-7340-B275-A73A7B093C72}"/>
+              </a:ext>
+            </a:extLst>
+          </p:cNvPr>
+          <p:cNvCxnSpPr>
+            <a:cxnSpLocks/>
+          </p:cNvCxnSpPr>
+          <p:nvPr/>
+        </p:nvCxnSpPr>
+        <p:spPr>
+          <a:xfrm>
+            <a:off x="993924" y="1000895"/>
+            <a:ext cx="323569" cy="0"/>
+          </a:xfrm>
+          <a:prstGeom prst="straightConnector1">
+            <a:avLst/>
+          </a:prstGeom>
+          <a:ln w="12700">
+            <a:solidFill>
+              <a:srgbClr val="C00000"/>
+            </a:solidFill>
+            <a:prstDash val="solid"/>
+            <a:headEnd type="none" w="med" len="med"/>
+            <a:tailEnd type="triangle" w="med" len="med"/>
+          </a:ln>
+        </p:spPr>
+        <p:style>
+          <a:lnRef idx="1">
+            <a:schemeClr val="accent1"/>
+          </a:lnRef>
+          <a:fillRef idx="0">
+            <a:schemeClr val="accent1"/>
+          </a:fillRef>
+          <a:effectRef idx="0">
+            <a:schemeClr val="accent1"/>
+          </a:effectRef>
+          <a:fontRef idx="minor">
+            <a:schemeClr val="tx1"/>
+          </a:fontRef>
+        </p:style>
+      </p:cxnSp>
+      <p:sp>
+        <p:nvSpPr>
+          <p:cNvPr id="202" name="TextBox 201">
+            <a:extLst>
+              <a:ext uri="{FF2B5EF4-FFF2-40B4-BE49-F238E27FC236}">
+                <a16:creationId xmlns:a16="http://schemas.microsoft.com/office/drawing/2014/main" id="{449F1D3F-37DD-3D27-3D2D-9DF3C49C34B5}"/>
+              </a:ext>
+            </a:extLst>
+          </p:cNvPr>
+          <p:cNvSpPr txBox="1"/>
+          <p:nvPr/>
+        </p:nvSpPr>
+        <p:spPr>
+          <a:xfrm>
+            <a:off x="2292632" y="815618"/>
+            <a:ext cx="726519" cy="369332"/>
+          </a:xfrm>
+          <a:prstGeom prst="rect">
+            <a:avLst/>
+          </a:prstGeom>
+          <a:noFill/>
+        </p:spPr>
+        <p:txBody>
+          <a:bodyPr wrap="square" rtlCol="0">
+            <a:spAutoFit/>
+          </a:bodyPr>
+          <a:lstStyle/>
+          <a:p>
+            <a:r>
+              <a:rPr lang="en-US" sz="900"/>
+              <a:t>Client C</a:t>
+            </a:r>
+          </a:p>
+          <a:p>
+            <a:r>
+              <a:rPr lang="en-US" sz="900"/>
+              <a:t>Traffic</a:t>
+            </a:r>
+            <a:endParaRPr lang="en-KR" sz="900"/>
+          </a:p>
+        </p:txBody>
+      </p:sp>
+      <p:cxnSp>
+        <p:nvCxnSpPr>
+          <p:cNvPr id="203" name="직선 화살표 연결선 96">
+            <a:extLst>
+              <a:ext uri="{FF2B5EF4-FFF2-40B4-BE49-F238E27FC236}">
+                <a16:creationId xmlns:a16="http://schemas.microsoft.com/office/drawing/2014/main" id="{181F7112-CCF2-D709-D468-C315085F1866}"/>
+              </a:ext>
+            </a:extLst>
+          </p:cNvPr>
+          <p:cNvCxnSpPr>
+            <a:cxnSpLocks/>
+          </p:cNvCxnSpPr>
+          <p:nvPr/>
+        </p:nvCxnSpPr>
+        <p:spPr>
+          <a:xfrm>
+            <a:off x="1996889" y="1001707"/>
+            <a:ext cx="323569" cy="0"/>
+          </a:xfrm>
+          <a:prstGeom prst="straightConnector1">
+            <a:avLst/>
+          </a:prstGeom>
+          <a:ln w="12700">
+            <a:solidFill>
+              <a:schemeClr val="accent6"/>
+            </a:solidFill>
+            <a:prstDash val="solid"/>
+            <a:headEnd type="none" w="med" len="med"/>
+            <a:tailEnd type="triangle" w="med" len="med"/>
+          </a:ln>
+        </p:spPr>
+        <p:style>
+          <a:lnRef idx="1">
+            <a:schemeClr val="accent1"/>
+          </a:lnRef>
+          <a:fillRef idx="0">
+            <a:schemeClr val="accent1"/>
+          </a:fillRef>
+          <a:effectRef idx="0">
+            <a:schemeClr val="accent1"/>
+          </a:effectRef>
+          <a:fontRef idx="minor">
+            <a:schemeClr val="tx1"/>
+          </a:fontRef>
+        </p:style>
+      </p:cxnSp>
+      <p:sp>
+        <p:nvSpPr>
+          <p:cNvPr id="6" name="사각형: 둥근 모서리 12">
+            <a:extLst>
+              <a:ext uri="{FF2B5EF4-FFF2-40B4-BE49-F238E27FC236}">
+                <a16:creationId xmlns:a16="http://schemas.microsoft.com/office/drawing/2014/main" id="{D83778A5-A920-8B44-24FA-0EB7477FC861}"/>
+              </a:ext>
+            </a:extLst>
+          </p:cNvPr>
+          <p:cNvSpPr/>
+          <p:nvPr/>
+        </p:nvSpPr>
+        <p:spPr>
+          <a:xfrm>
+            <a:off x="3297795" y="452758"/>
+            <a:ext cx="1139438" cy="451511"/>
+          </a:xfrm>
+          <a:prstGeom prst="roundRect">
+            <a:avLst>
+              <a:gd name="adj" fmla="val 14105"/>
+            </a:avLst>
+          </a:prstGeom>
+          <a:solidFill>
+            <a:schemeClr val="bg1">
+              <a:lumMod val="95000"/>
+            </a:schemeClr>
+          </a:solidFill>
+          <a:ln w="12700">
+            <a:headEnd type="none" w="med" len="med"/>
+            <a:tailEnd type="triangle" w="med" len="med"/>
+          </a:ln>
+        </p:spPr>
+        <p:style>
+          <a:lnRef idx="2">
+            <a:schemeClr val="dk1"/>
+          </a:lnRef>
+          <a:fillRef idx="1">
+            <a:schemeClr val="lt1"/>
+          </a:fillRef>
+          <a:effectRef idx="0">
+            <a:schemeClr val="dk1"/>
+          </a:effectRef>
+          <a:fontRef idx="minor">
+            <a:schemeClr val="dk1"/>
+          </a:fontRef>
+        </p:style>
+        <p:txBody>
+          <a:bodyPr rtlCol="0" anchor="ctr"/>
+          <a:lstStyle/>
+          <a:p>
+            <a:pPr algn="ctr"/>
+            <a:r>
+              <a:rPr lang="en-US" altLang="ko-KR" sz="900"/>
+              <a:t>Client C</a:t>
+            </a:r>
+          </a:p>
+          <a:p>
+            <a:pPr algn="ctr"/>
+            <a:r>
+              <a:rPr lang="en-US" altLang="ko-KR" sz="900" b="1"/>
+              <a:t>ReferenceGrant</a:t>
+            </a:r>
+          </a:p>
+        </p:txBody>
+      </p:sp>
+      <p:cxnSp>
+        <p:nvCxnSpPr>
+          <p:cNvPr id="20" name="직선 화살표 연결선 96">
+            <a:extLst>
+              <a:ext uri="{FF2B5EF4-FFF2-40B4-BE49-F238E27FC236}">
+                <a16:creationId xmlns:a16="http://schemas.microsoft.com/office/drawing/2014/main" id="{58CC9712-865D-F7CE-52E0-60B96E363E0A}"/>
+              </a:ext>
+            </a:extLst>
+          </p:cNvPr>
+          <p:cNvCxnSpPr>
+            <a:cxnSpLocks/>
+            <a:stCxn id="6" idx="3"/>
+            <a:endCxn id="56" idx="0"/>
+          </p:cNvCxnSpPr>
+          <p:nvPr/>
+        </p:nvCxnSpPr>
+        <p:spPr>
+          <a:xfrm>
+            <a:off x="4437233" y="678514"/>
+            <a:ext cx="199024" cy="1773705"/>
+          </a:xfrm>
+          <a:prstGeom prst="straightConnector1">
+            <a:avLst/>
+          </a:prstGeom>
+          <a:ln w="12700">
+            <a:solidFill>
+              <a:schemeClr val="accent5"/>
+            </a:solidFill>
+            <a:prstDash val="solid"/>
+            <a:headEnd type="none" w="med" len="med"/>
+            <a:tailEnd type="triangle" w="med" len="med"/>
+          </a:ln>
+        </p:spPr>
+        <p:style>
+          <a:lnRef idx="1">
+            <a:schemeClr val="accent1"/>
+          </a:lnRef>
+          <a:fillRef idx="0">
+            <a:schemeClr val="accent1"/>
+          </a:fillRef>
+          <a:effectRef idx="0">
+            <a:schemeClr val="accent1"/>
+          </a:effectRef>
+          <a:fontRef idx="minor">
+            <a:schemeClr val="tx1"/>
+          </a:fontRef>
+        </p:style>
+      </p:cxnSp>
+      <p:cxnSp>
+        <p:nvCxnSpPr>
+          <p:cNvPr id="24" name="직선 화살표 연결선 96">
+            <a:extLst>
+              <a:ext uri="{FF2B5EF4-FFF2-40B4-BE49-F238E27FC236}">
+                <a16:creationId xmlns:a16="http://schemas.microsoft.com/office/drawing/2014/main" id="{268B8009-6C18-3BBA-5C4E-64DFEABE6EEA}"/>
+              </a:ext>
+            </a:extLst>
+          </p:cNvPr>
+          <p:cNvCxnSpPr>
+            <a:cxnSpLocks/>
+            <a:stCxn id="6" idx="1"/>
+            <a:endCxn id="3" idx="0"/>
+          </p:cNvCxnSpPr>
+          <p:nvPr/>
+        </p:nvCxnSpPr>
+        <p:spPr>
+          <a:xfrm flipH="1">
+            <a:off x="1871699" y="678514"/>
+            <a:ext cx="1426096" cy="2495437"/>
+          </a:xfrm>
+          <a:prstGeom prst="straightConnector1">
+            <a:avLst/>
+          </a:prstGeom>
+          <a:ln w="12700">
+            <a:solidFill>
+              <a:schemeClr val="accent5"/>
+            </a:solidFill>
+            <a:prstDash val="solid"/>
+            <a:headEnd type="none" w="med" len="med"/>
+            <a:tailEnd type="triangle" w="med" len="med"/>
+          </a:ln>
+        </p:spPr>
+        <p:style>
+          <a:lnRef idx="1">
+            <a:schemeClr val="accent1"/>
+          </a:lnRef>
+          <a:fillRef idx="0">
+            <a:schemeClr val="accent1"/>
+          </a:fillRef>
+          <a:effectRef idx="0">
+            <a:schemeClr val="accent1"/>
+          </a:effectRef>
+          <a:fontRef idx="minor">
+            <a:schemeClr val="tx1"/>
+          </a:fontRef>
+        </p:style>
+      </p:cxnSp>
+      <p:cxnSp>
+        <p:nvCxnSpPr>
+          <p:cNvPr id="52" name="직선 화살표 연결선 96">
+            <a:extLst>
+              <a:ext uri="{FF2B5EF4-FFF2-40B4-BE49-F238E27FC236}">
+                <a16:creationId xmlns:a16="http://schemas.microsoft.com/office/drawing/2014/main" id="{53C5396C-1CF4-5501-3F31-9B1274450D69}"/>
+              </a:ext>
+            </a:extLst>
+          </p:cNvPr>
+          <p:cNvCxnSpPr>
+            <a:cxnSpLocks/>
+          </p:cNvCxnSpPr>
+          <p:nvPr/>
+        </p:nvCxnSpPr>
+        <p:spPr>
+          <a:xfrm>
+            <a:off x="994672" y="331128"/>
+            <a:ext cx="323569" cy="0"/>
+          </a:xfrm>
+          <a:prstGeom prst="straightConnector1">
+            <a:avLst/>
+          </a:prstGeom>
+          <a:ln w="12700">
+            <a:solidFill>
+              <a:schemeClr val="accent5"/>
+            </a:solidFill>
+            <a:prstDash val="solid"/>
+            <a:headEnd type="none" w="med" len="med"/>
+            <a:tailEnd type="triangle" w="med" len="med"/>
+          </a:ln>
+        </p:spPr>
+        <p:style>
+          <a:lnRef idx="1">
+            <a:schemeClr val="accent1"/>
+          </a:lnRef>
+          <a:fillRef idx="0">
+            <a:schemeClr val="accent1"/>
+          </a:fillRef>
+          <a:effectRef idx="0">
+            <a:schemeClr val="accent1"/>
+          </a:effectRef>
+          <a:fontRef idx="minor">
+            <a:schemeClr val="tx1"/>
+          </a:fontRef>
+        </p:style>
+      </p:cxnSp>
+      <p:sp>
+        <p:nvSpPr>
+          <p:cNvPr id="53" name="TextBox 52">
+            <a:extLst>
+              <a:ext uri="{FF2B5EF4-FFF2-40B4-BE49-F238E27FC236}">
+                <a16:creationId xmlns:a16="http://schemas.microsoft.com/office/drawing/2014/main" id="{147875AA-3CFD-AFEA-3EBD-3F5BF3931BE0}"/>
+              </a:ext>
+            </a:extLst>
+          </p:cNvPr>
+          <p:cNvSpPr txBox="1"/>
+          <p:nvPr/>
+        </p:nvSpPr>
+        <p:spPr>
+          <a:xfrm>
+            <a:off x="1290415" y="137115"/>
+            <a:ext cx="702455" cy="369332"/>
+          </a:xfrm>
+          <a:prstGeom prst="rect">
+            <a:avLst/>
+          </a:prstGeom>
+          <a:noFill/>
+        </p:spPr>
+        <p:txBody>
+          <a:bodyPr wrap="square" rtlCol="0">
+            <a:spAutoFit/>
+          </a:bodyPr>
+          <a:lstStyle/>
+          <a:p>
+            <a:r>
+              <a:rPr lang="en-US" sz="900"/>
+              <a:t>Grant</a:t>
+            </a:r>
+          </a:p>
+          <a:p>
+            <a:r>
+              <a:rPr lang="en-US" sz="900"/>
+              <a:t>Reference</a:t>
+            </a:r>
+            <a:endParaRPr lang="en-KR" sz="900"/>
+          </a:p>
+        </p:txBody>
+      </p:sp>
+      <p:cxnSp>
+        <p:nvCxnSpPr>
+          <p:cNvPr id="10" name="직선 화살표 연결선 96">
+            <a:extLst>
+              <a:ext uri="{FF2B5EF4-FFF2-40B4-BE49-F238E27FC236}">
+                <a16:creationId xmlns:a16="http://schemas.microsoft.com/office/drawing/2014/main" id="{F8F28C88-0D4C-8245-E6DC-127DE9AABEEF}"/>
+              </a:ext>
+            </a:extLst>
+          </p:cNvPr>
+          <p:cNvCxnSpPr>
+            <a:cxnSpLocks/>
+            <a:stCxn id="6" idx="3"/>
+            <a:endCxn id="62" idx="0"/>
+          </p:cNvCxnSpPr>
+          <p:nvPr/>
+        </p:nvCxnSpPr>
+        <p:spPr>
+          <a:xfrm>
+            <a:off x="4437233" y="678514"/>
+            <a:ext cx="196252" cy="3168605"/>
+          </a:xfrm>
+          <a:prstGeom prst="straightConnector1">
+            <a:avLst/>
+          </a:prstGeom>
+          <a:ln w="12700">
+            <a:solidFill>
+              <a:schemeClr val="accent5"/>
+            </a:solidFill>
+            <a:prstDash val="solid"/>
+            <a:headEnd type="none" w="med" len="med"/>
+            <a:tailEnd type="triangle" w="med" len="med"/>
+          </a:ln>
+        </p:spPr>
+        <p:style>
+          <a:lnRef idx="1">
+            <a:schemeClr val="accent1"/>
+          </a:lnRef>
+          <a:fillRef idx="0">
+            <a:schemeClr val="accent1"/>
+          </a:fillRef>
+          <a:effectRef idx="0">
+            <a:schemeClr val="accent1"/>
+          </a:effectRef>
+          <a:fontRef idx="minor">
+            <a:schemeClr val="tx1"/>
+          </a:fontRef>
+        </p:style>
+      </p:cxnSp>
+    </p:spTree>
+    <p:extLst>
+      <p:ext uri="{BB962C8B-B14F-4D97-AF65-F5344CB8AC3E}">
+        <p14:creationId xmlns:p14="http://schemas.microsoft.com/office/powerpoint/2010/main" val="1264336691"/>
+      </p:ext>
+    </p:extLst>
+  </p:cSld>
+  <p:clrMapOvr>
+    <a:masterClrMapping/>
+  </p:clrMapOvr>
+</p:sld>
+</file>
+
+<file path=ppt/slides/slide5.xml><?xml version="1.0" encoding="utf-8"?>
 <p:sld xmlns:a="http://schemas.openxmlformats.org/drawingml/2006/main" xmlns:r="http://schemas.openxmlformats.org/officeDocument/2006/relationships" xmlns:p="http://schemas.openxmlformats.org/presentationml/2006/main">
   <p:cSld>
     <p:spTree>
@@ -9014,7 +14626,7 @@
 </p:sld>
 </file>
 
-<file path=ppt/slides/slide4.xml><?xml version="1.0" encoding="utf-8"?>
+<file path=ppt/slides/slide6.xml><?xml version="1.0" encoding="utf-8"?>
 <p:sld xmlns:a="http://schemas.openxmlformats.org/drawingml/2006/main" xmlns:r="http://schemas.openxmlformats.org/officeDocument/2006/relationships" xmlns:p="http://schemas.openxmlformats.org/presentationml/2006/main">
   <p:cSld>
     <p:spTree>
@@ -11447,7 +17059,7 @@
 </p:sld>
 </file>
 
-<file path=ppt/slides/slide5.xml><?xml version="1.0" encoding="utf-8"?>
+<file path=ppt/slides/slide7.xml><?xml version="1.0" encoding="utf-8"?>
 <p:sld xmlns:a="http://schemas.openxmlformats.org/drawingml/2006/main" xmlns:r="http://schemas.openxmlformats.org/officeDocument/2006/relationships" xmlns:p="http://schemas.openxmlformats.org/presentationml/2006/main">
   <p:cSld>
     <p:spTree>
@@ -13815,7 +19427,7 @@
 </p:sld>
 </file>
 
-<file path=ppt/slides/slide6.xml><?xml version="1.0" encoding="utf-8"?>
+<file path=ppt/slides/slide8.xml><?xml version="1.0" encoding="utf-8"?>
 <p:sld xmlns:a="http://schemas.openxmlformats.org/drawingml/2006/main" xmlns:r="http://schemas.openxmlformats.org/officeDocument/2006/relationships" xmlns:p="http://schemas.openxmlformats.org/presentationml/2006/main">
   <p:cSld>
     <p:spTree>
@@ -15734,7 +21346,7 @@
 </p:sld>
 </file>
 
-<file path=ppt/slides/slide7.xml><?xml version="1.0" encoding="utf-8"?>
+<file path=ppt/slides/slide9.xml><?xml version="1.0" encoding="utf-8"?>
 <p:sld xmlns:a="http://schemas.openxmlformats.org/drawingml/2006/main" xmlns:r="http://schemas.openxmlformats.org/officeDocument/2006/relationships" xmlns:p="http://schemas.openxmlformats.org/presentationml/2006/main">
   <p:cSld>
     <p:spTree>
